--- a/Final/Figures/totaltransition_special.pdf.pptx
+++ b/Final/Figures/totaltransition_special.pdf.pptx
@@ -2,13 +2,13 @@
 <file path=ppt/presentation.xml><?xml version="1.0" encoding="utf-8"?>
 <p:presentation xmlns:a="http://schemas.openxmlformats.org/drawingml/2006/main" xmlns:r="http://schemas.openxmlformats.org/officeDocument/2006/relationships" xmlns:p="http://schemas.openxmlformats.org/presentationml/2006/main" saveSubsetFonts="1">
   <p:sldMasterIdLst>
-    <p:sldMasterId id="2147483696" r:id="rId1"/>
+    <p:sldMasterId id="2147483732" r:id="rId1"/>
   </p:sldMasterIdLst>
   <p:sldIdLst>
     <p:sldId id="256" r:id="rId2"/>
     <p:sldId id="257" r:id="rId3"/>
   </p:sldIdLst>
-  <p:sldSz cx="11231563" cy="6389688"/>
+  <p:sldSz cx="9906000" cy="5129213"/>
   <p:notesSz cx="6858000" cy="9144000"/>
   <p:defaultTextStyle>
     <a:defPPr>
@@ -105,6 +105,11 @@
       </a:defRPr>
     </a:lvl9pPr>
   </p:defaultTextStyle>
+  <p:extLst>
+    <p:ext uri="{EFAFB233-063F-42B5-8137-9DF3F51BA10A}">
+      <p15:sldGuideLst xmlns:p15="http://schemas.microsoft.com/office/powerpoint/2012/main"/>
+    </p:ext>
+  </p:extLst>
 </p:presentation>
 </file>
 
@@ -137,15 +142,15 @@
         </p:nvSpPr>
         <p:spPr>
           <a:xfrm>
-            <a:off x="1403946" y="1045720"/>
-            <a:ext cx="8423672" cy="2224558"/>
+            <a:off x="1238250" y="839434"/>
+            <a:ext cx="7429500" cy="1785726"/>
           </a:xfrm>
         </p:spPr>
         <p:txBody>
           <a:bodyPr anchor="b"/>
           <a:lstStyle>
             <a:lvl1pPr algn="ctr">
-              <a:defRPr sz="5527"/>
+              <a:defRPr sz="4487"/>
             </a:lvl1pPr>
           </a:lstStyle>
           <a:p>
@@ -169,8 +174,8 @@
         </p:nvSpPr>
         <p:spPr>
           <a:xfrm>
-            <a:off x="1403946" y="3356066"/>
-            <a:ext cx="8423672" cy="1542695"/>
+            <a:off x="1238250" y="2694025"/>
+            <a:ext cx="7429500" cy="1238372"/>
           </a:xfrm>
         </p:spPr>
         <p:txBody>
@@ -178,39 +183,39 @@
           <a:lstStyle>
             <a:lvl1pPr marL="0" indent="0" algn="ctr">
               <a:buNone/>
-              <a:defRPr sz="2211"/>
+              <a:defRPr sz="1795"/>
             </a:lvl1pPr>
-            <a:lvl2pPr marL="421173" indent="0" algn="ctr">
+            <a:lvl2pPr marL="341940" indent="0" algn="ctr">
               <a:buNone/>
-              <a:defRPr sz="1842"/>
+              <a:defRPr sz="1496"/>
             </a:lvl2pPr>
-            <a:lvl3pPr marL="842345" indent="0" algn="ctr">
+            <a:lvl3pPr marL="683880" indent="0" algn="ctr">
               <a:buNone/>
-              <a:defRPr sz="1658"/>
+              <a:defRPr sz="1346"/>
             </a:lvl3pPr>
-            <a:lvl4pPr marL="1263518" indent="0" algn="ctr">
+            <a:lvl4pPr marL="1025820" indent="0" algn="ctr">
               <a:buNone/>
-              <a:defRPr sz="1474"/>
+              <a:defRPr sz="1197"/>
             </a:lvl4pPr>
-            <a:lvl5pPr marL="1684691" indent="0" algn="ctr">
+            <a:lvl5pPr marL="1367760" indent="0" algn="ctr">
               <a:buNone/>
-              <a:defRPr sz="1474"/>
+              <a:defRPr sz="1197"/>
             </a:lvl5pPr>
-            <a:lvl6pPr marL="2105863" indent="0" algn="ctr">
+            <a:lvl6pPr marL="1709699" indent="0" algn="ctr">
               <a:buNone/>
-              <a:defRPr sz="1474"/>
+              <a:defRPr sz="1197"/>
             </a:lvl6pPr>
-            <a:lvl7pPr marL="2527036" indent="0" algn="ctr">
+            <a:lvl7pPr marL="2051639" indent="0" algn="ctr">
               <a:buNone/>
-              <a:defRPr sz="1474"/>
+              <a:defRPr sz="1197"/>
             </a:lvl7pPr>
-            <a:lvl8pPr marL="2948208" indent="0" algn="ctr">
+            <a:lvl8pPr marL="2393579" indent="0" algn="ctr">
               <a:buNone/>
-              <a:defRPr sz="1474"/>
+              <a:defRPr sz="1197"/>
             </a:lvl8pPr>
-            <a:lvl9pPr marL="3369381" indent="0" algn="ctr">
+            <a:lvl9pPr marL="2735519" indent="0" algn="ctr">
               <a:buNone/>
-              <a:defRPr sz="1474"/>
+              <a:defRPr sz="1197"/>
             </a:lvl9pPr>
           </a:lstStyle>
           <a:p>
@@ -239,7 +244,7 @@
           <a:p>
             <a:fld id="{8C2AE5C1-C91B-4CB5-96BE-6C63A5D03502}" type="datetimeFigureOut">
               <a:rPr lang="zh-TW" altLang="en-US" smtClean="0"/>
-              <a:t>2026/5/6</a:t>
+              <a:t>2026/5/22</a:t>
             </a:fld>
             <a:endParaRPr lang="zh-TW" altLang="en-US"/>
           </a:p>
@@ -290,7 +295,7 @@
     </p:spTree>
     <p:extLst>
       <p:ext uri="{BB962C8B-B14F-4D97-AF65-F5344CB8AC3E}">
-        <p14:creationId xmlns:p14="http://schemas.microsoft.com/office/powerpoint/2010/main" val="181357281"/>
+        <p14:creationId xmlns:p14="http://schemas.microsoft.com/office/powerpoint/2010/main" val="4025564295"/>
       </p:ext>
     </p:extLst>
   </p:cSld>
@@ -409,7 +414,7 @@
           <a:p>
             <a:fld id="{8C2AE5C1-C91B-4CB5-96BE-6C63A5D03502}" type="datetimeFigureOut">
               <a:rPr lang="zh-TW" altLang="en-US" smtClean="0"/>
-              <a:t>2026/5/6</a:t>
+              <a:t>2026/5/22</a:t>
             </a:fld>
             <a:endParaRPr lang="zh-TW" altLang="en-US"/>
           </a:p>
@@ -460,7 +465,7 @@
     </p:spTree>
     <p:extLst>
       <p:ext uri="{BB962C8B-B14F-4D97-AF65-F5344CB8AC3E}">
-        <p14:creationId xmlns:p14="http://schemas.microsoft.com/office/powerpoint/2010/main" val="2952092783"/>
+        <p14:creationId xmlns:p14="http://schemas.microsoft.com/office/powerpoint/2010/main" val="3375623850"/>
       </p:ext>
     </p:extLst>
   </p:cSld>
@@ -499,8 +504,8 @@
         </p:nvSpPr>
         <p:spPr>
           <a:xfrm>
-            <a:off x="8037587" y="340192"/>
-            <a:ext cx="2421806" cy="5414965"/>
+            <a:off x="7088981" y="273083"/>
+            <a:ext cx="2135981" cy="4346771"/>
           </a:xfrm>
         </p:spPr>
         <p:txBody>
@@ -527,8 +532,8 @@
         </p:nvSpPr>
         <p:spPr>
           <a:xfrm>
-            <a:off x="772170" y="340192"/>
-            <a:ext cx="7125023" cy="5414965"/>
+            <a:off x="681037" y="273083"/>
+            <a:ext cx="6284119" cy="4346771"/>
           </a:xfrm>
         </p:spPr>
         <p:txBody>
@@ -589,7 +594,7 @@
           <a:p>
             <a:fld id="{8C2AE5C1-C91B-4CB5-96BE-6C63A5D03502}" type="datetimeFigureOut">
               <a:rPr lang="zh-TW" altLang="en-US" smtClean="0"/>
-              <a:t>2026/5/6</a:t>
+              <a:t>2026/5/22</a:t>
             </a:fld>
             <a:endParaRPr lang="zh-TW" altLang="en-US"/>
           </a:p>
@@ -640,7 +645,7 @@
     </p:spTree>
     <p:extLst>
       <p:ext uri="{BB962C8B-B14F-4D97-AF65-F5344CB8AC3E}">
-        <p14:creationId xmlns:p14="http://schemas.microsoft.com/office/powerpoint/2010/main" val="4128599652"/>
+        <p14:creationId xmlns:p14="http://schemas.microsoft.com/office/powerpoint/2010/main" val="1352367978"/>
       </p:ext>
     </p:extLst>
   </p:cSld>
@@ -759,7 +764,7 @@
           <a:p>
             <a:fld id="{8C2AE5C1-C91B-4CB5-96BE-6C63A5D03502}" type="datetimeFigureOut">
               <a:rPr lang="zh-TW" altLang="en-US" smtClean="0"/>
-              <a:t>2026/5/6</a:t>
+              <a:t>2026/5/22</a:t>
             </a:fld>
             <a:endParaRPr lang="zh-TW" altLang="en-US"/>
           </a:p>
@@ -810,7 +815,7 @@
     </p:spTree>
     <p:extLst>
       <p:ext uri="{BB962C8B-B14F-4D97-AF65-F5344CB8AC3E}">
-        <p14:creationId xmlns:p14="http://schemas.microsoft.com/office/powerpoint/2010/main" val="4266226382"/>
+        <p14:creationId xmlns:p14="http://schemas.microsoft.com/office/powerpoint/2010/main" val="55874007"/>
       </p:ext>
     </p:extLst>
   </p:cSld>
@@ -849,15 +854,15 @@
         </p:nvSpPr>
         <p:spPr>
           <a:xfrm>
-            <a:off x="766320" y="1592986"/>
-            <a:ext cx="9687223" cy="2657932"/>
+            <a:off x="675878" y="1278742"/>
+            <a:ext cx="8543925" cy="2133610"/>
           </a:xfrm>
         </p:spPr>
         <p:txBody>
           <a:bodyPr anchor="b"/>
           <a:lstStyle>
             <a:lvl1pPr>
-              <a:defRPr sz="5527"/>
+              <a:defRPr sz="4487"/>
             </a:lvl1pPr>
           </a:lstStyle>
           <a:p>
@@ -881,8 +886,8 @@
         </p:nvSpPr>
         <p:spPr>
           <a:xfrm>
-            <a:off x="766320" y="4276063"/>
-            <a:ext cx="9687223" cy="1397744"/>
+            <a:off x="675878" y="3432537"/>
+            <a:ext cx="8543925" cy="1122015"/>
           </a:xfrm>
         </p:spPr>
         <p:txBody>
@@ -890,7 +895,7 @@
           <a:lstStyle>
             <a:lvl1pPr marL="0" indent="0">
               <a:buNone/>
-              <a:defRPr sz="2211">
+              <a:defRPr sz="1795">
                 <a:solidFill>
                   <a:schemeClr val="tx1">
                     <a:tint val="75000"/>
@@ -898,9 +903,9 @@
                 </a:solidFill>
               </a:defRPr>
             </a:lvl1pPr>
-            <a:lvl2pPr marL="421173" indent="0">
+            <a:lvl2pPr marL="341940" indent="0">
               <a:buNone/>
-              <a:defRPr sz="1842">
+              <a:defRPr sz="1496">
                 <a:solidFill>
                   <a:schemeClr val="tx1">
                     <a:tint val="75000"/>
@@ -908,9 +913,9 @@
                 </a:solidFill>
               </a:defRPr>
             </a:lvl2pPr>
-            <a:lvl3pPr marL="842345" indent="0">
+            <a:lvl3pPr marL="683880" indent="0">
               <a:buNone/>
-              <a:defRPr sz="1658">
+              <a:defRPr sz="1346">
                 <a:solidFill>
                   <a:schemeClr val="tx1">
                     <a:tint val="75000"/>
@@ -918,9 +923,9 @@
                 </a:solidFill>
               </a:defRPr>
             </a:lvl3pPr>
-            <a:lvl4pPr marL="1263518" indent="0">
+            <a:lvl4pPr marL="1025820" indent="0">
               <a:buNone/>
-              <a:defRPr sz="1474">
+              <a:defRPr sz="1197">
                 <a:solidFill>
                   <a:schemeClr val="tx1">
                     <a:tint val="75000"/>
@@ -928,9 +933,9 @@
                 </a:solidFill>
               </a:defRPr>
             </a:lvl4pPr>
-            <a:lvl5pPr marL="1684691" indent="0">
+            <a:lvl5pPr marL="1367760" indent="0">
               <a:buNone/>
-              <a:defRPr sz="1474">
+              <a:defRPr sz="1197">
                 <a:solidFill>
                   <a:schemeClr val="tx1">
                     <a:tint val="75000"/>
@@ -938,9 +943,9 @@
                 </a:solidFill>
               </a:defRPr>
             </a:lvl5pPr>
-            <a:lvl6pPr marL="2105863" indent="0">
+            <a:lvl6pPr marL="1709699" indent="0">
               <a:buNone/>
-              <a:defRPr sz="1474">
+              <a:defRPr sz="1197">
                 <a:solidFill>
                   <a:schemeClr val="tx1">
                     <a:tint val="75000"/>
@@ -948,9 +953,9 @@
                 </a:solidFill>
               </a:defRPr>
             </a:lvl6pPr>
-            <a:lvl7pPr marL="2527036" indent="0">
+            <a:lvl7pPr marL="2051639" indent="0">
               <a:buNone/>
-              <a:defRPr sz="1474">
+              <a:defRPr sz="1197">
                 <a:solidFill>
                   <a:schemeClr val="tx1">
                     <a:tint val="75000"/>
@@ -958,9 +963,9 @@
                 </a:solidFill>
               </a:defRPr>
             </a:lvl7pPr>
-            <a:lvl8pPr marL="2948208" indent="0">
+            <a:lvl8pPr marL="2393579" indent="0">
               <a:buNone/>
-              <a:defRPr sz="1474">
+              <a:defRPr sz="1197">
                 <a:solidFill>
                   <a:schemeClr val="tx1">
                     <a:tint val="75000"/>
@@ -968,9 +973,9 @@
                 </a:solidFill>
               </a:defRPr>
             </a:lvl8pPr>
-            <a:lvl9pPr marL="3369381" indent="0">
+            <a:lvl9pPr marL="2735519" indent="0">
               <a:buNone/>
-              <a:defRPr sz="1474">
+              <a:defRPr sz="1197">
                 <a:solidFill>
                   <a:schemeClr val="tx1">
                     <a:tint val="75000"/>
@@ -1005,7 +1010,7 @@
           <a:p>
             <a:fld id="{8C2AE5C1-C91B-4CB5-96BE-6C63A5D03502}" type="datetimeFigureOut">
               <a:rPr lang="zh-TW" altLang="en-US" smtClean="0"/>
-              <a:t>2026/5/6</a:t>
+              <a:t>2026/5/22</a:t>
             </a:fld>
             <a:endParaRPr lang="zh-TW" altLang="en-US"/>
           </a:p>
@@ -1056,7 +1061,7 @@
     </p:spTree>
     <p:extLst>
       <p:ext uri="{BB962C8B-B14F-4D97-AF65-F5344CB8AC3E}">
-        <p14:creationId xmlns:p14="http://schemas.microsoft.com/office/powerpoint/2010/main" val="2255497389"/>
+        <p14:creationId xmlns:p14="http://schemas.microsoft.com/office/powerpoint/2010/main" val="600876535"/>
       </p:ext>
     </p:extLst>
   </p:cSld>
@@ -1118,8 +1123,8 @@
         </p:nvSpPr>
         <p:spPr>
           <a:xfrm>
-            <a:off x="772170" y="1700959"/>
-            <a:ext cx="4773414" cy="4054198"/>
+            <a:off x="681038" y="1365415"/>
+            <a:ext cx="4210050" cy="3254439"/>
           </a:xfrm>
         </p:spPr>
         <p:txBody>
@@ -1175,8 +1180,8 @@
         </p:nvSpPr>
         <p:spPr>
           <a:xfrm>
-            <a:off x="5685979" y="1700959"/>
-            <a:ext cx="4773414" cy="4054198"/>
+            <a:off x="5014913" y="1365415"/>
+            <a:ext cx="4210050" cy="3254439"/>
           </a:xfrm>
         </p:spPr>
         <p:txBody>
@@ -1237,7 +1242,7 @@
           <a:p>
             <a:fld id="{8C2AE5C1-C91B-4CB5-96BE-6C63A5D03502}" type="datetimeFigureOut">
               <a:rPr lang="zh-TW" altLang="en-US" smtClean="0"/>
-              <a:t>2026/5/6</a:t>
+              <a:t>2026/5/22</a:t>
             </a:fld>
             <a:endParaRPr lang="zh-TW" altLang="en-US"/>
           </a:p>
@@ -1288,7 +1293,7 @@
     </p:spTree>
     <p:extLst>
       <p:ext uri="{BB962C8B-B14F-4D97-AF65-F5344CB8AC3E}">
-        <p14:creationId xmlns:p14="http://schemas.microsoft.com/office/powerpoint/2010/main" val="2572028070"/>
+        <p14:creationId xmlns:p14="http://schemas.microsoft.com/office/powerpoint/2010/main" val="1117099685"/>
       </p:ext>
     </p:extLst>
   </p:cSld>
@@ -1327,8 +1332,8 @@
         </p:nvSpPr>
         <p:spPr>
           <a:xfrm>
-            <a:off x="773633" y="340192"/>
-            <a:ext cx="9687223" cy="1235044"/>
+            <a:off x="682328" y="273083"/>
+            <a:ext cx="8543925" cy="991411"/>
           </a:xfrm>
         </p:spPr>
         <p:txBody>
@@ -1355,8 +1360,8 @@
         </p:nvSpPr>
         <p:spPr>
           <a:xfrm>
-            <a:off x="773633" y="1566361"/>
-            <a:ext cx="4751477" cy="767650"/>
+            <a:off x="682328" y="1257370"/>
+            <a:ext cx="4190702" cy="616218"/>
           </a:xfrm>
         </p:spPr>
         <p:txBody>
@@ -1364,39 +1369,39 @@
           <a:lstStyle>
             <a:lvl1pPr marL="0" indent="0">
               <a:buNone/>
-              <a:defRPr sz="2211" b="1"/>
+              <a:defRPr sz="1795" b="1"/>
             </a:lvl1pPr>
-            <a:lvl2pPr marL="421173" indent="0">
+            <a:lvl2pPr marL="341940" indent="0">
               <a:buNone/>
-              <a:defRPr sz="1842" b="1"/>
+              <a:defRPr sz="1496" b="1"/>
             </a:lvl2pPr>
-            <a:lvl3pPr marL="842345" indent="0">
+            <a:lvl3pPr marL="683880" indent="0">
               <a:buNone/>
-              <a:defRPr sz="1658" b="1"/>
+              <a:defRPr sz="1346" b="1"/>
             </a:lvl3pPr>
-            <a:lvl4pPr marL="1263518" indent="0">
+            <a:lvl4pPr marL="1025820" indent="0">
               <a:buNone/>
-              <a:defRPr sz="1474" b="1"/>
+              <a:defRPr sz="1197" b="1"/>
             </a:lvl4pPr>
-            <a:lvl5pPr marL="1684691" indent="0">
+            <a:lvl5pPr marL="1367760" indent="0">
               <a:buNone/>
-              <a:defRPr sz="1474" b="1"/>
+              <a:defRPr sz="1197" b="1"/>
             </a:lvl5pPr>
-            <a:lvl6pPr marL="2105863" indent="0">
+            <a:lvl6pPr marL="1709699" indent="0">
               <a:buNone/>
-              <a:defRPr sz="1474" b="1"/>
+              <a:defRPr sz="1197" b="1"/>
             </a:lvl6pPr>
-            <a:lvl7pPr marL="2527036" indent="0">
+            <a:lvl7pPr marL="2051639" indent="0">
               <a:buNone/>
-              <a:defRPr sz="1474" b="1"/>
+              <a:defRPr sz="1197" b="1"/>
             </a:lvl7pPr>
-            <a:lvl8pPr marL="2948208" indent="0">
+            <a:lvl8pPr marL="2393579" indent="0">
               <a:buNone/>
-              <a:defRPr sz="1474" b="1"/>
+              <a:defRPr sz="1197" b="1"/>
             </a:lvl8pPr>
-            <a:lvl9pPr marL="3369381" indent="0">
+            <a:lvl9pPr marL="2735519" indent="0">
               <a:buNone/>
-              <a:defRPr sz="1474" b="1"/>
+              <a:defRPr sz="1197" b="1"/>
             </a:lvl9pPr>
           </a:lstStyle>
           <a:p>
@@ -1420,8 +1425,8 @@
         </p:nvSpPr>
         <p:spPr>
           <a:xfrm>
-            <a:off x="773633" y="2334011"/>
-            <a:ext cx="4751477" cy="3432979"/>
+            <a:off x="682328" y="1873588"/>
+            <a:ext cx="4190702" cy="2755765"/>
           </a:xfrm>
         </p:spPr>
         <p:txBody>
@@ -1477,8 +1482,8 @@
         </p:nvSpPr>
         <p:spPr>
           <a:xfrm>
-            <a:off x="5685979" y="1566361"/>
-            <a:ext cx="4774877" cy="767650"/>
+            <a:off x="5014913" y="1257370"/>
+            <a:ext cx="4211340" cy="616218"/>
           </a:xfrm>
         </p:spPr>
         <p:txBody>
@@ -1486,39 +1491,39 @@
           <a:lstStyle>
             <a:lvl1pPr marL="0" indent="0">
               <a:buNone/>
-              <a:defRPr sz="2211" b="1"/>
+              <a:defRPr sz="1795" b="1"/>
             </a:lvl1pPr>
-            <a:lvl2pPr marL="421173" indent="0">
+            <a:lvl2pPr marL="341940" indent="0">
               <a:buNone/>
-              <a:defRPr sz="1842" b="1"/>
+              <a:defRPr sz="1496" b="1"/>
             </a:lvl2pPr>
-            <a:lvl3pPr marL="842345" indent="0">
+            <a:lvl3pPr marL="683880" indent="0">
               <a:buNone/>
-              <a:defRPr sz="1658" b="1"/>
+              <a:defRPr sz="1346" b="1"/>
             </a:lvl3pPr>
-            <a:lvl4pPr marL="1263518" indent="0">
+            <a:lvl4pPr marL="1025820" indent="0">
               <a:buNone/>
-              <a:defRPr sz="1474" b="1"/>
+              <a:defRPr sz="1197" b="1"/>
             </a:lvl4pPr>
-            <a:lvl5pPr marL="1684691" indent="0">
+            <a:lvl5pPr marL="1367760" indent="0">
               <a:buNone/>
-              <a:defRPr sz="1474" b="1"/>
+              <a:defRPr sz="1197" b="1"/>
             </a:lvl5pPr>
-            <a:lvl6pPr marL="2105863" indent="0">
+            <a:lvl6pPr marL="1709699" indent="0">
               <a:buNone/>
-              <a:defRPr sz="1474" b="1"/>
+              <a:defRPr sz="1197" b="1"/>
             </a:lvl6pPr>
-            <a:lvl7pPr marL="2527036" indent="0">
+            <a:lvl7pPr marL="2051639" indent="0">
               <a:buNone/>
-              <a:defRPr sz="1474" b="1"/>
+              <a:defRPr sz="1197" b="1"/>
             </a:lvl7pPr>
-            <a:lvl8pPr marL="2948208" indent="0">
+            <a:lvl8pPr marL="2393579" indent="0">
               <a:buNone/>
-              <a:defRPr sz="1474" b="1"/>
+              <a:defRPr sz="1197" b="1"/>
             </a:lvl8pPr>
-            <a:lvl9pPr marL="3369381" indent="0">
+            <a:lvl9pPr marL="2735519" indent="0">
               <a:buNone/>
-              <a:defRPr sz="1474" b="1"/>
+              <a:defRPr sz="1197" b="1"/>
             </a:lvl9pPr>
           </a:lstStyle>
           <a:p>
@@ -1542,8 +1547,8 @@
         </p:nvSpPr>
         <p:spPr>
           <a:xfrm>
-            <a:off x="5685979" y="2334011"/>
-            <a:ext cx="4774877" cy="3432979"/>
+            <a:off x="5014913" y="1873588"/>
+            <a:ext cx="4211340" cy="2755765"/>
           </a:xfrm>
         </p:spPr>
         <p:txBody>
@@ -1604,7 +1609,7 @@
           <a:p>
             <a:fld id="{8C2AE5C1-C91B-4CB5-96BE-6C63A5D03502}" type="datetimeFigureOut">
               <a:rPr lang="zh-TW" altLang="en-US" smtClean="0"/>
-              <a:t>2026/5/6</a:t>
+              <a:t>2026/5/22</a:t>
             </a:fld>
             <a:endParaRPr lang="zh-TW" altLang="en-US"/>
           </a:p>
@@ -1655,7 +1660,7 @@
     </p:spTree>
     <p:extLst>
       <p:ext uri="{BB962C8B-B14F-4D97-AF65-F5344CB8AC3E}">
-        <p14:creationId xmlns:p14="http://schemas.microsoft.com/office/powerpoint/2010/main" val="119242639"/>
+        <p14:creationId xmlns:p14="http://schemas.microsoft.com/office/powerpoint/2010/main" val="531267639"/>
       </p:ext>
     </p:extLst>
   </p:cSld>
@@ -1722,7 +1727,7 @@
           <a:p>
             <a:fld id="{8C2AE5C1-C91B-4CB5-96BE-6C63A5D03502}" type="datetimeFigureOut">
               <a:rPr lang="zh-TW" altLang="en-US" smtClean="0"/>
-              <a:t>2026/5/6</a:t>
+              <a:t>2026/5/22</a:t>
             </a:fld>
             <a:endParaRPr lang="zh-TW" altLang="en-US"/>
           </a:p>
@@ -1773,7 +1778,7 @@
     </p:spTree>
     <p:extLst>
       <p:ext uri="{BB962C8B-B14F-4D97-AF65-F5344CB8AC3E}">
-        <p14:creationId xmlns:p14="http://schemas.microsoft.com/office/powerpoint/2010/main" val="1804491816"/>
+        <p14:creationId xmlns:p14="http://schemas.microsoft.com/office/powerpoint/2010/main" val="589518060"/>
       </p:ext>
     </p:extLst>
   </p:cSld>
@@ -1817,7 +1822,7 @@
           <a:p>
             <a:fld id="{8C2AE5C1-C91B-4CB5-96BE-6C63A5D03502}" type="datetimeFigureOut">
               <a:rPr lang="zh-TW" altLang="en-US" smtClean="0"/>
-              <a:t>2026/5/6</a:t>
+              <a:t>2026/5/22</a:t>
             </a:fld>
             <a:endParaRPr lang="zh-TW" altLang="en-US"/>
           </a:p>
@@ -1868,7 +1873,7 @@
     </p:spTree>
     <p:extLst>
       <p:ext uri="{BB962C8B-B14F-4D97-AF65-F5344CB8AC3E}">
-        <p14:creationId xmlns:p14="http://schemas.microsoft.com/office/powerpoint/2010/main" val="242551201"/>
+        <p14:creationId xmlns:p14="http://schemas.microsoft.com/office/powerpoint/2010/main" val="1516624707"/>
       </p:ext>
     </p:extLst>
   </p:cSld>
@@ -1907,15 +1912,15 @@
         </p:nvSpPr>
         <p:spPr>
           <a:xfrm>
-            <a:off x="773633" y="425979"/>
-            <a:ext cx="3622471" cy="1490927"/>
+            <a:off x="682328" y="341948"/>
+            <a:ext cx="3194943" cy="1196816"/>
           </a:xfrm>
         </p:spPr>
         <p:txBody>
           <a:bodyPr anchor="b"/>
           <a:lstStyle>
             <a:lvl1pPr>
-              <a:defRPr sz="2948"/>
+              <a:defRPr sz="2393"/>
             </a:lvl1pPr>
           </a:lstStyle>
           <a:p>
@@ -1939,39 +1944,39 @@
         </p:nvSpPr>
         <p:spPr>
           <a:xfrm>
-            <a:off x="4774877" y="919997"/>
-            <a:ext cx="5685979" cy="4540820"/>
+            <a:off x="4211340" y="738512"/>
+            <a:ext cx="5014913" cy="3645066"/>
           </a:xfrm>
         </p:spPr>
         <p:txBody>
           <a:bodyPr/>
           <a:lstStyle>
             <a:lvl1pPr>
-              <a:defRPr sz="2948"/>
+              <a:defRPr sz="2393"/>
             </a:lvl1pPr>
             <a:lvl2pPr>
-              <a:defRPr sz="2579"/>
+              <a:defRPr sz="2094"/>
             </a:lvl2pPr>
             <a:lvl3pPr>
-              <a:defRPr sz="2211"/>
+              <a:defRPr sz="1795"/>
             </a:lvl3pPr>
             <a:lvl4pPr>
-              <a:defRPr sz="1842"/>
+              <a:defRPr sz="1496"/>
             </a:lvl4pPr>
             <a:lvl5pPr>
-              <a:defRPr sz="1842"/>
+              <a:defRPr sz="1496"/>
             </a:lvl5pPr>
             <a:lvl6pPr>
-              <a:defRPr sz="1842"/>
+              <a:defRPr sz="1496"/>
             </a:lvl6pPr>
             <a:lvl7pPr>
-              <a:defRPr sz="1842"/>
+              <a:defRPr sz="1496"/>
             </a:lvl7pPr>
             <a:lvl8pPr>
-              <a:defRPr sz="1842"/>
+              <a:defRPr sz="1496"/>
             </a:lvl8pPr>
             <a:lvl9pPr>
-              <a:defRPr sz="1842"/>
+              <a:defRPr sz="1496"/>
             </a:lvl9pPr>
           </a:lstStyle>
           <a:p>
@@ -2024,8 +2029,8 @@
         </p:nvSpPr>
         <p:spPr>
           <a:xfrm>
-            <a:off x="773633" y="1916907"/>
-            <a:ext cx="3622471" cy="3551306"/>
+            <a:off x="682328" y="1538764"/>
+            <a:ext cx="3194943" cy="2850750"/>
           </a:xfrm>
         </p:spPr>
         <p:txBody>
@@ -2033,39 +2038,39 @@
           <a:lstStyle>
             <a:lvl1pPr marL="0" indent="0">
               <a:buNone/>
-              <a:defRPr sz="1474"/>
+              <a:defRPr sz="1197"/>
             </a:lvl1pPr>
-            <a:lvl2pPr marL="421173" indent="0">
+            <a:lvl2pPr marL="341940" indent="0">
               <a:buNone/>
-              <a:defRPr sz="1290"/>
+              <a:defRPr sz="1047"/>
             </a:lvl2pPr>
-            <a:lvl3pPr marL="842345" indent="0">
+            <a:lvl3pPr marL="683880" indent="0">
               <a:buNone/>
-              <a:defRPr sz="1105"/>
+              <a:defRPr sz="897"/>
             </a:lvl3pPr>
-            <a:lvl4pPr marL="1263518" indent="0">
+            <a:lvl4pPr marL="1025820" indent="0">
               <a:buNone/>
-              <a:defRPr sz="921"/>
+              <a:defRPr sz="748"/>
             </a:lvl4pPr>
-            <a:lvl5pPr marL="1684691" indent="0">
+            <a:lvl5pPr marL="1367760" indent="0">
               <a:buNone/>
-              <a:defRPr sz="921"/>
+              <a:defRPr sz="748"/>
             </a:lvl5pPr>
-            <a:lvl6pPr marL="2105863" indent="0">
+            <a:lvl6pPr marL="1709699" indent="0">
               <a:buNone/>
-              <a:defRPr sz="921"/>
+              <a:defRPr sz="748"/>
             </a:lvl6pPr>
-            <a:lvl7pPr marL="2527036" indent="0">
+            <a:lvl7pPr marL="2051639" indent="0">
               <a:buNone/>
-              <a:defRPr sz="921"/>
+              <a:defRPr sz="748"/>
             </a:lvl7pPr>
-            <a:lvl8pPr marL="2948208" indent="0">
+            <a:lvl8pPr marL="2393579" indent="0">
               <a:buNone/>
-              <a:defRPr sz="921"/>
+              <a:defRPr sz="748"/>
             </a:lvl8pPr>
-            <a:lvl9pPr marL="3369381" indent="0">
+            <a:lvl9pPr marL="2735519" indent="0">
               <a:buNone/>
-              <a:defRPr sz="921"/>
+              <a:defRPr sz="748"/>
             </a:lvl9pPr>
           </a:lstStyle>
           <a:p>
@@ -2094,7 +2099,7 @@
           <a:p>
             <a:fld id="{8C2AE5C1-C91B-4CB5-96BE-6C63A5D03502}" type="datetimeFigureOut">
               <a:rPr lang="zh-TW" altLang="en-US" smtClean="0"/>
-              <a:t>2026/5/6</a:t>
+              <a:t>2026/5/22</a:t>
             </a:fld>
             <a:endParaRPr lang="zh-TW" altLang="en-US"/>
           </a:p>
@@ -2145,7 +2150,7 @@
     </p:spTree>
     <p:extLst>
       <p:ext uri="{BB962C8B-B14F-4D97-AF65-F5344CB8AC3E}">
-        <p14:creationId xmlns:p14="http://schemas.microsoft.com/office/powerpoint/2010/main" val="2739744435"/>
+        <p14:creationId xmlns:p14="http://schemas.microsoft.com/office/powerpoint/2010/main" val="700275719"/>
       </p:ext>
     </p:extLst>
   </p:cSld>
@@ -2184,15 +2189,15 @@
         </p:nvSpPr>
         <p:spPr>
           <a:xfrm>
-            <a:off x="773633" y="425979"/>
-            <a:ext cx="3622471" cy="1490927"/>
+            <a:off x="682328" y="341948"/>
+            <a:ext cx="3194943" cy="1196816"/>
           </a:xfrm>
         </p:spPr>
         <p:txBody>
           <a:bodyPr anchor="b"/>
           <a:lstStyle>
             <a:lvl1pPr>
-              <a:defRPr sz="2948"/>
+              <a:defRPr sz="2393"/>
             </a:lvl1pPr>
           </a:lstStyle>
           <a:p>
@@ -2216,8 +2221,8 @@
         </p:nvSpPr>
         <p:spPr>
           <a:xfrm>
-            <a:off x="4774877" y="919997"/>
-            <a:ext cx="5685979" cy="4540820"/>
+            <a:off x="4211340" y="738512"/>
+            <a:ext cx="5014913" cy="3645066"/>
           </a:xfrm>
         </p:spPr>
         <p:txBody>
@@ -2225,39 +2230,39 @@
           <a:lstStyle>
             <a:lvl1pPr marL="0" indent="0">
               <a:buNone/>
-              <a:defRPr sz="2948"/>
+              <a:defRPr sz="2393"/>
             </a:lvl1pPr>
-            <a:lvl2pPr marL="421173" indent="0">
+            <a:lvl2pPr marL="341940" indent="0">
               <a:buNone/>
-              <a:defRPr sz="2579"/>
+              <a:defRPr sz="2094"/>
             </a:lvl2pPr>
-            <a:lvl3pPr marL="842345" indent="0">
+            <a:lvl3pPr marL="683880" indent="0">
               <a:buNone/>
-              <a:defRPr sz="2211"/>
+              <a:defRPr sz="1795"/>
             </a:lvl3pPr>
-            <a:lvl4pPr marL="1263518" indent="0">
+            <a:lvl4pPr marL="1025820" indent="0">
               <a:buNone/>
-              <a:defRPr sz="1842"/>
+              <a:defRPr sz="1496"/>
             </a:lvl4pPr>
-            <a:lvl5pPr marL="1684691" indent="0">
+            <a:lvl5pPr marL="1367760" indent="0">
               <a:buNone/>
-              <a:defRPr sz="1842"/>
+              <a:defRPr sz="1496"/>
             </a:lvl5pPr>
-            <a:lvl6pPr marL="2105863" indent="0">
+            <a:lvl6pPr marL="1709699" indent="0">
               <a:buNone/>
-              <a:defRPr sz="1842"/>
+              <a:defRPr sz="1496"/>
             </a:lvl6pPr>
-            <a:lvl7pPr marL="2527036" indent="0">
+            <a:lvl7pPr marL="2051639" indent="0">
               <a:buNone/>
-              <a:defRPr sz="1842"/>
+              <a:defRPr sz="1496"/>
             </a:lvl7pPr>
-            <a:lvl8pPr marL="2948208" indent="0">
+            <a:lvl8pPr marL="2393579" indent="0">
               <a:buNone/>
-              <a:defRPr sz="1842"/>
+              <a:defRPr sz="1496"/>
             </a:lvl8pPr>
-            <a:lvl9pPr marL="3369381" indent="0">
+            <a:lvl9pPr marL="2735519" indent="0">
               <a:buNone/>
-              <a:defRPr sz="1842"/>
+              <a:defRPr sz="1496"/>
             </a:lvl9pPr>
           </a:lstStyle>
           <a:p>
@@ -2281,8 +2286,8 @@
         </p:nvSpPr>
         <p:spPr>
           <a:xfrm>
-            <a:off x="773633" y="1916907"/>
-            <a:ext cx="3622471" cy="3551306"/>
+            <a:off x="682328" y="1538764"/>
+            <a:ext cx="3194943" cy="2850750"/>
           </a:xfrm>
         </p:spPr>
         <p:txBody>
@@ -2290,39 +2295,39 @@
           <a:lstStyle>
             <a:lvl1pPr marL="0" indent="0">
               <a:buNone/>
-              <a:defRPr sz="1474"/>
+              <a:defRPr sz="1197"/>
             </a:lvl1pPr>
-            <a:lvl2pPr marL="421173" indent="0">
+            <a:lvl2pPr marL="341940" indent="0">
               <a:buNone/>
-              <a:defRPr sz="1290"/>
+              <a:defRPr sz="1047"/>
             </a:lvl2pPr>
-            <a:lvl3pPr marL="842345" indent="0">
+            <a:lvl3pPr marL="683880" indent="0">
               <a:buNone/>
-              <a:defRPr sz="1105"/>
+              <a:defRPr sz="897"/>
             </a:lvl3pPr>
-            <a:lvl4pPr marL="1263518" indent="0">
+            <a:lvl4pPr marL="1025820" indent="0">
               <a:buNone/>
-              <a:defRPr sz="921"/>
+              <a:defRPr sz="748"/>
             </a:lvl4pPr>
-            <a:lvl5pPr marL="1684691" indent="0">
+            <a:lvl5pPr marL="1367760" indent="0">
               <a:buNone/>
-              <a:defRPr sz="921"/>
+              <a:defRPr sz="748"/>
             </a:lvl5pPr>
-            <a:lvl6pPr marL="2105863" indent="0">
+            <a:lvl6pPr marL="1709699" indent="0">
               <a:buNone/>
-              <a:defRPr sz="921"/>
+              <a:defRPr sz="748"/>
             </a:lvl6pPr>
-            <a:lvl7pPr marL="2527036" indent="0">
+            <a:lvl7pPr marL="2051639" indent="0">
               <a:buNone/>
-              <a:defRPr sz="921"/>
+              <a:defRPr sz="748"/>
             </a:lvl7pPr>
-            <a:lvl8pPr marL="2948208" indent="0">
+            <a:lvl8pPr marL="2393579" indent="0">
               <a:buNone/>
-              <a:defRPr sz="921"/>
+              <a:defRPr sz="748"/>
             </a:lvl8pPr>
-            <a:lvl9pPr marL="3369381" indent="0">
+            <a:lvl9pPr marL="2735519" indent="0">
               <a:buNone/>
-              <a:defRPr sz="921"/>
+              <a:defRPr sz="748"/>
             </a:lvl9pPr>
           </a:lstStyle>
           <a:p>
@@ -2351,7 +2356,7 @@
           <a:p>
             <a:fld id="{8C2AE5C1-C91B-4CB5-96BE-6C63A5D03502}" type="datetimeFigureOut">
               <a:rPr lang="zh-TW" altLang="en-US" smtClean="0"/>
-              <a:t>2026/5/6</a:t>
+              <a:t>2026/5/22</a:t>
             </a:fld>
             <a:endParaRPr lang="zh-TW" altLang="en-US"/>
           </a:p>
@@ -2402,7 +2407,7 @@
     </p:spTree>
     <p:extLst>
       <p:ext uri="{BB962C8B-B14F-4D97-AF65-F5344CB8AC3E}">
-        <p14:creationId xmlns:p14="http://schemas.microsoft.com/office/powerpoint/2010/main" val="3835023832"/>
+        <p14:creationId xmlns:p14="http://schemas.microsoft.com/office/powerpoint/2010/main" val="2060411783"/>
       </p:ext>
     </p:extLst>
   </p:cSld>
@@ -2446,8 +2451,8 @@
         </p:nvSpPr>
         <p:spPr>
           <a:xfrm>
-            <a:off x="772170" y="340192"/>
-            <a:ext cx="9687223" cy="1235044"/>
+            <a:off x="681038" y="273083"/>
+            <a:ext cx="8543925" cy="991411"/>
           </a:xfrm>
           <a:prstGeom prst="rect">
             <a:avLst/>
@@ -2479,8 +2484,8 @@
         </p:nvSpPr>
         <p:spPr>
           <a:xfrm>
-            <a:off x="772170" y="1700959"/>
-            <a:ext cx="9687223" cy="4054198"/>
+            <a:off x="681038" y="1365415"/>
+            <a:ext cx="8543925" cy="3254439"/>
           </a:xfrm>
           <a:prstGeom prst="rect">
             <a:avLst/>
@@ -2541,8 +2546,8 @@
         </p:nvSpPr>
         <p:spPr>
           <a:xfrm>
-            <a:off x="772170" y="5922294"/>
-            <a:ext cx="2527102" cy="340192"/>
+            <a:off x="681038" y="4754021"/>
+            <a:ext cx="2228850" cy="273083"/>
           </a:xfrm>
           <a:prstGeom prst="rect">
             <a:avLst/>
@@ -2552,7 +2557,7 @@
           <a:bodyPr vert="horz" lIns="91440" tIns="45720" rIns="91440" bIns="45720" rtlCol="0" anchor="ctr"/>
           <a:lstStyle>
             <a:lvl1pPr algn="l">
-              <a:defRPr sz="1105">
+              <a:defRPr sz="897">
                 <a:solidFill>
                   <a:schemeClr val="tx1">
                     <a:tint val="75000"/>
@@ -2564,7 +2569,7 @@
           <a:p>
             <a:fld id="{8C2AE5C1-C91B-4CB5-96BE-6C63A5D03502}" type="datetimeFigureOut">
               <a:rPr lang="zh-TW" altLang="en-US" smtClean="0"/>
-              <a:t>2026/5/6</a:t>
+              <a:t>2026/5/22</a:t>
             </a:fld>
             <a:endParaRPr lang="zh-TW" altLang="en-US"/>
           </a:p>
@@ -2582,8 +2587,8 @@
         </p:nvSpPr>
         <p:spPr>
           <a:xfrm>
-            <a:off x="3720455" y="5922294"/>
-            <a:ext cx="3790653" cy="340192"/>
+            <a:off x="3281363" y="4754021"/>
+            <a:ext cx="3343275" cy="273083"/>
           </a:xfrm>
           <a:prstGeom prst="rect">
             <a:avLst/>
@@ -2593,7 +2598,7 @@
           <a:bodyPr vert="horz" lIns="91440" tIns="45720" rIns="91440" bIns="45720" rtlCol="0" anchor="ctr"/>
           <a:lstStyle>
             <a:lvl1pPr algn="ctr">
-              <a:defRPr sz="1105">
+              <a:defRPr sz="897">
                 <a:solidFill>
                   <a:schemeClr val="tx1">
                     <a:tint val="75000"/>
@@ -2619,8 +2624,8 @@
         </p:nvSpPr>
         <p:spPr>
           <a:xfrm>
-            <a:off x="7932291" y="5922294"/>
-            <a:ext cx="2527102" cy="340192"/>
+            <a:off x="6996113" y="4754021"/>
+            <a:ext cx="2228850" cy="273083"/>
           </a:xfrm>
           <a:prstGeom prst="rect">
             <a:avLst/>
@@ -2630,7 +2635,7 @@
           <a:bodyPr vert="horz" lIns="91440" tIns="45720" rIns="91440" bIns="45720" rtlCol="0" anchor="ctr"/>
           <a:lstStyle>
             <a:lvl1pPr algn="r">
-              <a:defRPr sz="1105">
+              <a:defRPr sz="897">
                 <a:solidFill>
                   <a:schemeClr val="tx1">
                     <a:tint val="75000"/>
@@ -2651,27 +2656,27 @@
     </p:spTree>
     <p:extLst>
       <p:ext uri="{BB962C8B-B14F-4D97-AF65-F5344CB8AC3E}">
-        <p14:creationId xmlns:p14="http://schemas.microsoft.com/office/powerpoint/2010/main" val="1883768304"/>
+        <p14:creationId xmlns:p14="http://schemas.microsoft.com/office/powerpoint/2010/main" val="3844420343"/>
       </p:ext>
     </p:extLst>
   </p:cSld>
   <p:clrMap bg1="lt1" tx1="dk1" bg2="lt2" tx2="dk2" accent1="accent1" accent2="accent2" accent3="accent3" accent4="accent4" accent5="accent5" accent6="accent6" hlink="hlink" folHlink="folHlink"/>
   <p:sldLayoutIdLst>
-    <p:sldLayoutId id="2147483697" r:id="rId1"/>
-    <p:sldLayoutId id="2147483698" r:id="rId2"/>
-    <p:sldLayoutId id="2147483699" r:id="rId3"/>
-    <p:sldLayoutId id="2147483700" r:id="rId4"/>
-    <p:sldLayoutId id="2147483701" r:id="rId5"/>
-    <p:sldLayoutId id="2147483702" r:id="rId6"/>
-    <p:sldLayoutId id="2147483703" r:id="rId7"/>
-    <p:sldLayoutId id="2147483704" r:id="rId8"/>
-    <p:sldLayoutId id="2147483705" r:id="rId9"/>
-    <p:sldLayoutId id="2147483706" r:id="rId10"/>
-    <p:sldLayoutId id="2147483707" r:id="rId11"/>
+    <p:sldLayoutId id="2147483733" r:id="rId1"/>
+    <p:sldLayoutId id="2147483734" r:id="rId2"/>
+    <p:sldLayoutId id="2147483735" r:id="rId3"/>
+    <p:sldLayoutId id="2147483736" r:id="rId4"/>
+    <p:sldLayoutId id="2147483737" r:id="rId5"/>
+    <p:sldLayoutId id="2147483738" r:id="rId6"/>
+    <p:sldLayoutId id="2147483739" r:id="rId7"/>
+    <p:sldLayoutId id="2147483740" r:id="rId8"/>
+    <p:sldLayoutId id="2147483741" r:id="rId9"/>
+    <p:sldLayoutId id="2147483742" r:id="rId10"/>
+    <p:sldLayoutId id="2147483743" r:id="rId11"/>
   </p:sldLayoutIdLst>
   <p:txStyles>
     <p:titleStyle>
-      <a:lvl1pPr algn="l" defTabSz="842345" rtl="0" eaLnBrk="1" latinLnBrk="0" hangingPunct="1">
+      <a:lvl1pPr algn="l" defTabSz="683880" rtl="0" eaLnBrk="1" latinLnBrk="0" hangingPunct="1">
         <a:lnSpc>
           <a:spcPct val="90000"/>
         </a:lnSpc>
@@ -2679,7 +2684,7 @@
           <a:spcPct val="0"/>
         </a:spcBef>
         <a:buNone/>
-        <a:defRPr sz="4053" kern="1200">
+        <a:defRPr sz="3291" kern="1200">
           <a:solidFill>
             <a:schemeClr val="tx1"/>
           </a:solidFill>
@@ -2690,16 +2695,16 @@
       </a:lvl1pPr>
     </p:titleStyle>
     <p:bodyStyle>
-      <a:lvl1pPr marL="210586" indent="-210586" algn="l" defTabSz="842345" rtl="0" eaLnBrk="1" latinLnBrk="0" hangingPunct="1">
+      <a:lvl1pPr marL="170970" indent="-170970" algn="l" defTabSz="683880" rtl="0" eaLnBrk="1" latinLnBrk="0" hangingPunct="1">
         <a:lnSpc>
           <a:spcPct val="90000"/>
         </a:lnSpc>
         <a:spcBef>
-          <a:spcPts val="921"/>
+          <a:spcPts val="748"/>
         </a:spcBef>
         <a:buFont typeface="Arial" panose="020B0604020202020204" pitchFamily="34" charset="0"/>
         <a:buChar char="•"/>
-        <a:defRPr sz="2579" kern="1200">
+        <a:defRPr sz="2094" kern="1200">
           <a:solidFill>
             <a:schemeClr val="tx1"/>
           </a:solidFill>
@@ -2708,16 +2713,16 @@
           <a:cs typeface="+mn-cs"/>
         </a:defRPr>
       </a:lvl1pPr>
-      <a:lvl2pPr marL="631759" indent="-210586" algn="l" defTabSz="842345" rtl="0" eaLnBrk="1" latinLnBrk="0" hangingPunct="1">
+      <a:lvl2pPr marL="512910" indent="-170970" algn="l" defTabSz="683880" rtl="0" eaLnBrk="1" latinLnBrk="0" hangingPunct="1">
         <a:lnSpc>
           <a:spcPct val="90000"/>
         </a:lnSpc>
         <a:spcBef>
-          <a:spcPts val="461"/>
+          <a:spcPts val="374"/>
         </a:spcBef>
         <a:buFont typeface="Arial" panose="020B0604020202020204" pitchFamily="34" charset="0"/>
         <a:buChar char="•"/>
-        <a:defRPr sz="2211" kern="1200">
+        <a:defRPr sz="1795" kern="1200">
           <a:solidFill>
             <a:schemeClr val="tx1"/>
           </a:solidFill>
@@ -2726,16 +2731,16 @@
           <a:cs typeface="+mn-cs"/>
         </a:defRPr>
       </a:lvl2pPr>
-      <a:lvl3pPr marL="1052932" indent="-210586" algn="l" defTabSz="842345" rtl="0" eaLnBrk="1" latinLnBrk="0" hangingPunct="1">
+      <a:lvl3pPr marL="854850" indent="-170970" algn="l" defTabSz="683880" rtl="0" eaLnBrk="1" latinLnBrk="0" hangingPunct="1">
         <a:lnSpc>
           <a:spcPct val="90000"/>
         </a:lnSpc>
         <a:spcBef>
-          <a:spcPts val="461"/>
+          <a:spcPts val="374"/>
         </a:spcBef>
         <a:buFont typeface="Arial" panose="020B0604020202020204" pitchFamily="34" charset="0"/>
         <a:buChar char="•"/>
-        <a:defRPr sz="1842" kern="1200">
+        <a:defRPr sz="1496" kern="1200">
           <a:solidFill>
             <a:schemeClr val="tx1"/>
           </a:solidFill>
@@ -2744,16 +2749,16 @@
           <a:cs typeface="+mn-cs"/>
         </a:defRPr>
       </a:lvl3pPr>
-      <a:lvl4pPr marL="1474104" indent="-210586" algn="l" defTabSz="842345" rtl="0" eaLnBrk="1" latinLnBrk="0" hangingPunct="1">
+      <a:lvl4pPr marL="1196790" indent="-170970" algn="l" defTabSz="683880" rtl="0" eaLnBrk="1" latinLnBrk="0" hangingPunct="1">
         <a:lnSpc>
           <a:spcPct val="90000"/>
         </a:lnSpc>
         <a:spcBef>
-          <a:spcPts val="461"/>
+          <a:spcPts val="374"/>
         </a:spcBef>
         <a:buFont typeface="Arial" panose="020B0604020202020204" pitchFamily="34" charset="0"/>
         <a:buChar char="•"/>
-        <a:defRPr sz="1658" kern="1200">
+        <a:defRPr sz="1346" kern="1200">
           <a:solidFill>
             <a:schemeClr val="tx1"/>
           </a:solidFill>
@@ -2762,16 +2767,16 @@
           <a:cs typeface="+mn-cs"/>
         </a:defRPr>
       </a:lvl4pPr>
-      <a:lvl5pPr marL="1895277" indent="-210586" algn="l" defTabSz="842345" rtl="0" eaLnBrk="1" latinLnBrk="0" hangingPunct="1">
+      <a:lvl5pPr marL="1538729" indent="-170970" algn="l" defTabSz="683880" rtl="0" eaLnBrk="1" latinLnBrk="0" hangingPunct="1">
         <a:lnSpc>
           <a:spcPct val="90000"/>
         </a:lnSpc>
         <a:spcBef>
-          <a:spcPts val="461"/>
+          <a:spcPts val="374"/>
         </a:spcBef>
         <a:buFont typeface="Arial" panose="020B0604020202020204" pitchFamily="34" charset="0"/>
         <a:buChar char="•"/>
-        <a:defRPr sz="1658" kern="1200">
+        <a:defRPr sz="1346" kern="1200">
           <a:solidFill>
             <a:schemeClr val="tx1"/>
           </a:solidFill>
@@ -2780,16 +2785,16 @@
           <a:cs typeface="+mn-cs"/>
         </a:defRPr>
       </a:lvl5pPr>
-      <a:lvl6pPr marL="2316450" indent="-210586" algn="l" defTabSz="842345" rtl="0" eaLnBrk="1" latinLnBrk="0" hangingPunct="1">
+      <a:lvl6pPr marL="1880669" indent="-170970" algn="l" defTabSz="683880" rtl="0" eaLnBrk="1" latinLnBrk="0" hangingPunct="1">
         <a:lnSpc>
           <a:spcPct val="90000"/>
         </a:lnSpc>
         <a:spcBef>
-          <a:spcPts val="461"/>
+          <a:spcPts val="374"/>
         </a:spcBef>
         <a:buFont typeface="Arial" panose="020B0604020202020204" pitchFamily="34" charset="0"/>
         <a:buChar char="•"/>
-        <a:defRPr sz="1658" kern="1200">
+        <a:defRPr sz="1346" kern="1200">
           <a:solidFill>
             <a:schemeClr val="tx1"/>
           </a:solidFill>
@@ -2798,16 +2803,16 @@
           <a:cs typeface="+mn-cs"/>
         </a:defRPr>
       </a:lvl6pPr>
-      <a:lvl7pPr marL="2737622" indent="-210586" algn="l" defTabSz="842345" rtl="0" eaLnBrk="1" latinLnBrk="0" hangingPunct="1">
+      <a:lvl7pPr marL="2222609" indent="-170970" algn="l" defTabSz="683880" rtl="0" eaLnBrk="1" latinLnBrk="0" hangingPunct="1">
         <a:lnSpc>
           <a:spcPct val="90000"/>
         </a:lnSpc>
         <a:spcBef>
-          <a:spcPts val="461"/>
+          <a:spcPts val="374"/>
         </a:spcBef>
         <a:buFont typeface="Arial" panose="020B0604020202020204" pitchFamily="34" charset="0"/>
         <a:buChar char="•"/>
-        <a:defRPr sz="1658" kern="1200">
+        <a:defRPr sz="1346" kern="1200">
           <a:solidFill>
             <a:schemeClr val="tx1"/>
           </a:solidFill>
@@ -2816,16 +2821,16 @@
           <a:cs typeface="+mn-cs"/>
         </a:defRPr>
       </a:lvl7pPr>
-      <a:lvl8pPr marL="3158795" indent="-210586" algn="l" defTabSz="842345" rtl="0" eaLnBrk="1" latinLnBrk="0" hangingPunct="1">
+      <a:lvl8pPr marL="2564549" indent="-170970" algn="l" defTabSz="683880" rtl="0" eaLnBrk="1" latinLnBrk="0" hangingPunct="1">
         <a:lnSpc>
           <a:spcPct val="90000"/>
         </a:lnSpc>
         <a:spcBef>
-          <a:spcPts val="461"/>
+          <a:spcPts val="374"/>
         </a:spcBef>
         <a:buFont typeface="Arial" panose="020B0604020202020204" pitchFamily="34" charset="0"/>
         <a:buChar char="•"/>
-        <a:defRPr sz="1658" kern="1200">
+        <a:defRPr sz="1346" kern="1200">
           <a:solidFill>
             <a:schemeClr val="tx1"/>
           </a:solidFill>
@@ -2834,16 +2839,16 @@
           <a:cs typeface="+mn-cs"/>
         </a:defRPr>
       </a:lvl8pPr>
-      <a:lvl9pPr marL="3579967" indent="-210586" algn="l" defTabSz="842345" rtl="0" eaLnBrk="1" latinLnBrk="0" hangingPunct="1">
+      <a:lvl9pPr marL="2906489" indent="-170970" algn="l" defTabSz="683880" rtl="0" eaLnBrk="1" latinLnBrk="0" hangingPunct="1">
         <a:lnSpc>
           <a:spcPct val="90000"/>
         </a:lnSpc>
         <a:spcBef>
-          <a:spcPts val="461"/>
+          <a:spcPts val="374"/>
         </a:spcBef>
         <a:buFont typeface="Arial" panose="020B0604020202020204" pitchFamily="34" charset="0"/>
         <a:buChar char="•"/>
-        <a:defRPr sz="1658" kern="1200">
+        <a:defRPr sz="1346" kern="1200">
           <a:solidFill>
             <a:schemeClr val="tx1"/>
           </a:solidFill>
@@ -2857,8 +2862,8 @@
       <a:defPPr>
         <a:defRPr lang="en-US"/>
       </a:defPPr>
-      <a:lvl1pPr marL="0" algn="l" defTabSz="842345" rtl="0" eaLnBrk="1" latinLnBrk="0" hangingPunct="1">
-        <a:defRPr sz="1658" kern="1200">
+      <a:lvl1pPr marL="0" algn="l" defTabSz="683880" rtl="0" eaLnBrk="1" latinLnBrk="0" hangingPunct="1">
+        <a:defRPr sz="1346" kern="1200">
           <a:solidFill>
             <a:schemeClr val="tx1"/>
           </a:solidFill>
@@ -2867,8 +2872,8 @@
           <a:cs typeface="+mn-cs"/>
         </a:defRPr>
       </a:lvl1pPr>
-      <a:lvl2pPr marL="421173" algn="l" defTabSz="842345" rtl="0" eaLnBrk="1" latinLnBrk="0" hangingPunct="1">
-        <a:defRPr sz="1658" kern="1200">
+      <a:lvl2pPr marL="341940" algn="l" defTabSz="683880" rtl="0" eaLnBrk="1" latinLnBrk="0" hangingPunct="1">
+        <a:defRPr sz="1346" kern="1200">
           <a:solidFill>
             <a:schemeClr val="tx1"/>
           </a:solidFill>
@@ -2877,8 +2882,8 @@
           <a:cs typeface="+mn-cs"/>
         </a:defRPr>
       </a:lvl2pPr>
-      <a:lvl3pPr marL="842345" algn="l" defTabSz="842345" rtl="0" eaLnBrk="1" latinLnBrk="0" hangingPunct="1">
-        <a:defRPr sz="1658" kern="1200">
+      <a:lvl3pPr marL="683880" algn="l" defTabSz="683880" rtl="0" eaLnBrk="1" latinLnBrk="0" hangingPunct="1">
+        <a:defRPr sz="1346" kern="1200">
           <a:solidFill>
             <a:schemeClr val="tx1"/>
           </a:solidFill>
@@ -2887,8 +2892,8 @@
           <a:cs typeface="+mn-cs"/>
         </a:defRPr>
       </a:lvl3pPr>
-      <a:lvl4pPr marL="1263518" algn="l" defTabSz="842345" rtl="0" eaLnBrk="1" latinLnBrk="0" hangingPunct="1">
-        <a:defRPr sz="1658" kern="1200">
+      <a:lvl4pPr marL="1025820" algn="l" defTabSz="683880" rtl="0" eaLnBrk="1" latinLnBrk="0" hangingPunct="1">
+        <a:defRPr sz="1346" kern="1200">
           <a:solidFill>
             <a:schemeClr val="tx1"/>
           </a:solidFill>
@@ -2897,8 +2902,8 @@
           <a:cs typeface="+mn-cs"/>
         </a:defRPr>
       </a:lvl4pPr>
-      <a:lvl5pPr marL="1684691" algn="l" defTabSz="842345" rtl="0" eaLnBrk="1" latinLnBrk="0" hangingPunct="1">
-        <a:defRPr sz="1658" kern="1200">
+      <a:lvl5pPr marL="1367760" algn="l" defTabSz="683880" rtl="0" eaLnBrk="1" latinLnBrk="0" hangingPunct="1">
+        <a:defRPr sz="1346" kern="1200">
           <a:solidFill>
             <a:schemeClr val="tx1"/>
           </a:solidFill>
@@ -2907,8 +2912,8 @@
           <a:cs typeface="+mn-cs"/>
         </a:defRPr>
       </a:lvl5pPr>
-      <a:lvl6pPr marL="2105863" algn="l" defTabSz="842345" rtl="0" eaLnBrk="1" latinLnBrk="0" hangingPunct="1">
-        <a:defRPr sz="1658" kern="1200">
+      <a:lvl6pPr marL="1709699" algn="l" defTabSz="683880" rtl="0" eaLnBrk="1" latinLnBrk="0" hangingPunct="1">
+        <a:defRPr sz="1346" kern="1200">
           <a:solidFill>
             <a:schemeClr val="tx1"/>
           </a:solidFill>
@@ -2917,8 +2922,8 @@
           <a:cs typeface="+mn-cs"/>
         </a:defRPr>
       </a:lvl6pPr>
-      <a:lvl7pPr marL="2527036" algn="l" defTabSz="842345" rtl="0" eaLnBrk="1" latinLnBrk="0" hangingPunct="1">
-        <a:defRPr sz="1658" kern="1200">
+      <a:lvl7pPr marL="2051639" algn="l" defTabSz="683880" rtl="0" eaLnBrk="1" latinLnBrk="0" hangingPunct="1">
+        <a:defRPr sz="1346" kern="1200">
           <a:solidFill>
             <a:schemeClr val="tx1"/>
           </a:solidFill>
@@ -2927,8 +2932,8 @@
           <a:cs typeface="+mn-cs"/>
         </a:defRPr>
       </a:lvl7pPr>
-      <a:lvl8pPr marL="2948208" algn="l" defTabSz="842345" rtl="0" eaLnBrk="1" latinLnBrk="0" hangingPunct="1">
-        <a:defRPr sz="1658" kern="1200">
+      <a:lvl8pPr marL="2393579" algn="l" defTabSz="683880" rtl="0" eaLnBrk="1" latinLnBrk="0" hangingPunct="1">
+        <a:defRPr sz="1346" kern="1200">
           <a:solidFill>
             <a:schemeClr val="tx1"/>
           </a:solidFill>
@@ -2937,8 +2942,8 @@
           <a:cs typeface="+mn-cs"/>
         </a:defRPr>
       </a:lvl8pPr>
-      <a:lvl9pPr marL="3369381" algn="l" defTabSz="842345" rtl="0" eaLnBrk="1" latinLnBrk="0" hangingPunct="1">
-        <a:defRPr sz="1658" kern="1200">
+      <a:lvl9pPr marL="2735519" algn="l" defTabSz="683880" rtl="0" eaLnBrk="1" latinLnBrk="0" hangingPunct="1">
+        <a:defRPr sz="1346" kern="1200">
           <a:solidFill>
             <a:schemeClr val="tx1"/>
           </a:solidFill>
@@ -2983,8 +2988,8 @@
         </p:nvGrpSpPr>
         <p:grpSpPr>
           <a:xfrm>
-            <a:off x="7949406" y="2045278"/>
-            <a:ext cx="2319338" cy="2399146"/>
+            <a:off x="7011216" y="1550713"/>
+            <a:ext cx="2045607" cy="2115996"/>
             <a:chOff x="8429625" y="2279434"/>
             <a:chExt cx="2319338" cy="2399146"/>
           </a:xfrm>
@@ -3055,7 +3060,7 @@
             </a:fontRef>
           </p:style>
           <p:txBody>
-            <a:bodyPr rot="0" spcFirstLastPara="0" vertOverflow="overflow" horzOverflow="overflow" vert="horz" wrap="square" lIns="58066" tIns="29033" rIns="58066" bIns="29033" numCol="1" spcCol="0" rtlCol="0" fromWordArt="0" anchor="ctr" anchorCtr="0" forceAA="0" compatLnSpc="1">
+            <a:bodyPr rot="0" spcFirstLastPara="0" vertOverflow="overflow" horzOverflow="overflow" vert="horz" wrap="square" lIns="51213" tIns="25606" rIns="51213" bIns="25606" numCol="1" spcCol="0" rtlCol="0" fromWordArt="0" anchor="ctr" anchorCtr="0" forceAA="0" compatLnSpc="1">
               <a:prstTxWarp prst="textNoShape">
                 <a:avLst/>
               </a:prstTxWarp>
@@ -3064,7 +3069,7 @@
             <a:lstStyle/>
             <a:p>
               <a:pPr algn="ctr"/>
-              <a:endParaRPr lang="zh-TW" altLang="en-US" sz="1143" dirty="0"/>
+              <a:endParaRPr lang="zh-TW" altLang="en-US" sz="1008" dirty="0"/>
             </a:p>
           </p:txBody>
         </p:sp>
@@ -3283,8 +3288,8 @@
         </p:nvGrpSpPr>
         <p:grpSpPr>
           <a:xfrm>
-            <a:off x="3931342" y="2138364"/>
-            <a:ext cx="2319338" cy="2399146"/>
+            <a:off x="3467368" y="1632813"/>
+            <a:ext cx="2045607" cy="2115996"/>
             <a:chOff x="3931342" y="2273301"/>
             <a:chExt cx="2319338" cy="2399146"/>
           </a:xfrm>
@@ -3375,7 +3380,7 @@
               </a:fontRef>
             </p:style>
             <p:txBody>
-              <a:bodyPr rot="0" spcFirstLastPara="0" vertOverflow="overflow" horzOverflow="overflow" vert="horz" wrap="square" lIns="58066" tIns="29033" rIns="58066" bIns="29033" numCol="1" spcCol="0" rtlCol="0" fromWordArt="0" anchor="ctr" anchorCtr="0" forceAA="0" compatLnSpc="1">
+              <a:bodyPr rot="0" spcFirstLastPara="0" vertOverflow="overflow" horzOverflow="overflow" vert="horz" wrap="square" lIns="51213" tIns="25606" rIns="51213" bIns="25606" numCol="1" spcCol="0" rtlCol="0" fromWordArt="0" anchor="ctr" anchorCtr="0" forceAA="0" compatLnSpc="1">
                 <a:prstTxWarp prst="textNoShape">
                   <a:avLst/>
                 </a:prstTxWarp>
@@ -3384,7 +3389,7 @@
               <a:lstStyle/>
               <a:p>
                 <a:pPr algn="ctr"/>
-                <a:endParaRPr lang="zh-TW" altLang="en-US" sz="1143" dirty="0"/>
+                <a:endParaRPr lang="zh-TW" altLang="en-US" sz="1008" dirty="0"/>
               </a:p>
             </p:txBody>
           </p:sp>
@@ -3627,10 +3632,10 @@
       </p:grpSpPr>
       <p:grpSp>
         <p:nvGrpSpPr>
-          <p:cNvPr id="111" name="群組 110">
+          <p:cNvPr id="2" name="群組 1">
             <a:extLst>
               <a:ext uri="{FF2B5EF4-FFF2-40B4-BE49-F238E27FC236}">
-                <a16:creationId xmlns:a16="http://schemas.microsoft.com/office/drawing/2014/main" id="{556BC181-F196-44A1-9241-47E9221FA8A9}"/>
+                <a16:creationId xmlns:a16="http://schemas.microsoft.com/office/drawing/2014/main" id="{7399701C-F9CB-4E09-A86F-9281B68389C1}"/>
               </a:ext>
             </a:extLst>
           </p:cNvPr>
@@ -3639,10 +3644,10 @@
         </p:nvGrpSpPr>
         <p:grpSpPr>
           <a:xfrm>
-            <a:off x="21436" y="32547"/>
-            <a:ext cx="11188699" cy="6324601"/>
-            <a:chOff x="241300" y="317499"/>
-            <a:chExt cx="11188699" cy="6324601"/>
+            <a:off x="18915" y="52467"/>
+            <a:ext cx="9868195" cy="5024278"/>
+            <a:chOff x="18908" y="330359"/>
+            <a:chExt cx="9868195" cy="5024278"/>
           </a:xfrm>
         </p:grpSpPr>
         <p:sp>
@@ -3659,14 +3664,30 @@
           </p:nvSpPr>
           <p:spPr>
             <a:xfrm>
-              <a:off x="241300" y="317499"/>
-              <a:ext cx="11188699" cy="6324601"/>
+              <a:off x="18908" y="330359"/>
+              <a:ext cx="9868195" cy="5024278"/>
             </a:xfrm>
             <a:prstGeom prst="roundRect">
               <a:avLst>
                 <a:gd name="adj" fmla="val 7772"/>
               </a:avLst>
             </a:prstGeom>
+            <a:gradFill flip="none" rotWithShape="1">
+              <a:gsLst>
+                <a:gs pos="0">
+                  <a:schemeClr val="bg1">
+                    <a:lumMod val="95000"/>
+                  </a:schemeClr>
+                </a:gs>
+                <a:gs pos="100000">
+                  <a:schemeClr val="bg1">
+                    <a:lumMod val="85000"/>
+                  </a:schemeClr>
+                </a:gs>
+              </a:gsLst>
+              <a:lin ang="5400000" scaled="1"/>
+              <a:tileRect/>
+            </a:gradFill>
           </p:spPr>
           <p:style>
             <a:lnRef idx="1">
@@ -3683,7 +3704,7 @@
             </a:fontRef>
           </p:style>
           <p:txBody>
-            <a:bodyPr rot="0" spcFirstLastPara="0" vertOverflow="overflow" horzOverflow="overflow" vert="horz" wrap="square" lIns="58066" tIns="29033" rIns="58066" bIns="29033" numCol="1" spcCol="0" rtlCol="0" fromWordArt="0" anchor="ctr" anchorCtr="0" forceAA="0" compatLnSpc="1">
+            <a:bodyPr rot="0" spcFirstLastPara="0" vertOverflow="overflow" horzOverflow="overflow" vert="horz" wrap="square" lIns="51213" tIns="25606" rIns="51213" bIns="25606" numCol="1" spcCol="0" rtlCol="0" fromWordArt="0" anchor="ctr" anchorCtr="0" forceAA="0" compatLnSpc="1">
               <a:prstTxWarp prst="textNoShape">
                 <a:avLst/>
               </a:prstTxWarp>
@@ -3692,7 +3713,7 @@
             <a:lstStyle/>
             <a:p>
               <a:pPr algn="ctr"/>
-              <a:endParaRPr lang="zh-TW" altLang="en-US" sz="1143" dirty="0"/>
+              <a:endParaRPr lang="zh-TW" altLang="en-US" sz="1008" dirty="0"/>
             </a:p>
           </p:txBody>
         </p:sp>
@@ -3712,8 +3733,8 @@
               </p:nvSpPr>
               <p:spPr>
                 <a:xfrm>
-                  <a:off x="2832526" y="442842"/>
-                  <a:ext cx="7451856" cy="584775"/>
+                  <a:off x="2089825" y="565087"/>
+                  <a:ext cx="6572379" cy="526619"/>
                 </a:xfrm>
                 <a:prstGeom prst="rect">
                   <a:avLst/>
@@ -3728,7 +3749,7 @@
                 <a:p>
                   <a:pPr algn="ctr"/>
                   <a:r>
-                    <a:rPr lang="en-US" altLang="zh-TW" sz="3200" dirty="0">
+                    <a:rPr lang="en-US" altLang="zh-TW" sz="2700" dirty="0">
                       <a:latin typeface="Times New Roman" panose="02020603050405020304" pitchFamily="18" charset="0"/>
                       <a:cs typeface="Times New Roman" panose="02020603050405020304" pitchFamily="18" charset="0"/>
                     </a:rPr>
@@ -3737,32 +3758,32 @@
                   <a14:m>
                     <m:oMath xmlns:m="http://schemas.openxmlformats.org/officeDocument/2006/math">
                       <m:r>
-                        <a:rPr lang="en-US" altLang="zh-TW" sz="3200" i="1">
+                        <a:rPr lang="en-US" altLang="zh-TW" sz="2700" i="1">
                           <a:latin typeface="Cambria Math" panose="02040503050406030204" pitchFamily="18" charset="0"/>
                         </a:rPr>
                         <m:t>𝛽</m:t>
                       </m:r>
                       <m:r>
-                        <a:rPr lang="en-US" altLang="zh-TW" sz="3200" i="1">
+                        <a:rPr lang="en-US" altLang="zh-TW" sz="2700" i="1">
                           <a:latin typeface="Cambria Math" panose="02040503050406030204" pitchFamily="18" charset="0"/>
                         </a:rPr>
                         <m:t>=</m:t>
                       </m:r>
                       <m:r>
-                        <a:rPr lang="en-US" altLang="zh-TW" sz="3200" i="1">
+                        <a:rPr lang="en-US" altLang="zh-TW" sz="2700" i="1">
                           <a:latin typeface="Cambria Math" panose="02040503050406030204" pitchFamily="18" charset="0"/>
                         </a:rPr>
                         <m:t>𝜋</m:t>
                       </m:r>
                       <m:r>
-                        <a:rPr lang="en-US" altLang="zh-TW" sz="3200" i="1">
+                        <a:rPr lang="en-US" altLang="zh-TW" sz="2700" i="1">
                           <a:latin typeface="Cambria Math" panose="02040503050406030204" pitchFamily="18" charset="0"/>
                         </a:rPr>
                         <m:t>/2</m:t>
                       </m:r>
                     </m:oMath>
                   </a14:m>
-                  <a:endParaRPr lang="zh-TW" altLang="en-US" sz="3200" dirty="0"/>
+                  <a:endParaRPr lang="zh-TW" altLang="en-US" sz="2700" dirty="0"/>
                 </a:p>
               </p:txBody>
             </p:sp>
@@ -3784,8 +3805,8 @@
               </p:nvSpPr>
               <p:spPr>
                 <a:xfrm>
-                  <a:off x="2832526" y="442842"/>
-                  <a:ext cx="7451856" cy="584775"/>
+                  <a:off x="2089825" y="565087"/>
+                  <a:ext cx="6572379" cy="526619"/>
                 </a:xfrm>
                 <a:prstGeom prst="rect">
                   <a:avLst/>
@@ -3793,7 +3814,7 @@
                 <a:blipFill>
                   <a:blip r:embed="rId2"/>
                   <a:stretch>
-                    <a:fillRect l="-1473" t="-15625" b="-31250"/>
+                    <a:fillRect t="-12791" b="-25581"/>
                   </a:stretch>
                 </a:blipFill>
               </p:spPr>
@@ -3814,1544 +3835,6 @@
         </mc:AlternateContent>
         <p:grpSp>
           <p:nvGrpSpPr>
-            <p:cNvPr id="99" name="群組 98">
-              <a:extLst>
-                <a:ext uri="{FF2B5EF4-FFF2-40B4-BE49-F238E27FC236}">
-                  <a16:creationId xmlns:a16="http://schemas.microsoft.com/office/drawing/2014/main" id="{E0D3337E-999F-44A2-ABAD-58AEE63CCBC9}"/>
-                </a:ext>
-              </a:extLst>
-            </p:cNvPr>
-            <p:cNvGrpSpPr/>
-            <p:nvPr/>
-          </p:nvGrpSpPr>
-          <p:grpSpPr>
-            <a:xfrm>
-              <a:off x="392419" y="1913426"/>
-              <a:ext cx="2627943" cy="3705546"/>
-              <a:chOff x="278119" y="1862626"/>
-              <a:chExt cx="2627943" cy="3705546"/>
-            </a:xfrm>
-          </p:grpSpPr>
-          <p:grpSp>
-            <p:nvGrpSpPr>
-              <p:cNvPr id="20" name="群組 19">
-                <a:extLst>
-                  <a:ext uri="{FF2B5EF4-FFF2-40B4-BE49-F238E27FC236}">
-                    <a16:creationId xmlns:a16="http://schemas.microsoft.com/office/drawing/2014/main" id="{CE08241E-EDE6-4D36-B87D-107CC65A53A3}"/>
-                  </a:ext>
-                </a:extLst>
-              </p:cNvPr>
-              <p:cNvGrpSpPr/>
-              <p:nvPr/>
-            </p:nvGrpSpPr>
-            <p:grpSpPr>
-              <a:xfrm>
-                <a:off x="278119" y="1862626"/>
-                <a:ext cx="2627943" cy="3705546"/>
-                <a:chOff x="447599" y="580602"/>
-                <a:chExt cx="2627943" cy="3705546"/>
-              </a:xfrm>
-            </p:grpSpPr>
-            <p:grpSp>
-              <p:nvGrpSpPr>
-                <p:cNvPr id="29" name="群組 28">
-                  <a:extLst>
-                    <a:ext uri="{FF2B5EF4-FFF2-40B4-BE49-F238E27FC236}">
-                      <a16:creationId xmlns:a16="http://schemas.microsoft.com/office/drawing/2014/main" id="{BCEDBCD7-0DA3-4364-A481-7761E95349DA}"/>
-                    </a:ext>
-                  </a:extLst>
-                </p:cNvPr>
-                <p:cNvGrpSpPr/>
-                <p:nvPr/>
-              </p:nvGrpSpPr>
-              <p:grpSpPr>
-                <a:xfrm>
-                  <a:off x="447599" y="580602"/>
-                  <a:ext cx="2627943" cy="3705546"/>
-                  <a:chOff x="-288283" y="3566921"/>
-                  <a:chExt cx="2627943" cy="3705546"/>
-                </a:xfrm>
-              </p:grpSpPr>
-              <mc:AlternateContent xmlns:mc="http://schemas.openxmlformats.org/markup-compatibility/2006">
-                <mc:Choice xmlns:a14="http://schemas.microsoft.com/office/drawing/2010/main" Requires="a14">
-                  <p:sp>
-                    <p:nvSpPr>
-                      <p:cNvPr id="34" name="文字方塊 33">
-                        <a:extLst>
-                          <a:ext uri="{FF2B5EF4-FFF2-40B4-BE49-F238E27FC236}">
-                            <a16:creationId xmlns:a16="http://schemas.microsoft.com/office/drawing/2014/main" id="{AD41D7DD-36E1-4473-BF56-D93D1ABCE712}"/>
-                          </a:ext>
-                        </a:extLst>
-                      </p:cNvPr>
-                      <p:cNvSpPr txBox="1"/>
-                      <p:nvPr/>
-                    </p:nvSpPr>
-                    <p:spPr>
-                      <a:xfrm>
-                        <a:off x="554344" y="6906689"/>
-                        <a:ext cx="938079" cy="365778"/>
-                      </a:xfrm>
-                      <a:prstGeom prst="rect">
-                        <a:avLst/>
-                      </a:prstGeom>
-                      <a:noFill/>
-                    </p:spPr>
-                    <p:txBody>
-                      <a:bodyPr wrap="square" rtlCol="0">
-                        <a:spAutoFit/>
-                      </a:bodyPr>
-                      <a:lstStyle/>
-                      <a:p>
-                        <a:pPr/>
-                        <a14:m>
-                          <m:oMathPara xmlns:m="http://schemas.openxmlformats.org/officeDocument/2006/math">
-                            <m:oMathParaPr>
-                              <m:jc m:val="centerGroup"/>
-                            </m:oMathParaPr>
-                            <m:oMath xmlns:m="http://schemas.openxmlformats.org/officeDocument/2006/math">
-                              <m:r>
-                                <a:rPr lang="en-US" altLang="zh-TW" i="1">
-                                  <a:latin typeface="Cambria Math" panose="02040503050406030204" pitchFamily="18" charset="0"/>
-                                </a:rPr>
-                                <m:t>|</m:t>
-                              </m:r>
-                              <m:d>
-                                <m:dPr>
-                                  <m:begChr m:val=""/>
-                                  <m:endChr m:val="⟩"/>
-                                  <m:ctrlPr>
-                                    <a:rPr lang="en-US" altLang="zh-TW" i="1">
-                                      <a:latin typeface="Cambria Math" panose="02040503050406030204" pitchFamily="18" charset="0"/>
-                                    </a:rPr>
-                                  </m:ctrlPr>
-                                </m:dPr>
-                                <m:e>
-                                  <m:r>
-                                    <a:rPr lang="en-US" altLang="zh-TW" i="1">
-                                      <a:latin typeface="Cambria Math" panose="02040503050406030204" pitchFamily="18" charset="0"/>
-                                    </a:rPr>
-                                    <m:t>−1, 1</m:t>
-                                  </m:r>
-                                </m:e>
-                              </m:d>
-                            </m:oMath>
-                          </m:oMathPara>
-                        </a14:m>
-                        <a:endParaRPr lang="zh-TW" altLang="en-US" dirty="0"/>
-                      </a:p>
-                    </p:txBody>
-                  </p:sp>
-                </mc:Choice>
-                <mc:Fallback>
-                  <p:sp>
-                    <p:nvSpPr>
-                      <p:cNvPr id="34" name="文字方塊 33">
-                        <a:extLst>
-                          <a:ext uri="{FF2B5EF4-FFF2-40B4-BE49-F238E27FC236}">
-                            <a16:creationId xmlns:a16="http://schemas.microsoft.com/office/drawing/2014/main" id="{AD41D7DD-36E1-4473-BF56-D93D1ABCE712}"/>
-                          </a:ext>
-                        </a:extLst>
-                      </p:cNvPr>
-                      <p:cNvSpPr txBox="1">
-                        <a:spLocks noRot="1" noChangeAspect="1" noMove="1" noResize="1" noEditPoints="1" noAdjustHandles="1" noChangeArrowheads="1" noChangeShapeType="1" noTextEdit="1"/>
-                      </p:cNvSpPr>
-                      <p:nvPr/>
-                    </p:nvSpPr>
-                    <p:spPr>
-                      <a:xfrm>
-                        <a:off x="554344" y="6906689"/>
-                        <a:ext cx="938079" cy="365778"/>
-                      </a:xfrm>
-                      <a:prstGeom prst="rect">
-                        <a:avLst/>
-                      </a:prstGeom>
-                      <a:blipFill>
-                        <a:blip r:embed="rId3"/>
-                        <a:stretch>
-                          <a:fillRect t="-121667" r="-49020" b="-188333"/>
-                        </a:stretch>
-                      </a:blipFill>
-                    </p:spPr>
-                    <p:txBody>
-                      <a:bodyPr/>
-                      <a:lstStyle/>
-                      <a:p>
-                        <a:r>
-                          <a:rPr lang="zh-TW" altLang="en-US">
-                            <a:noFill/>
-                          </a:rPr>
-                          <a:t> </a:t>
-                        </a:r>
-                      </a:p>
-                    </p:txBody>
-                  </p:sp>
-                </mc:Fallback>
-              </mc:AlternateContent>
-              <mc:AlternateContent xmlns:mc="http://schemas.openxmlformats.org/markup-compatibility/2006" xmlns:a14="http://schemas.microsoft.com/office/drawing/2010/main">
-                <mc:Choice Requires="a14">
-                  <p:sp>
-                    <p:nvSpPr>
-                      <p:cNvPr id="35" name="文字方塊 34">
-                        <a:extLst>
-                          <a:ext uri="{FF2B5EF4-FFF2-40B4-BE49-F238E27FC236}">
-                            <a16:creationId xmlns:a16="http://schemas.microsoft.com/office/drawing/2014/main" id="{E454296E-832D-4D38-A0C6-DD9FBB97EFD7}"/>
-                          </a:ext>
-                        </a:extLst>
-                      </p:cNvPr>
-                      <p:cNvSpPr txBox="1"/>
-                      <p:nvPr/>
-                    </p:nvSpPr>
-                    <p:spPr>
-                      <a:xfrm>
-                        <a:off x="554344" y="3566921"/>
-                        <a:ext cx="938079" cy="365778"/>
-                      </a:xfrm>
-                      <a:prstGeom prst="rect">
-                        <a:avLst/>
-                      </a:prstGeom>
-                      <a:noFill/>
-                    </p:spPr>
-                    <p:txBody>
-                      <a:bodyPr wrap="square" rtlCol="0">
-                        <a:spAutoFit/>
-                      </a:bodyPr>
-                      <a:lstStyle/>
-                      <a:p>
-                        <a:pPr/>
-                        <a14:m>
-                          <m:oMathPara xmlns:m="http://schemas.openxmlformats.org/officeDocument/2006/math">
-                            <m:oMathParaPr>
-                              <m:jc m:val="centerGroup"/>
-                            </m:oMathParaPr>
-                            <m:oMath xmlns:m="http://schemas.openxmlformats.org/officeDocument/2006/math">
-                              <m:r>
-                                <a:rPr lang="en-US" altLang="zh-TW" i="1">
-                                  <a:latin typeface="Cambria Math" panose="02040503050406030204" pitchFamily="18" charset="0"/>
-                                </a:rPr>
-                                <m:t>|</m:t>
-                              </m:r>
-                              <m:d>
-                                <m:dPr>
-                                  <m:begChr m:val=""/>
-                                  <m:endChr m:val="⟩"/>
-                                  <m:ctrlPr>
-                                    <a:rPr lang="en-US" altLang="zh-TW" i="1">
-                                      <a:latin typeface="Cambria Math" panose="02040503050406030204" pitchFamily="18" charset="0"/>
-                                    </a:rPr>
-                                  </m:ctrlPr>
-                                </m:dPr>
-                                <m:e>
-                                  <m:r>
-                                    <a:rPr lang="en-US" altLang="zh-TW" i="1">
-                                      <a:latin typeface="Cambria Math" panose="02040503050406030204" pitchFamily="18" charset="0"/>
-                                    </a:rPr>
-                                    <m:t>1, −1</m:t>
-                                  </m:r>
-                                </m:e>
-                              </m:d>
-                            </m:oMath>
-                          </m:oMathPara>
-                        </a14:m>
-                        <a:endParaRPr lang="zh-TW" altLang="en-US" dirty="0"/>
-                      </a:p>
-                    </p:txBody>
-                  </p:sp>
-                </mc:Choice>
-                <mc:Fallback xmlns="">
-                  <p:sp>
-                    <p:nvSpPr>
-                      <p:cNvPr id="114" name="文字方塊 113">
-                        <a:extLst>
-                          <a:ext uri="{FF2B5EF4-FFF2-40B4-BE49-F238E27FC236}">
-                            <a16:creationId xmlns:a16="http://schemas.microsoft.com/office/drawing/2014/main" id="{61CC87A8-EF42-4DAB-B7E0-5ECE879342C2}"/>
-                          </a:ext>
-                        </a:extLst>
-                      </p:cNvPr>
-                      <p:cNvSpPr txBox="1">
-                        <a:spLocks noRot="1" noChangeAspect="1" noMove="1" noResize="1" noEditPoints="1" noAdjustHandles="1" noChangeArrowheads="1" noChangeShapeType="1" noTextEdit="1"/>
-                      </p:cNvSpPr>
-                      <p:nvPr/>
-                    </p:nvSpPr>
-                    <p:spPr>
-                      <a:xfrm>
-                        <a:off x="554344" y="3566921"/>
-                        <a:ext cx="938079" cy="365778"/>
-                      </a:xfrm>
-                      <a:prstGeom prst="rect">
-                        <a:avLst/>
-                      </a:prstGeom>
-                      <a:blipFill>
-                        <a:blip r:embed="rId11"/>
-                        <a:stretch>
-                          <a:fillRect t="-121667" r="-48052" b="-188333"/>
-                        </a:stretch>
-                      </a:blipFill>
-                    </p:spPr>
-                    <p:txBody>
-                      <a:bodyPr/>
-                      <a:lstStyle/>
-                      <a:p>
-                        <a:r>
-                          <a:rPr lang="zh-TW" altLang="en-US">
-                            <a:noFill/>
-                          </a:rPr>
-                          <a:t> </a:t>
-                        </a:r>
-                      </a:p>
-                    </p:txBody>
-                  </p:sp>
-                </mc:Fallback>
-              </mc:AlternateContent>
-              <p:grpSp>
-                <p:nvGrpSpPr>
-                  <p:cNvPr id="36" name="群組 35">
-                    <a:extLst>
-                      <a:ext uri="{FF2B5EF4-FFF2-40B4-BE49-F238E27FC236}">
-                        <a16:creationId xmlns:a16="http://schemas.microsoft.com/office/drawing/2014/main" id="{69FFBE3B-D0E5-4C85-B11E-D802CED4057A}"/>
-                      </a:ext>
-                    </a:extLst>
-                  </p:cNvPr>
-                  <p:cNvGrpSpPr/>
-                  <p:nvPr/>
-                </p:nvGrpSpPr>
-                <p:grpSpPr>
-                  <a:xfrm>
-                    <a:off x="-288283" y="4053977"/>
-                    <a:ext cx="2627943" cy="2718993"/>
-                    <a:chOff x="4057954" y="2288513"/>
-                    <a:chExt cx="2627943" cy="2718993"/>
-                  </a:xfrm>
-                </p:grpSpPr>
-                <p:sp>
-                  <p:nvSpPr>
-                    <p:cNvPr id="37" name="Oval 4">
-                      <a:extLst>
-                        <a:ext uri="{FF2B5EF4-FFF2-40B4-BE49-F238E27FC236}">
-                          <a16:creationId xmlns:a16="http://schemas.microsoft.com/office/drawing/2014/main" id="{5F7B8D78-2CAB-40FD-9FEA-EF0C7576BD52}"/>
-                        </a:ext>
-                      </a:extLst>
-                    </p:cNvPr>
-                    <p:cNvSpPr/>
-                    <p:nvPr/>
-                  </p:nvSpPr>
-                  <p:spPr>
-                    <a:xfrm>
-                      <a:off x="4061937" y="2288513"/>
-                      <a:ext cx="2623960" cy="2718084"/>
-                    </a:xfrm>
-                    <a:prstGeom prst="ellipse">
-                      <a:avLst/>
-                    </a:prstGeom>
-                    <a:gradFill flip="none" rotWithShape="1">
-                      <a:gsLst>
-                        <a:gs pos="100000">
-                          <a:schemeClr val="accent3">
-                            <a:lumMod val="60000"/>
-                            <a:lumOff val="40000"/>
-                            <a:alpha val="60000"/>
-                          </a:schemeClr>
-                        </a:gs>
-                        <a:gs pos="55000">
-                          <a:schemeClr val="accent3">
-                            <a:lumMod val="40000"/>
-                            <a:lumOff val="60000"/>
-                            <a:alpha val="60000"/>
-                          </a:schemeClr>
-                        </a:gs>
-                        <a:gs pos="0">
-                          <a:schemeClr val="bg1">
-                            <a:alpha val="60000"/>
-                          </a:schemeClr>
-                        </a:gs>
-                      </a:gsLst>
-                      <a:path path="circle">
-                        <a:fillToRect l="100000" b="100000"/>
-                      </a:path>
-                      <a:tileRect t="-100000" r="-100000"/>
-                    </a:gradFill>
-                    <a:ln w="57150">
-                      <a:solidFill>
-                        <a:srgbClr val="D5D7DA"/>
-                      </a:solidFill>
-                    </a:ln>
-                  </p:spPr>
-                  <p:style>
-                    <a:lnRef idx="2">
-                      <a:schemeClr val="accent1">
-                        <a:shade val="50000"/>
-                      </a:schemeClr>
-                    </a:lnRef>
-                    <a:fillRef idx="1">
-                      <a:schemeClr val="accent1"/>
-                    </a:fillRef>
-                    <a:effectRef idx="0">
-                      <a:schemeClr val="accent1"/>
-                    </a:effectRef>
-                    <a:fontRef idx="minor">
-                      <a:schemeClr val="lt1"/>
-                    </a:fontRef>
-                  </p:style>
-                  <p:txBody>
-                    <a:bodyPr rtlCol="0" anchor="ctr"/>
-                    <a:lstStyle/>
-                    <a:p>
-                      <a:pPr algn="ctr"/>
-                      <a:endParaRPr lang="en-US" dirty="0"/>
-                    </a:p>
-                  </p:txBody>
-                </p:sp>
-                <p:sp>
-                  <p:nvSpPr>
-                    <p:cNvPr id="38" name="SHO">
-                      <a:extLst>
-                        <a:ext uri="{FF2B5EF4-FFF2-40B4-BE49-F238E27FC236}">
-                          <a16:creationId xmlns:a16="http://schemas.microsoft.com/office/drawing/2014/main" id="{5B11F199-C378-4B82-A521-EFE3AB01F5B4}"/>
-                        </a:ext>
-                      </a:extLst>
-                    </p:cNvPr>
-                    <p:cNvSpPr/>
-                    <p:nvPr/>
-                  </p:nvSpPr>
-                  <p:spPr>
-                    <a:xfrm rot="16200000">
-                      <a:off x="4804171" y="2336484"/>
-                      <a:ext cx="1131525" cy="2623960"/>
-                    </a:xfrm>
-                    <a:prstGeom prst="arc">
-                      <a:avLst>
-                        <a:gd name="adj1" fmla="val 5396867"/>
-                        <a:gd name="adj2" fmla="val 5395779"/>
-                      </a:avLst>
-                    </a:prstGeom>
-                    <a:gradFill flip="none" rotWithShape="1">
-                      <a:gsLst>
-                        <a:gs pos="0">
-                          <a:schemeClr val="bg1">
-                            <a:lumMod val="65000"/>
-                          </a:schemeClr>
-                        </a:gs>
-                        <a:gs pos="47000">
-                          <a:schemeClr val="bg1">
-                            <a:lumMod val="50000"/>
-                          </a:schemeClr>
-                        </a:gs>
-                        <a:gs pos="97000">
-                          <a:srgbClr val="5E5E5E"/>
-                        </a:gs>
-                      </a:gsLst>
-                      <a:path path="circle">
-                        <a:fillToRect l="50000" t="50000" r="50000" b="50000"/>
-                      </a:path>
-                      <a:tileRect/>
-                    </a:gradFill>
-                    <a:ln w="31750">
-                      <a:solidFill>
-                        <a:srgbClr val="EC711E"/>
-                      </a:solidFill>
-                    </a:ln>
-                  </p:spPr>
-                  <p:style>
-                    <a:lnRef idx="1">
-                      <a:schemeClr val="accent1"/>
-                    </a:lnRef>
-                    <a:fillRef idx="0">
-                      <a:schemeClr val="accent1"/>
-                    </a:fillRef>
-                    <a:effectRef idx="0">
-                      <a:schemeClr val="accent1"/>
-                    </a:effectRef>
-                    <a:fontRef idx="minor">
-                      <a:schemeClr val="tx1"/>
-                    </a:fontRef>
-                  </p:style>
-                  <p:txBody>
-                    <a:bodyPr rtlCol="0" anchor="ctr"/>
-                    <a:lstStyle/>
-                    <a:p>
-                      <a:pPr algn="ctr"/>
-                      <a:endParaRPr lang="en-US" dirty="0"/>
-                    </a:p>
-                  </p:txBody>
-                </p:sp>
-                <p:sp>
-                  <p:nvSpPr>
-                    <p:cNvPr id="39" name="SVO">
-                      <a:extLst>
-                        <a:ext uri="{FF2B5EF4-FFF2-40B4-BE49-F238E27FC236}">
-                          <a16:creationId xmlns:a16="http://schemas.microsoft.com/office/drawing/2014/main" id="{D50A92CB-3910-4F97-B484-7E7A5F590275}"/>
-                        </a:ext>
-                      </a:extLst>
-                    </p:cNvPr>
-                    <p:cNvSpPr/>
-                    <p:nvPr/>
-                  </p:nvSpPr>
-                  <p:spPr>
-                    <a:xfrm>
-                      <a:off x="4712309" y="2289422"/>
-                      <a:ext cx="1311980" cy="2718084"/>
-                    </a:xfrm>
-                    <a:prstGeom prst="ellipse">
-                      <a:avLst/>
-                    </a:prstGeom>
-                    <a:noFill/>
-                    <a:ln w="25400">
-                      <a:solidFill>
-                        <a:schemeClr val="bg1">
-                          <a:lumMod val="50000"/>
-                        </a:schemeClr>
-                      </a:solidFill>
-                      <a:prstDash val="dash"/>
-                    </a:ln>
-                  </p:spPr>
-                  <p:style>
-                    <a:lnRef idx="2">
-                      <a:schemeClr val="accent1">
-                        <a:shade val="50000"/>
-                      </a:schemeClr>
-                    </a:lnRef>
-                    <a:fillRef idx="1">
-                      <a:schemeClr val="accent1"/>
-                    </a:fillRef>
-                    <a:effectRef idx="0">
-                      <a:schemeClr val="accent1"/>
-                    </a:effectRef>
-                    <a:fontRef idx="minor">
-                      <a:schemeClr val="lt1"/>
-                    </a:fontRef>
-                  </p:style>
-                  <p:txBody>
-                    <a:bodyPr rtlCol="0" anchor="ctr"/>
-                    <a:lstStyle/>
-                    <a:p>
-                      <a:pPr algn="ctr"/>
-                      <a:endParaRPr lang="en-US"/>
-                    </a:p>
-                  </p:txBody>
-                </p:sp>
-                <p:sp>
-                  <p:nvSpPr>
-                    <p:cNvPr id="40" name="Oval 6">
-                      <a:extLst>
-                        <a:ext uri="{FF2B5EF4-FFF2-40B4-BE49-F238E27FC236}">
-                          <a16:creationId xmlns:a16="http://schemas.microsoft.com/office/drawing/2014/main" id="{DB842231-ED50-4529-999D-066257C6224B}"/>
-                        </a:ext>
-                      </a:extLst>
-                    </p:cNvPr>
-                    <p:cNvSpPr/>
-                    <p:nvPr/>
-                  </p:nvSpPr>
-                  <p:spPr>
-                    <a:xfrm rot="16200000">
-                      <a:off x="4804171" y="2336484"/>
-                      <a:ext cx="1131525" cy="2623960"/>
-                    </a:xfrm>
-                    <a:prstGeom prst="ellipse">
-                      <a:avLst/>
-                    </a:prstGeom>
-                    <a:noFill/>
-                    <a:ln w="38100">
-                      <a:solidFill>
-                        <a:srgbClr val="FF3300">
-                          <a:alpha val="60000"/>
-                        </a:srgbClr>
-                      </a:solidFill>
-                      <a:prstDash val="solid"/>
-                    </a:ln>
-                  </p:spPr>
-                  <p:style>
-                    <a:lnRef idx="2">
-                      <a:schemeClr val="accent1">
-                        <a:shade val="50000"/>
-                      </a:schemeClr>
-                    </a:lnRef>
-                    <a:fillRef idx="1">
-                      <a:schemeClr val="accent1"/>
-                    </a:fillRef>
-                    <a:effectRef idx="0">
-                      <a:schemeClr val="accent1"/>
-                    </a:effectRef>
-                    <a:fontRef idx="minor">
-                      <a:schemeClr val="lt1"/>
-                    </a:fontRef>
-                  </p:style>
-                  <p:txBody>
-                    <a:bodyPr rtlCol="0" anchor="ctr"/>
-                    <a:lstStyle/>
-                    <a:p>
-                      <a:pPr algn="ctr"/>
-                      <a:endParaRPr lang="en-US" dirty="0"/>
-                    </a:p>
-                  </p:txBody>
-                </p:sp>
-                <mc:AlternateContent xmlns:mc="http://schemas.openxmlformats.org/markup-compatibility/2006" xmlns:a14="http://schemas.microsoft.com/office/drawing/2010/main">
-                  <mc:Choice Requires="a14">
-                    <p:sp>
-                      <p:nvSpPr>
-                        <p:cNvPr id="41" name="TextBox 11">
-                          <a:extLst>
-                            <a:ext uri="{FF2B5EF4-FFF2-40B4-BE49-F238E27FC236}">
-                              <a16:creationId xmlns:a16="http://schemas.microsoft.com/office/drawing/2014/main" id="{10548A7A-088E-4C63-ADD7-17BA462B79E2}"/>
-                            </a:ext>
-                          </a:extLst>
-                        </p:cNvPr>
-                        <p:cNvSpPr txBox="1"/>
-                        <p:nvPr/>
-                      </p:nvSpPr>
-                      <p:spPr>
-                        <a:xfrm>
-                          <a:off x="4440286" y="3358991"/>
-                          <a:ext cx="321505" cy="519661"/>
-                        </a:xfrm>
-                        <a:prstGeom prst="rect">
-                          <a:avLst/>
-                        </a:prstGeom>
-                        <a:noFill/>
-                      </p:spPr>
-                      <p:txBody>
-                        <a:bodyPr wrap="square" rtlCol="0">
-                          <a:spAutoFit/>
-                        </a:bodyPr>
-                        <a:lstStyle/>
-                        <a:p>
-                          <a:pPr/>
-                          <a14:m>
-                            <m:oMathPara xmlns:m="http://schemas.openxmlformats.org/officeDocument/2006/math">
-                              <m:oMathParaPr>
-                                <m:jc m:val="centerGroup"/>
-                              </m:oMathParaPr>
-                              <m:oMath xmlns:m="http://schemas.openxmlformats.org/officeDocument/2006/math">
-                                <m:r>
-                                  <a:rPr lang="en-US" sz="2800" i="1">
-                                    <a:latin typeface="Cambria Math" panose="02040503050406030204" pitchFamily="18" charset="0"/>
-                                  </a:rPr>
-                                  <m:t>𝑥</m:t>
-                                </m:r>
-                              </m:oMath>
-                            </m:oMathPara>
-                          </a14:m>
-                          <a:endParaRPr lang="en-US" sz="2800" dirty="0"/>
-                        </a:p>
-                      </p:txBody>
-                    </p:sp>
-                  </mc:Choice>
-                  <mc:Fallback xmlns="">
-                    <p:sp>
-                      <p:nvSpPr>
-                        <p:cNvPr id="149" name="TextBox 11">
-                          <a:extLst>
-                            <a:ext uri="{FF2B5EF4-FFF2-40B4-BE49-F238E27FC236}">
-                              <a16:creationId xmlns:a16="http://schemas.microsoft.com/office/drawing/2014/main" id="{BD9DB877-6816-42FC-B548-00D5312CDF41}"/>
-                            </a:ext>
-                          </a:extLst>
-                        </p:cNvPr>
-                        <p:cNvSpPr txBox="1">
-                          <a:spLocks noRot="1" noChangeAspect="1" noMove="1" noResize="1" noEditPoints="1" noAdjustHandles="1" noChangeArrowheads="1" noChangeShapeType="1" noTextEdit="1"/>
-                        </p:cNvSpPr>
-                        <p:nvPr/>
-                      </p:nvSpPr>
-                      <p:spPr>
-                        <a:xfrm>
-                          <a:off x="4440286" y="3358991"/>
-                          <a:ext cx="321505" cy="519661"/>
-                        </a:xfrm>
-                        <a:prstGeom prst="rect">
-                          <a:avLst/>
-                        </a:prstGeom>
-                        <a:blipFill>
-                          <a:blip r:embed="rId13"/>
-                          <a:stretch>
-                            <a:fillRect/>
-                          </a:stretch>
-                        </a:blipFill>
-                      </p:spPr>
-                      <p:txBody>
-                        <a:bodyPr/>
-                        <a:lstStyle/>
-                        <a:p>
-                          <a:r>
-                            <a:rPr lang="zh-TW" altLang="en-US">
-                              <a:noFill/>
-                            </a:rPr>
-                            <a:t> </a:t>
-                          </a:r>
-                        </a:p>
-                      </p:txBody>
-                    </p:sp>
-                  </mc:Fallback>
-                </mc:AlternateContent>
-                <mc:AlternateContent xmlns:mc="http://schemas.openxmlformats.org/markup-compatibility/2006" xmlns:a14="http://schemas.microsoft.com/office/drawing/2010/main">
-                  <mc:Choice Requires="a14">
-                    <p:sp>
-                      <p:nvSpPr>
-                        <p:cNvPr id="42" name="TextBox 12">
-                          <a:extLst>
-                            <a:ext uri="{FF2B5EF4-FFF2-40B4-BE49-F238E27FC236}">
-                              <a16:creationId xmlns:a16="http://schemas.microsoft.com/office/drawing/2014/main" id="{5F5372E9-2C77-4E4F-958B-ADF95636A39D}"/>
-                            </a:ext>
-                          </a:extLst>
-                        </p:cNvPr>
-                        <p:cNvSpPr txBox="1"/>
-                        <p:nvPr/>
-                      </p:nvSpPr>
-                      <p:spPr>
-                        <a:xfrm>
-                          <a:off x="5682303" y="3497725"/>
-                          <a:ext cx="321505" cy="519661"/>
-                        </a:xfrm>
-                        <a:prstGeom prst="rect">
-                          <a:avLst/>
-                        </a:prstGeom>
-                        <a:noFill/>
-                      </p:spPr>
-                      <p:txBody>
-                        <a:bodyPr wrap="square" rtlCol="0">
-                          <a:spAutoFit/>
-                        </a:bodyPr>
-                        <a:lstStyle/>
-                        <a:p>
-                          <a:pPr/>
-                          <a14:m>
-                            <m:oMathPara xmlns:m="http://schemas.openxmlformats.org/officeDocument/2006/math">
-                              <m:oMathParaPr>
-                                <m:jc m:val="centerGroup"/>
-                              </m:oMathParaPr>
-                              <m:oMath xmlns:m="http://schemas.openxmlformats.org/officeDocument/2006/math">
-                                <m:r>
-                                  <a:rPr lang="en-US" sz="2800" i="1">
-                                    <a:latin typeface="Cambria Math" panose="02040503050406030204" pitchFamily="18" charset="0"/>
-                                  </a:rPr>
-                                  <m:t>𝑦</m:t>
-                                </m:r>
-                              </m:oMath>
-                            </m:oMathPara>
-                          </a14:m>
-                          <a:endParaRPr lang="en-US" sz="2800" dirty="0"/>
-                        </a:p>
-                      </p:txBody>
-                    </p:sp>
-                  </mc:Choice>
-                  <mc:Fallback xmlns="">
-                    <p:sp>
-                      <p:nvSpPr>
-                        <p:cNvPr id="151" name="TextBox 12">
-                          <a:extLst>
-                            <a:ext uri="{FF2B5EF4-FFF2-40B4-BE49-F238E27FC236}">
-                              <a16:creationId xmlns:a16="http://schemas.microsoft.com/office/drawing/2014/main" id="{F7976580-4BE2-4593-8EC6-991FA6292EE3}"/>
-                            </a:ext>
-                          </a:extLst>
-                        </p:cNvPr>
-                        <p:cNvSpPr txBox="1">
-                          <a:spLocks noRot="1" noChangeAspect="1" noMove="1" noResize="1" noEditPoints="1" noAdjustHandles="1" noChangeArrowheads="1" noChangeShapeType="1" noTextEdit="1"/>
-                        </p:cNvSpPr>
-                        <p:nvPr/>
-                      </p:nvSpPr>
-                      <p:spPr>
-                        <a:xfrm>
-                          <a:off x="5682303" y="3497725"/>
-                          <a:ext cx="321505" cy="519661"/>
-                        </a:xfrm>
-                        <a:prstGeom prst="rect">
-                          <a:avLst/>
-                        </a:prstGeom>
-                        <a:blipFill>
-                          <a:blip r:embed="rId14"/>
-                          <a:stretch>
-                            <a:fillRect/>
-                          </a:stretch>
-                        </a:blipFill>
-                      </p:spPr>
-                      <p:txBody>
-                        <a:bodyPr/>
-                        <a:lstStyle/>
-                        <a:p>
-                          <a:r>
-                            <a:rPr lang="zh-TW" altLang="en-US">
-                              <a:noFill/>
-                            </a:rPr>
-                            <a:t> </a:t>
-                          </a:r>
-                        </a:p>
-                      </p:txBody>
-                    </p:sp>
-                  </mc:Fallback>
-                </mc:AlternateContent>
-                <mc:AlternateContent xmlns:mc="http://schemas.openxmlformats.org/markup-compatibility/2006" xmlns:a14="http://schemas.microsoft.com/office/drawing/2010/main">
-                  <mc:Choice Requires="a14">
-                    <p:sp>
-                      <p:nvSpPr>
-                        <p:cNvPr id="43" name="TextBox 13">
-                          <a:extLst>
-                            <a:ext uri="{FF2B5EF4-FFF2-40B4-BE49-F238E27FC236}">
-                              <a16:creationId xmlns:a16="http://schemas.microsoft.com/office/drawing/2014/main" id="{65048EFC-6E5D-4F5E-B21C-A5EB9188972F}"/>
-                            </a:ext>
-                          </a:extLst>
-                        </p:cNvPr>
-                        <p:cNvSpPr txBox="1"/>
-                        <p:nvPr/>
-                      </p:nvSpPr>
-                      <p:spPr>
-                        <a:xfrm>
-                          <a:off x="5200614" y="2429547"/>
-                          <a:ext cx="321505" cy="519661"/>
-                        </a:xfrm>
-                        <a:prstGeom prst="rect">
-                          <a:avLst/>
-                        </a:prstGeom>
-                        <a:noFill/>
-                      </p:spPr>
-                      <p:txBody>
-                        <a:bodyPr wrap="square" rtlCol="0">
-                          <a:spAutoFit/>
-                        </a:bodyPr>
-                        <a:lstStyle/>
-                        <a:p>
-                          <a:pPr/>
-                          <a14:m>
-                            <m:oMathPara xmlns:m="http://schemas.openxmlformats.org/officeDocument/2006/math">
-                              <m:oMathParaPr>
-                                <m:jc m:val="centerGroup"/>
-                              </m:oMathParaPr>
-                              <m:oMath xmlns:m="http://schemas.openxmlformats.org/officeDocument/2006/math">
-                                <m:r>
-                                  <a:rPr lang="en-US" sz="2800" i="1">
-                                    <a:latin typeface="Cambria Math" panose="02040503050406030204" pitchFamily="18" charset="0"/>
-                                  </a:rPr>
-                                  <m:t>𝑧</m:t>
-                                </m:r>
-                              </m:oMath>
-                            </m:oMathPara>
-                          </a14:m>
-                          <a:endParaRPr lang="en-US" sz="2800" dirty="0"/>
-                        </a:p>
-                      </p:txBody>
-                    </p:sp>
-                  </mc:Choice>
-                  <mc:Fallback xmlns="">
-                    <p:sp>
-                      <p:nvSpPr>
-                        <p:cNvPr id="152" name="TextBox 13">
-                          <a:extLst>
-                            <a:ext uri="{FF2B5EF4-FFF2-40B4-BE49-F238E27FC236}">
-                              <a16:creationId xmlns:a16="http://schemas.microsoft.com/office/drawing/2014/main" id="{42276086-3A24-4D44-9798-6BF141BD4D16}"/>
-                            </a:ext>
-                          </a:extLst>
-                        </p:cNvPr>
-                        <p:cNvSpPr txBox="1">
-                          <a:spLocks noRot="1" noChangeAspect="1" noMove="1" noResize="1" noEditPoints="1" noAdjustHandles="1" noChangeArrowheads="1" noChangeShapeType="1" noTextEdit="1"/>
-                        </p:cNvSpPr>
-                        <p:nvPr/>
-                      </p:nvSpPr>
-                      <p:spPr>
-                        <a:xfrm>
-                          <a:off x="5200614" y="2429547"/>
-                          <a:ext cx="321505" cy="519661"/>
-                        </a:xfrm>
-                        <a:prstGeom prst="rect">
-                          <a:avLst/>
-                        </a:prstGeom>
-                        <a:blipFill>
-                          <a:blip r:embed="rId15"/>
-                          <a:stretch>
-                            <a:fillRect/>
-                          </a:stretch>
-                        </a:blipFill>
-                      </p:spPr>
-                      <p:txBody>
-                        <a:bodyPr/>
-                        <a:lstStyle/>
-                        <a:p>
-                          <a:r>
-                            <a:rPr lang="zh-TW" altLang="en-US">
-                              <a:noFill/>
-                            </a:rPr>
-                            <a:t> </a:t>
-                          </a:r>
-                        </a:p>
-                      </p:txBody>
-                    </p:sp>
-                  </mc:Fallback>
-                </mc:AlternateContent>
-                <p:sp>
-                  <p:nvSpPr>
-                    <p:cNvPr id="44" name="DVO">
-                      <a:extLst>
-                        <a:ext uri="{FF2B5EF4-FFF2-40B4-BE49-F238E27FC236}">
-                          <a16:creationId xmlns:a16="http://schemas.microsoft.com/office/drawing/2014/main" id="{E9BEA31F-1022-4453-8378-900CE2FC25F4}"/>
-                        </a:ext>
-                      </a:extLst>
-                    </p:cNvPr>
-                    <p:cNvSpPr/>
-                    <p:nvPr/>
-                  </p:nvSpPr>
-                  <p:spPr>
-                    <a:xfrm flipH="1">
-                      <a:off x="4712309" y="2289422"/>
-                      <a:ext cx="1311980" cy="2718084"/>
-                    </a:xfrm>
-                    <a:prstGeom prst="arc">
-                      <a:avLst>
-                        <a:gd name="adj1" fmla="val 5396867"/>
-                        <a:gd name="adj2" fmla="val 16170484"/>
-                      </a:avLst>
-                    </a:prstGeom>
-                    <a:ln w="25400">
-                      <a:solidFill>
-                        <a:schemeClr val="bg1">
-                          <a:lumMod val="50000"/>
-                        </a:schemeClr>
-                      </a:solidFill>
-                    </a:ln>
-                  </p:spPr>
-                  <p:style>
-                    <a:lnRef idx="1">
-                      <a:schemeClr val="accent1"/>
-                    </a:lnRef>
-                    <a:fillRef idx="0">
-                      <a:schemeClr val="accent1"/>
-                    </a:fillRef>
-                    <a:effectRef idx="0">
-                      <a:schemeClr val="accent1"/>
-                    </a:effectRef>
-                    <a:fontRef idx="minor">
-                      <a:schemeClr val="tx1"/>
-                    </a:fontRef>
-                  </p:style>
-                  <p:txBody>
-                    <a:bodyPr rtlCol="0" anchor="ctr"/>
-                    <a:lstStyle/>
-                    <a:p>
-                      <a:pPr algn="ctr"/>
-                      <a:endParaRPr lang="en-US" dirty="0"/>
-                    </a:p>
-                  </p:txBody>
-                </p:sp>
-                <p:cxnSp>
-                  <p:nvCxnSpPr>
-                    <p:cNvPr id="45" name="Straight Arrow Connector 7">
-                      <a:extLst>
-                        <a:ext uri="{FF2B5EF4-FFF2-40B4-BE49-F238E27FC236}">
-                          <a16:creationId xmlns:a16="http://schemas.microsoft.com/office/drawing/2014/main" id="{0D834752-0222-4706-A502-F64A2B780156}"/>
-                        </a:ext>
-                      </a:extLst>
-                    </p:cNvPr>
-                    <p:cNvCxnSpPr>
-                      <a:cxnSpLocks/>
-                    </p:cNvCxnSpPr>
-                    <p:nvPr/>
-                  </p:nvCxnSpPr>
-                  <p:spPr>
-                    <a:xfrm flipV="1">
-                      <a:off x="5362789" y="2834235"/>
-                      <a:ext cx="3083" cy="810248"/>
-                    </a:xfrm>
-                    <a:prstGeom prst="straightConnector1">
-                      <a:avLst/>
-                    </a:prstGeom>
-                    <a:ln w="12700">
-                      <a:solidFill>
-                        <a:schemeClr val="tx1"/>
-                      </a:solidFill>
-                      <a:tailEnd type="triangle" w="lg" len="lg"/>
-                    </a:ln>
-                  </p:spPr>
-                  <p:style>
-                    <a:lnRef idx="1">
-                      <a:schemeClr val="accent1"/>
-                    </a:lnRef>
-                    <a:fillRef idx="0">
-                      <a:schemeClr val="accent1"/>
-                    </a:fillRef>
-                    <a:effectRef idx="0">
-                      <a:schemeClr val="accent1"/>
-                    </a:effectRef>
-                    <a:fontRef idx="minor">
-                      <a:schemeClr val="tx1"/>
-                    </a:fontRef>
-                  </p:style>
-                </p:cxnSp>
-                <p:cxnSp>
-                  <p:nvCxnSpPr>
-                    <p:cNvPr id="46" name="Straight Arrow Connector 19">
-                      <a:extLst>
-                        <a:ext uri="{FF2B5EF4-FFF2-40B4-BE49-F238E27FC236}">
-                          <a16:creationId xmlns:a16="http://schemas.microsoft.com/office/drawing/2014/main" id="{573EBD86-7B09-4EB2-B8EA-87E1E51F1CBD}"/>
-                        </a:ext>
-                      </a:extLst>
-                    </p:cNvPr>
-                    <p:cNvCxnSpPr>
-                      <a:cxnSpLocks/>
-                    </p:cNvCxnSpPr>
-                    <p:nvPr/>
-                  </p:nvCxnSpPr>
-                  <p:spPr>
-                    <a:xfrm>
-                      <a:off x="5368214" y="3640512"/>
-                      <a:ext cx="355802" cy="284861"/>
-                    </a:xfrm>
-                    <a:prstGeom prst="straightConnector1">
-                      <a:avLst/>
-                    </a:prstGeom>
-                    <a:ln w="12700">
-                      <a:solidFill>
-                        <a:schemeClr val="tx1"/>
-                      </a:solidFill>
-                      <a:tailEnd type="triangle" w="lg" len="lg"/>
-                    </a:ln>
-                  </p:spPr>
-                  <p:style>
-                    <a:lnRef idx="1">
-                      <a:schemeClr val="accent1"/>
-                    </a:lnRef>
-                    <a:fillRef idx="0">
-                      <a:schemeClr val="accent1"/>
-                    </a:fillRef>
-                    <a:effectRef idx="0">
-                      <a:schemeClr val="accent1"/>
-                    </a:effectRef>
-                    <a:fontRef idx="minor">
-                      <a:schemeClr val="tx1"/>
-                    </a:fontRef>
-                  </p:style>
-                </p:cxnSp>
-                <p:cxnSp>
-                  <p:nvCxnSpPr>
-                    <p:cNvPr id="47" name="Straight Arrow Connector 18">
-                      <a:extLst>
-                        <a:ext uri="{FF2B5EF4-FFF2-40B4-BE49-F238E27FC236}">
-                          <a16:creationId xmlns:a16="http://schemas.microsoft.com/office/drawing/2014/main" id="{288E804C-9FFC-4FFB-B040-B0010D9EA742}"/>
-                        </a:ext>
-                      </a:extLst>
-                    </p:cNvPr>
-                    <p:cNvCxnSpPr>
-                      <a:cxnSpLocks/>
-                    </p:cNvCxnSpPr>
-                    <p:nvPr/>
-                  </p:nvCxnSpPr>
-                  <p:spPr>
-                    <a:xfrm rot="16200000" flipH="1" flipV="1">
-                      <a:off x="5056896" y="3328917"/>
-                      <a:ext cx="0" cy="623190"/>
-                    </a:xfrm>
-                    <a:prstGeom prst="straightConnector1">
-                      <a:avLst/>
-                    </a:prstGeom>
-                    <a:ln w="12700">
-                      <a:solidFill>
-                        <a:schemeClr val="tx1"/>
-                      </a:solidFill>
-                      <a:tailEnd type="triangle" w="lg" len="lg"/>
-                    </a:ln>
-                  </p:spPr>
-                  <p:style>
-                    <a:lnRef idx="1">
-                      <a:schemeClr val="accent1"/>
-                    </a:lnRef>
-                    <a:fillRef idx="0">
-                      <a:schemeClr val="accent1"/>
-                    </a:fillRef>
-                    <a:effectRef idx="0">
-                      <a:schemeClr val="accent1"/>
-                    </a:effectRef>
-                    <a:fontRef idx="minor">
-                      <a:schemeClr val="tx1"/>
-                    </a:fontRef>
-                  </p:style>
-                </p:cxnSp>
-              </p:grpSp>
-            </p:grpSp>
-            <p:sp>
-              <p:nvSpPr>
-                <p:cNvPr id="23" name="Partial Circle 9">
-                  <a:extLst>
-                    <a:ext uri="{FF2B5EF4-FFF2-40B4-BE49-F238E27FC236}">
-                      <a16:creationId xmlns:a16="http://schemas.microsoft.com/office/drawing/2014/main" id="{7A0C311C-621A-4F95-A7DC-13E0CE389B80}"/>
-                    </a:ext>
-                  </a:extLst>
-                </p:cNvPr>
-                <p:cNvSpPr>
-                  <a:spLocks noChangeAspect="1"/>
-                </p:cNvSpPr>
-                <p:nvPr/>
-              </p:nvSpPr>
-              <p:spPr>
-                <a:xfrm rot="16200000" flipH="1">
-                  <a:off x="1545316" y="2004821"/>
-                  <a:ext cx="431715" cy="833530"/>
-                </a:xfrm>
-                <a:prstGeom prst="pie">
-                  <a:avLst>
-                    <a:gd name="adj1" fmla="val 16258856"/>
-                    <a:gd name="adj2" fmla="val 19252600"/>
-                  </a:avLst>
-                </a:prstGeom>
-                <a:gradFill flip="none" rotWithShape="1">
-                  <a:gsLst>
-                    <a:gs pos="0">
-                      <a:schemeClr val="tx1"/>
-                    </a:gs>
-                    <a:gs pos="50000">
-                      <a:schemeClr val="tx1">
-                        <a:lumMod val="50000"/>
-                        <a:lumOff val="50000"/>
-                      </a:schemeClr>
-                    </a:gs>
-                    <a:gs pos="100000">
-                      <a:schemeClr val="bg1">
-                        <a:lumMod val="50000"/>
-                      </a:schemeClr>
-                    </a:gs>
-                  </a:gsLst>
-                  <a:lin ang="2700000" scaled="1"/>
-                  <a:tileRect/>
-                </a:gradFill>
-                <a:ln w="19050">
-                  <a:solidFill>
-                    <a:schemeClr val="tx1"/>
-                  </a:solidFill>
-                </a:ln>
-              </p:spPr>
-              <p:style>
-                <a:lnRef idx="2">
-                  <a:schemeClr val="accent1">
-                    <a:shade val="50000"/>
-                  </a:schemeClr>
-                </a:lnRef>
-                <a:fillRef idx="1">
-                  <a:schemeClr val="accent1"/>
-                </a:fillRef>
-                <a:effectRef idx="0">
-                  <a:schemeClr val="accent1"/>
-                </a:effectRef>
-                <a:fontRef idx="minor">
-                  <a:schemeClr val="lt1"/>
-                </a:fontRef>
-              </p:style>
-              <p:txBody>
-                <a:bodyPr rtlCol="0" anchor="ctr"/>
-                <a:lstStyle/>
-                <a:p>
-                  <a:pPr algn="ctr"/>
-                  <a:endParaRPr lang="en-US" dirty="0">
-                    <a:solidFill>
-                      <a:schemeClr val="tx1"/>
-                    </a:solidFill>
-                  </a:endParaRPr>
-                </a:p>
-              </p:txBody>
-            </p:sp>
-            <mc:AlternateContent xmlns:mc="http://schemas.openxmlformats.org/markup-compatibility/2006">
-              <mc:Choice xmlns:a14="http://schemas.microsoft.com/office/drawing/2010/main" Requires="a14">
-                <p:sp>
-                  <p:nvSpPr>
-                    <p:cNvPr id="24" name="TextBox 10">
-                      <a:extLst>
-                        <a:ext uri="{FF2B5EF4-FFF2-40B4-BE49-F238E27FC236}">
-                          <a16:creationId xmlns:a16="http://schemas.microsoft.com/office/drawing/2014/main" id="{A6780D20-608D-4846-BC44-ECC895EAB82A}"/>
-                        </a:ext>
-                      </a:extLst>
-                    </p:cNvPr>
-                    <p:cNvSpPr txBox="1"/>
-                    <p:nvPr/>
-                  </p:nvSpPr>
-                  <p:spPr>
-                    <a:xfrm>
-                      <a:off x="1085869" y="2339562"/>
-                      <a:ext cx="321504" cy="523220"/>
-                    </a:xfrm>
-                    <a:prstGeom prst="rect">
-                      <a:avLst/>
-                    </a:prstGeom>
-                    <a:noFill/>
-                  </p:spPr>
-                  <p:txBody>
-                    <a:bodyPr wrap="square" rtlCol="0">
-                      <a:spAutoFit/>
-                    </a:bodyPr>
-                    <a:lstStyle/>
-                    <a:p>
-                      <a:pPr/>
-                      <a14:m>
-                        <m:oMathPara xmlns:m="http://schemas.openxmlformats.org/officeDocument/2006/math">
-                          <m:oMathParaPr>
-                            <m:jc m:val="centerGroup"/>
-                          </m:oMathParaPr>
-                          <m:oMath xmlns:m="http://schemas.openxmlformats.org/officeDocument/2006/math">
-                            <m:r>
-                              <a:rPr lang="en-US" sz="2800" i="1">
-                                <a:latin typeface="Cambria Math" panose="02040503050406030204" pitchFamily="18" charset="0"/>
-                              </a:rPr>
-                              <m:t>𝛼</m:t>
-                            </m:r>
-                          </m:oMath>
-                        </m:oMathPara>
-                      </a14:m>
-                      <a:endParaRPr lang="en-US" sz="2800" dirty="0"/>
-                    </a:p>
-                  </p:txBody>
-                </p:sp>
-              </mc:Choice>
-              <mc:Fallback>
-                <p:sp>
-                  <p:nvSpPr>
-                    <p:cNvPr id="24" name="TextBox 10">
-                      <a:extLst>
-                        <a:ext uri="{FF2B5EF4-FFF2-40B4-BE49-F238E27FC236}">
-                          <a16:creationId xmlns:a16="http://schemas.microsoft.com/office/drawing/2014/main" id="{A6780D20-608D-4846-BC44-ECC895EAB82A}"/>
-                        </a:ext>
-                      </a:extLst>
-                    </p:cNvPr>
-                    <p:cNvSpPr txBox="1">
-                      <a:spLocks noRot="1" noChangeAspect="1" noMove="1" noResize="1" noEditPoints="1" noAdjustHandles="1" noChangeArrowheads="1" noChangeShapeType="1" noTextEdit="1"/>
-                    </p:cNvSpPr>
-                    <p:nvPr/>
-                  </p:nvSpPr>
-                  <p:spPr>
-                    <a:xfrm>
-                      <a:off x="1085869" y="2339562"/>
-                      <a:ext cx="321504" cy="523220"/>
-                    </a:xfrm>
-                    <a:prstGeom prst="rect">
-                      <a:avLst/>
-                    </a:prstGeom>
-                    <a:blipFill>
-                      <a:blip r:embed="rId16"/>
-                      <a:stretch>
-                        <a:fillRect/>
-                      </a:stretch>
-                    </a:blipFill>
-                  </p:spPr>
-                  <p:txBody>
-                    <a:bodyPr/>
-                    <a:lstStyle/>
-                    <a:p>
-                      <a:r>
-                        <a:rPr lang="zh-TW" altLang="en-US">
-                          <a:noFill/>
-                        </a:rPr>
-                        <a:t> </a:t>
-                      </a:r>
-                    </a:p>
-                  </p:txBody>
-                </p:sp>
-              </mc:Fallback>
-            </mc:AlternateContent>
-            <p:cxnSp>
-              <p:nvCxnSpPr>
-                <p:cNvPr id="25" name="Straight Arrow Connector 17">
-                  <a:extLst>
-                    <a:ext uri="{FF2B5EF4-FFF2-40B4-BE49-F238E27FC236}">
-                      <a16:creationId xmlns:a16="http://schemas.microsoft.com/office/drawing/2014/main" id="{B878944B-853A-4DB8-9BAE-F3015E95B163}"/>
-                    </a:ext>
-                  </a:extLst>
-                </p:cNvPr>
-                <p:cNvCxnSpPr>
-                  <a:cxnSpLocks/>
-                </p:cNvCxnSpPr>
-                <p:nvPr/>
-              </p:nvCxnSpPr>
-              <p:spPr>
-                <a:xfrm flipH="1">
-                  <a:off x="1358881" y="2423096"/>
-                  <a:ext cx="402652" cy="520683"/>
-                </a:xfrm>
-                <a:prstGeom prst="straightConnector1">
-                  <a:avLst/>
-                </a:prstGeom>
-                <a:ln w="53975">
-                  <a:solidFill>
-                    <a:schemeClr val="tx1"/>
-                  </a:solidFill>
-                  <a:tailEnd type="stealth" w="lg" len="lg"/>
-                </a:ln>
-              </p:spPr>
-              <p:style>
-                <a:lnRef idx="3">
-                  <a:schemeClr val="accent6"/>
-                </a:lnRef>
-                <a:fillRef idx="0">
-                  <a:schemeClr val="accent6"/>
-                </a:fillRef>
-                <a:effectRef idx="2">
-                  <a:schemeClr val="accent6"/>
-                </a:effectRef>
-                <a:fontRef idx="minor">
-                  <a:schemeClr val="tx1"/>
-                </a:fontRef>
-              </p:style>
-            </p:cxnSp>
-            <p:sp>
-              <p:nvSpPr>
-                <p:cNvPr id="26" name="Partial Circle 9">
-                  <a:extLst>
-                    <a:ext uri="{FF2B5EF4-FFF2-40B4-BE49-F238E27FC236}">
-                      <a16:creationId xmlns:a16="http://schemas.microsoft.com/office/drawing/2014/main" id="{9BA6A617-DBA1-40F3-93BA-D8EF49AD07A9}"/>
-                    </a:ext>
-                  </a:extLst>
-                </p:cNvPr>
-                <p:cNvSpPr>
-                  <a:spLocks noChangeAspect="1"/>
-                </p:cNvSpPr>
-                <p:nvPr/>
-              </p:nvSpPr>
-              <p:spPr>
-                <a:xfrm>
-                  <a:off x="1609055" y="2112188"/>
-                  <a:ext cx="301557" cy="609055"/>
-                </a:xfrm>
-                <a:prstGeom prst="pie">
-                  <a:avLst>
-                    <a:gd name="adj1" fmla="val 16258856"/>
-                    <a:gd name="adj2" fmla="val 19252600"/>
-                  </a:avLst>
-                </a:prstGeom>
-                <a:gradFill flip="none" rotWithShape="1">
-                  <a:gsLst>
-                    <a:gs pos="0">
-                      <a:schemeClr val="tx1"/>
-                    </a:gs>
-                    <a:gs pos="50000">
-                      <a:schemeClr val="tx1">
-                        <a:lumMod val="50000"/>
-                        <a:lumOff val="50000"/>
-                      </a:schemeClr>
-                    </a:gs>
-                    <a:gs pos="100000">
-                      <a:schemeClr val="bg1">
-                        <a:lumMod val="50000"/>
-                      </a:schemeClr>
-                    </a:gs>
-                  </a:gsLst>
-                  <a:lin ang="2700000" scaled="1"/>
-                  <a:tileRect/>
-                </a:gradFill>
-                <a:ln w="19050">
-                  <a:solidFill>
-                    <a:schemeClr val="tx1"/>
-                  </a:solidFill>
-                </a:ln>
-              </p:spPr>
-              <p:style>
-                <a:lnRef idx="2">
-                  <a:schemeClr val="accent1">
-                    <a:shade val="50000"/>
-                  </a:schemeClr>
-                </a:lnRef>
-                <a:fillRef idx="1">
-                  <a:schemeClr val="accent1"/>
-                </a:fillRef>
-                <a:effectRef idx="0">
-                  <a:schemeClr val="accent1"/>
-                </a:effectRef>
-                <a:fontRef idx="minor">
-                  <a:schemeClr val="lt1"/>
-                </a:fontRef>
-              </p:style>
-              <p:txBody>
-                <a:bodyPr rtlCol="0" anchor="ctr"/>
-                <a:lstStyle/>
-                <a:p>
-                  <a:pPr algn="ctr"/>
-                  <a:endParaRPr lang="en-US" dirty="0">
-                    <a:solidFill>
-                      <a:schemeClr val="tx1"/>
-                    </a:solidFill>
-                  </a:endParaRPr>
-                </a:p>
-              </p:txBody>
-            </p:sp>
-            <mc:AlternateContent xmlns:mc="http://schemas.openxmlformats.org/markup-compatibility/2006">
-              <mc:Choice xmlns:a14="http://schemas.microsoft.com/office/drawing/2010/main" Requires="a14">
-                <p:sp>
-                  <p:nvSpPr>
-                    <p:cNvPr id="27" name="TextBox 10">
-                      <a:extLst>
-                        <a:ext uri="{FF2B5EF4-FFF2-40B4-BE49-F238E27FC236}">
-                          <a16:creationId xmlns:a16="http://schemas.microsoft.com/office/drawing/2014/main" id="{869C2AD8-C4E5-48A7-A1DF-099E88D7EFE5}"/>
-                        </a:ext>
-                      </a:extLst>
-                    </p:cNvPr>
-                    <p:cNvSpPr txBox="1"/>
-                    <p:nvPr/>
-                  </p:nvSpPr>
-                  <p:spPr>
-                    <a:xfrm>
-                      <a:off x="1812884" y="1767698"/>
-                      <a:ext cx="321504" cy="523220"/>
-                    </a:xfrm>
-                    <a:prstGeom prst="rect">
-                      <a:avLst/>
-                    </a:prstGeom>
-                    <a:noFill/>
-                  </p:spPr>
-                  <p:txBody>
-                    <a:bodyPr wrap="square" rtlCol="0">
-                      <a:spAutoFit/>
-                    </a:bodyPr>
-                    <a:lstStyle/>
-                    <a:p>
-                      <a:pPr/>
-                      <a14:m>
-                        <m:oMathPara xmlns:m="http://schemas.openxmlformats.org/officeDocument/2006/math">
-                          <m:oMathParaPr>
-                            <m:jc m:val="centerGroup"/>
-                          </m:oMathParaPr>
-                          <m:oMath xmlns:m="http://schemas.openxmlformats.org/officeDocument/2006/math">
-                            <m:r>
-                              <a:rPr lang="en-US" sz="2800" i="1">
-                                <a:latin typeface="Cambria Math" panose="02040503050406030204" pitchFamily="18" charset="0"/>
-                              </a:rPr>
-                              <m:t>𝛽</m:t>
-                            </m:r>
-                          </m:oMath>
-                        </m:oMathPara>
-                      </a14:m>
-                      <a:endParaRPr lang="en-US" sz="2800" dirty="0"/>
-                    </a:p>
-                  </p:txBody>
-                </p:sp>
-              </mc:Choice>
-              <mc:Fallback>
-                <p:sp>
-                  <p:nvSpPr>
-                    <p:cNvPr id="27" name="TextBox 10">
-                      <a:extLst>
-                        <a:ext uri="{FF2B5EF4-FFF2-40B4-BE49-F238E27FC236}">
-                          <a16:creationId xmlns:a16="http://schemas.microsoft.com/office/drawing/2014/main" id="{869C2AD8-C4E5-48A7-A1DF-099E88D7EFE5}"/>
-                        </a:ext>
-                      </a:extLst>
-                    </p:cNvPr>
-                    <p:cNvSpPr txBox="1">
-                      <a:spLocks noRot="1" noChangeAspect="1" noMove="1" noResize="1" noEditPoints="1" noAdjustHandles="1" noChangeArrowheads="1" noChangeShapeType="1" noTextEdit="1"/>
-                    </p:cNvSpPr>
-                    <p:nvPr/>
-                  </p:nvSpPr>
-                  <p:spPr>
-                    <a:xfrm>
-                      <a:off x="1812884" y="1767698"/>
-                      <a:ext cx="321504" cy="523220"/>
-                    </a:xfrm>
-                    <a:prstGeom prst="rect">
-                      <a:avLst/>
-                    </a:prstGeom>
-                    <a:blipFill>
-                      <a:blip r:embed="rId17"/>
-                      <a:stretch>
-                        <a:fillRect/>
-                      </a:stretch>
-                    </a:blipFill>
-                  </p:spPr>
-                  <p:txBody>
-                    <a:bodyPr/>
-                    <a:lstStyle/>
-                    <a:p>
-                      <a:r>
-                        <a:rPr lang="zh-TW" altLang="en-US">
-                          <a:noFill/>
-                        </a:rPr>
-                        <a:t> </a:t>
-                      </a:r>
-                    </a:p>
-                  </p:txBody>
-                </p:sp>
-              </mc:Fallback>
-            </mc:AlternateContent>
-            <p:cxnSp>
-              <p:nvCxnSpPr>
-                <p:cNvPr id="28" name="Straight Arrow Connector 17">
-                  <a:extLst>
-                    <a:ext uri="{FF2B5EF4-FFF2-40B4-BE49-F238E27FC236}">
-                      <a16:creationId xmlns:a16="http://schemas.microsoft.com/office/drawing/2014/main" id="{7B128A95-9759-4272-9D59-94498F839837}"/>
-                    </a:ext>
-                  </a:extLst>
-                </p:cNvPr>
-                <p:cNvCxnSpPr>
-                  <a:cxnSpLocks/>
-                </p:cNvCxnSpPr>
-                <p:nvPr/>
-              </p:nvCxnSpPr>
-              <p:spPr>
-                <a:xfrm flipV="1">
-                  <a:off x="1746838" y="1613149"/>
-                  <a:ext cx="1039268" cy="817070"/>
-                </a:xfrm>
-                <a:prstGeom prst="straightConnector1">
-                  <a:avLst/>
-                </a:prstGeom>
-                <a:ln w="53975">
-                  <a:solidFill>
-                    <a:schemeClr val="tx1"/>
-                  </a:solidFill>
-                  <a:tailEnd type="stealth" w="lg" len="lg"/>
-                </a:ln>
-              </p:spPr>
-              <p:style>
-                <a:lnRef idx="3">
-                  <a:schemeClr val="accent6"/>
-                </a:lnRef>
-                <a:fillRef idx="0">
-                  <a:schemeClr val="accent6"/>
-                </a:fillRef>
-                <a:effectRef idx="2">
-                  <a:schemeClr val="accent6"/>
-                </a:effectRef>
-                <a:fontRef idx="minor">
-                  <a:schemeClr val="tx1"/>
-                </a:fontRef>
-              </p:style>
-            </p:cxnSp>
-          </p:grpSp>
-          <p:sp>
-            <p:nvSpPr>
-              <p:cNvPr id="98" name="等腰三角形 97">
-                <a:extLst>
-                  <a:ext uri="{FF2B5EF4-FFF2-40B4-BE49-F238E27FC236}">
-                    <a16:creationId xmlns:a16="http://schemas.microsoft.com/office/drawing/2014/main" id="{8C3FBD2D-7EF7-4553-AE31-AD4ECEE48C01}"/>
-                  </a:ext>
-                </a:extLst>
-              </p:cNvPr>
-              <p:cNvSpPr/>
-              <p:nvPr/>
-            </p:nvSpPr>
-            <p:spPr>
-              <a:xfrm rot="5400000">
-                <a:off x="1356130" y="4049215"/>
-                <a:ext cx="641264" cy="430016"/>
-              </a:xfrm>
-              <a:prstGeom prst="triangle">
-                <a:avLst/>
-              </a:prstGeom>
-            </p:spPr>
-            <p:style>
-              <a:lnRef idx="0">
-                <a:schemeClr val="accent2"/>
-              </a:lnRef>
-              <a:fillRef idx="3">
-                <a:schemeClr val="accent2"/>
-              </a:fillRef>
-              <a:effectRef idx="3">
-                <a:schemeClr val="accent2"/>
-              </a:effectRef>
-              <a:fontRef idx="minor">
-                <a:schemeClr val="lt1"/>
-              </a:fontRef>
-            </p:style>
-            <p:txBody>
-              <a:bodyPr rot="0" spcFirstLastPara="0" vertOverflow="overflow" horzOverflow="overflow" vert="horz" wrap="square" lIns="91439" tIns="45720" rIns="91439" bIns="45720" numCol="1" spcCol="0" rtlCol="0" fromWordArt="0" anchor="ctr" anchorCtr="0" forceAA="0" compatLnSpc="1">
-                <a:prstTxWarp prst="textNoShape">
-                  <a:avLst/>
-                </a:prstTxWarp>
-                <a:noAutofit/>
-              </a:bodyPr>
-              <a:lstStyle/>
-              <a:p>
-                <a:pPr algn="ctr"/>
-                <a:endParaRPr lang="zh-TW" altLang="en-US" dirty="0"/>
-              </a:p>
-            </p:txBody>
-          </p:sp>
-        </p:grpSp>
-        <p:grpSp>
-          <p:nvGrpSpPr>
             <p:cNvPr id="110" name="群組 109">
               <a:extLst>
                 <a:ext uri="{FF2B5EF4-FFF2-40B4-BE49-F238E27FC236}">
@@ -5364,10 +3847,10 @@
           </p:nvGrpSpPr>
           <p:grpSpPr>
             <a:xfrm>
-              <a:off x="3220094" y="1092200"/>
-              <a:ext cx="6812044" cy="5531145"/>
+              <a:off x="2219678" y="1152736"/>
+              <a:ext cx="5933596" cy="3885347"/>
               <a:chOff x="3220094" y="1092200"/>
-              <a:chExt cx="6812044" cy="5531145"/>
+              <a:chExt cx="6812044" cy="5701155"/>
             </a:xfrm>
           </p:grpSpPr>
           <p:grpSp>
@@ -5385,9 +3868,9 @@
             <p:grpSpPr>
               <a:xfrm>
                 <a:off x="3220094" y="1153911"/>
-                <a:ext cx="6812044" cy="5469434"/>
+                <a:ext cx="6812044" cy="5639444"/>
                 <a:chOff x="3677951" y="2003456"/>
-                <a:chExt cx="5309655" cy="3840712"/>
+                <a:chExt cx="5309655" cy="3960095"/>
               </a:xfrm>
             </p:grpSpPr>
             <mc:AlternateContent xmlns:mc="http://schemas.openxmlformats.org/markup-compatibility/2006">
@@ -5406,8 +3889,8 @@
                   </p:nvSpPr>
                   <p:spPr>
                     <a:xfrm>
-                      <a:off x="3677951" y="5469401"/>
-                      <a:ext cx="935697" cy="367412"/>
+                      <a:off x="3677951" y="5469400"/>
+                      <a:ext cx="935697" cy="486795"/>
                     </a:xfrm>
                     <a:prstGeom prst="rect">
                       <a:avLst/>
@@ -5428,13 +3911,13 @@
                           </m:oMathParaPr>
                           <m:oMath xmlns:m="http://schemas.openxmlformats.org/officeDocument/2006/math">
                             <m:r>
-                              <a:rPr lang="en-US" altLang="zh-TW" sz="2800" i="1">
+                              <a:rPr lang="en-US" altLang="zh-TW" sz="2470" i="1">
                                 <a:latin typeface="Cambria Math" panose="02040503050406030204" pitchFamily="18" charset="0"/>
                               </a:rPr>
                               <m:t>𝛼</m:t>
                             </m:r>
                             <m:r>
-                              <a:rPr lang="en-US" altLang="zh-TW" sz="2800" i="1">
+                              <a:rPr lang="en-US" altLang="zh-TW" sz="2470" i="1">
                                 <a:latin typeface="Cambria Math" panose="02040503050406030204" pitchFamily="18" charset="0"/>
                               </a:rPr>
                               <m:t>=0</m:t>
@@ -5442,7 +3925,7 @@
                           </m:oMath>
                         </m:oMathPara>
                       </a14:m>
-                      <a:endParaRPr lang="zh-TW" altLang="en-US" sz="2800" dirty="0"/>
+                      <a:endParaRPr lang="zh-TW" altLang="en-US" sz="2470" dirty="0"/>
                     </a:p>
                   </p:txBody>
                 </p:sp>
@@ -5464,14 +3947,14 @@
                   </p:nvSpPr>
                   <p:spPr>
                     <a:xfrm>
-                      <a:off x="3677951" y="5469401"/>
-                      <a:ext cx="935697" cy="367412"/>
+                      <a:off x="3677951" y="5469400"/>
+                      <a:ext cx="935697" cy="486795"/>
                     </a:xfrm>
                     <a:prstGeom prst="rect">
                       <a:avLst/>
                     </a:prstGeom>
                     <a:blipFill>
-                      <a:blip r:embed="rId18"/>
+                      <a:blip r:embed="rId3"/>
                       <a:stretch>
                         <a:fillRect/>
                       </a:stretch>
@@ -5509,7 +3992,7 @@
                   <p:spPr>
                     <a:xfrm>
                       <a:off x="8443936" y="5469401"/>
-                      <a:ext cx="543670" cy="369332"/>
+                      <a:ext cx="543670" cy="486795"/>
                     </a:xfrm>
                     <a:prstGeom prst="rect">
                       <a:avLst/>
@@ -5530,13 +4013,13 @@
                           </m:oMathParaPr>
                           <m:oMath xmlns:m="http://schemas.openxmlformats.org/officeDocument/2006/math">
                             <m:r>
-                              <a:rPr lang="en-US" altLang="zh-TW" sz="2800" i="1">
+                              <a:rPr lang="en-US" altLang="zh-TW" sz="2470" i="1">
                                 <a:latin typeface="Cambria Math" panose="02040503050406030204" pitchFamily="18" charset="0"/>
                               </a:rPr>
                               <m:t>2</m:t>
                             </m:r>
                             <m:r>
-                              <a:rPr lang="en-US" altLang="zh-TW" sz="2800" i="1">
+                              <a:rPr lang="en-US" altLang="zh-TW" sz="2470" i="1">
                                 <a:latin typeface="Cambria Math" panose="02040503050406030204" pitchFamily="18" charset="0"/>
                               </a:rPr>
                               <m:t>𝜋</m:t>
@@ -5544,7 +4027,7 @@
                           </m:oMath>
                         </m:oMathPara>
                       </a14:m>
-                      <a:endParaRPr lang="zh-TW" altLang="en-US" sz="2800" dirty="0"/>
+                      <a:endParaRPr lang="zh-TW" altLang="en-US" sz="2470" dirty="0"/>
                     </a:p>
                   </p:txBody>
                 </p:sp>
@@ -5567,15 +4050,15 @@
                   <p:spPr>
                     <a:xfrm>
                       <a:off x="8443936" y="5469401"/>
-                      <a:ext cx="543670" cy="369332"/>
+                      <a:ext cx="543670" cy="486795"/>
                     </a:xfrm>
                     <a:prstGeom prst="rect">
                       <a:avLst/>
                     </a:prstGeom>
                     <a:blipFill>
-                      <a:blip r:embed="rId19"/>
+                      <a:blip r:embed="rId4"/>
                       <a:stretch>
-                        <a:fillRect/>
+                        <a:fillRect l="-3030"/>
                       </a:stretch>
                     </a:blipFill>
                   </p:spPr>
@@ -5611,7 +4094,7 @@
                   <p:spPr>
                     <a:xfrm>
                       <a:off x="5990995" y="5476756"/>
-                      <a:ext cx="865663" cy="367412"/>
+                      <a:ext cx="865663" cy="486795"/>
                     </a:xfrm>
                     <a:prstGeom prst="rect">
                       <a:avLst/>
@@ -5632,7 +4115,7 @@
                           </m:oMathParaPr>
                           <m:oMath xmlns:m="http://schemas.openxmlformats.org/officeDocument/2006/math">
                             <m:r>
-                              <a:rPr lang="en-US" altLang="zh-TW" sz="2800" i="1">
+                              <a:rPr lang="en-US" altLang="zh-TW" sz="2470" i="1">
                                 <a:latin typeface="Cambria Math" panose="02040503050406030204" pitchFamily="18" charset="0"/>
                               </a:rPr>
                               <m:t>𝜋</m:t>
@@ -5640,7 +4123,7 @@
                           </m:oMath>
                         </m:oMathPara>
                       </a14:m>
-                      <a:endParaRPr lang="zh-TW" altLang="en-US" sz="2800" dirty="0"/>
+                      <a:endParaRPr lang="zh-TW" altLang="en-US" sz="2470" dirty="0"/>
                     </a:p>
                   </p:txBody>
                 </p:sp>
@@ -5663,13 +4146,13 @@
                   <p:spPr>
                     <a:xfrm>
                       <a:off x="5990995" y="5476756"/>
-                      <a:ext cx="865663" cy="367412"/>
+                      <a:ext cx="865663" cy="486795"/>
                     </a:xfrm>
                     <a:prstGeom prst="rect">
                       <a:avLst/>
                     </a:prstGeom>
                     <a:blipFill>
-                      <a:blip r:embed="rId20"/>
+                      <a:blip r:embed="rId5"/>
                       <a:stretch>
                         <a:fillRect/>
                       </a:stretch>
@@ -5707,7 +4190,7 @@
                   <p:spPr>
                     <a:xfrm>
                       <a:off x="3825999" y="2003456"/>
-                      <a:ext cx="353850" cy="369332"/>
+                      <a:ext cx="353850" cy="486795"/>
                     </a:xfrm>
                     <a:prstGeom prst="rect">
                       <a:avLst/>
@@ -5728,7 +4211,7 @@
                           </m:oMathParaPr>
                           <m:oMath xmlns:m="http://schemas.openxmlformats.org/officeDocument/2006/math">
                             <m:r>
-                              <a:rPr lang="en-US" altLang="zh-TW" sz="2800" i="1">
+                              <a:rPr lang="en-US" altLang="zh-TW" sz="2470" i="1">
                                 <a:latin typeface="Cambria Math" panose="02040503050406030204" pitchFamily="18" charset="0"/>
                               </a:rPr>
                               <m:t>1</m:t>
@@ -5736,7 +4219,7 @@
                           </m:oMath>
                         </m:oMathPara>
                       </a14:m>
-                      <a:endParaRPr lang="zh-TW" altLang="en-US" sz="2800" dirty="0"/>
+                      <a:endParaRPr lang="zh-TW" altLang="en-US" sz="2470" dirty="0"/>
                     </a:p>
                   </p:txBody>
                 </p:sp>
@@ -5759,15 +4242,15 @@
                   <p:spPr>
                     <a:xfrm>
                       <a:off x="3825999" y="2003456"/>
-                      <a:ext cx="353850" cy="369332"/>
+                      <a:ext cx="353850" cy="486795"/>
                     </a:xfrm>
                     <a:prstGeom prst="rect">
                       <a:avLst/>
                     </a:prstGeom>
                     <a:blipFill>
-                      <a:blip r:embed="rId21"/>
+                      <a:blip r:embed="rId6"/>
                       <a:stretch>
-                        <a:fillRect/>
+                        <a:fillRect l="-7692"/>
                       </a:stretch>
                     </a:blipFill>
                   </p:spPr>
@@ -5803,7 +4286,7 @@
                   <p:spPr>
                     <a:xfrm>
                       <a:off x="3878686" y="5075200"/>
-                      <a:ext cx="248476" cy="369332"/>
+                      <a:ext cx="248476" cy="486795"/>
                     </a:xfrm>
                     <a:prstGeom prst="rect">
                       <a:avLst/>
@@ -5824,7 +4307,7 @@
                           </m:oMathParaPr>
                           <m:oMath xmlns:m="http://schemas.openxmlformats.org/officeDocument/2006/math">
                             <m:r>
-                              <a:rPr lang="en-US" altLang="zh-TW" sz="2800" i="1">
+                              <a:rPr lang="en-US" altLang="zh-TW" sz="2470" i="1">
                                 <a:latin typeface="Cambria Math" panose="02040503050406030204" pitchFamily="18" charset="0"/>
                               </a:rPr>
                               <m:t>0</m:t>
@@ -5832,7 +4315,7 @@
                           </m:oMath>
                         </m:oMathPara>
                       </a14:m>
-                      <a:endParaRPr lang="zh-TW" altLang="en-US" sz="2800" dirty="0"/>
+                      <a:endParaRPr lang="zh-TW" altLang="en-US" sz="2470" dirty="0"/>
                     </a:p>
                   </p:txBody>
                 </p:sp>
@@ -5855,15 +4338,15 @@
                   <p:spPr>
                     <a:xfrm>
                       <a:off x="3878686" y="5075200"/>
-                      <a:ext cx="248476" cy="369332"/>
+                      <a:ext cx="248476" cy="486795"/>
                     </a:xfrm>
                     <a:prstGeom prst="rect">
                       <a:avLst/>
                     </a:prstGeom>
                     <a:blipFill>
-                      <a:blip r:embed="rId22"/>
+                      <a:blip r:embed="rId7"/>
                       <a:stretch>
-                        <a:fillRect/>
+                        <a:fillRect l="-33333" r="-6667"/>
                       </a:stretch>
                     </a:blipFill>
                   </p:spPr>
@@ -5898,8 +4381,8 @@
                   </p:nvSpPr>
                   <p:spPr>
                     <a:xfrm rot="16200000">
-                      <a:off x="3648200" y="3506881"/>
-                      <a:ext cx="487945" cy="407824"/>
+                      <a:off x="3648200" y="3499414"/>
+                      <a:ext cx="487945" cy="422758"/>
                     </a:xfrm>
                     <a:prstGeom prst="rect">
                       <a:avLst/>
@@ -5923,13 +4406,13 @@
                               <m:rPr>
                                 <m:sty m:val="p"/>
                               </m:rPr>
-                              <a:rPr lang="en-US" altLang="zh-TW" sz="2800" dirty="0">
+                              <a:rPr lang="en-US" altLang="zh-TW" sz="2470" dirty="0">
                                 <a:latin typeface="Cambria Math" panose="02040503050406030204" pitchFamily="18" charset="0"/>
                               </a:rPr>
                               <m:t>a</m:t>
                             </m:r>
                             <m:r>
-                              <a:rPr lang="en-US" altLang="zh-TW" sz="2800" dirty="0">
+                              <a:rPr lang="en-US" altLang="zh-TW" sz="2470" dirty="0">
                                 <a:latin typeface="Cambria Math" panose="02040503050406030204" pitchFamily="18" charset="0"/>
                               </a:rPr>
                               <m:t>.</m:t>
@@ -5938,13 +4421,13 @@
                               <m:rPr>
                                 <m:sty m:val="p"/>
                               </m:rPr>
-                              <a:rPr lang="en-US" altLang="zh-TW" sz="2800" dirty="0">
+                              <a:rPr lang="en-US" altLang="zh-TW" sz="2470" dirty="0">
                                 <a:latin typeface="Cambria Math" panose="02040503050406030204" pitchFamily="18" charset="0"/>
                               </a:rPr>
                               <m:t>u</m:t>
                             </m:r>
                             <m:r>
-                              <a:rPr lang="en-US" altLang="zh-TW" sz="2800" dirty="0">
+                              <a:rPr lang="en-US" altLang="zh-TW" sz="2470" dirty="0">
                                 <a:latin typeface="Cambria Math" panose="02040503050406030204" pitchFamily="18" charset="0"/>
                               </a:rPr>
                               <m:t>.</m:t>
@@ -5952,7 +4435,7 @@
                           </m:oMath>
                         </m:oMathPara>
                       </a14:m>
-                      <a:endParaRPr lang="zh-TW" altLang="en-US" sz="2800" dirty="0"/>
+                      <a:endParaRPr lang="zh-TW" altLang="en-US" sz="2470" dirty="0"/>
                     </a:p>
                   </p:txBody>
                 </p:sp>
@@ -5974,16 +4457,16 @@
                   </p:nvSpPr>
                   <p:spPr>
                     <a:xfrm rot="16200000">
-                      <a:off x="3648200" y="3506881"/>
-                      <a:ext cx="487945" cy="407824"/>
+                      <a:off x="3648200" y="3499414"/>
+                      <a:ext cx="487945" cy="422758"/>
                     </a:xfrm>
                     <a:prstGeom prst="rect">
                       <a:avLst/>
                     </a:prstGeom>
                     <a:blipFill>
-                      <a:blip r:embed="rId23"/>
+                      <a:blip r:embed="rId8"/>
                       <a:stretch>
-                        <a:fillRect/>
+                        <a:fillRect b="-26923"/>
                       </a:stretch>
                     </a:blipFill>
                   </p:spPr>
@@ -6018,7 +4501,7 @@
               <p:nvPr/>
             </p:nvPicPr>
             <p:blipFill rotWithShape="1">
-              <a:blip r:embed="rId24">
+              <a:blip r:embed="rId9">
                 <a:clrChange>
                   <a:clrFrom>
                     <a:srgbClr val="FFFFFF"/>
@@ -6063,8 +4546,8 @@
           </p:nvGrpSpPr>
           <p:grpSpPr>
             <a:xfrm>
-              <a:off x="8943215" y="2460113"/>
-              <a:ext cx="2319338" cy="2399146"/>
+              <a:off x="7418646" y="1902599"/>
+              <a:ext cx="2045607" cy="2115996"/>
               <a:chOff x="3931342" y="2273301"/>
               <a:chExt cx="2319338" cy="2399146"/>
             </a:xfrm>
@@ -6113,28 +4596,14 @@
                 </a:prstGeom>
                 <a:gradFill>
                   <a:gsLst>
-                    <a:gs pos="0">
-                      <a:schemeClr val="accent3">
-                        <a:satMod val="103000"/>
-                        <a:tint val="94000"/>
-                        <a:lumMod val="75000"/>
-                        <a:lumOff val="25000"/>
+                    <a:gs pos="100000">
+                      <a:schemeClr val="bg1">
+                        <a:lumMod val="95000"/>
                       </a:schemeClr>
                     </a:gs>
-                    <a:gs pos="50000">
-                      <a:schemeClr val="accent3">
-                        <a:satMod val="110000"/>
-                        <a:shade val="100000"/>
-                        <a:lumMod val="77000"/>
-                        <a:lumOff val="23000"/>
-                      </a:schemeClr>
-                    </a:gs>
-                    <a:gs pos="100000">
-                      <a:schemeClr val="accent3">
-                        <a:satMod val="120000"/>
-                        <a:shade val="78000"/>
-                        <a:lumMod val="78000"/>
-                        <a:lumOff val="22000"/>
+                    <a:gs pos="0">
+                      <a:schemeClr val="bg1">
+                        <a:lumMod val="85000"/>
                       </a:schemeClr>
                     </a:gs>
                   </a:gsLst>
@@ -6155,7 +4624,7 @@
                 </a:fontRef>
               </p:style>
               <p:txBody>
-                <a:bodyPr rot="0" spcFirstLastPara="0" vertOverflow="overflow" horzOverflow="overflow" vert="horz" wrap="square" lIns="58066" tIns="29033" rIns="58066" bIns="29033" numCol="1" spcCol="0" rtlCol="0" fromWordArt="0" anchor="ctr" anchorCtr="0" forceAA="0" compatLnSpc="1">
+                <a:bodyPr rot="0" spcFirstLastPara="0" vertOverflow="overflow" horzOverflow="overflow" vert="horz" wrap="square" lIns="51213" tIns="25606" rIns="51213" bIns="25606" numCol="1" spcCol="0" rtlCol="0" fromWordArt="0" anchor="ctr" anchorCtr="0" forceAA="0" compatLnSpc="1">
                   <a:prstTxWarp prst="textNoShape">
                     <a:avLst/>
                   </a:prstTxWarp>
@@ -6164,7 +4633,7 @@
                 <a:lstStyle/>
                 <a:p>
                   <a:pPr algn="ctr"/>
-                  <a:endParaRPr lang="zh-TW" altLang="en-US" sz="1143" dirty="0"/>
+                  <a:endParaRPr lang="zh-TW" altLang="en-US" sz="1008" dirty="0"/>
                 </a:p>
               </p:txBody>
             </p:sp>
@@ -6183,7 +4652,7 @@
                 <p:nvPr/>
               </p:nvPicPr>
               <p:blipFill rotWithShape="1">
-                <a:blip r:embed="rId25">
+                <a:blip r:embed="rId10">
                   <a:clrChange>
                     <a:clrFrom>
                       <a:srgbClr val="FFFFFF"/>
@@ -6223,7 +4692,7 @@
                 <p:nvPr/>
               </p:nvPicPr>
               <p:blipFill rotWithShape="1">
-                <a:blip r:embed="rId25">
+                <a:blip r:embed="rId10">
                   <a:clrChange>
                     <a:clrFrom>
                       <a:srgbClr val="FFFFFF"/>
@@ -6263,7 +4732,7 @@
                 <p:nvPr/>
               </p:nvPicPr>
               <p:blipFill rotWithShape="1">
-                <a:blip r:embed="rId25">
+                <a:blip r:embed="rId10">
                   <a:clrChange>
                     <a:clrFrom>
                       <a:srgbClr val="FFFFFF"/>
@@ -6303,7 +4772,7 @@
                 <p:nvPr/>
               </p:nvPicPr>
               <p:blipFill rotWithShape="1">
-                <a:blip r:embed="rId25">
+                <a:blip r:embed="rId10">
                   <a:clrChange>
                     <a:clrFrom>
                       <a:srgbClr val="FFFFFF"/>
@@ -6344,7 +4813,7 @@
               <p:nvPr/>
             </p:nvPicPr>
             <p:blipFill rotWithShape="1">
-              <a:blip r:embed="rId26">
+              <a:blip r:embed="rId11">
                 <a:clrChange>
                   <a:clrFrom>
                     <a:srgbClr val="FFFFFF"/>
@@ -6374,6 +4843,1485 @@
               </a:prstGeom>
             </p:spPr>
           </p:pic>
+        </p:grpSp>
+        <p:grpSp>
+          <p:nvGrpSpPr>
+            <p:cNvPr id="48" name="群組 47">
+              <a:extLst>
+                <a:ext uri="{FF2B5EF4-FFF2-40B4-BE49-F238E27FC236}">
+                  <a16:creationId xmlns:a16="http://schemas.microsoft.com/office/drawing/2014/main" id="{C442AC70-635E-4D32-8B70-E0C2CA7499E9}"/>
+                </a:ext>
+              </a:extLst>
+            </p:cNvPr>
+            <p:cNvGrpSpPr/>
+            <p:nvPr/>
+          </p:nvGrpSpPr>
+          <p:grpSpPr>
+            <a:xfrm>
+              <a:off x="535756" y="1740179"/>
+              <a:ext cx="1446191" cy="2284146"/>
+              <a:chOff x="1269221" y="-909815"/>
+              <a:chExt cx="1446191" cy="2284146"/>
+            </a:xfrm>
+          </p:grpSpPr>
+          <mc:AlternateContent xmlns:mc="http://schemas.openxmlformats.org/markup-compatibility/2006">
+            <mc:Choice xmlns:a14="http://schemas.microsoft.com/office/drawing/2010/main" Requires="a14">
+              <p:sp>
+                <p:nvSpPr>
+                  <p:cNvPr id="49" name="文字方塊 48">
+                    <a:extLst>
+                      <a:ext uri="{FF2B5EF4-FFF2-40B4-BE49-F238E27FC236}">
+                        <a16:creationId xmlns:a16="http://schemas.microsoft.com/office/drawing/2014/main" id="{FBF53740-3821-4DC0-B0C2-B03AF01F965D}"/>
+                      </a:ext>
+                    </a:extLst>
+                  </p:cNvPr>
+                  <p:cNvSpPr txBox="1"/>
+                  <p:nvPr/>
+                </p:nvSpPr>
+                <p:spPr>
+                  <a:xfrm>
+                    <a:off x="1563231" y="1035777"/>
+                    <a:ext cx="812954" cy="338554"/>
+                  </a:xfrm>
+                  <a:prstGeom prst="rect">
+                    <a:avLst/>
+                  </a:prstGeom>
+                  <a:noFill/>
+                </p:spPr>
+                <p:txBody>
+                  <a:bodyPr wrap="square" rtlCol="0">
+                    <a:spAutoFit/>
+                  </a:bodyPr>
+                  <a:lstStyle/>
+                  <a:p>
+                    <a:pPr/>
+                    <a14:m>
+                      <m:oMathPara xmlns:m="http://schemas.openxmlformats.org/officeDocument/2006/math">
+                        <m:oMathParaPr>
+                          <m:jc m:val="centerGroup"/>
+                        </m:oMathParaPr>
+                        <m:oMath xmlns:m="http://schemas.openxmlformats.org/officeDocument/2006/math">
+                          <m:r>
+                            <a:rPr lang="en-US" altLang="zh-TW" sz="1600" i="1">
+                              <a:latin typeface="Cambria Math" panose="02040503050406030204" pitchFamily="18" charset="0"/>
+                            </a:rPr>
+                            <m:t>|</m:t>
+                          </m:r>
+                          <m:d>
+                            <m:dPr>
+                              <m:begChr m:val=""/>
+                              <m:endChr m:val="⟩"/>
+                              <m:ctrlPr>
+                                <a:rPr lang="en-US" altLang="zh-TW" sz="1600" i="1">
+                                  <a:latin typeface="Cambria Math" panose="02040503050406030204" pitchFamily="18" charset="0"/>
+                                </a:rPr>
+                              </m:ctrlPr>
+                            </m:dPr>
+                            <m:e>
+                              <m:r>
+                                <a:rPr lang="en-US" altLang="zh-TW" sz="1600" i="1">
+                                  <a:latin typeface="Cambria Math" panose="02040503050406030204" pitchFamily="18" charset="0"/>
+                                </a:rPr>
+                                <m:t>−1, </m:t>
+                              </m:r>
+                              <m:r>
+                                <a:rPr lang="en-US" altLang="zh-TW" sz="1600" i="1">
+                                  <a:latin typeface="Cambria Math" panose="02040503050406030204" pitchFamily="18" charset="0"/>
+                                </a:rPr>
+                                <m:t>1</m:t>
+                              </m:r>
+                            </m:e>
+                          </m:d>
+                        </m:oMath>
+                      </m:oMathPara>
+                    </a14:m>
+                    <a:endParaRPr lang="zh-TW" altLang="en-US" sz="1600" dirty="0"/>
+                  </a:p>
+                </p:txBody>
+              </p:sp>
+            </mc:Choice>
+            <mc:Fallback>
+              <p:sp>
+                <p:nvSpPr>
+                  <p:cNvPr id="49" name="文字方塊 48">
+                    <a:extLst>
+                      <a:ext uri="{FF2B5EF4-FFF2-40B4-BE49-F238E27FC236}">
+                        <a16:creationId xmlns:a16="http://schemas.microsoft.com/office/drawing/2014/main" id="{FBF53740-3821-4DC0-B0C2-B03AF01F965D}"/>
+                      </a:ext>
+                    </a:extLst>
+                  </p:cNvPr>
+                  <p:cNvSpPr txBox="1">
+                    <a:spLocks noRot="1" noChangeAspect="1" noMove="1" noResize="1" noEditPoints="1" noAdjustHandles="1" noChangeArrowheads="1" noChangeShapeType="1" noTextEdit="1"/>
+                  </p:cNvSpPr>
+                  <p:nvPr/>
+                </p:nvSpPr>
+                <p:spPr>
+                  <a:xfrm>
+                    <a:off x="1563231" y="1035777"/>
+                    <a:ext cx="812954" cy="338554"/>
+                  </a:xfrm>
+                  <a:prstGeom prst="rect">
+                    <a:avLst/>
+                  </a:prstGeom>
+                  <a:blipFill>
+                    <a:blip r:embed="rId12"/>
+                    <a:stretch>
+                      <a:fillRect t="-108929" r="-47368" b="-167857"/>
+                    </a:stretch>
+                  </a:blipFill>
+                </p:spPr>
+                <p:txBody>
+                  <a:bodyPr/>
+                  <a:lstStyle/>
+                  <a:p>
+                    <a:r>
+                      <a:rPr lang="zh-TW" altLang="en-US">
+                        <a:noFill/>
+                      </a:rPr>
+                      <a:t> </a:t>
+                    </a:r>
+                  </a:p>
+                </p:txBody>
+              </p:sp>
+            </mc:Fallback>
+          </mc:AlternateContent>
+          <mc:AlternateContent xmlns:mc="http://schemas.openxmlformats.org/markup-compatibility/2006" xmlns:a14="http://schemas.microsoft.com/office/drawing/2010/main">
+            <mc:Choice Requires="a14">
+              <p:sp>
+                <p:nvSpPr>
+                  <p:cNvPr id="50" name="文字方塊 49">
+                    <a:extLst>
+                      <a:ext uri="{FF2B5EF4-FFF2-40B4-BE49-F238E27FC236}">
+                        <a16:creationId xmlns:a16="http://schemas.microsoft.com/office/drawing/2014/main" id="{F6703772-D62D-410E-8CBB-3657AD0B1213}"/>
+                      </a:ext>
+                    </a:extLst>
+                  </p:cNvPr>
+                  <p:cNvSpPr txBox="1"/>
+                  <p:nvPr/>
+                </p:nvSpPr>
+                <p:spPr>
+                  <a:xfrm>
+                    <a:off x="1580027" y="-909815"/>
+                    <a:ext cx="812954" cy="338554"/>
+                  </a:xfrm>
+                  <a:prstGeom prst="rect">
+                    <a:avLst/>
+                  </a:prstGeom>
+                  <a:noFill/>
+                </p:spPr>
+                <p:txBody>
+                  <a:bodyPr wrap="square" rtlCol="0">
+                    <a:spAutoFit/>
+                  </a:bodyPr>
+                  <a:lstStyle/>
+                  <a:p>
+                    <a:pPr/>
+                    <a14:m>
+                      <m:oMathPara xmlns:m="http://schemas.openxmlformats.org/officeDocument/2006/math">
+                        <m:oMathParaPr>
+                          <m:jc m:val="centerGroup"/>
+                        </m:oMathParaPr>
+                        <m:oMath xmlns:m="http://schemas.openxmlformats.org/officeDocument/2006/math">
+                          <m:r>
+                            <a:rPr lang="en-US" altLang="zh-TW" sz="1600" i="1">
+                              <a:latin typeface="Cambria Math" panose="02040503050406030204" pitchFamily="18" charset="0"/>
+                            </a:rPr>
+                            <m:t>|</m:t>
+                          </m:r>
+                          <m:d>
+                            <m:dPr>
+                              <m:begChr m:val=""/>
+                              <m:endChr m:val="⟩"/>
+                              <m:ctrlPr>
+                                <a:rPr lang="en-US" altLang="zh-TW" sz="1600" i="1">
+                                  <a:latin typeface="Cambria Math" panose="02040503050406030204" pitchFamily="18" charset="0"/>
+                                </a:rPr>
+                              </m:ctrlPr>
+                            </m:dPr>
+                            <m:e>
+                              <m:r>
+                                <a:rPr lang="en-US" altLang="zh-TW" sz="1600" i="1">
+                                  <a:latin typeface="Cambria Math" panose="02040503050406030204" pitchFamily="18" charset="0"/>
+                                </a:rPr>
+                                <m:t>1, −1</m:t>
+                              </m:r>
+                            </m:e>
+                          </m:d>
+                        </m:oMath>
+                      </m:oMathPara>
+                    </a14:m>
+                    <a:endParaRPr lang="zh-TW" altLang="en-US" sz="1600" dirty="0"/>
+                  </a:p>
+                </p:txBody>
+              </p:sp>
+            </mc:Choice>
+            <mc:Fallback xmlns="">
+              <p:sp>
+                <p:nvSpPr>
+                  <p:cNvPr id="110" name="文字方塊 109">
+                    <a:extLst>
+                      <a:ext uri="{FF2B5EF4-FFF2-40B4-BE49-F238E27FC236}">
+                        <a16:creationId xmlns:a16="http://schemas.microsoft.com/office/drawing/2014/main" id="{AA0071A4-0DA4-44B4-A41D-67D31117A474}"/>
+                      </a:ext>
+                    </a:extLst>
+                  </p:cNvPr>
+                  <p:cNvSpPr txBox="1">
+                    <a:spLocks noRot="1" noChangeAspect="1" noMove="1" noResize="1" noEditPoints="1" noAdjustHandles="1" noChangeArrowheads="1" noChangeShapeType="1" noTextEdit="1"/>
+                  </p:cNvSpPr>
+                  <p:nvPr/>
+                </p:nvSpPr>
+                <p:spPr>
+                  <a:xfrm>
+                    <a:off x="1580027" y="-909815"/>
+                    <a:ext cx="812954" cy="338554"/>
+                  </a:xfrm>
+                  <a:prstGeom prst="rect">
+                    <a:avLst/>
+                  </a:prstGeom>
+                  <a:blipFill>
+                    <a:blip r:embed="rId13"/>
+                    <a:stretch>
+                      <a:fillRect t="-108929" r="-47368" b="-167857"/>
+                    </a:stretch>
+                  </a:blipFill>
+                </p:spPr>
+                <p:txBody>
+                  <a:bodyPr/>
+                  <a:lstStyle/>
+                  <a:p>
+                    <a:r>
+                      <a:rPr lang="zh-TW" altLang="en-US">
+                        <a:noFill/>
+                      </a:rPr>
+                      <a:t> </a:t>
+                    </a:r>
+                  </a:p>
+                </p:txBody>
+              </p:sp>
+            </mc:Fallback>
+          </mc:AlternateContent>
+          <p:sp>
+            <p:nvSpPr>
+              <p:cNvPr id="51" name="Oval 4">
+                <a:extLst>
+                  <a:ext uri="{FF2B5EF4-FFF2-40B4-BE49-F238E27FC236}">
+                    <a16:creationId xmlns:a16="http://schemas.microsoft.com/office/drawing/2014/main" id="{AFE19F3B-91E8-4FEC-917C-B2AFC2DD0EC2}"/>
+                  </a:ext>
+                </a:extLst>
+              </p:cNvPr>
+              <p:cNvSpPr/>
+              <p:nvPr/>
+            </p:nvSpPr>
+            <p:spPr>
+              <a:xfrm>
+                <a:off x="1271413" y="-529397"/>
+                <a:ext cx="1443999" cy="1495797"/>
+              </a:xfrm>
+              <a:prstGeom prst="ellipse">
+                <a:avLst/>
+              </a:prstGeom>
+              <a:gradFill flip="none" rotWithShape="1">
+                <a:gsLst>
+                  <a:gs pos="100000">
+                    <a:schemeClr val="accent3">
+                      <a:lumMod val="60000"/>
+                      <a:lumOff val="40000"/>
+                      <a:alpha val="60000"/>
+                    </a:schemeClr>
+                  </a:gs>
+                  <a:gs pos="55000">
+                    <a:schemeClr val="accent3">
+                      <a:lumMod val="40000"/>
+                      <a:lumOff val="60000"/>
+                      <a:alpha val="60000"/>
+                    </a:schemeClr>
+                  </a:gs>
+                  <a:gs pos="0">
+                    <a:schemeClr val="bg1">
+                      <a:alpha val="60000"/>
+                    </a:schemeClr>
+                  </a:gs>
+                </a:gsLst>
+                <a:path path="circle">
+                  <a:fillToRect l="100000" b="100000"/>
+                </a:path>
+                <a:tileRect t="-100000" r="-100000"/>
+              </a:gradFill>
+              <a:ln w="57150">
+                <a:solidFill>
+                  <a:srgbClr val="D5D7DA"/>
+                </a:solidFill>
+              </a:ln>
+            </p:spPr>
+            <p:style>
+              <a:lnRef idx="2">
+                <a:schemeClr val="accent1">
+                  <a:shade val="50000"/>
+                </a:schemeClr>
+              </a:lnRef>
+              <a:fillRef idx="1">
+                <a:schemeClr val="accent1"/>
+              </a:fillRef>
+              <a:effectRef idx="0">
+                <a:schemeClr val="accent1"/>
+              </a:effectRef>
+              <a:fontRef idx="minor">
+                <a:schemeClr val="lt1"/>
+              </a:fontRef>
+            </p:style>
+            <p:txBody>
+              <a:bodyPr rtlCol="0" anchor="ctr"/>
+              <a:lstStyle/>
+              <a:p>
+                <a:pPr algn="ctr"/>
+                <a:endParaRPr lang="en-US" sz="1600" dirty="0"/>
+              </a:p>
+            </p:txBody>
+          </p:sp>
+          <p:sp>
+            <p:nvSpPr>
+              <p:cNvPr id="52" name="SHO">
+                <a:extLst>
+                  <a:ext uri="{FF2B5EF4-FFF2-40B4-BE49-F238E27FC236}">
+                    <a16:creationId xmlns:a16="http://schemas.microsoft.com/office/drawing/2014/main" id="{271EBE3E-50A2-4546-88A8-7D84E9F7DD27}"/>
+                  </a:ext>
+                </a:extLst>
+              </p:cNvPr>
+              <p:cNvSpPr/>
+              <p:nvPr/>
+            </p:nvSpPr>
+            <p:spPr>
+              <a:xfrm rot="16200000">
+                <a:off x="1679874" y="-502998"/>
+                <a:ext cx="622693" cy="1443999"/>
+              </a:xfrm>
+              <a:prstGeom prst="arc">
+                <a:avLst>
+                  <a:gd name="adj1" fmla="val 5396867"/>
+                  <a:gd name="adj2" fmla="val 5395779"/>
+                </a:avLst>
+              </a:prstGeom>
+              <a:gradFill flip="none" rotWithShape="1">
+                <a:gsLst>
+                  <a:gs pos="0">
+                    <a:schemeClr val="bg1">
+                      <a:lumMod val="65000"/>
+                    </a:schemeClr>
+                  </a:gs>
+                  <a:gs pos="47000">
+                    <a:schemeClr val="bg1">
+                      <a:lumMod val="50000"/>
+                    </a:schemeClr>
+                  </a:gs>
+                  <a:gs pos="97000">
+                    <a:srgbClr val="5E5E5E"/>
+                  </a:gs>
+                </a:gsLst>
+                <a:path path="circle">
+                  <a:fillToRect l="50000" t="50000" r="50000" b="50000"/>
+                </a:path>
+                <a:tileRect/>
+              </a:gradFill>
+              <a:ln w="31750">
+                <a:noFill/>
+              </a:ln>
+            </p:spPr>
+            <p:style>
+              <a:lnRef idx="1">
+                <a:schemeClr val="accent1"/>
+              </a:lnRef>
+              <a:fillRef idx="0">
+                <a:schemeClr val="accent1"/>
+              </a:fillRef>
+              <a:effectRef idx="0">
+                <a:schemeClr val="accent1"/>
+              </a:effectRef>
+              <a:fontRef idx="minor">
+                <a:schemeClr val="tx1"/>
+              </a:fontRef>
+            </p:style>
+            <p:txBody>
+              <a:bodyPr rtlCol="0" anchor="ctr"/>
+              <a:lstStyle/>
+              <a:p>
+                <a:pPr algn="ctr"/>
+                <a:endParaRPr lang="en-US" sz="1600" dirty="0"/>
+              </a:p>
+            </p:txBody>
+          </p:sp>
+          <p:sp>
+            <p:nvSpPr>
+              <p:cNvPr id="53" name="SVO">
+                <a:extLst>
+                  <a:ext uri="{FF2B5EF4-FFF2-40B4-BE49-F238E27FC236}">
+                    <a16:creationId xmlns:a16="http://schemas.microsoft.com/office/drawing/2014/main" id="{80625FC8-72C7-41B1-9C8D-E9879A086ECC}"/>
+                  </a:ext>
+                </a:extLst>
+              </p:cNvPr>
+              <p:cNvSpPr/>
+              <p:nvPr/>
+            </p:nvSpPr>
+            <p:spPr>
+              <a:xfrm>
+                <a:off x="1629320" y="-528896"/>
+                <a:ext cx="722000" cy="1495797"/>
+              </a:xfrm>
+              <a:prstGeom prst="ellipse">
+                <a:avLst/>
+              </a:prstGeom>
+              <a:noFill/>
+              <a:ln w="25400">
+                <a:solidFill>
+                  <a:schemeClr val="bg1">
+                    <a:lumMod val="50000"/>
+                  </a:schemeClr>
+                </a:solidFill>
+                <a:prstDash val="dash"/>
+              </a:ln>
+            </p:spPr>
+            <p:style>
+              <a:lnRef idx="2">
+                <a:schemeClr val="accent1">
+                  <a:shade val="50000"/>
+                </a:schemeClr>
+              </a:lnRef>
+              <a:fillRef idx="1">
+                <a:schemeClr val="accent1"/>
+              </a:fillRef>
+              <a:effectRef idx="0">
+                <a:schemeClr val="accent1"/>
+              </a:effectRef>
+              <a:fontRef idx="minor">
+                <a:schemeClr val="lt1"/>
+              </a:fontRef>
+            </p:style>
+            <p:txBody>
+              <a:bodyPr rtlCol="0" anchor="ctr"/>
+              <a:lstStyle/>
+              <a:p>
+                <a:pPr algn="ctr"/>
+                <a:endParaRPr lang="en-US" sz="1600"/>
+              </a:p>
+            </p:txBody>
+          </p:sp>
+          <p:sp>
+            <p:nvSpPr>
+              <p:cNvPr id="54" name="Oval 6">
+                <a:extLst>
+                  <a:ext uri="{FF2B5EF4-FFF2-40B4-BE49-F238E27FC236}">
+                    <a16:creationId xmlns:a16="http://schemas.microsoft.com/office/drawing/2014/main" id="{A72BD00D-72C1-4AC1-9E18-24F79F488786}"/>
+                  </a:ext>
+                </a:extLst>
+              </p:cNvPr>
+              <p:cNvSpPr/>
+              <p:nvPr/>
+            </p:nvSpPr>
+            <p:spPr>
+              <a:xfrm rot="16200000">
+                <a:off x="1679874" y="-502998"/>
+                <a:ext cx="622693" cy="1443999"/>
+              </a:xfrm>
+              <a:prstGeom prst="ellipse">
+                <a:avLst/>
+              </a:prstGeom>
+              <a:noFill/>
+              <a:ln w="38100">
+                <a:solidFill>
+                  <a:srgbClr val="FF3300">
+                    <a:alpha val="60000"/>
+                  </a:srgbClr>
+                </a:solidFill>
+                <a:prstDash val="solid"/>
+              </a:ln>
+            </p:spPr>
+            <p:style>
+              <a:lnRef idx="2">
+                <a:schemeClr val="accent1">
+                  <a:shade val="50000"/>
+                </a:schemeClr>
+              </a:lnRef>
+              <a:fillRef idx="1">
+                <a:schemeClr val="accent1"/>
+              </a:fillRef>
+              <a:effectRef idx="0">
+                <a:schemeClr val="accent1"/>
+              </a:effectRef>
+              <a:fontRef idx="minor">
+                <a:schemeClr val="lt1"/>
+              </a:fontRef>
+            </p:style>
+            <p:txBody>
+              <a:bodyPr rtlCol="0" anchor="ctr"/>
+              <a:lstStyle/>
+              <a:p>
+                <a:pPr algn="ctr"/>
+                <a:endParaRPr lang="en-US" sz="1600" dirty="0"/>
+              </a:p>
+            </p:txBody>
+          </p:sp>
+          <mc:AlternateContent xmlns:mc="http://schemas.openxmlformats.org/markup-compatibility/2006" xmlns:a14="http://schemas.microsoft.com/office/drawing/2010/main">
+            <mc:Choice Requires="a14">
+              <p:sp>
+                <p:nvSpPr>
+                  <p:cNvPr id="55" name="TextBox 11">
+                    <a:extLst>
+                      <a:ext uri="{FF2B5EF4-FFF2-40B4-BE49-F238E27FC236}">
+                        <a16:creationId xmlns:a16="http://schemas.microsoft.com/office/drawing/2014/main" id="{2C660CDC-D9A8-44E4-B6A2-8D2E6CD6D9F3}"/>
+                      </a:ext>
+                    </a:extLst>
+                  </p:cNvPr>
+                  <p:cNvSpPr txBox="1"/>
+                  <p:nvPr/>
+                </p:nvSpPr>
+                <p:spPr>
+                  <a:xfrm>
+                    <a:off x="1441522" y="40650"/>
+                    <a:ext cx="176928" cy="338554"/>
+                  </a:xfrm>
+                  <a:prstGeom prst="rect">
+                    <a:avLst/>
+                  </a:prstGeom>
+                  <a:noFill/>
+                </p:spPr>
+                <p:txBody>
+                  <a:bodyPr wrap="square" rtlCol="0">
+                    <a:spAutoFit/>
+                  </a:bodyPr>
+                  <a:lstStyle/>
+                  <a:p>
+                    <a:pPr/>
+                    <a14:m>
+                      <m:oMathPara xmlns:m="http://schemas.openxmlformats.org/officeDocument/2006/math">
+                        <m:oMathParaPr>
+                          <m:jc m:val="centerGroup"/>
+                        </m:oMathParaPr>
+                        <m:oMath xmlns:m="http://schemas.openxmlformats.org/officeDocument/2006/math">
+                          <m:r>
+                            <a:rPr lang="en-US" sz="1600" i="1">
+                              <a:latin typeface="Cambria Math" panose="02040503050406030204" pitchFamily="18" charset="0"/>
+                            </a:rPr>
+                            <m:t>𝑥</m:t>
+                          </m:r>
+                        </m:oMath>
+                      </m:oMathPara>
+                    </a14:m>
+                    <a:endParaRPr lang="en-US" sz="1600" dirty="0"/>
+                  </a:p>
+                </p:txBody>
+              </p:sp>
+            </mc:Choice>
+            <mc:Fallback xmlns="">
+              <p:sp>
+                <p:nvSpPr>
+                  <p:cNvPr id="125" name="TextBox 11">
+                    <a:extLst>
+                      <a:ext uri="{FF2B5EF4-FFF2-40B4-BE49-F238E27FC236}">
+                        <a16:creationId xmlns:a16="http://schemas.microsoft.com/office/drawing/2014/main" id="{115660D2-D291-4CC2-9F64-AC685B91012F}"/>
+                      </a:ext>
+                    </a:extLst>
+                  </p:cNvPr>
+                  <p:cNvSpPr txBox="1">
+                    <a:spLocks noRot="1" noChangeAspect="1" noMove="1" noResize="1" noEditPoints="1" noAdjustHandles="1" noChangeArrowheads="1" noChangeShapeType="1" noTextEdit="1"/>
+                  </p:cNvSpPr>
+                  <p:nvPr/>
+                </p:nvSpPr>
+                <p:spPr>
+                  <a:xfrm>
+                    <a:off x="1441522" y="40650"/>
+                    <a:ext cx="176928" cy="338554"/>
+                  </a:xfrm>
+                  <a:prstGeom prst="rect">
+                    <a:avLst/>
+                  </a:prstGeom>
+                  <a:blipFill>
+                    <a:blip r:embed="rId14"/>
+                    <a:stretch>
+                      <a:fillRect r="-41379"/>
+                    </a:stretch>
+                  </a:blipFill>
+                </p:spPr>
+                <p:txBody>
+                  <a:bodyPr/>
+                  <a:lstStyle/>
+                  <a:p>
+                    <a:r>
+                      <a:rPr lang="zh-TW" altLang="en-US">
+                        <a:noFill/>
+                      </a:rPr>
+                      <a:t> </a:t>
+                    </a:r>
+                  </a:p>
+                </p:txBody>
+              </p:sp>
+            </mc:Fallback>
+          </mc:AlternateContent>
+          <mc:AlternateContent xmlns:mc="http://schemas.openxmlformats.org/markup-compatibility/2006" xmlns:a14="http://schemas.microsoft.com/office/drawing/2010/main">
+            <mc:Choice Requires="a14">
+              <p:sp>
+                <p:nvSpPr>
+                  <p:cNvPr id="56" name="TextBox 12">
+                    <a:extLst>
+                      <a:ext uri="{FF2B5EF4-FFF2-40B4-BE49-F238E27FC236}">
+                        <a16:creationId xmlns:a16="http://schemas.microsoft.com/office/drawing/2014/main" id="{5D9434DF-9D09-4ECB-ABE4-0C76FE93439D}"/>
+                      </a:ext>
+                    </a:extLst>
+                  </p:cNvPr>
+                  <p:cNvSpPr txBox="1"/>
+                  <p:nvPr/>
+                </p:nvSpPr>
+                <p:spPr>
+                  <a:xfrm>
+                    <a:off x="2096445" y="136047"/>
+                    <a:ext cx="176928" cy="338554"/>
+                  </a:xfrm>
+                  <a:prstGeom prst="rect">
+                    <a:avLst/>
+                  </a:prstGeom>
+                  <a:noFill/>
+                </p:spPr>
+                <p:txBody>
+                  <a:bodyPr wrap="square" rtlCol="0">
+                    <a:spAutoFit/>
+                  </a:bodyPr>
+                  <a:lstStyle/>
+                  <a:p>
+                    <a:pPr/>
+                    <a14:m>
+                      <m:oMathPara xmlns:m="http://schemas.openxmlformats.org/officeDocument/2006/math">
+                        <m:oMathParaPr>
+                          <m:jc m:val="centerGroup"/>
+                        </m:oMathParaPr>
+                        <m:oMath xmlns:m="http://schemas.openxmlformats.org/officeDocument/2006/math">
+                          <m:r>
+                            <a:rPr lang="en-US" sz="1600" i="1">
+                              <a:latin typeface="Cambria Math" panose="02040503050406030204" pitchFamily="18" charset="0"/>
+                            </a:rPr>
+                            <m:t>𝑦</m:t>
+                          </m:r>
+                        </m:oMath>
+                      </m:oMathPara>
+                    </a14:m>
+                    <a:endParaRPr lang="en-US" sz="1600" dirty="0"/>
+                  </a:p>
+                </p:txBody>
+              </p:sp>
+            </mc:Choice>
+            <mc:Fallback xmlns="">
+              <p:sp>
+                <p:nvSpPr>
+                  <p:cNvPr id="127" name="TextBox 12">
+                    <a:extLst>
+                      <a:ext uri="{FF2B5EF4-FFF2-40B4-BE49-F238E27FC236}">
+                        <a16:creationId xmlns:a16="http://schemas.microsoft.com/office/drawing/2014/main" id="{3BFF9703-6F9D-4BE1-800D-35E8D1FA7574}"/>
+                      </a:ext>
+                    </a:extLst>
+                  </p:cNvPr>
+                  <p:cNvSpPr txBox="1">
+                    <a:spLocks noRot="1" noChangeAspect="1" noMove="1" noResize="1" noEditPoints="1" noAdjustHandles="1" noChangeArrowheads="1" noChangeShapeType="1" noTextEdit="1"/>
+                  </p:cNvSpPr>
+                  <p:nvPr/>
+                </p:nvSpPr>
+                <p:spPr>
+                  <a:xfrm>
+                    <a:off x="2096445" y="136047"/>
+                    <a:ext cx="176928" cy="338554"/>
+                  </a:xfrm>
+                  <a:prstGeom prst="rect">
+                    <a:avLst/>
+                  </a:prstGeom>
+                  <a:blipFill>
+                    <a:blip r:embed="rId15"/>
+                    <a:stretch>
+                      <a:fillRect r="-51724" b="-3636"/>
+                    </a:stretch>
+                  </a:blipFill>
+                </p:spPr>
+                <p:txBody>
+                  <a:bodyPr/>
+                  <a:lstStyle/>
+                  <a:p>
+                    <a:r>
+                      <a:rPr lang="zh-TW" altLang="en-US">
+                        <a:noFill/>
+                      </a:rPr>
+                      <a:t> </a:t>
+                    </a:r>
+                  </a:p>
+                </p:txBody>
+              </p:sp>
+            </mc:Fallback>
+          </mc:AlternateContent>
+          <mc:AlternateContent xmlns:mc="http://schemas.openxmlformats.org/markup-compatibility/2006" xmlns:a14="http://schemas.microsoft.com/office/drawing/2010/main">
+            <mc:Choice Requires="a14">
+              <p:sp>
+                <p:nvSpPr>
+                  <p:cNvPr id="57" name="TextBox 13">
+                    <a:extLst>
+                      <a:ext uri="{FF2B5EF4-FFF2-40B4-BE49-F238E27FC236}">
+                        <a16:creationId xmlns:a16="http://schemas.microsoft.com/office/drawing/2014/main" id="{FD3E0DB0-BFA5-4C05-8197-56FED2EA48A3}"/>
+                      </a:ext>
+                    </a:extLst>
+                  </p:cNvPr>
+                  <p:cNvSpPr txBox="1"/>
+                  <p:nvPr/>
+                </p:nvSpPr>
+                <p:spPr>
+                  <a:xfrm>
+                    <a:off x="1852321" y="-493695"/>
+                    <a:ext cx="256967" cy="338554"/>
+                  </a:xfrm>
+                  <a:prstGeom prst="rect">
+                    <a:avLst/>
+                  </a:prstGeom>
+                  <a:noFill/>
+                </p:spPr>
+                <p:txBody>
+                  <a:bodyPr wrap="square" rtlCol="0">
+                    <a:spAutoFit/>
+                  </a:bodyPr>
+                  <a:lstStyle/>
+                  <a:p>
+                    <a:pPr/>
+                    <a14:m>
+                      <m:oMathPara xmlns:m="http://schemas.openxmlformats.org/officeDocument/2006/math">
+                        <m:oMathParaPr>
+                          <m:jc m:val="centerGroup"/>
+                        </m:oMathParaPr>
+                        <m:oMath xmlns:m="http://schemas.openxmlformats.org/officeDocument/2006/math">
+                          <m:r>
+                            <a:rPr lang="en-US" sz="1600" i="1">
+                              <a:latin typeface="Cambria Math" panose="02040503050406030204" pitchFamily="18" charset="0"/>
+                            </a:rPr>
+                            <m:t>𝑧</m:t>
+                          </m:r>
+                        </m:oMath>
+                      </m:oMathPara>
+                    </a14:m>
+                    <a:endParaRPr lang="en-US" sz="1600" dirty="0"/>
+                  </a:p>
+                </p:txBody>
+              </p:sp>
+            </mc:Choice>
+            <mc:Fallback xmlns="">
+              <p:sp>
+                <p:nvSpPr>
+                  <p:cNvPr id="129" name="TextBox 13">
+                    <a:extLst>
+                      <a:ext uri="{FF2B5EF4-FFF2-40B4-BE49-F238E27FC236}">
+                        <a16:creationId xmlns:a16="http://schemas.microsoft.com/office/drawing/2014/main" id="{006DB87D-4747-446D-A81F-C70C343CD78F}"/>
+                      </a:ext>
+                    </a:extLst>
+                  </p:cNvPr>
+                  <p:cNvSpPr txBox="1">
+                    <a:spLocks noRot="1" noChangeAspect="1" noMove="1" noResize="1" noEditPoints="1" noAdjustHandles="1" noChangeArrowheads="1" noChangeShapeType="1" noTextEdit="1"/>
+                  </p:cNvSpPr>
+                  <p:nvPr/>
+                </p:nvSpPr>
+                <p:spPr>
+                  <a:xfrm>
+                    <a:off x="1852321" y="-493695"/>
+                    <a:ext cx="256967" cy="338554"/>
+                  </a:xfrm>
+                  <a:prstGeom prst="rect">
+                    <a:avLst/>
+                  </a:prstGeom>
+                  <a:blipFill>
+                    <a:blip r:embed="rId16"/>
+                    <a:stretch>
+                      <a:fillRect/>
+                    </a:stretch>
+                  </a:blipFill>
+                </p:spPr>
+                <p:txBody>
+                  <a:bodyPr/>
+                  <a:lstStyle/>
+                  <a:p>
+                    <a:r>
+                      <a:rPr lang="zh-TW" altLang="en-US">
+                        <a:noFill/>
+                      </a:rPr>
+                      <a:t> </a:t>
+                    </a:r>
+                  </a:p>
+                </p:txBody>
+              </p:sp>
+            </mc:Fallback>
+          </mc:AlternateContent>
+          <p:sp>
+            <p:nvSpPr>
+              <p:cNvPr id="58" name="DVO">
+                <a:extLst>
+                  <a:ext uri="{FF2B5EF4-FFF2-40B4-BE49-F238E27FC236}">
+                    <a16:creationId xmlns:a16="http://schemas.microsoft.com/office/drawing/2014/main" id="{8014F4CC-016E-429A-A39F-EF381543DB95}"/>
+                  </a:ext>
+                </a:extLst>
+              </p:cNvPr>
+              <p:cNvSpPr/>
+              <p:nvPr/>
+            </p:nvSpPr>
+            <p:spPr>
+              <a:xfrm flipH="1">
+                <a:off x="1629320" y="-528896"/>
+                <a:ext cx="722000" cy="1495797"/>
+              </a:xfrm>
+              <a:prstGeom prst="arc">
+                <a:avLst>
+                  <a:gd name="adj1" fmla="val 5396867"/>
+                  <a:gd name="adj2" fmla="val 16170484"/>
+                </a:avLst>
+              </a:prstGeom>
+              <a:ln w="25400">
+                <a:solidFill>
+                  <a:schemeClr val="bg1">
+                    <a:lumMod val="50000"/>
+                  </a:schemeClr>
+                </a:solidFill>
+              </a:ln>
+            </p:spPr>
+            <p:style>
+              <a:lnRef idx="1">
+                <a:schemeClr val="accent1"/>
+              </a:lnRef>
+              <a:fillRef idx="0">
+                <a:schemeClr val="accent1"/>
+              </a:fillRef>
+              <a:effectRef idx="0">
+                <a:schemeClr val="accent1"/>
+              </a:effectRef>
+              <a:fontRef idx="minor">
+                <a:schemeClr val="tx1"/>
+              </a:fontRef>
+            </p:style>
+            <p:txBody>
+              <a:bodyPr rtlCol="0" anchor="ctr"/>
+              <a:lstStyle/>
+              <a:p>
+                <a:pPr algn="ctr"/>
+                <a:endParaRPr lang="en-US" sz="1600" dirty="0"/>
+              </a:p>
+            </p:txBody>
+          </p:sp>
+          <p:cxnSp>
+            <p:nvCxnSpPr>
+              <p:cNvPr id="60" name="Straight Arrow Connector 7">
+                <a:extLst>
+                  <a:ext uri="{FF2B5EF4-FFF2-40B4-BE49-F238E27FC236}">
+                    <a16:creationId xmlns:a16="http://schemas.microsoft.com/office/drawing/2014/main" id="{0F735830-0119-41EE-8B88-9E1CEF71A068}"/>
+                  </a:ext>
+                </a:extLst>
+              </p:cNvPr>
+              <p:cNvCxnSpPr>
+                <a:cxnSpLocks/>
+              </p:cNvCxnSpPr>
+              <p:nvPr/>
+            </p:nvCxnSpPr>
+            <p:spPr>
+              <a:xfrm flipV="1">
+                <a:off x="1987289" y="-229080"/>
+                <a:ext cx="1697" cy="445890"/>
+              </a:xfrm>
+              <a:prstGeom prst="straightConnector1">
+                <a:avLst/>
+              </a:prstGeom>
+              <a:ln w="12700">
+                <a:solidFill>
+                  <a:schemeClr val="tx1"/>
+                </a:solidFill>
+                <a:tailEnd type="triangle" w="med" len="lg"/>
+              </a:ln>
+            </p:spPr>
+            <p:style>
+              <a:lnRef idx="1">
+                <a:schemeClr val="accent1"/>
+              </a:lnRef>
+              <a:fillRef idx="0">
+                <a:schemeClr val="accent1"/>
+              </a:fillRef>
+              <a:effectRef idx="0">
+                <a:schemeClr val="accent1"/>
+              </a:effectRef>
+              <a:fontRef idx="minor">
+                <a:schemeClr val="tx1"/>
+              </a:fontRef>
+            </p:style>
+          </p:cxnSp>
+          <p:cxnSp>
+            <p:nvCxnSpPr>
+              <p:cNvPr id="61" name="Straight Arrow Connector 19">
+                <a:extLst>
+                  <a:ext uri="{FF2B5EF4-FFF2-40B4-BE49-F238E27FC236}">
+                    <a16:creationId xmlns:a16="http://schemas.microsoft.com/office/drawing/2014/main" id="{39E2CFE6-71B5-48A8-A33D-0F7BAF74F818}"/>
+                  </a:ext>
+                </a:extLst>
+              </p:cNvPr>
+              <p:cNvCxnSpPr>
+                <a:cxnSpLocks/>
+              </p:cNvCxnSpPr>
+              <p:nvPr/>
+            </p:nvCxnSpPr>
+            <p:spPr>
+              <a:xfrm>
+                <a:off x="1990273" y="214626"/>
+                <a:ext cx="195802" cy="156763"/>
+              </a:xfrm>
+              <a:prstGeom prst="straightConnector1">
+                <a:avLst/>
+              </a:prstGeom>
+              <a:ln w="12700">
+                <a:solidFill>
+                  <a:schemeClr val="tx1"/>
+                </a:solidFill>
+                <a:tailEnd type="triangle" w="med" len="lg"/>
+              </a:ln>
+            </p:spPr>
+            <p:style>
+              <a:lnRef idx="1">
+                <a:schemeClr val="accent1"/>
+              </a:lnRef>
+              <a:fillRef idx="0">
+                <a:schemeClr val="accent1"/>
+              </a:fillRef>
+              <a:effectRef idx="0">
+                <a:schemeClr val="accent1"/>
+              </a:effectRef>
+              <a:fontRef idx="minor">
+                <a:schemeClr val="tx1"/>
+              </a:fontRef>
+            </p:style>
+          </p:cxnSp>
+          <p:cxnSp>
+            <p:nvCxnSpPr>
+              <p:cNvPr id="62" name="Straight Arrow Connector 18">
+                <a:extLst>
+                  <a:ext uri="{FF2B5EF4-FFF2-40B4-BE49-F238E27FC236}">
+                    <a16:creationId xmlns:a16="http://schemas.microsoft.com/office/drawing/2014/main" id="{77E2241E-E6BD-4C5C-BF46-A54DF191C714}"/>
+                  </a:ext>
+                </a:extLst>
+              </p:cNvPr>
+              <p:cNvCxnSpPr>
+                <a:cxnSpLocks/>
+              </p:cNvCxnSpPr>
+              <p:nvPr/>
+            </p:nvCxnSpPr>
+            <p:spPr>
+              <a:xfrm rot="16200000" flipH="1" flipV="1">
+                <a:off x="1818951" y="43150"/>
+                <a:ext cx="0" cy="342950"/>
+              </a:xfrm>
+              <a:prstGeom prst="straightConnector1">
+                <a:avLst/>
+              </a:prstGeom>
+              <a:ln w="12700">
+                <a:solidFill>
+                  <a:schemeClr val="tx1"/>
+                </a:solidFill>
+                <a:tailEnd type="triangle" w="med" len="lg"/>
+              </a:ln>
+            </p:spPr>
+            <p:style>
+              <a:lnRef idx="1">
+                <a:schemeClr val="accent1"/>
+              </a:lnRef>
+              <a:fillRef idx="0">
+                <a:schemeClr val="accent1"/>
+              </a:fillRef>
+              <a:effectRef idx="0">
+                <a:schemeClr val="accent1"/>
+              </a:effectRef>
+              <a:fontRef idx="minor">
+                <a:schemeClr val="tx1"/>
+              </a:fontRef>
+            </p:style>
+          </p:cxnSp>
+          <p:sp>
+            <p:nvSpPr>
+              <p:cNvPr id="65" name="Partial Circle 9">
+                <a:extLst>
+                  <a:ext uri="{FF2B5EF4-FFF2-40B4-BE49-F238E27FC236}">
+                    <a16:creationId xmlns:a16="http://schemas.microsoft.com/office/drawing/2014/main" id="{D88A16EF-A4D9-422C-B440-1E9B0B79D7E9}"/>
+                  </a:ext>
+                </a:extLst>
+              </p:cNvPr>
+              <p:cNvSpPr>
+                <a:spLocks noChangeAspect="1"/>
+              </p:cNvSpPr>
+              <p:nvPr/>
+            </p:nvSpPr>
+            <p:spPr>
+              <a:xfrm rot="16200000" flipH="1">
+                <a:off x="1924887" y="120473"/>
+                <a:ext cx="102408" cy="197724"/>
+              </a:xfrm>
+              <a:prstGeom prst="pie">
+                <a:avLst>
+                  <a:gd name="adj1" fmla="val 16258856"/>
+                  <a:gd name="adj2" fmla="val 19252600"/>
+                </a:avLst>
+              </a:prstGeom>
+              <a:gradFill flip="none" rotWithShape="1">
+                <a:gsLst>
+                  <a:gs pos="0">
+                    <a:schemeClr val="tx1"/>
+                  </a:gs>
+                  <a:gs pos="50000">
+                    <a:schemeClr val="tx1">
+                      <a:lumMod val="50000"/>
+                      <a:lumOff val="50000"/>
+                    </a:schemeClr>
+                  </a:gs>
+                  <a:gs pos="100000">
+                    <a:schemeClr val="bg1">
+                      <a:lumMod val="50000"/>
+                    </a:schemeClr>
+                  </a:gs>
+                </a:gsLst>
+                <a:lin ang="2700000" scaled="1"/>
+                <a:tileRect/>
+              </a:gradFill>
+              <a:ln w="19050">
+                <a:solidFill>
+                  <a:schemeClr val="tx1"/>
+                </a:solidFill>
+              </a:ln>
+            </p:spPr>
+            <p:style>
+              <a:lnRef idx="2">
+                <a:schemeClr val="accent1">
+                  <a:shade val="50000"/>
+                </a:schemeClr>
+              </a:lnRef>
+              <a:fillRef idx="1">
+                <a:schemeClr val="accent1"/>
+              </a:fillRef>
+              <a:effectRef idx="0">
+                <a:schemeClr val="accent1"/>
+              </a:effectRef>
+              <a:fontRef idx="minor">
+                <a:schemeClr val="lt1"/>
+              </a:fontRef>
+            </p:style>
+            <p:txBody>
+              <a:bodyPr rtlCol="0" anchor="ctr"/>
+              <a:lstStyle/>
+              <a:p>
+                <a:pPr algn="ctr"/>
+                <a:endParaRPr lang="en-US" sz="1600" dirty="0">
+                  <a:solidFill>
+                    <a:schemeClr val="tx1"/>
+                  </a:solidFill>
+                </a:endParaRPr>
+              </a:p>
+            </p:txBody>
+          </p:sp>
+          <mc:AlternateContent xmlns:mc="http://schemas.openxmlformats.org/markup-compatibility/2006" xmlns:a14="http://schemas.microsoft.com/office/drawing/2010/main">
+            <mc:Choice Requires="a14">
+              <p:sp>
+                <p:nvSpPr>
+                  <p:cNvPr id="66" name="TextBox 10">
+                    <a:extLst>
+                      <a:ext uri="{FF2B5EF4-FFF2-40B4-BE49-F238E27FC236}">
+                        <a16:creationId xmlns:a16="http://schemas.microsoft.com/office/drawing/2014/main" id="{B0755140-1ED3-418E-8E73-E1D2B917C7ED}"/>
+                      </a:ext>
+                    </a:extLst>
+                  </p:cNvPr>
+                  <p:cNvSpPr txBox="1"/>
+                  <p:nvPr/>
+                </p:nvSpPr>
+                <p:spPr>
+                  <a:xfrm>
+                    <a:off x="1560871" y="155523"/>
+                    <a:ext cx="315234" cy="338554"/>
+                  </a:xfrm>
+                  <a:prstGeom prst="rect">
+                    <a:avLst/>
+                  </a:prstGeom>
+                  <a:noFill/>
+                </p:spPr>
+                <p:txBody>
+                  <a:bodyPr wrap="square" rtlCol="0">
+                    <a:spAutoFit/>
+                  </a:bodyPr>
+                  <a:lstStyle/>
+                  <a:p>
+                    <a:pPr/>
+                    <a14:m>
+                      <m:oMathPara xmlns:m="http://schemas.openxmlformats.org/officeDocument/2006/math">
+                        <m:oMathParaPr>
+                          <m:jc m:val="centerGroup"/>
+                        </m:oMathParaPr>
+                        <m:oMath xmlns:m="http://schemas.openxmlformats.org/officeDocument/2006/math">
+                          <m:r>
+                            <a:rPr lang="en-US" sz="1600" i="1">
+                              <a:latin typeface="Cambria Math" panose="02040503050406030204" pitchFamily="18" charset="0"/>
+                            </a:rPr>
+                            <m:t>𝛼</m:t>
+                          </m:r>
+                        </m:oMath>
+                      </m:oMathPara>
+                    </a14:m>
+                    <a:endParaRPr lang="en-US" sz="1600" dirty="0"/>
+                  </a:p>
+                </p:txBody>
+              </p:sp>
+            </mc:Choice>
+            <mc:Fallback xmlns="">
+              <p:sp>
+                <p:nvSpPr>
+                  <p:cNvPr id="143" name="TextBox 10">
+                    <a:extLst>
+                      <a:ext uri="{FF2B5EF4-FFF2-40B4-BE49-F238E27FC236}">
+                        <a16:creationId xmlns:a16="http://schemas.microsoft.com/office/drawing/2014/main" id="{F4BA87A4-FF23-4612-80FF-80921F92BB65}"/>
+                      </a:ext>
+                    </a:extLst>
+                  </p:cNvPr>
+                  <p:cNvSpPr txBox="1">
+                    <a:spLocks noRot="1" noChangeAspect="1" noMove="1" noResize="1" noEditPoints="1" noAdjustHandles="1" noChangeArrowheads="1" noChangeShapeType="1" noTextEdit="1"/>
+                  </p:cNvSpPr>
+                  <p:nvPr/>
+                </p:nvSpPr>
+                <p:spPr>
+                  <a:xfrm>
+                    <a:off x="1560871" y="155523"/>
+                    <a:ext cx="315234" cy="338554"/>
+                  </a:xfrm>
+                  <a:prstGeom prst="rect">
+                    <a:avLst/>
+                  </a:prstGeom>
+                  <a:blipFill>
+                    <a:blip r:embed="rId17"/>
+                    <a:stretch>
+                      <a:fillRect/>
+                    </a:stretch>
+                  </a:blipFill>
+                </p:spPr>
+                <p:txBody>
+                  <a:bodyPr/>
+                  <a:lstStyle/>
+                  <a:p>
+                    <a:r>
+                      <a:rPr lang="zh-TW" altLang="en-US">
+                        <a:noFill/>
+                      </a:rPr>
+                      <a:t> </a:t>
+                    </a:r>
+                  </a:p>
+                </p:txBody>
+              </p:sp>
+            </mc:Fallback>
+          </mc:AlternateContent>
+          <p:cxnSp>
+            <p:nvCxnSpPr>
+              <p:cNvPr id="67" name="Straight Arrow Connector 17">
+                <a:extLst>
+                  <a:ext uri="{FF2B5EF4-FFF2-40B4-BE49-F238E27FC236}">
+                    <a16:creationId xmlns:a16="http://schemas.microsoft.com/office/drawing/2014/main" id="{BF6121CE-90BE-4D19-9571-5F7CB3DD4312}"/>
+                  </a:ext>
+                </a:extLst>
+              </p:cNvPr>
+              <p:cNvCxnSpPr>
+                <a:cxnSpLocks/>
+              </p:cNvCxnSpPr>
+              <p:nvPr/>
+            </p:nvCxnSpPr>
+            <p:spPr>
+              <a:xfrm flipH="1">
+                <a:off x="1768140" y="220545"/>
+                <a:ext cx="221585" cy="286539"/>
+              </a:xfrm>
+              <a:prstGeom prst="straightConnector1">
+                <a:avLst/>
+              </a:prstGeom>
+              <a:ln w="38100">
+                <a:solidFill>
+                  <a:schemeClr val="tx1"/>
+                </a:solidFill>
+                <a:tailEnd type="stealth" w="lg" len="lg"/>
+              </a:ln>
+            </p:spPr>
+            <p:style>
+              <a:lnRef idx="3">
+                <a:schemeClr val="accent6"/>
+              </a:lnRef>
+              <a:fillRef idx="0">
+                <a:schemeClr val="accent6"/>
+              </a:fillRef>
+              <a:effectRef idx="2">
+                <a:schemeClr val="accent6"/>
+              </a:effectRef>
+              <a:fontRef idx="minor">
+                <a:schemeClr val="tx1"/>
+              </a:fontRef>
+            </p:style>
+          </p:cxnSp>
+          <p:sp>
+            <p:nvSpPr>
+              <p:cNvPr id="68" name="Partial Circle 9">
+                <a:extLst>
+                  <a:ext uri="{FF2B5EF4-FFF2-40B4-BE49-F238E27FC236}">
+                    <a16:creationId xmlns:a16="http://schemas.microsoft.com/office/drawing/2014/main" id="{528F2B9E-C51B-4BE0-A58B-43D54E2EE500}"/>
+                  </a:ext>
+                </a:extLst>
+              </p:cNvPr>
+              <p:cNvSpPr>
+                <a:spLocks noChangeAspect="1"/>
+              </p:cNvSpPr>
+              <p:nvPr/>
+            </p:nvSpPr>
+            <p:spPr>
+              <a:xfrm>
+                <a:off x="1912164" y="83252"/>
+                <a:ext cx="149214" cy="301366"/>
+              </a:xfrm>
+              <a:prstGeom prst="pie">
+                <a:avLst>
+                  <a:gd name="adj1" fmla="val 16258856"/>
+                  <a:gd name="adj2" fmla="val 19252600"/>
+                </a:avLst>
+              </a:prstGeom>
+              <a:gradFill flip="none" rotWithShape="1">
+                <a:gsLst>
+                  <a:gs pos="0">
+                    <a:schemeClr val="tx1"/>
+                  </a:gs>
+                  <a:gs pos="50000">
+                    <a:schemeClr val="tx1">
+                      <a:lumMod val="50000"/>
+                      <a:lumOff val="50000"/>
+                    </a:schemeClr>
+                  </a:gs>
+                  <a:gs pos="100000">
+                    <a:schemeClr val="bg1">
+                      <a:lumMod val="50000"/>
+                    </a:schemeClr>
+                  </a:gs>
+                </a:gsLst>
+                <a:lin ang="2700000" scaled="1"/>
+                <a:tileRect/>
+              </a:gradFill>
+              <a:ln w="19050">
+                <a:solidFill>
+                  <a:schemeClr val="tx1"/>
+                </a:solidFill>
+              </a:ln>
+            </p:spPr>
+            <p:style>
+              <a:lnRef idx="2">
+                <a:schemeClr val="accent1">
+                  <a:shade val="50000"/>
+                </a:schemeClr>
+              </a:lnRef>
+              <a:fillRef idx="1">
+                <a:schemeClr val="accent1"/>
+              </a:fillRef>
+              <a:effectRef idx="0">
+                <a:schemeClr val="accent1"/>
+              </a:effectRef>
+              <a:fontRef idx="minor">
+                <a:schemeClr val="lt1"/>
+              </a:fontRef>
+            </p:style>
+            <p:txBody>
+              <a:bodyPr rtlCol="0" anchor="ctr"/>
+              <a:lstStyle/>
+              <a:p>
+                <a:pPr algn="ctr"/>
+                <a:endParaRPr lang="en-US" sz="1600" dirty="0">
+                  <a:solidFill>
+                    <a:schemeClr val="tx1"/>
+                  </a:solidFill>
+                </a:endParaRPr>
+              </a:p>
+            </p:txBody>
+          </p:sp>
+          <mc:AlternateContent xmlns:mc="http://schemas.openxmlformats.org/markup-compatibility/2006" xmlns:a14="http://schemas.microsoft.com/office/drawing/2010/main">
+            <mc:Choice Requires="a14">
+              <p:sp>
+                <p:nvSpPr>
+                  <p:cNvPr id="69" name="TextBox 10">
+                    <a:extLst>
+                      <a:ext uri="{FF2B5EF4-FFF2-40B4-BE49-F238E27FC236}">
+                        <a16:creationId xmlns:a16="http://schemas.microsoft.com/office/drawing/2014/main" id="{E3CB8141-3307-4D03-B1E5-D63D5A364FA6}"/>
+                      </a:ext>
+                    </a:extLst>
+                  </p:cNvPr>
+                  <p:cNvSpPr txBox="1"/>
+                  <p:nvPr/>
+                </p:nvSpPr>
+                <p:spPr>
+                  <a:xfrm>
+                    <a:off x="1951942" y="-164895"/>
+                    <a:ext cx="297046" cy="338554"/>
+                  </a:xfrm>
+                  <a:prstGeom prst="rect">
+                    <a:avLst/>
+                  </a:prstGeom>
+                  <a:noFill/>
+                </p:spPr>
+                <p:txBody>
+                  <a:bodyPr wrap="square" rtlCol="0">
+                    <a:spAutoFit/>
+                  </a:bodyPr>
+                  <a:lstStyle/>
+                  <a:p>
+                    <a:pPr/>
+                    <a14:m>
+                      <m:oMathPara xmlns:m="http://schemas.openxmlformats.org/officeDocument/2006/math">
+                        <m:oMathParaPr>
+                          <m:jc m:val="centerGroup"/>
+                        </m:oMathParaPr>
+                        <m:oMath xmlns:m="http://schemas.openxmlformats.org/officeDocument/2006/math">
+                          <m:r>
+                            <a:rPr lang="en-US" sz="1600" i="1">
+                              <a:latin typeface="Cambria Math" panose="02040503050406030204" pitchFamily="18" charset="0"/>
+                            </a:rPr>
+                            <m:t>𝛽</m:t>
+                          </m:r>
+                        </m:oMath>
+                      </m:oMathPara>
+                    </a14:m>
+                    <a:endParaRPr lang="en-US" sz="1600" dirty="0"/>
+                  </a:p>
+                </p:txBody>
+              </p:sp>
+            </mc:Choice>
+            <mc:Fallback xmlns="">
+              <p:sp>
+                <p:nvSpPr>
+                  <p:cNvPr id="146" name="TextBox 10">
+                    <a:extLst>
+                      <a:ext uri="{FF2B5EF4-FFF2-40B4-BE49-F238E27FC236}">
+                        <a16:creationId xmlns:a16="http://schemas.microsoft.com/office/drawing/2014/main" id="{18AA10A0-393A-4B71-8D8A-7D5D0CD59BF5}"/>
+                      </a:ext>
+                    </a:extLst>
+                  </p:cNvPr>
+                  <p:cNvSpPr txBox="1">
+                    <a:spLocks noRot="1" noChangeAspect="1" noMove="1" noResize="1" noEditPoints="1" noAdjustHandles="1" noChangeArrowheads="1" noChangeShapeType="1" noTextEdit="1"/>
+                  </p:cNvSpPr>
+                  <p:nvPr/>
+                </p:nvSpPr>
+                <p:spPr>
+                  <a:xfrm>
+                    <a:off x="1951942" y="-164895"/>
+                    <a:ext cx="297046" cy="338554"/>
+                  </a:xfrm>
+                  <a:prstGeom prst="rect">
+                    <a:avLst/>
+                  </a:prstGeom>
+                  <a:blipFill>
+                    <a:blip r:embed="rId18"/>
+                    <a:stretch>
+                      <a:fillRect r="-4082" b="-8929"/>
+                    </a:stretch>
+                  </a:blipFill>
+                </p:spPr>
+                <p:txBody>
+                  <a:bodyPr/>
+                  <a:lstStyle/>
+                  <a:p>
+                    <a:r>
+                      <a:rPr lang="zh-TW" altLang="en-US">
+                        <a:noFill/>
+                      </a:rPr>
+                      <a:t> </a:t>
+                    </a:r>
+                  </a:p>
+                </p:txBody>
+              </p:sp>
+            </mc:Fallback>
+          </mc:AlternateContent>
+          <p:cxnSp>
+            <p:nvCxnSpPr>
+              <p:cNvPr id="70" name="Straight Arrow Connector 17">
+                <a:extLst>
+                  <a:ext uri="{FF2B5EF4-FFF2-40B4-BE49-F238E27FC236}">
+                    <a16:creationId xmlns:a16="http://schemas.microsoft.com/office/drawing/2014/main" id="{5F124962-8FE5-4142-B6B9-BECD5A587C8A}"/>
+                  </a:ext>
+                </a:extLst>
+              </p:cNvPr>
+              <p:cNvCxnSpPr>
+                <a:cxnSpLocks/>
+              </p:cNvCxnSpPr>
+              <p:nvPr/>
+            </p:nvCxnSpPr>
+            <p:spPr>
+              <a:xfrm flipV="1">
+                <a:off x="1981637" y="-225181"/>
+                <a:ext cx="571923" cy="449644"/>
+              </a:xfrm>
+              <a:prstGeom prst="straightConnector1">
+                <a:avLst/>
+              </a:prstGeom>
+              <a:ln w="38100">
+                <a:solidFill>
+                  <a:schemeClr val="tx1"/>
+                </a:solidFill>
+                <a:tailEnd type="stealth" w="lg" len="lg"/>
+              </a:ln>
+            </p:spPr>
+            <p:style>
+              <a:lnRef idx="3">
+                <a:schemeClr val="accent6"/>
+              </a:lnRef>
+              <a:fillRef idx="0">
+                <a:schemeClr val="accent6"/>
+              </a:fillRef>
+              <a:effectRef idx="2">
+                <a:schemeClr val="accent6"/>
+              </a:effectRef>
+              <a:fontRef idx="minor">
+                <a:schemeClr val="tx1"/>
+              </a:fontRef>
+            </p:style>
+          </p:cxnSp>
+          <p:sp>
+            <p:nvSpPr>
+              <p:cNvPr id="71" name="等腰三角形 70">
+                <a:extLst>
+                  <a:ext uri="{FF2B5EF4-FFF2-40B4-BE49-F238E27FC236}">
+                    <a16:creationId xmlns:a16="http://schemas.microsoft.com/office/drawing/2014/main" id="{1BA0EA36-2FEC-48FE-A773-79C92D57F754}"/>
+                  </a:ext>
+                </a:extLst>
+              </p:cNvPr>
+              <p:cNvSpPr/>
+              <p:nvPr/>
+            </p:nvSpPr>
+            <p:spPr>
+              <a:xfrm rot="5400000">
+                <a:off x="1943813" y="420057"/>
+                <a:ext cx="329835" cy="221179"/>
+              </a:xfrm>
+              <a:prstGeom prst="triangle">
+                <a:avLst/>
+              </a:prstGeom>
+            </p:spPr>
+            <p:style>
+              <a:lnRef idx="0">
+                <a:schemeClr val="accent2"/>
+              </a:lnRef>
+              <a:fillRef idx="3">
+                <a:schemeClr val="accent2"/>
+              </a:fillRef>
+              <a:effectRef idx="3">
+                <a:schemeClr val="accent2"/>
+              </a:effectRef>
+              <a:fontRef idx="minor">
+                <a:schemeClr val="lt1"/>
+              </a:fontRef>
+            </p:style>
+            <p:txBody>
+              <a:bodyPr rot="0" spcFirstLastPara="0" vertOverflow="overflow" horzOverflow="overflow" vert="horz" wrap="square" lIns="71889" tIns="35945" rIns="71889" bIns="35945" numCol="1" spcCol="0" rtlCol="0" fromWordArt="0" anchor="ctr" anchorCtr="0" forceAA="0" compatLnSpc="1">
+                <a:prstTxWarp prst="textNoShape">
+                  <a:avLst/>
+                </a:prstTxWarp>
+                <a:noAutofit/>
+              </a:bodyPr>
+              <a:lstStyle/>
+              <a:p>
+                <a:pPr algn="ctr"/>
+                <a:endParaRPr lang="zh-TW" altLang="en-US" sz="1415" dirty="0"/>
+              </a:p>
+            </p:txBody>
+          </p:sp>
         </p:grpSp>
       </p:grpSp>
     </p:spTree>

--- a/Final/Figures/totaltransition_special.pdf.pptx
+++ b/Final/Figures/totaltransition_special.pdf.pptx
@@ -244,7 +244,7 @@
           <a:p>
             <a:fld id="{8C2AE5C1-C91B-4CB5-96BE-6C63A5D03502}" type="datetimeFigureOut">
               <a:rPr lang="zh-TW" altLang="en-US" smtClean="0"/>
-              <a:t>2026/5/22</a:t>
+              <a:t>2026/7/12</a:t>
             </a:fld>
             <a:endParaRPr lang="zh-TW" altLang="en-US"/>
           </a:p>
@@ -414,7 +414,7 @@
           <a:p>
             <a:fld id="{8C2AE5C1-C91B-4CB5-96BE-6C63A5D03502}" type="datetimeFigureOut">
               <a:rPr lang="zh-TW" altLang="en-US" smtClean="0"/>
-              <a:t>2026/5/22</a:t>
+              <a:t>2026/7/12</a:t>
             </a:fld>
             <a:endParaRPr lang="zh-TW" altLang="en-US"/>
           </a:p>
@@ -594,7 +594,7 @@
           <a:p>
             <a:fld id="{8C2AE5C1-C91B-4CB5-96BE-6C63A5D03502}" type="datetimeFigureOut">
               <a:rPr lang="zh-TW" altLang="en-US" smtClean="0"/>
-              <a:t>2026/5/22</a:t>
+              <a:t>2026/7/12</a:t>
             </a:fld>
             <a:endParaRPr lang="zh-TW" altLang="en-US"/>
           </a:p>
@@ -764,7 +764,7 @@
           <a:p>
             <a:fld id="{8C2AE5C1-C91B-4CB5-96BE-6C63A5D03502}" type="datetimeFigureOut">
               <a:rPr lang="zh-TW" altLang="en-US" smtClean="0"/>
-              <a:t>2026/5/22</a:t>
+              <a:t>2026/7/12</a:t>
             </a:fld>
             <a:endParaRPr lang="zh-TW" altLang="en-US"/>
           </a:p>
@@ -1010,7 +1010,7 @@
           <a:p>
             <a:fld id="{8C2AE5C1-C91B-4CB5-96BE-6C63A5D03502}" type="datetimeFigureOut">
               <a:rPr lang="zh-TW" altLang="en-US" smtClean="0"/>
-              <a:t>2026/5/22</a:t>
+              <a:t>2026/7/12</a:t>
             </a:fld>
             <a:endParaRPr lang="zh-TW" altLang="en-US"/>
           </a:p>
@@ -1242,7 +1242,7 @@
           <a:p>
             <a:fld id="{8C2AE5C1-C91B-4CB5-96BE-6C63A5D03502}" type="datetimeFigureOut">
               <a:rPr lang="zh-TW" altLang="en-US" smtClean="0"/>
-              <a:t>2026/5/22</a:t>
+              <a:t>2026/7/12</a:t>
             </a:fld>
             <a:endParaRPr lang="zh-TW" altLang="en-US"/>
           </a:p>
@@ -1609,7 +1609,7 @@
           <a:p>
             <a:fld id="{8C2AE5C1-C91B-4CB5-96BE-6C63A5D03502}" type="datetimeFigureOut">
               <a:rPr lang="zh-TW" altLang="en-US" smtClean="0"/>
-              <a:t>2026/5/22</a:t>
+              <a:t>2026/7/12</a:t>
             </a:fld>
             <a:endParaRPr lang="zh-TW" altLang="en-US"/>
           </a:p>
@@ -1727,7 +1727,7 @@
           <a:p>
             <a:fld id="{8C2AE5C1-C91B-4CB5-96BE-6C63A5D03502}" type="datetimeFigureOut">
               <a:rPr lang="zh-TW" altLang="en-US" smtClean="0"/>
-              <a:t>2026/5/22</a:t>
+              <a:t>2026/7/12</a:t>
             </a:fld>
             <a:endParaRPr lang="zh-TW" altLang="en-US"/>
           </a:p>
@@ -1822,7 +1822,7 @@
           <a:p>
             <a:fld id="{8C2AE5C1-C91B-4CB5-96BE-6C63A5D03502}" type="datetimeFigureOut">
               <a:rPr lang="zh-TW" altLang="en-US" smtClean="0"/>
-              <a:t>2026/5/22</a:t>
+              <a:t>2026/7/12</a:t>
             </a:fld>
             <a:endParaRPr lang="zh-TW" altLang="en-US"/>
           </a:p>
@@ -2099,7 +2099,7 @@
           <a:p>
             <a:fld id="{8C2AE5C1-C91B-4CB5-96BE-6C63A5D03502}" type="datetimeFigureOut">
               <a:rPr lang="zh-TW" altLang="en-US" smtClean="0"/>
-              <a:t>2026/5/22</a:t>
+              <a:t>2026/7/12</a:t>
             </a:fld>
             <a:endParaRPr lang="zh-TW" altLang="en-US"/>
           </a:p>
@@ -2356,7 +2356,7 @@
           <a:p>
             <a:fld id="{8C2AE5C1-C91B-4CB5-96BE-6C63A5D03502}" type="datetimeFigureOut">
               <a:rPr lang="zh-TW" altLang="en-US" smtClean="0"/>
-              <a:t>2026/5/22</a:t>
+              <a:t>2026/7/12</a:t>
             </a:fld>
             <a:endParaRPr lang="zh-TW" altLang="en-US"/>
           </a:p>
@@ -2569,7 +2569,7 @@
           <a:p>
             <a:fld id="{8C2AE5C1-C91B-4CB5-96BE-6C63A5D03502}" type="datetimeFigureOut">
               <a:rPr lang="zh-TW" altLang="en-US" smtClean="0"/>
-              <a:t>2026/5/22</a:t>
+              <a:t>2026/7/12</a:t>
             </a:fld>
             <a:endParaRPr lang="zh-TW" altLang="en-US"/>
           </a:p>
@@ -3630,12 +3630,195 @@
           <a:chExt cx="0" cy="0"/>
         </a:xfrm>
       </p:grpSpPr>
+      <p:sp>
+        <p:nvSpPr>
+          <p:cNvPr id="19" name="矩形: 圓角 18">
+            <a:extLst>
+              <a:ext uri="{FF2B5EF4-FFF2-40B4-BE49-F238E27FC236}">
+                <a16:creationId xmlns:a16="http://schemas.microsoft.com/office/drawing/2014/main" id="{304AFB44-AE3C-4A1F-8656-62BCAC628641}"/>
+              </a:ext>
+            </a:extLst>
+          </p:cNvPr>
+          <p:cNvSpPr/>
+          <p:nvPr/>
+        </p:nvSpPr>
+        <p:spPr>
+          <a:xfrm>
+            <a:off x="18915" y="52467"/>
+            <a:ext cx="9868195" cy="5024278"/>
+          </a:xfrm>
+          <a:prstGeom prst="roundRect">
+            <a:avLst>
+              <a:gd name="adj" fmla="val 7772"/>
+            </a:avLst>
+          </a:prstGeom>
+          <a:gradFill flip="none" rotWithShape="1">
+            <a:gsLst>
+              <a:gs pos="0">
+                <a:schemeClr val="bg1">
+                  <a:lumMod val="95000"/>
+                </a:schemeClr>
+              </a:gs>
+              <a:gs pos="100000">
+                <a:schemeClr val="bg1">
+                  <a:lumMod val="85000"/>
+                </a:schemeClr>
+              </a:gs>
+            </a:gsLst>
+            <a:lin ang="5400000" scaled="1"/>
+            <a:tileRect/>
+          </a:gradFill>
+        </p:spPr>
+        <p:style>
+          <a:lnRef idx="1">
+            <a:schemeClr val="accent3"/>
+          </a:lnRef>
+          <a:fillRef idx="2">
+            <a:schemeClr val="accent3"/>
+          </a:fillRef>
+          <a:effectRef idx="1">
+            <a:schemeClr val="accent3"/>
+          </a:effectRef>
+          <a:fontRef idx="minor">
+            <a:schemeClr val="dk1"/>
+          </a:fontRef>
+        </p:style>
+        <p:txBody>
+          <a:bodyPr rot="0" spcFirstLastPara="0" vertOverflow="overflow" horzOverflow="overflow" vert="horz" wrap="square" lIns="51213" tIns="25606" rIns="51213" bIns="25606" numCol="1" spcCol="0" rtlCol="0" fromWordArt="0" anchor="ctr" anchorCtr="0" forceAA="0" compatLnSpc="1">
+            <a:prstTxWarp prst="textNoShape">
+              <a:avLst/>
+            </a:prstTxWarp>
+            <a:noAutofit/>
+          </a:bodyPr>
+          <a:lstStyle/>
+          <a:p>
+            <a:pPr algn="ctr"/>
+            <a:endParaRPr lang="zh-TW" altLang="en-US" sz="1008" dirty="0"/>
+          </a:p>
+        </p:txBody>
+      </p:sp>
+      <mc:AlternateContent xmlns:mc="http://schemas.openxmlformats.org/markup-compatibility/2006">
+        <mc:Choice xmlns:a14="http://schemas.microsoft.com/office/drawing/2010/main" Requires="a14">
+          <p:sp>
+            <p:nvSpPr>
+              <p:cNvPr id="81" name="文字方塊 80">
+                <a:extLst>
+                  <a:ext uri="{FF2B5EF4-FFF2-40B4-BE49-F238E27FC236}">
+                    <a16:creationId xmlns:a16="http://schemas.microsoft.com/office/drawing/2014/main" id="{7CA7E072-1D8B-40FF-A423-DEA0E6B6BA9F}"/>
+                  </a:ext>
+                </a:extLst>
+              </p:cNvPr>
+              <p:cNvSpPr txBox="1"/>
+              <p:nvPr/>
+            </p:nvSpPr>
+            <p:spPr>
+              <a:xfrm>
+                <a:off x="2089832" y="287195"/>
+                <a:ext cx="6572379" cy="526619"/>
+              </a:xfrm>
+              <a:prstGeom prst="rect">
+                <a:avLst/>
+              </a:prstGeom>
+              <a:noFill/>
+            </p:spPr>
+            <p:txBody>
+              <a:bodyPr wrap="square" rtlCol="0">
+                <a:spAutoFit/>
+              </a:bodyPr>
+              <a:lstStyle/>
+              <a:p>
+                <a:pPr algn="ctr"/>
+                <a:r>
+                  <a:rPr lang="en-US" altLang="zh-TW" sz="2700" dirty="0">
+                    <a:latin typeface="Times New Roman" panose="02020603050405020304" pitchFamily="18" charset="0"/>
+                    <a:cs typeface="Times New Roman" panose="02020603050405020304" pitchFamily="18" charset="0"/>
+                  </a:rPr>
+                  <a:t>Total transition rate at equator line </a:t>
+                </a:r>
+                <a14:m>
+                  <m:oMath xmlns:m="http://schemas.openxmlformats.org/officeDocument/2006/math">
+                    <m:r>
+                      <a:rPr lang="en-US" altLang="zh-TW" sz="2700" i="1">
+                        <a:latin typeface="Cambria Math" panose="02040503050406030204" pitchFamily="18" charset="0"/>
+                      </a:rPr>
+                      <m:t>𝛽</m:t>
+                    </m:r>
+                    <m:r>
+                      <a:rPr lang="en-US" altLang="zh-TW" sz="2700" i="1">
+                        <a:latin typeface="Cambria Math" panose="02040503050406030204" pitchFamily="18" charset="0"/>
+                      </a:rPr>
+                      <m:t>=</m:t>
+                    </m:r>
+                    <m:r>
+                      <a:rPr lang="en-US" altLang="zh-TW" sz="2700" i="1">
+                        <a:latin typeface="Cambria Math" panose="02040503050406030204" pitchFamily="18" charset="0"/>
+                      </a:rPr>
+                      <m:t>𝜋</m:t>
+                    </m:r>
+                    <m:r>
+                      <a:rPr lang="en-US" altLang="zh-TW" sz="2700" i="1">
+                        <a:latin typeface="Cambria Math" panose="02040503050406030204" pitchFamily="18" charset="0"/>
+                      </a:rPr>
+                      <m:t>/2</m:t>
+                    </m:r>
+                  </m:oMath>
+                </a14:m>
+                <a:endParaRPr lang="zh-TW" altLang="en-US" sz="2700" dirty="0"/>
+              </a:p>
+            </p:txBody>
+          </p:sp>
+        </mc:Choice>
+        <mc:Fallback>
+          <p:sp>
+            <p:nvSpPr>
+              <p:cNvPr id="81" name="文字方塊 80">
+                <a:extLst>
+                  <a:ext uri="{FF2B5EF4-FFF2-40B4-BE49-F238E27FC236}">
+                    <a16:creationId xmlns:a16="http://schemas.microsoft.com/office/drawing/2014/main" id="{7CA7E072-1D8B-40FF-A423-DEA0E6B6BA9F}"/>
+                  </a:ext>
+                </a:extLst>
+              </p:cNvPr>
+              <p:cNvSpPr txBox="1">
+                <a:spLocks noRot="1" noChangeAspect="1" noMove="1" noResize="1" noEditPoints="1" noAdjustHandles="1" noChangeArrowheads="1" noChangeShapeType="1" noTextEdit="1"/>
+              </p:cNvSpPr>
+              <p:nvPr/>
+            </p:nvSpPr>
+            <p:spPr>
+              <a:xfrm>
+                <a:off x="2089832" y="287195"/>
+                <a:ext cx="6572379" cy="526619"/>
+              </a:xfrm>
+              <a:prstGeom prst="rect">
+                <a:avLst/>
+              </a:prstGeom>
+              <a:blipFill>
+                <a:blip r:embed="rId2"/>
+                <a:stretch>
+                  <a:fillRect t="-12791" b="-25581"/>
+                </a:stretch>
+              </a:blipFill>
+            </p:spPr>
+            <p:txBody>
+              <a:bodyPr/>
+              <a:lstStyle/>
+              <a:p>
+                <a:r>
+                  <a:rPr lang="zh-TW" altLang="en-US">
+                    <a:noFill/>
+                  </a:rPr>
+                  <a:t> </a:t>
+                </a:r>
+              </a:p>
+            </p:txBody>
+          </p:sp>
+        </mc:Fallback>
+      </mc:AlternateContent>
       <p:grpSp>
         <p:nvGrpSpPr>
-          <p:cNvPr id="2" name="群組 1">
+          <p:cNvPr id="110" name="群組 109">
             <a:extLst>
               <a:ext uri="{FF2B5EF4-FFF2-40B4-BE49-F238E27FC236}">
-                <a16:creationId xmlns:a16="http://schemas.microsoft.com/office/drawing/2014/main" id="{7399701C-F9CB-4E09-A86F-9281B68389C1}"/>
+                <a16:creationId xmlns:a16="http://schemas.microsoft.com/office/drawing/2014/main" id="{C549E9CD-F5D7-4AC7-84BE-AD4FA7751BE7}"/>
               </a:ext>
             </a:extLst>
           </p:cNvPr>
@@ -3644,201 +3827,18 @@
         </p:nvGrpSpPr>
         <p:grpSpPr>
           <a:xfrm>
-            <a:off x="18915" y="52467"/>
-            <a:ext cx="9868195" cy="5024278"/>
-            <a:chOff x="18908" y="330359"/>
-            <a:chExt cx="9868195" cy="5024278"/>
+            <a:off x="2219685" y="874844"/>
+            <a:ext cx="5933596" cy="3885347"/>
+            <a:chOff x="3220094" y="1092200"/>
+            <a:chExt cx="6812044" cy="5701155"/>
           </a:xfrm>
         </p:grpSpPr>
-        <p:sp>
-          <p:nvSpPr>
-            <p:cNvPr id="19" name="矩形: 圓角 18">
+        <p:grpSp>
+          <p:nvGrpSpPr>
+            <p:cNvPr id="90" name="群組 89">
               <a:extLst>
                 <a:ext uri="{FF2B5EF4-FFF2-40B4-BE49-F238E27FC236}">
-                  <a16:creationId xmlns:a16="http://schemas.microsoft.com/office/drawing/2014/main" id="{304AFB44-AE3C-4A1F-8656-62BCAC628641}"/>
-                </a:ext>
-              </a:extLst>
-            </p:cNvPr>
-            <p:cNvSpPr/>
-            <p:nvPr/>
-          </p:nvSpPr>
-          <p:spPr>
-            <a:xfrm>
-              <a:off x="18908" y="330359"/>
-              <a:ext cx="9868195" cy="5024278"/>
-            </a:xfrm>
-            <a:prstGeom prst="roundRect">
-              <a:avLst>
-                <a:gd name="adj" fmla="val 7772"/>
-              </a:avLst>
-            </a:prstGeom>
-            <a:gradFill flip="none" rotWithShape="1">
-              <a:gsLst>
-                <a:gs pos="0">
-                  <a:schemeClr val="bg1">
-                    <a:lumMod val="95000"/>
-                  </a:schemeClr>
-                </a:gs>
-                <a:gs pos="100000">
-                  <a:schemeClr val="bg1">
-                    <a:lumMod val="85000"/>
-                  </a:schemeClr>
-                </a:gs>
-              </a:gsLst>
-              <a:lin ang="5400000" scaled="1"/>
-              <a:tileRect/>
-            </a:gradFill>
-          </p:spPr>
-          <p:style>
-            <a:lnRef idx="1">
-              <a:schemeClr val="accent3"/>
-            </a:lnRef>
-            <a:fillRef idx="2">
-              <a:schemeClr val="accent3"/>
-            </a:fillRef>
-            <a:effectRef idx="1">
-              <a:schemeClr val="accent3"/>
-            </a:effectRef>
-            <a:fontRef idx="minor">
-              <a:schemeClr val="dk1"/>
-            </a:fontRef>
-          </p:style>
-          <p:txBody>
-            <a:bodyPr rot="0" spcFirstLastPara="0" vertOverflow="overflow" horzOverflow="overflow" vert="horz" wrap="square" lIns="51213" tIns="25606" rIns="51213" bIns="25606" numCol="1" spcCol="0" rtlCol="0" fromWordArt="0" anchor="ctr" anchorCtr="0" forceAA="0" compatLnSpc="1">
-              <a:prstTxWarp prst="textNoShape">
-                <a:avLst/>
-              </a:prstTxWarp>
-              <a:noAutofit/>
-            </a:bodyPr>
-            <a:lstStyle/>
-            <a:p>
-              <a:pPr algn="ctr"/>
-              <a:endParaRPr lang="zh-TW" altLang="en-US" sz="1008" dirty="0"/>
-            </a:p>
-          </p:txBody>
-        </p:sp>
-        <mc:AlternateContent xmlns:mc="http://schemas.openxmlformats.org/markup-compatibility/2006">
-          <mc:Choice xmlns:a14="http://schemas.microsoft.com/office/drawing/2010/main" Requires="a14">
-            <p:sp>
-              <p:nvSpPr>
-                <p:cNvPr id="81" name="文字方塊 80">
-                  <a:extLst>
-                    <a:ext uri="{FF2B5EF4-FFF2-40B4-BE49-F238E27FC236}">
-                      <a16:creationId xmlns:a16="http://schemas.microsoft.com/office/drawing/2014/main" id="{7CA7E072-1D8B-40FF-A423-DEA0E6B6BA9F}"/>
-                    </a:ext>
-                  </a:extLst>
-                </p:cNvPr>
-                <p:cNvSpPr txBox="1"/>
-                <p:nvPr/>
-              </p:nvSpPr>
-              <p:spPr>
-                <a:xfrm>
-                  <a:off x="2089825" y="565087"/>
-                  <a:ext cx="6572379" cy="526619"/>
-                </a:xfrm>
-                <a:prstGeom prst="rect">
-                  <a:avLst/>
-                </a:prstGeom>
-                <a:noFill/>
-              </p:spPr>
-              <p:txBody>
-                <a:bodyPr wrap="square" rtlCol="0">
-                  <a:spAutoFit/>
-                </a:bodyPr>
-                <a:lstStyle/>
-                <a:p>
-                  <a:pPr algn="ctr"/>
-                  <a:r>
-                    <a:rPr lang="en-US" altLang="zh-TW" sz="2700" dirty="0">
-                      <a:latin typeface="Times New Roman" panose="02020603050405020304" pitchFamily="18" charset="0"/>
-                      <a:cs typeface="Times New Roman" panose="02020603050405020304" pitchFamily="18" charset="0"/>
-                    </a:rPr>
-                    <a:t>Total transition rate at equator line </a:t>
-                  </a:r>
-                  <a14:m>
-                    <m:oMath xmlns:m="http://schemas.openxmlformats.org/officeDocument/2006/math">
-                      <m:r>
-                        <a:rPr lang="en-US" altLang="zh-TW" sz="2700" i="1">
-                          <a:latin typeface="Cambria Math" panose="02040503050406030204" pitchFamily="18" charset="0"/>
-                        </a:rPr>
-                        <m:t>𝛽</m:t>
-                      </m:r>
-                      <m:r>
-                        <a:rPr lang="en-US" altLang="zh-TW" sz="2700" i="1">
-                          <a:latin typeface="Cambria Math" panose="02040503050406030204" pitchFamily="18" charset="0"/>
-                        </a:rPr>
-                        <m:t>=</m:t>
-                      </m:r>
-                      <m:r>
-                        <a:rPr lang="en-US" altLang="zh-TW" sz="2700" i="1">
-                          <a:latin typeface="Cambria Math" panose="02040503050406030204" pitchFamily="18" charset="0"/>
-                        </a:rPr>
-                        <m:t>𝜋</m:t>
-                      </m:r>
-                      <m:r>
-                        <a:rPr lang="en-US" altLang="zh-TW" sz="2700" i="1">
-                          <a:latin typeface="Cambria Math" panose="02040503050406030204" pitchFamily="18" charset="0"/>
-                        </a:rPr>
-                        <m:t>/2</m:t>
-                      </m:r>
-                    </m:oMath>
-                  </a14:m>
-                  <a:endParaRPr lang="zh-TW" altLang="en-US" sz="2700" dirty="0"/>
-                </a:p>
-              </p:txBody>
-            </p:sp>
-          </mc:Choice>
-          <mc:Fallback>
-            <p:sp>
-              <p:nvSpPr>
-                <p:cNvPr id="81" name="文字方塊 80">
-                  <a:extLst>
-                    <a:ext uri="{FF2B5EF4-FFF2-40B4-BE49-F238E27FC236}">
-                      <a16:creationId xmlns:a16="http://schemas.microsoft.com/office/drawing/2014/main" id="{7CA7E072-1D8B-40FF-A423-DEA0E6B6BA9F}"/>
-                    </a:ext>
-                  </a:extLst>
-                </p:cNvPr>
-                <p:cNvSpPr txBox="1">
-                  <a:spLocks noRot="1" noChangeAspect="1" noMove="1" noResize="1" noEditPoints="1" noAdjustHandles="1" noChangeArrowheads="1" noChangeShapeType="1" noTextEdit="1"/>
-                </p:cNvSpPr>
-                <p:nvPr/>
-              </p:nvSpPr>
-              <p:spPr>
-                <a:xfrm>
-                  <a:off x="2089825" y="565087"/>
-                  <a:ext cx="6572379" cy="526619"/>
-                </a:xfrm>
-                <a:prstGeom prst="rect">
-                  <a:avLst/>
-                </a:prstGeom>
-                <a:blipFill>
-                  <a:blip r:embed="rId2"/>
-                  <a:stretch>
-                    <a:fillRect t="-12791" b="-25581"/>
-                  </a:stretch>
-                </a:blipFill>
-              </p:spPr>
-              <p:txBody>
-                <a:bodyPr/>
-                <a:lstStyle/>
-                <a:p>
-                  <a:r>
-                    <a:rPr lang="zh-TW" altLang="en-US">
-                      <a:noFill/>
-                    </a:rPr>
-                    <a:t> </a:t>
-                  </a:r>
-                </a:p>
-              </p:txBody>
-            </p:sp>
-          </mc:Fallback>
-        </mc:AlternateContent>
-        <p:grpSp>
-          <p:nvGrpSpPr>
-            <p:cNvPr id="110" name="群組 109">
-              <a:extLst>
-                <a:ext uri="{FF2B5EF4-FFF2-40B4-BE49-F238E27FC236}">
-                  <a16:creationId xmlns:a16="http://schemas.microsoft.com/office/drawing/2014/main" id="{C549E9CD-F5D7-4AC7-84BE-AD4FA7751BE7}"/>
+                  <a16:creationId xmlns:a16="http://schemas.microsoft.com/office/drawing/2014/main" id="{FF7FCB96-36C3-420E-A62B-C505A647D741}"/>
                 </a:ext>
               </a:extLst>
             </p:cNvPr>
@@ -3847,1031 +3847,20 @@
           </p:nvGrpSpPr>
           <p:grpSpPr>
             <a:xfrm>
-              <a:off x="2219678" y="1152736"/>
-              <a:ext cx="5933596" cy="3885347"/>
-              <a:chOff x="3220094" y="1092200"/>
-              <a:chExt cx="6812044" cy="5701155"/>
+              <a:off x="3220094" y="1153911"/>
+              <a:ext cx="6812044" cy="5639444"/>
+              <a:chOff x="3677951" y="2003456"/>
+              <a:chExt cx="5309655" cy="3960095"/>
             </a:xfrm>
           </p:grpSpPr>
-          <p:grpSp>
-            <p:nvGrpSpPr>
-              <p:cNvPr id="90" name="群組 89">
-                <a:extLst>
-                  <a:ext uri="{FF2B5EF4-FFF2-40B4-BE49-F238E27FC236}">
-                    <a16:creationId xmlns:a16="http://schemas.microsoft.com/office/drawing/2014/main" id="{FF7FCB96-36C3-420E-A62B-C505A647D741}"/>
-                  </a:ext>
-                </a:extLst>
-              </p:cNvPr>
-              <p:cNvGrpSpPr/>
-              <p:nvPr/>
-            </p:nvGrpSpPr>
-            <p:grpSpPr>
-              <a:xfrm>
-                <a:off x="3220094" y="1153911"/>
-                <a:ext cx="6812044" cy="5639444"/>
-                <a:chOff x="3677951" y="2003456"/>
-                <a:chExt cx="5309655" cy="3960095"/>
-              </a:xfrm>
-            </p:grpSpPr>
-            <mc:AlternateContent xmlns:mc="http://schemas.openxmlformats.org/markup-compatibility/2006">
-              <mc:Choice xmlns:a14="http://schemas.microsoft.com/office/drawing/2010/main" Requires="a14">
-                <p:sp>
-                  <p:nvSpPr>
-                    <p:cNvPr id="92" name="文字方塊 91">
-                      <a:extLst>
-                        <a:ext uri="{FF2B5EF4-FFF2-40B4-BE49-F238E27FC236}">
-                          <a16:creationId xmlns:a16="http://schemas.microsoft.com/office/drawing/2014/main" id="{B315D0CD-69B8-4E42-A7E0-B00D0330CD04}"/>
-                        </a:ext>
-                      </a:extLst>
-                    </p:cNvPr>
-                    <p:cNvSpPr txBox="1"/>
-                    <p:nvPr/>
-                  </p:nvSpPr>
-                  <p:spPr>
-                    <a:xfrm>
-                      <a:off x="3677951" y="5469400"/>
-                      <a:ext cx="935697" cy="486795"/>
-                    </a:xfrm>
-                    <a:prstGeom prst="rect">
-                      <a:avLst/>
-                    </a:prstGeom>
-                    <a:noFill/>
-                  </p:spPr>
-                  <p:txBody>
-                    <a:bodyPr wrap="square" rtlCol="0">
-                      <a:spAutoFit/>
-                    </a:bodyPr>
-                    <a:lstStyle/>
-                    <a:p>
-                      <a:pPr algn="ctr"/>
-                      <a14:m>
-                        <m:oMathPara xmlns:m="http://schemas.openxmlformats.org/officeDocument/2006/math">
-                          <m:oMathParaPr>
-                            <m:jc m:val="centerGroup"/>
-                          </m:oMathParaPr>
-                          <m:oMath xmlns:m="http://schemas.openxmlformats.org/officeDocument/2006/math">
-                            <m:r>
-                              <a:rPr lang="en-US" altLang="zh-TW" sz="2470" i="1">
-                                <a:latin typeface="Cambria Math" panose="02040503050406030204" pitchFamily="18" charset="0"/>
-                              </a:rPr>
-                              <m:t>𝛼</m:t>
-                            </m:r>
-                            <m:r>
-                              <a:rPr lang="en-US" altLang="zh-TW" sz="2470" i="1">
-                                <a:latin typeface="Cambria Math" panose="02040503050406030204" pitchFamily="18" charset="0"/>
-                              </a:rPr>
-                              <m:t>=0</m:t>
-                            </m:r>
-                          </m:oMath>
-                        </m:oMathPara>
-                      </a14:m>
-                      <a:endParaRPr lang="zh-TW" altLang="en-US" sz="2470" dirty="0"/>
-                    </a:p>
-                  </p:txBody>
-                </p:sp>
-              </mc:Choice>
-              <mc:Fallback>
-                <p:sp>
-                  <p:nvSpPr>
-                    <p:cNvPr id="92" name="文字方塊 91">
-                      <a:extLst>
-                        <a:ext uri="{FF2B5EF4-FFF2-40B4-BE49-F238E27FC236}">
-                          <a16:creationId xmlns:a16="http://schemas.microsoft.com/office/drawing/2014/main" id="{B315D0CD-69B8-4E42-A7E0-B00D0330CD04}"/>
-                        </a:ext>
-                      </a:extLst>
-                    </p:cNvPr>
-                    <p:cNvSpPr txBox="1">
-                      <a:spLocks noRot="1" noChangeAspect="1" noMove="1" noResize="1" noEditPoints="1" noAdjustHandles="1" noChangeArrowheads="1" noChangeShapeType="1" noTextEdit="1"/>
-                    </p:cNvSpPr>
-                    <p:nvPr/>
-                  </p:nvSpPr>
-                  <p:spPr>
-                    <a:xfrm>
-                      <a:off x="3677951" y="5469400"/>
-                      <a:ext cx="935697" cy="486795"/>
-                    </a:xfrm>
-                    <a:prstGeom prst="rect">
-                      <a:avLst/>
-                    </a:prstGeom>
-                    <a:blipFill>
-                      <a:blip r:embed="rId3"/>
-                      <a:stretch>
-                        <a:fillRect/>
-                      </a:stretch>
-                    </a:blipFill>
-                  </p:spPr>
-                  <p:txBody>
-                    <a:bodyPr/>
-                    <a:lstStyle/>
-                    <a:p>
-                      <a:r>
-                        <a:rPr lang="zh-TW" altLang="en-US">
-                          <a:noFill/>
-                        </a:rPr>
-                        <a:t> </a:t>
-                      </a:r>
-                    </a:p>
-                  </p:txBody>
-                </p:sp>
-              </mc:Fallback>
-            </mc:AlternateContent>
-            <mc:AlternateContent xmlns:mc="http://schemas.openxmlformats.org/markup-compatibility/2006">
-              <mc:Choice xmlns:a14="http://schemas.microsoft.com/office/drawing/2010/main" Requires="a14">
-                <p:sp>
-                  <p:nvSpPr>
-                    <p:cNvPr id="93" name="文字方塊 92">
-                      <a:extLst>
-                        <a:ext uri="{FF2B5EF4-FFF2-40B4-BE49-F238E27FC236}">
-                          <a16:creationId xmlns:a16="http://schemas.microsoft.com/office/drawing/2014/main" id="{E959E21E-866F-4164-9EC6-2DA255030BF4}"/>
-                        </a:ext>
-                      </a:extLst>
-                    </p:cNvPr>
-                    <p:cNvSpPr txBox="1"/>
-                    <p:nvPr/>
-                  </p:nvSpPr>
-                  <p:spPr>
-                    <a:xfrm>
-                      <a:off x="8443936" y="5469401"/>
-                      <a:ext cx="543670" cy="486795"/>
-                    </a:xfrm>
-                    <a:prstGeom prst="rect">
-                      <a:avLst/>
-                    </a:prstGeom>
-                    <a:noFill/>
-                  </p:spPr>
-                  <p:txBody>
-                    <a:bodyPr wrap="square" rtlCol="0">
-                      <a:spAutoFit/>
-                    </a:bodyPr>
-                    <a:lstStyle/>
-                    <a:p>
-                      <a:pPr algn="ctr"/>
-                      <a14:m>
-                        <m:oMathPara xmlns:m="http://schemas.openxmlformats.org/officeDocument/2006/math">
-                          <m:oMathParaPr>
-                            <m:jc m:val="centerGroup"/>
-                          </m:oMathParaPr>
-                          <m:oMath xmlns:m="http://schemas.openxmlformats.org/officeDocument/2006/math">
-                            <m:r>
-                              <a:rPr lang="en-US" altLang="zh-TW" sz="2470" i="1">
-                                <a:latin typeface="Cambria Math" panose="02040503050406030204" pitchFamily="18" charset="0"/>
-                              </a:rPr>
-                              <m:t>2</m:t>
-                            </m:r>
-                            <m:r>
-                              <a:rPr lang="en-US" altLang="zh-TW" sz="2470" i="1">
-                                <a:latin typeface="Cambria Math" panose="02040503050406030204" pitchFamily="18" charset="0"/>
-                              </a:rPr>
-                              <m:t>𝜋</m:t>
-                            </m:r>
-                          </m:oMath>
-                        </m:oMathPara>
-                      </a14:m>
-                      <a:endParaRPr lang="zh-TW" altLang="en-US" sz="2470" dirty="0"/>
-                    </a:p>
-                  </p:txBody>
-                </p:sp>
-              </mc:Choice>
-              <mc:Fallback>
-                <p:sp>
-                  <p:nvSpPr>
-                    <p:cNvPr id="93" name="文字方塊 92">
-                      <a:extLst>
-                        <a:ext uri="{FF2B5EF4-FFF2-40B4-BE49-F238E27FC236}">
-                          <a16:creationId xmlns:a16="http://schemas.microsoft.com/office/drawing/2014/main" id="{E959E21E-866F-4164-9EC6-2DA255030BF4}"/>
-                        </a:ext>
-                      </a:extLst>
-                    </p:cNvPr>
-                    <p:cNvSpPr txBox="1">
-                      <a:spLocks noRot="1" noChangeAspect="1" noMove="1" noResize="1" noEditPoints="1" noAdjustHandles="1" noChangeArrowheads="1" noChangeShapeType="1" noTextEdit="1"/>
-                    </p:cNvSpPr>
-                    <p:nvPr/>
-                  </p:nvSpPr>
-                  <p:spPr>
-                    <a:xfrm>
-                      <a:off x="8443936" y="5469401"/>
-                      <a:ext cx="543670" cy="486795"/>
-                    </a:xfrm>
-                    <a:prstGeom prst="rect">
-                      <a:avLst/>
-                    </a:prstGeom>
-                    <a:blipFill>
-                      <a:blip r:embed="rId4"/>
-                      <a:stretch>
-                        <a:fillRect l="-3030"/>
-                      </a:stretch>
-                    </a:blipFill>
-                  </p:spPr>
-                  <p:txBody>
-                    <a:bodyPr/>
-                    <a:lstStyle/>
-                    <a:p>
-                      <a:r>
-                        <a:rPr lang="zh-TW" altLang="en-US">
-                          <a:noFill/>
-                        </a:rPr>
-                        <a:t> </a:t>
-                      </a:r>
-                    </a:p>
-                  </p:txBody>
-                </p:sp>
-              </mc:Fallback>
-            </mc:AlternateContent>
-            <mc:AlternateContent xmlns:mc="http://schemas.openxmlformats.org/markup-compatibility/2006">
-              <mc:Choice xmlns:a14="http://schemas.microsoft.com/office/drawing/2010/main" Requires="a14">
-                <p:sp>
-                  <p:nvSpPr>
-                    <p:cNvPr id="94" name="文字方塊 93">
-                      <a:extLst>
-                        <a:ext uri="{FF2B5EF4-FFF2-40B4-BE49-F238E27FC236}">
-                          <a16:creationId xmlns:a16="http://schemas.microsoft.com/office/drawing/2014/main" id="{D13B2A8B-882B-4987-9873-0FED454CC822}"/>
-                        </a:ext>
-                      </a:extLst>
-                    </p:cNvPr>
-                    <p:cNvSpPr txBox="1"/>
-                    <p:nvPr/>
-                  </p:nvSpPr>
-                  <p:spPr>
-                    <a:xfrm>
-                      <a:off x="5990995" y="5476756"/>
-                      <a:ext cx="865663" cy="486795"/>
-                    </a:xfrm>
-                    <a:prstGeom prst="rect">
-                      <a:avLst/>
-                    </a:prstGeom>
-                    <a:noFill/>
-                  </p:spPr>
-                  <p:txBody>
-                    <a:bodyPr wrap="square" rtlCol="0">
-                      <a:spAutoFit/>
-                    </a:bodyPr>
-                    <a:lstStyle/>
-                    <a:p>
-                      <a:pPr algn="ctr"/>
-                      <a14:m>
-                        <m:oMathPara xmlns:m="http://schemas.openxmlformats.org/officeDocument/2006/math">
-                          <m:oMathParaPr>
-                            <m:jc m:val="centerGroup"/>
-                          </m:oMathParaPr>
-                          <m:oMath xmlns:m="http://schemas.openxmlformats.org/officeDocument/2006/math">
-                            <m:r>
-                              <a:rPr lang="en-US" altLang="zh-TW" sz="2470" i="1">
-                                <a:latin typeface="Cambria Math" panose="02040503050406030204" pitchFamily="18" charset="0"/>
-                              </a:rPr>
-                              <m:t>𝜋</m:t>
-                            </m:r>
-                          </m:oMath>
-                        </m:oMathPara>
-                      </a14:m>
-                      <a:endParaRPr lang="zh-TW" altLang="en-US" sz="2470" dirty="0"/>
-                    </a:p>
-                  </p:txBody>
-                </p:sp>
-              </mc:Choice>
-              <mc:Fallback>
-                <p:sp>
-                  <p:nvSpPr>
-                    <p:cNvPr id="94" name="文字方塊 93">
-                      <a:extLst>
-                        <a:ext uri="{FF2B5EF4-FFF2-40B4-BE49-F238E27FC236}">
-                          <a16:creationId xmlns:a16="http://schemas.microsoft.com/office/drawing/2014/main" id="{D13B2A8B-882B-4987-9873-0FED454CC822}"/>
-                        </a:ext>
-                      </a:extLst>
-                    </p:cNvPr>
-                    <p:cNvSpPr txBox="1">
-                      <a:spLocks noRot="1" noChangeAspect="1" noMove="1" noResize="1" noEditPoints="1" noAdjustHandles="1" noChangeArrowheads="1" noChangeShapeType="1" noTextEdit="1"/>
-                    </p:cNvSpPr>
-                    <p:nvPr/>
-                  </p:nvSpPr>
-                  <p:spPr>
-                    <a:xfrm>
-                      <a:off x="5990995" y="5476756"/>
-                      <a:ext cx="865663" cy="486795"/>
-                    </a:xfrm>
-                    <a:prstGeom prst="rect">
-                      <a:avLst/>
-                    </a:prstGeom>
-                    <a:blipFill>
-                      <a:blip r:embed="rId5"/>
-                      <a:stretch>
-                        <a:fillRect/>
-                      </a:stretch>
-                    </a:blipFill>
-                  </p:spPr>
-                  <p:txBody>
-                    <a:bodyPr/>
-                    <a:lstStyle/>
-                    <a:p>
-                      <a:r>
-                        <a:rPr lang="zh-TW" altLang="en-US">
-                          <a:noFill/>
-                        </a:rPr>
-                        <a:t> </a:t>
-                      </a:r>
-                    </a:p>
-                  </p:txBody>
-                </p:sp>
-              </mc:Fallback>
-            </mc:AlternateContent>
-            <mc:AlternateContent xmlns:mc="http://schemas.openxmlformats.org/markup-compatibility/2006">
-              <mc:Choice xmlns:a14="http://schemas.microsoft.com/office/drawing/2010/main" Requires="a14">
-                <p:sp>
-                  <p:nvSpPr>
-                    <p:cNvPr id="95" name="文字方塊 94">
-                      <a:extLst>
-                        <a:ext uri="{FF2B5EF4-FFF2-40B4-BE49-F238E27FC236}">
-                          <a16:creationId xmlns:a16="http://schemas.microsoft.com/office/drawing/2014/main" id="{EF56A411-7952-4419-9680-98A1AFFEF81A}"/>
-                        </a:ext>
-                      </a:extLst>
-                    </p:cNvPr>
-                    <p:cNvSpPr txBox="1"/>
-                    <p:nvPr/>
-                  </p:nvSpPr>
-                  <p:spPr>
-                    <a:xfrm>
-                      <a:off x="3825999" y="2003456"/>
-                      <a:ext cx="353850" cy="486795"/>
-                    </a:xfrm>
-                    <a:prstGeom prst="rect">
-                      <a:avLst/>
-                    </a:prstGeom>
-                    <a:noFill/>
-                  </p:spPr>
-                  <p:txBody>
-                    <a:bodyPr wrap="square" rtlCol="0">
-                      <a:spAutoFit/>
-                    </a:bodyPr>
-                    <a:lstStyle/>
-                    <a:p>
-                      <a:pPr algn="ctr"/>
-                      <a14:m>
-                        <m:oMathPara xmlns:m="http://schemas.openxmlformats.org/officeDocument/2006/math">
-                          <m:oMathParaPr>
-                            <m:jc m:val="centerGroup"/>
-                          </m:oMathParaPr>
-                          <m:oMath xmlns:m="http://schemas.openxmlformats.org/officeDocument/2006/math">
-                            <m:r>
-                              <a:rPr lang="en-US" altLang="zh-TW" sz="2470" i="1">
-                                <a:latin typeface="Cambria Math" panose="02040503050406030204" pitchFamily="18" charset="0"/>
-                              </a:rPr>
-                              <m:t>1</m:t>
-                            </m:r>
-                          </m:oMath>
-                        </m:oMathPara>
-                      </a14:m>
-                      <a:endParaRPr lang="zh-TW" altLang="en-US" sz="2470" dirty="0"/>
-                    </a:p>
-                  </p:txBody>
-                </p:sp>
-              </mc:Choice>
-              <mc:Fallback>
-                <p:sp>
-                  <p:nvSpPr>
-                    <p:cNvPr id="95" name="文字方塊 94">
-                      <a:extLst>
-                        <a:ext uri="{FF2B5EF4-FFF2-40B4-BE49-F238E27FC236}">
-                          <a16:creationId xmlns:a16="http://schemas.microsoft.com/office/drawing/2014/main" id="{EF56A411-7952-4419-9680-98A1AFFEF81A}"/>
-                        </a:ext>
-                      </a:extLst>
-                    </p:cNvPr>
-                    <p:cNvSpPr txBox="1">
-                      <a:spLocks noRot="1" noChangeAspect="1" noMove="1" noResize="1" noEditPoints="1" noAdjustHandles="1" noChangeArrowheads="1" noChangeShapeType="1" noTextEdit="1"/>
-                    </p:cNvSpPr>
-                    <p:nvPr/>
-                  </p:nvSpPr>
-                  <p:spPr>
-                    <a:xfrm>
-                      <a:off x="3825999" y="2003456"/>
-                      <a:ext cx="353850" cy="486795"/>
-                    </a:xfrm>
-                    <a:prstGeom prst="rect">
-                      <a:avLst/>
-                    </a:prstGeom>
-                    <a:blipFill>
-                      <a:blip r:embed="rId6"/>
-                      <a:stretch>
-                        <a:fillRect l="-7692"/>
-                      </a:stretch>
-                    </a:blipFill>
-                  </p:spPr>
-                  <p:txBody>
-                    <a:bodyPr/>
-                    <a:lstStyle/>
-                    <a:p>
-                      <a:r>
-                        <a:rPr lang="zh-TW" altLang="en-US">
-                          <a:noFill/>
-                        </a:rPr>
-                        <a:t> </a:t>
-                      </a:r>
-                    </a:p>
-                  </p:txBody>
-                </p:sp>
-              </mc:Fallback>
-            </mc:AlternateContent>
-            <mc:AlternateContent xmlns:mc="http://schemas.openxmlformats.org/markup-compatibility/2006">
-              <mc:Choice xmlns:a14="http://schemas.microsoft.com/office/drawing/2010/main" Requires="a14">
-                <p:sp>
-                  <p:nvSpPr>
-                    <p:cNvPr id="96" name="文字方塊 95">
-                      <a:extLst>
-                        <a:ext uri="{FF2B5EF4-FFF2-40B4-BE49-F238E27FC236}">
-                          <a16:creationId xmlns:a16="http://schemas.microsoft.com/office/drawing/2014/main" id="{E1FC4C25-9C59-4E3E-A43F-FEA53E982F28}"/>
-                        </a:ext>
-                      </a:extLst>
-                    </p:cNvPr>
-                    <p:cNvSpPr txBox="1"/>
-                    <p:nvPr/>
-                  </p:nvSpPr>
-                  <p:spPr>
-                    <a:xfrm>
-                      <a:off x="3878686" y="5075200"/>
-                      <a:ext cx="248476" cy="486795"/>
-                    </a:xfrm>
-                    <a:prstGeom prst="rect">
-                      <a:avLst/>
-                    </a:prstGeom>
-                    <a:noFill/>
-                  </p:spPr>
-                  <p:txBody>
-                    <a:bodyPr wrap="square" rtlCol="0">
-                      <a:spAutoFit/>
-                    </a:bodyPr>
-                    <a:lstStyle/>
-                    <a:p>
-                      <a:pPr algn="ctr"/>
-                      <a14:m>
-                        <m:oMathPara xmlns:m="http://schemas.openxmlformats.org/officeDocument/2006/math">
-                          <m:oMathParaPr>
-                            <m:jc m:val="centerGroup"/>
-                          </m:oMathParaPr>
-                          <m:oMath xmlns:m="http://schemas.openxmlformats.org/officeDocument/2006/math">
-                            <m:r>
-                              <a:rPr lang="en-US" altLang="zh-TW" sz="2470" i="1">
-                                <a:latin typeface="Cambria Math" panose="02040503050406030204" pitchFamily="18" charset="0"/>
-                              </a:rPr>
-                              <m:t>0</m:t>
-                            </m:r>
-                          </m:oMath>
-                        </m:oMathPara>
-                      </a14:m>
-                      <a:endParaRPr lang="zh-TW" altLang="en-US" sz="2470" dirty="0"/>
-                    </a:p>
-                  </p:txBody>
-                </p:sp>
-              </mc:Choice>
-              <mc:Fallback>
-                <p:sp>
-                  <p:nvSpPr>
-                    <p:cNvPr id="96" name="文字方塊 95">
-                      <a:extLst>
-                        <a:ext uri="{FF2B5EF4-FFF2-40B4-BE49-F238E27FC236}">
-                          <a16:creationId xmlns:a16="http://schemas.microsoft.com/office/drawing/2014/main" id="{E1FC4C25-9C59-4E3E-A43F-FEA53E982F28}"/>
-                        </a:ext>
-                      </a:extLst>
-                    </p:cNvPr>
-                    <p:cNvSpPr txBox="1">
-                      <a:spLocks noRot="1" noChangeAspect="1" noMove="1" noResize="1" noEditPoints="1" noAdjustHandles="1" noChangeArrowheads="1" noChangeShapeType="1" noTextEdit="1"/>
-                    </p:cNvSpPr>
-                    <p:nvPr/>
-                  </p:nvSpPr>
-                  <p:spPr>
-                    <a:xfrm>
-                      <a:off x="3878686" y="5075200"/>
-                      <a:ext cx="248476" cy="486795"/>
-                    </a:xfrm>
-                    <a:prstGeom prst="rect">
-                      <a:avLst/>
-                    </a:prstGeom>
-                    <a:blipFill>
-                      <a:blip r:embed="rId7"/>
-                      <a:stretch>
-                        <a:fillRect l="-33333" r="-6667"/>
-                      </a:stretch>
-                    </a:blipFill>
-                  </p:spPr>
-                  <p:txBody>
-                    <a:bodyPr/>
-                    <a:lstStyle/>
-                    <a:p>
-                      <a:r>
-                        <a:rPr lang="zh-TW" altLang="en-US">
-                          <a:noFill/>
-                        </a:rPr>
-                        <a:t> </a:t>
-                      </a:r>
-                    </a:p>
-                  </p:txBody>
-                </p:sp>
-              </mc:Fallback>
-            </mc:AlternateContent>
-            <mc:AlternateContent xmlns:mc="http://schemas.openxmlformats.org/markup-compatibility/2006">
-              <mc:Choice xmlns:a14="http://schemas.microsoft.com/office/drawing/2010/main" Requires="a14">
-                <p:sp>
-                  <p:nvSpPr>
-                    <p:cNvPr id="97" name="文字方塊 96">
-                      <a:extLst>
-                        <a:ext uri="{FF2B5EF4-FFF2-40B4-BE49-F238E27FC236}">
-                          <a16:creationId xmlns:a16="http://schemas.microsoft.com/office/drawing/2014/main" id="{FDEF6E31-6CEA-40DE-8268-E67835E3C9DE}"/>
-                        </a:ext>
-                      </a:extLst>
-                    </p:cNvPr>
-                    <p:cNvSpPr txBox="1"/>
-                    <p:nvPr/>
-                  </p:nvSpPr>
-                  <p:spPr>
-                    <a:xfrm rot="16200000">
-                      <a:off x="3648200" y="3499414"/>
-                      <a:ext cx="487945" cy="422758"/>
-                    </a:xfrm>
-                    <a:prstGeom prst="rect">
-                      <a:avLst/>
-                    </a:prstGeom>
-                    <a:noFill/>
-                  </p:spPr>
-                  <p:txBody>
-                    <a:bodyPr wrap="square" rtlCol="0">
-                      <a:spAutoFit/>
-                    </a:bodyPr>
-                    <a:lstStyle/>
-                    <a:p>
-                      <a:pPr algn="ctr"/>
-                      <a14:m>
-                        <m:oMathPara xmlns:m="http://schemas.openxmlformats.org/officeDocument/2006/math">
-                          <m:oMathParaPr>
-                            <m:jc m:val="center"/>
-                          </m:oMathParaPr>
-                          <m:oMath xmlns:m="http://schemas.openxmlformats.org/officeDocument/2006/math">
-                            <m:r>
-                              <m:rPr>
-                                <m:sty m:val="p"/>
-                              </m:rPr>
-                              <a:rPr lang="en-US" altLang="zh-TW" sz="2470" dirty="0">
-                                <a:latin typeface="Cambria Math" panose="02040503050406030204" pitchFamily="18" charset="0"/>
-                              </a:rPr>
-                              <m:t>a</m:t>
-                            </m:r>
-                            <m:r>
-                              <a:rPr lang="en-US" altLang="zh-TW" sz="2470" dirty="0">
-                                <a:latin typeface="Cambria Math" panose="02040503050406030204" pitchFamily="18" charset="0"/>
-                              </a:rPr>
-                              <m:t>.</m:t>
-                            </m:r>
-                            <m:r>
-                              <m:rPr>
-                                <m:sty m:val="p"/>
-                              </m:rPr>
-                              <a:rPr lang="en-US" altLang="zh-TW" sz="2470" dirty="0">
-                                <a:latin typeface="Cambria Math" panose="02040503050406030204" pitchFamily="18" charset="0"/>
-                              </a:rPr>
-                              <m:t>u</m:t>
-                            </m:r>
-                            <m:r>
-                              <a:rPr lang="en-US" altLang="zh-TW" sz="2470" dirty="0">
-                                <a:latin typeface="Cambria Math" panose="02040503050406030204" pitchFamily="18" charset="0"/>
-                              </a:rPr>
-                              <m:t>.</m:t>
-                            </m:r>
-                          </m:oMath>
-                        </m:oMathPara>
-                      </a14:m>
-                      <a:endParaRPr lang="zh-TW" altLang="en-US" sz="2470" dirty="0"/>
-                    </a:p>
-                  </p:txBody>
-                </p:sp>
-              </mc:Choice>
-              <mc:Fallback>
-                <p:sp>
-                  <p:nvSpPr>
-                    <p:cNvPr id="97" name="文字方塊 96">
-                      <a:extLst>
-                        <a:ext uri="{FF2B5EF4-FFF2-40B4-BE49-F238E27FC236}">
-                          <a16:creationId xmlns:a16="http://schemas.microsoft.com/office/drawing/2014/main" id="{FDEF6E31-6CEA-40DE-8268-E67835E3C9DE}"/>
-                        </a:ext>
-                      </a:extLst>
-                    </p:cNvPr>
-                    <p:cNvSpPr txBox="1">
-                      <a:spLocks noRot="1" noChangeAspect="1" noMove="1" noResize="1" noEditPoints="1" noAdjustHandles="1" noChangeArrowheads="1" noChangeShapeType="1" noTextEdit="1"/>
-                    </p:cNvSpPr>
-                    <p:nvPr/>
-                  </p:nvSpPr>
-                  <p:spPr>
-                    <a:xfrm rot="16200000">
-                      <a:off x="3648200" y="3499414"/>
-                      <a:ext cx="487945" cy="422758"/>
-                    </a:xfrm>
-                    <a:prstGeom prst="rect">
-                      <a:avLst/>
-                    </a:prstGeom>
-                    <a:blipFill>
-                      <a:blip r:embed="rId8"/>
-                      <a:stretch>
-                        <a:fillRect b="-26923"/>
-                      </a:stretch>
-                    </a:blipFill>
-                  </p:spPr>
-                  <p:txBody>
-                    <a:bodyPr/>
-                    <a:lstStyle/>
-                    <a:p>
-                      <a:r>
-                        <a:rPr lang="zh-TW" altLang="en-US">
-                          <a:noFill/>
-                        </a:rPr>
-                        <a:t> </a:t>
-                      </a:r>
-                    </a:p>
-                  </p:txBody>
-                </p:sp>
-              </mc:Fallback>
-            </mc:AlternateContent>
-          </p:grpSp>
-          <p:pic>
-            <p:nvPicPr>
-              <p:cNvPr id="109" name="圖片 108">
-                <a:extLst>
-                  <a:ext uri="{FF2B5EF4-FFF2-40B4-BE49-F238E27FC236}">
-                    <a16:creationId xmlns:a16="http://schemas.microsoft.com/office/drawing/2014/main" id="{599620D1-D750-4CB6-92F0-6E1E6D67F8CB}"/>
-                  </a:ext>
-                </a:extLst>
-              </p:cNvPr>
-              <p:cNvPicPr>
-                <a:picLocks noChangeAspect="1"/>
-              </p:cNvPicPr>
-              <p:nvPr/>
-            </p:nvPicPr>
-            <p:blipFill rotWithShape="1">
-              <a:blip r:embed="rId9">
-                <a:clrChange>
-                  <a:clrFrom>
-                    <a:srgbClr val="FFFFFF"/>
-                  </a:clrFrom>
-                  <a:clrTo>
-                    <a:srgbClr val="FFFFFF">
-                      <a:alpha val="0"/>
-                    </a:srgbClr>
-                  </a:clrTo>
-                </a:clrChange>
-                <a:extLst>
-                  <a:ext uri="{28A0092B-C50C-407E-A947-70E740481C1C}">
-                    <a14:useLocalDpi xmlns:a14="http://schemas.microsoft.com/office/drawing/2010/main" val="0"/>
-                  </a:ext>
-                </a:extLst>
-              </a:blip>
-              <a:srcRect l="11196" t="10298" r="8713" b="9225"/>
-              <a:stretch/>
-            </p:blipFill>
-            <p:spPr>
-              <a:xfrm>
-                <a:off x="3695700" y="1092200"/>
-                <a:ext cx="6051940" cy="5067300"/>
-              </a:xfrm>
-              <a:prstGeom prst="rect">
-                <a:avLst/>
-              </a:prstGeom>
-            </p:spPr>
-          </p:pic>
-        </p:grpSp>
-        <p:grpSp>
-          <p:nvGrpSpPr>
-            <p:cNvPr id="100" name="群組 99">
-              <a:extLst>
-                <a:ext uri="{FF2B5EF4-FFF2-40B4-BE49-F238E27FC236}">
-                  <a16:creationId xmlns:a16="http://schemas.microsoft.com/office/drawing/2014/main" id="{A891D3DD-CA42-4E3B-862C-1E531521AF18}"/>
-                </a:ext>
-              </a:extLst>
-            </p:cNvPr>
-            <p:cNvGrpSpPr/>
-            <p:nvPr/>
-          </p:nvGrpSpPr>
-          <p:grpSpPr>
-            <a:xfrm>
-              <a:off x="7418646" y="1902599"/>
-              <a:ext cx="2045607" cy="2115996"/>
-              <a:chOff x="3931342" y="2273301"/>
-              <a:chExt cx="2319338" cy="2399146"/>
-            </a:xfrm>
-          </p:grpSpPr>
-          <p:grpSp>
-            <p:nvGrpSpPr>
-              <p:cNvPr id="101" name="群組 100">
-                <a:extLst>
-                  <a:ext uri="{FF2B5EF4-FFF2-40B4-BE49-F238E27FC236}">
-                    <a16:creationId xmlns:a16="http://schemas.microsoft.com/office/drawing/2014/main" id="{1D88D25E-8ACE-474D-99D5-98CE042D1311}"/>
-                  </a:ext>
-                </a:extLst>
-              </p:cNvPr>
-              <p:cNvGrpSpPr/>
-              <p:nvPr/>
-            </p:nvGrpSpPr>
-            <p:grpSpPr>
-              <a:xfrm>
-                <a:off x="3931342" y="2273301"/>
-                <a:ext cx="2319338" cy="2399146"/>
-                <a:chOff x="8429625" y="2279434"/>
-                <a:chExt cx="2319338" cy="2399146"/>
-              </a:xfrm>
-            </p:grpSpPr>
-            <p:sp>
-              <p:nvSpPr>
-                <p:cNvPr id="103" name="矩形: 圓角 102">
-                  <a:extLst>
-                    <a:ext uri="{FF2B5EF4-FFF2-40B4-BE49-F238E27FC236}">
-                      <a16:creationId xmlns:a16="http://schemas.microsoft.com/office/drawing/2014/main" id="{0F8570AA-B79B-4813-8A09-F41912059DEF}"/>
-                    </a:ext>
-                  </a:extLst>
-                </p:cNvPr>
-                <p:cNvSpPr/>
-                <p:nvPr/>
-              </p:nvSpPr>
-              <p:spPr>
-                <a:xfrm>
-                  <a:off x="8429625" y="2279434"/>
-                  <a:ext cx="2319338" cy="2399146"/>
-                </a:xfrm>
-                <a:prstGeom prst="roundRect">
-                  <a:avLst>
-                    <a:gd name="adj" fmla="val 2487"/>
-                  </a:avLst>
-                </a:prstGeom>
-                <a:gradFill>
-                  <a:gsLst>
-                    <a:gs pos="100000">
-                      <a:schemeClr val="bg1">
-                        <a:lumMod val="95000"/>
-                      </a:schemeClr>
-                    </a:gs>
-                    <a:gs pos="0">
-                      <a:schemeClr val="bg1">
-                        <a:lumMod val="85000"/>
-                      </a:schemeClr>
-                    </a:gs>
-                  </a:gsLst>
-                </a:gradFill>
-              </p:spPr>
-              <p:style>
-                <a:lnRef idx="0">
-                  <a:schemeClr val="accent3"/>
-                </a:lnRef>
-                <a:fillRef idx="3">
-                  <a:schemeClr val="accent3"/>
-                </a:fillRef>
-                <a:effectRef idx="3">
-                  <a:schemeClr val="accent3"/>
-                </a:effectRef>
-                <a:fontRef idx="minor">
-                  <a:schemeClr val="lt1"/>
-                </a:fontRef>
-              </p:style>
-              <p:txBody>
-                <a:bodyPr rot="0" spcFirstLastPara="0" vertOverflow="overflow" horzOverflow="overflow" vert="horz" wrap="square" lIns="51213" tIns="25606" rIns="51213" bIns="25606" numCol="1" spcCol="0" rtlCol="0" fromWordArt="0" anchor="ctr" anchorCtr="0" forceAA="0" compatLnSpc="1">
-                  <a:prstTxWarp prst="textNoShape">
-                    <a:avLst/>
-                  </a:prstTxWarp>
-                  <a:noAutofit/>
-                </a:bodyPr>
-                <a:lstStyle/>
-                <a:p>
-                  <a:pPr algn="ctr"/>
-                  <a:endParaRPr lang="zh-TW" altLang="en-US" sz="1008" dirty="0"/>
-                </a:p>
-              </p:txBody>
-            </p:sp>
-            <p:pic>
-              <p:nvPicPr>
-                <p:cNvPr id="104" name="圖片 103">
-                  <a:extLst>
-                    <a:ext uri="{FF2B5EF4-FFF2-40B4-BE49-F238E27FC236}">
-                      <a16:creationId xmlns:a16="http://schemas.microsoft.com/office/drawing/2014/main" id="{816EFE65-7CC6-441D-BAE1-FC184AD58417}"/>
-                    </a:ext>
-                  </a:extLst>
-                </p:cNvPr>
-                <p:cNvPicPr>
-                  <a:picLocks noChangeAspect="1"/>
-                </p:cNvPicPr>
-                <p:nvPr/>
-              </p:nvPicPr>
-              <p:blipFill rotWithShape="1">
-                <a:blip r:embed="rId10">
-                  <a:clrChange>
-                    <a:clrFrom>
-                      <a:srgbClr val="FFFFFF"/>
-                    </a:clrFrom>
-                    <a:clrTo>
-                      <a:srgbClr val="FFFFFF">
-                        <a:alpha val="0"/>
-                      </a:srgbClr>
-                    </a:clrTo>
-                  </a:clrChange>
-                </a:blip>
-                <a:srcRect l="24815" r="49907"/>
-                <a:stretch/>
-              </p:blipFill>
-              <p:spPr>
-                <a:xfrm>
-                  <a:off x="9507740" y="2996758"/>
-                  <a:ext cx="1061469" cy="384394"/>
-                </a:xfrm>
-                <a:prstGeom prst="rect">
-                  <a:avLst/>
-                </a:prstGeom>
-              </p:spPr>
-            </p:pic>
-            <p:pic>
-              <p:nvPicPr>
-                <p:cNvPr id="105" name="圖片 104">
-                  <a:extLst>
-                    <a:ext uri="{FF2B5EF4-FFF2-40B4-BE49-F238E27FC236}">
-                      <a16:creationId xmlns:a16="http://schemas.microsoft.com/office/drawing/2014/main" id="{ADC94B57-B79E-42F7-B251-D11376F3F57E}"/>
-                    </a:ext>
-                  </a:extLst>
-                </p:cNvPr>
-                <p:cNvPicPr>
-                  <a:picLocks noChangeAspect="1"/>
-                </p:cNvPicPr>
-                <p:nvPr/>
-              </p:nvPicPr>
-              <p:blipFill rotWithShape="1">
-                <a:blip r:embed="rId10">
-                  <a:clrChange>
-                    <a:clrFrom>
-                      <a:srgbClr val="FFFFFF"/>
-                    </a:clrFrom>
-                    <a:clrTo>
-                      <a:srgbClr val="FFFFFF">
-                        <a:alpha val="0"/>
-                      </a:srgbClr>
-                    </a:clrTo>
-                  </a:clrChange>
-                </a:blip>
-                <a:srcRect r="74861"/>
-                <a:stretch/>
-              </p:blipFill>
-              <p:spPr>
-                <a:xfrm>
-                  <a:off x="9507740" y="2410917"/>
-                  <a:ext cx="1055637" cy="384394"/>
-                </a:xfrm>
-                <a:prstGeom prst="rect">
-                  <a:avLst/>
-                </a:prstGeom>
-              </p:spPr>
-            </p:pic>
-            <p:pic>
-              <p:nvPicPr>
-                <p:cNvPr id="106" name="圖片 105">
-                  <a:extLst>
-                    <a:ext uri="{FF2B5EF4-FFF2-40B4-BE49-F238E27FC236}">
-                      <a16:creationId xmlns:a16="http://schemas.microsoft.com/office/drawing/2014/main" id="{9B0D56D2-4D2E-4AD0-B6D2-F775797A4BB5}"/>
-                    </a:ext>
-                  </a:extLst>
-                </p:cNvPr>
-                <p:cNvPicPr>
-                  <a:picLocks noChangeAspect="1"/>
-                </p:cNvPicPr>
-                <p:nvPr/>
-              </p:nvPicPr>
-              <p:blipFill rotWithShape="1">
-                <a:blip r:embed="rId10">
-                  <a:clrChange>
-                    <a:clrFrom>
-                      <a:srgbClr val="FFFFFF"/>
-                    </a:clrFrom>
-                    <a:clrTo>
-                      <a:srgbClr val="FFFFFF">
-                        <a:alpha val="0"/>
-                      </a:srgbClr>
-                    </a:clrTo>
-                  </a:clrChange>
-                </a:blip>
-                <a:srcRect l="49861" r="24676"/>
-                <a:stretch/>
-              </p:blipFill>
-              <p:spPr>
-                <a:xfrm>
-                  <a:off x="9507740" y="3579355"/>
-                  <a:ext cx="1069247" cy="384394"/>
-                </a:xfrm>
-                <a:prstGeom prst="rect">
-                  <a:avLst/>
-                </a:prstGeom>
-              </p:spPr>
-            </p:pic>
-            <p:pic>
-              <p:nvPicPr>
-                <p:cNvPr id="107" name="圖片 106">
-                  <a:extLst>
-                    <a:ext uri="{FF2B5EF4-FFF2-40B4-BE49-F238E27FC236}">
-                      <a16:creationId xmlns:a16="http://schemas.microsoft.com/office/drawing/2014/main" id="{A0FC878E-C831-4DB8-8C7A-35ED80FC8FB5}"/>
-                    </a:ext>
-                  </a:extLst>
-                </p:cNvPr>
-                <p:cNvPicPr>
-                  <a:picLocks noChangeAspect="1"/>
-                </p:cNvPicPr>
-                <p:nvPr/>
-              </p:nvPicPr>
-              <p:blipFill rotWithShape="1">
-                <a:blip r:embed="rId10">
-                  <a:clrChange>
-                    <a:clrFrom>
-                      <a:srgbClr val="FFFFFF"/>
-                    </a:clrFrom>
-                    <a:clrTo>
-                      <a:srgbClr val="FFFFFF">
-                        <a:alpha val="0"/>
-                      </a:srgbClr>
-                    </a:clrTo>
-                  </a:clrChange>
-                </a:blip>
-                <a:srcRect l="74768"/>
-                <a:stretch/>
-              </p:blipFill>
-              <p:spPr>
-                <a:xfrm>
-                  <a:off x="9507740" y="4169509"/>
-                  <a:ext cx="1059526" cy="384394"/>
-                </a:xfrm>
-                <a:prstGeom prst="rect">
-                  <a:avLst/>
-                </a:prstGeom>
-              </p:spPr>
-            </p:pic>
-          </p:grpSp>
-          <p:pic>
-            <p:nvPicPr>
-              <p:cNvPr id="102" name="圖片 101">
-                <a:extLst>
-                  <a:ext uri="{FF2B5EF4-FFF2-40B4-BE49-F238E27FC236}">
-                    <a16:creationId xmlns:a16="http://schemas.microsoft.com/office/drawing/2014/main" id="{4F1AA4D3-A4D7-4974-A36D-A1DD6F1523EF}"/>
-                  </a:ext>
-                </a:extLst>
-              </p:cNvPr>
-              <p:cNvPicPr>
-                <a:picLocks noChangeAspect="1"/>
-              </p:cNvPicPr>
-              <p:nvPr/>
-            </p:nvPicPr>
-            <p:blipFill rotWithShape="1">
-              <a:blip r:embed="rId11">
-                <a:clrChange>
-                  <a:clrFrom>
-                    <a:srgbClr val="FFFFFF"/>
-                  </a:clrFrom>
-                  <a:clrTo>
-                    <a:srgbClr val="FFFFFF">
-                      <a:alpha val="0"/>
-                    </a:srgbClr>
-                  </a:clrTo>
-                </a:clrChange>
-                <a:extLst>
-                  <a:ext uri="{28A0092B-C50C-407E-A947-70E740481C1C}">
-                    <a14:useLocalDpi xmlns:a14="http://schemas.microsoft.com/office/drawing/2010/main" val="0"/>
-                  </a:ext>
-                </a:extLst>
-              </a:blip>
-              <a:srcRect l="61194" t="34136" r="30343" b="39166"/>
-              <a:stretch/>
-            </p:blipFill>
-            <p:spPr>
-              <a:xfrm>
-                <a:off x="4064762" y="2414839"/>
-                <a:ext cx="811276" cy="2132931"/>
-              </a:xfrm>
-              <a:prstGeom prst="rect">
-                <a:avLst/>
-              </a:prstGeom>
-            </p:spPr>
-          </p:pic>
-        </p:grpSp>
-        <p:grpSp>
-          <p:nvGrpSpPr>
-            <p:cNvPr id="48" name="群組 47">
-              <a:extLst>
-                <a:ext uri="{FF2B5EF4-FFF2-40B4-BE49-F238E27FC236}">
-                  <a16:creationId xmlns:a16="http://schemas.microsoft.com/office/drawing/2014/main" id="{C442AC70-635E-4D32-8B70-E0C2CA7499E9}"/>
-                </a:ext>
-              </a:extLst>
-            </p:cNvPr>
-            <p:cNvGrpSpPr/>
-            <p:nvPr/>
-          </p:nvGrpSpPr>
-          <p:grpSpPr>
-            <a:xfrm>
-              <a:off x="535756" y="1740179"/>
-              <a:ext cx="1446191" cy="2284146"/>
-              <a:chOff x="1269221" y="-909815"/>
-              <a:chExt cx="1446191" cy="2284146"/>
-            </a:xfrm>
-          </p:grpSpPr>
-          <mc:AlternateContent xmlns:mc="http://schemas.openxmlformats.org/markup-compatibility/2006">
-            <mc:Choice xmlns:a14="http://schemas.microsoft.com/office/drawing/2010/main" Requires="a14">
+          <mc:AlternateContent xmlns:mc="http://schemas.openxmlformats.org/markup-compatibility/2006" xmlns:a14="http://schemas.microsoft.com/office/drawing/2010/main">
+            <mc:Choice Requires="a14">
               <p:sp>
                 <p:nvSpPr>
-                  <p:cNvPr id="49" name="文字方塊 48">
+                  <p:cNvPr id="92" name="文字方塊 91">
                     <a:extLst>
                       <a:ext uri="{FF2B5EF4-FFF2-40B4-BE49-F238E27FC236}">
-                        <a16:creationId xmlns:a16="http://schemas.microsoft.com/office/drawing/2014/main" id="{FBF53740-3821-4DC0-B0C2-B03AF01F965D}"/>
+                        <a16:creationId xmlns:a16="http://schemas.microsoft.com/office/drawing/2014/main" id="{B315D0CD-69B8-4E42-A7E0-B00D0330CD04}"/>
                       </a:ext>
                     </a:extLst>
                   </p:cNvPr>
@@ -4880,8 +3869,8 @@
                 </p:nvSpPr>
                 <p:spPr>
                   <a:xfrm>
-                    <a:off x="1563231" y="1035777"/>
-                    <a:ext cx="812954" cy="338554"/>
+                    <a:off x="3677951" y="5469400"/>
+                    <a:ext cx="935697" cy="486795"/>
                   </a:xfrm>
                   <a:prstGeom prst="rect">
                     <a:avLst/>
@@ -4894,7 +3883,7 @@
                   </a:bodyPr>
                   <a:lstStyle/>
                   <a:p>
-                    <a:pPr/>
+                    <a:pPr algn="ctr"/>
                     <a14:m>
                       <m:oMathPara xmlns:m="http://schemas.openxmlformats.org/officeDocument/2006/math">
                         <m:oMathParaPr>
@@ -4902,51 +3891,32 @@
                         </m:oMathParaPr>
                         <m:oMath xmlns:m="http://schemas.openxmlformats.org/officeDocument/2006/math">
                           <m:r>
-                            <a:rPr lang="en-US" altLang="zh-TW" sz="1600" i="1">
+                            <a:rPr lang="en-US" altLang="zh-TW" sz="2470" i="1">
                               <a:latin typeface="Cambria Math" panose="02040503050406030204" pitchFamily="18" charset="0"/>
                             </a:rPr>
-                            <m:t>|</m:t>
+                            <m:t>𝛼</m:t>
                           </m:r>
-                          <m:d>
-                            <m:dPr>
-                              <m:begChr m:val=""/>
-                              <m:endChr m:val="⟩"/>
-                              <m:ctrlPr>
-                                <a:rPr lang="en-US" altLang="zh-TW" sz="1600" i="1">
-                                  <a:latin typeface="Cambria Math" panose="02040503050406030204" pitchFamily="18" charset="0"/>
-                                </a:rPr>
-                              </m:ctrlPr>
-                            </m:dPr>
-                            <m:e>
-                              <m:r>
-                                <a:rPr lang="en-US" altLang="zh-TW" sz="1600" i="1">
-                                  <a:latin typeface="Cambria Math" panose="02040503050406030204" pitchFamily="18" charset="0"/>
-                                </a:rPr>
-                                <m:t>−1, </m:t>
-                              </m:r>
-                              <m:r>
-                                <a:rPr lang="en-US" altLang="zh-TW" sz="1600" i="1">
-                                  <a:latin typeface="Cambria Math" panose="02040503050406030204" pitchFamily="18" charset="0"/>
-                                </a:rPr>
-                                <m:t>1</m:t>
-                              </m:r>
-                            </m:e>
-                          </m:d>
+                          <m:r>
+                            <a:rPr lang="en-US" altLang="zh-TW" sz="2470" i="1">
+                              <a:latin typeface="Cambria Math" panose="02040503050406030204" pitchFamily="18" charset="0"/>
+                            </a:rPr>
+                            <m:t>=0</m:t>
+                          </m:r>
                         </m:oMath>
                       </m:oMathPara>
                     </a14:m>
-                    <a:endParaRPr lang="zh-TW" altLang="en-US" sz="1600" dirty="0"/>
+                    <a:endParaRPr lang="zh-TW" altLang="en-US" sz="2470" dirty="0"/>
                   </a:p>
                 </p:txBody>
               </p:sp>
             </mc:Choice>
-            <mc:Fallback>
+            <mc:Fallback xmlns="">
               <p:sp>
                 <p:nvSpPr>
-                  <p:cNvPr id="49" name="文字方塊 48">
+                  <p:cNvPr id="92" name="文字方塊 91">
                     <a:extLst>
                       <a:ext uri="{FF2B5EF4-FFF2-40B4-BE49-F238E27FC236}">
-                        <a16:creationId xmlns:a16="http://schemas.microsoft.com/office/drawing/2014/main" id="{FBF53740-3821-4DC0-B0C2-B03AF01F965D}"/>
+                        <a16:creationId xmlns:a16="http://schemas.microsoft.com/office/drawing/2014/main" id="{B315D0CD-69B8-4E42-A7E0-B00D0330CD04}"/>
                       </a:ext>
                     </a:extLst>
                   </p:cNvPr>
@@ -4957,16 +3927,16 @@
                 </p:nvSpPr>
                 <p:spPr>
                   <a:xfrm>
-                    <a:off x="1563231" y="1035777"/>
-                    <a:ext cx="812954" cy="338554"/>
+                    <a:off x="3677951" y="5469400"/>
+                    <a:ext cx="935697" cy="486795"/>
                   </a:xfrm>
                   <a:prstGeom prst="rect">
                     <a:avLst/>
                   </a:prstGeom>
                   <a:blipFill>
-                    <a:blip r:embed="rId12"/>
+                    <a:blip r:embed="rId3"/>
                     <a:stretch>
-                      <a:fillRect t="-108929" r="-47368" b="-167857"/>
+                      <a:fillRect/>
                     </a:stretch>
                   </a:blipFill>
                 </p:spPr>
@@ -4989,10 +3959,10 @@
             <mc:Choice Requires="a14">
               <p:sp>
                 <p:nvSpPr>
-                  <p:cNvPr id="50" name="文字方塊 49">
+                  <p:cNvPr id="93" name="文字方塊 92">
                     <a:extLst>
                       <a:ext uri="{FF2B5EF4-FFF2-40B4-BE49-F238E27FC236}">
-                        <a16:creationId xmlns:a16="http://schemas.microsoft.com/office/drawing/2014/main" id="{F6703772-D62D-410E-8CBB-3657AD0B1213}"/>
+                        <a16:creationId xmlns:a16="http://schemas.microsoft.com/office/drawing/2014/main" id="{E959E21E-866F-4164-9EC6-2DA255030BF4}"/>
                       </a:ext>
                     </a:extLst>
                   </p:cNvPr>
@@ -5001,8 +3971,8 @@
                 </p:nvSpPr>
                 <p:spPr>
                   <a:xfrm>
-                    <a:off x="1580027" y="-909815"/>
-                    <a:ext cx="812954" cy="338554"/>
+                    <a:off x="8443936" y="5469401"/>
+                    <a:ext cx="543670" cy="486795"/>
                   </a:xfrm>
                   <a:prstGeom prst="rect">
                     <a:avLst/>
@@ -5015,7 +3985,7 @@
                   </a:bodyPr>
                   <a:lstStyle/>
                   <a:p>
-                    <a:pPr/>
+                    <a:pPr algn="ctr"/>
                     <a14:m>
                       <m:oMathPara xmlns:m="http://schemas.openxmlformats.org/officeDocument/2006/math">
                         <m:oMathParaPr>
@@ -5023,34 +3993,21 @@
                         </m:oMathParaPr>
                         <m:oMath xmlns:m="http://schemas.openxmlformats.org/officeDocument/2006/math">
                           <m:r>
-                            <a:rPr lang="en-US" altLang="zh-TW" sz="1600" i="1">
+                            <a:rPr lang="en-US" altLang="zh-TW" sz="2470" i="1">
                               <a:latin typeface="Cambria Math" panose="02040503050406030204" pitchFamily="18" charset="0"/>
                             </a:rPr>
-                            <m:t>|</m:t>
+                            <m:t>2</m:t>
                           </m:r>
-                          <m:d>
-                            <m:dPr>
-                              <m:begChr m:val=""/>
-                              <m:endChr m:val="⟩"/>
-                              <m:ctrlPr>
-                                <a:rPr lang="en-US" altLang="zh-TW" sz="1600" i="1">
-                                  <a:latin typeface="Cambria Math" panose="02040503050406030204" pitchFamily="18" charset="0"/>
-                                </a:rPr>
-                              </m:ctrlPr>
-                            </m:dPr>
-                            <m:e>
-                              <m:r>
-                                <a:rPr lang="en-US" altLang="zh-TW" sz="1600" i="1">
-                                  <a:latin typeface="Cambria Math" panose="02040503050406030204" pitchFamily="18" charset="0"/>
-                                </a:rPr>
-                                <m:t>1, −1</m:t>
-                              </m:r>
-                            </m:e>
-                          </m:d>
+                          <m:r>
+                            <a:rPr lang="en-US" altLang="zh-TW" sz="2470" i="1">
+                              <a:latin typeface="Cambria Math" panose="02040503050406030204" pitchFamily="18" charset="0"/>
+                            </a:rPr>
+                            <m:t>𝜋</m:t>
+                          </m:r>
                         </m:oMath>
                       </m:oMathPara>
                     </a14:m>
-                    <a:endParaRPr lang="zh-TW" altLang="en-US" sz="1600" dirty="0"/>
+                    <a:endParaRPr lang="zh-TW" altLang="en-US" sz="2470" dirty="0"/>
                   </a:p>
                 </p:txBody>
               </p:sp>
@@ -5058,10 +4015,10 @@
             <mc:Fallback xmlns="">
               <p:sp>
                 <p:nvSpPr>
-                  <p:cNvPr id="110" name="文字方塊 109">
+                  <p:cNvPr id="93" name="文字方塊 92">
                     <a:extLst>
                       <a:ext uri="{FF2B5EF4-FFF2-40B4-BE49-F238E27FC236}">
-                        <a16:creationId xmlns:a16="http://schemas.microsoft.com/office/drawing/2014/main" id="{AA0071A4-0DA4-44B4-A41D-67D31117A474}"/>
+                        <a16:creationId xmlns:a16="http://schemas.microsoft.com/office/drawing/2014/main" id="{E959E21E-866F-4164-9EC6-2DA255030BF4}"/>
                       </a:ext>
                     </a:extLst>
                   </p:cNvPr>
@@ -5072,371 +4029,16 @@
                 </p:nvSpPr>
                 <p:spPr>
                   <a:xfrm>
-                    <a:off x="1580027" y="-909815"/>
-                    <a:ext cx="812954" cy="338554"/>
+                    <a:off x="8443936" y="5469401"/>
+                    <a:ext cx="543670" cy="486795"/>
                   </a:xfrm>
                   <a:prstGeom prst="rect">
                     <a:avLst/>
                   </a:prstGeom>
                   <a:blipFill>
-                    <a:blip r:embed="rId13"/>
+                    <a:blip r:embed="rId4"/>
                     <a:stretch>
-                      <a:fillRect t="-108929" r="-47368" b="-167857"/>
-                    </a:stretch>
-                  </a:blipFill>
-                </p:spPr>
-                <p:txBody>
-                  <a:bodyPr/>
-                  <a:lstStyle/>
-                  <a:p>
-                    <a:r>
-                      <a:rPr lang="zh-TW" altLang="en-US">
-                        <a:noFill/>
-                      </a:rPr>
-                      <a:t> </a:t>
-                    </a:r>
-                  </a:p>
-                </p:txBody>
-              </p:sp>
-            </mc:Fallback>
-          </mc:AlternateContent>
-          <p:sp>
-            <p:nvSpPr>
-              <p:cNvPr id="51" name="Oval 4">
-                <a:extLst>
-                  <a:ext uri="{FF2B5EF4-FFF2-40B4-BE49-F238E27FC236}">
-                    <a16:creationId xmlns:a16="http://schemas.microsoft.com/office/drawing/2014/main" id="{AFE19F3B-91E8-4FEC-917C-B2AFC2DD0EC2}"/>
-                  </a:ext>
-                </a:extLst>
-              </p:cNvPr>
-              <p:cNvSpPr/>
-              <p:nvPr/>
-            </p:nvSpPr>
-            <p:spPr>
-              <a:xfrm>
-                <a:off x="1271413" y="-529397"/>
-                <a:ext cx="1443999" cy="1495797"/>
-              </a:xfrm>
-              <a:prstGeom prst="ellipse">
-                <a:avLst/>
-              </a:prstGeom>
-              <a:gradFill flip="none" rotWithShape="1">
-                <a:gsLst>
-                  <a:gs pos="100000">
-                    <a:schemeClr val="accent3">
-                      <a:lumMod val="60000"/>
-                      <a:lumOff val="40000"/>
-                      <a:alpha val="60000"/>
-                    </a:schemeClr>
-                  </a:gs>
-                  <a:gs pos="55000">
-                    <a:schemeClr val="accent3">
-                      <a:lumMod val="40000"/>
-                      <a:lumOff val="60000"/>
-                      <a:alpha val="60000"/>
-                    </a:schemeClr>
-                  </a:gs>
-                  <a:gs pos="0">
-                    <a:schemeClr val="bg1">
-                      <a:alpha val="60000"/>
-                    </a:schemeClr>
-                  </a:gs>
-                </a:gsLst>
-                <a:path path="circle">
-                  <a:fillToRect l="100000" b="100000"/>
-                </a:path>
-                <a:tileRect t="-100000" r="-100000"/>
-              </a:gradFill>
-              <a:ln w="57150">
-                <a:solidFill>
-                  <a:srgbClr val="D5D7DA"/>
-                </a:solidFill>
-              </a:ln>
-            </p:spPr>
-            <p:style>
-              <a:lnRef idx="2">
-                <a:schemeClr val="accent1">
-                  <a:shade val="50000"/>
-                </a:schemeClr>
-              </a:lnRef>
-              <a:fillRef idx="1">
-                <a:schemeClr val="accent1"/>
-              </a:fillRef>
-              <a:effectRef idx="0">
-                <a:schemeClr val="accent1"/>
-              </a:effectRef>
-              <a:fontRef idx="minor">
-                <a:schemeClr val="lt1"/>
-              </a:fontRef>
-            </p:style>
-            <p:txBody>
-              <a:bodyPr rtlCol="0" anchor="ctr"/>
-              <a:lstStyle/>
-              <a:p>
-                <a:pPr algn="ctr"/>
-                <a:endParaRPr lang="en-US" sz="1600" dirty="0"/>
-              </a:p>
-            </p:txBody>
-          </p:sp>
-          <p:sp>
-            <p:nvSpPr>
-              <p:cNvPr id="52" name="SHO">
-                <a:extLst>
-                  <a:ext uri="{FF2B5EF4-FFF2-40B4-BE49-F238E27FC236}">
-                    <a16:creationId xmlns:a16="http://schemas.microsoft.com/office/drawing/2014/main" id="{271EBE3E-50A2-4546-88A8-7D84E9F7DD27}"/>
-                  </a:ext>
-                </a:extLst>
-              </p:cNvPr>
-              <p:cNvSpPr/>
-              <p:nvPr/>
-            </p:nvSpPr>
-            <p:spPr>
-              <a:xfrm rot="16200000">
-                <a:off x="1679874" y="-502998"/>
-                <a:ext cx="622693" cy="1443999"/>
-              </a:xfrm>
-              <a:prstGeom prst="arc">
-                <a:avLst>
-                  <a:gd name="adj1" fmla="val 5396867"/>
-                  <a:gd name="adj2" fmla="val 5395779"/>
-                </a:avLst>
-              </a:prstGeom>
-              <a:gradFill flip="none" rotWithShape="1">
-                <a:gsLst>
-                  <a:gs pos="0">
-                    <a:schemeClr val="bg1">
-                      <a:lumMod val="65000"/>
-                    </a:schemeClr>
-                  </a:gs>
-                  <a:gs pos="47000">
-                    <a:schemeClr val="bg1">
-                      <a:lumMod val="50000"/>
-                    </a:schemeClr>
-                  </a:gs>
-                  <a:gs pos="97000">
-                    <a:srgbClr val="5E5E5E"/>
-                  </a:gs>
-                </a:gsLst>
-                <a:path path="circle">
-                  <a:fillToRect l="50000" t="50000" r="50000" b="50000"/>
-                </a:path>
-                <a:tileRect/>
-              </a:gradFill>
-              <a:ln w="31750">
-                <a:noFill/>
-              </a:ln>
-            </p:spPr>
-            <p:style>
-              <a:lnRef idx="1">
-                <a:schemeClr val="accent1"/>
-              </a:lnRef>
-              <a:fillRef idx="0">
-                <a:schemeClr val="accent1"/>
-              </a:fillRef>
-              <a:effectRef idx="0">
-                <a:schemeClr val="accent1"/>
-              </a:effectRef>
-              <a:fontRef idx="minor">
-                <a:schemeClr val="tx1"/>
-              </a:fontRef>
-            </p:style>
-            <p:txBody>
-              <a:bodyPr rtlCol="0" anchor="ctr"/>
-              <a:lstStyle/>
-              <a:p>
-                <a:pPr algn="ctr"/>
-                <a:endParaRPr lang="en-US" sz="1600" dirty="0"/>
-              </a:p>
-            </p:txBody>
-          </p:sp>
-          <p:sp>
-            <p:nvSpPr>
-              <p:cNvPr id="53" name="SVO">
-                <a:extLst>
-                  <a:ext uri="{FF2B5EF4-FFF2-40B4-BE49-F238E27FC236}">
-                    <a16:creationId xmlns:a16="http://schemas.microsoft.com/office/drawing/2014/main" id="{80625FC8-72C7-41B1-9C8D-E9879A086ECC}"/>
-                  </a:ext>
-                </a:extLst>
-              </p:cNvPr>
-              <p:cNvSpPr/>
-              <p:nvPr/>
-            </p:nvSpPr>
-            <p:spPr>
-              <a:xfrm>
-                <a:off x="1629320" y="-528896"/>
-                <a:ext cx="722000" cy="1495797"/>
-              </a:xfrm>
-              <a:prstGeom prst="ellipse">
-                <a:avLst/>
-              </a:prstGeom>
-              <a:noFill/>
-              <a:ln w="25400">
-                <a:solidFill>
-                  <a:schemeClr val="bg1">
-                    <a:lumMod val="50000"/>
-                  </a:schemeClr>
-                </a:solidFill>
-                <a:prstDash val="dash"/>
-              </a:ln>
-            </p:spPr>
-            <p:style>
-              <a:lnRef idx="2">
-                <a:schemeClr val="accent1">
-                  <a:shade val="50000"/>
-                </a:schemeClr>
-              </a:lnRef>
-              <a:fillRef idx="1">
-                <a:schemeClr val="accent1"/>
-              </a:fillRef>
-              <a:effectRef idx="0">
-                <a:schemeClr val="accent1"/>
-              </a:effectRef>
-              <a:fontRef idx="minor">
-                <a:schemeClr val="lt1"/>
-              </a:fontRef>
-            </p:style>
-            <p:txBody>
-              <a:bodyPr rtlCol="0" anchor="ctr"/>
-              <a:lstStyle/>
-              <a:p>
-                <a:pPr algn="ctr"/>
-                <a:endParaRPr lang="en-US" sz="1600"/>
-              </a:p>
-            </p:txBody>
-          </p:sp>
-          <p:sp>
-            <p:nvSpPr>
-              <p:cNvPr id="54" name="Oval 6">
-                <a:extLst>
-                  <a:ext uri="{FF2B5EF4-FFF2-40B4-BE49-F238E27FC236}">
-                    <a16:creationId xmlns:a16="http://schemas.microsoft.com/office/drawing/2014/main" id="{A72BD00D-72C1-4AC1-9E18-24F79F488786}"/>
-                  </a:ext>
-                </a:extLst>
-              </p:cNvPr>
-              <p:cNvSpPr/>
-              <p:nvPr/>
-            </p:nvSpPr>
-            <p:spPr>
-              <a:xfrm rot="16200000">
-                <a:off x="1679874" y="-502998"/>
-                <a:ext cx="622693" cy="1443999"/>
-              </a:xfrm>
-              <a:prstGeom prst="ellipse">
-                <a:avLst/>
-              </a:prstGeom>
-              <a:noFill/>
-              <a:ln w="38100">
-                <a:solidFill>
-                  <a:srgbClr val="FF3300">
-                    <a:alpha val="60000"/>
-                  </a:srgbClr>
-                </a:solidFill>
-                <a:prstDash val="solid"/>
-              </a:ln>
-            </p:spPr>
-            <p:style>
-              <a:lnRef idx="2">
-                <a:schemeClr val="accent1">
-                  <a:shade val="50000"/>
-                </a:schemeClr>
-              </a:lnRef>
-              <a:fillRef idx="1">
-                <a:schemeClr val="accent1"/>
-              </a:fillRef>
-              <a:effectRef idx="0">
-                <a:schemeClr val="accent1"/>
-              </a:effectRef>
-              <a:fontRef idx="minor">
-                <a:schemeClr val="lt1"/>
-              </a:fontRef>
-            </p:style>
-            <p:txBody>
-              <a:bodyPr rtlCol="0" anchor="ctr"/>
-              <a:lstStyle/>
-              <a:p>
-                <a:pPr algn="ctr"/>
-                <a:endParaRPr lang="en-US" sz="1600" dirty="0"/>
-              </a:p>
-            </p:txBody>
-          </p:sp>
-          <mc:AlternateContent xmlns:mc="http://schemas.openxmlformats.org/markup-compatibility/2006" xmlns:a14="http://schemas.microsoft.com/office/drawing/2010/main">
-            <mc:Choice Requires="a14">
-              <p:sp>
-                <p:nvSpPr>
-                  <p:cNvPr id="55" name="TextBox 11">
-                    <a:extLst>
-                      <a:ext uri="{FF2B5EF4-FFF2-40B4-BE49-F238E27FC236}">
-                        <a16:creationId xmlns:a16="http://schemas.microsoft.com/office/drawing/2014/main" id="{2C660CDC-D9A8-44E4-B6A2-8D2E6CD6D9F3}"/>
-                      </a:ext>
-                    </a:extLst>
-                  </p:cNvPr>
-                  <p:cNvSpPr txBox="1"/>
-                  <p:nvPr/>
-                </p:nvSpPr>
-                <p:spPr>
-                  <a:xfrm>
-                    <a:off x="1441522" y="40650"/>
-                    <a:ext cx="176928" cy="338554"/>
-                  </a:xfrm>
-                  <a:prstGeom prst="rect">
-                    <a:avLst/>
-                  </a:prstGeom>
-                  <a:noFill/>
-                </p:spPr>
-                <p:txBody>
-                  <a:bodyPr wrap="square" rtlCol="0">
-                    <a:spAutoFit/>
-                  </a:bodyPr>
-                  <a:lstStyle/>
-                  <a:p>
-                    <a:pPr/>
-                    <a14:m>
-                      <m:oMathPara xmlns:m="http://schemas.openxmlformats.org/officeDocument/2006/math">
-                        <m:oMathParaPr>
-                          <m:jc m:val="centerGroup"/>
-                        </m:oMathParaPr>
-                        <m:oMath xmlns:m="http://schemas.openxmlformats.org/officeDocument/2006/math">
-                          <m:r>
-                            <a:rPr lang="en-US" sz="1600" i="1">
-                              <a:latin typeface="Cambria Math" panose="02040503050406030204" pitchFamily="18" charset="0"/>
-                            </a:rPr>
-                            <m:t>𝑥</m:t>
-                          </m:r>
-                        </m:oMath>
-                      </m:oMathPara>
-                    </a14:m>
-                    <a:endParaRPr lang="en-US" sz="1600" dirty="0"/>
-                  </a:p>
-                </p:txBody>
-              </p:sp>
-            </mc:Choice>
-            <mc:Fallback xmlns="">
-              <p:sp>
-                <p:nvSpPr>
-                  <p:cNvPr id="125" name="TextBox 11">
-                    <a:extLst>
-                      <a:ext uri="{FF2B5EF4-FFF2-40B4-BE49-F238E27FC236}">
-                        <a16:creationId xmlns:a16="http://schemas.microsoft.com/office/drawing/2014/main" id="{115660D2-D291-4CC2-9F64-AC685B91012F}"/>
-                      </a:ext>
-                    </a:extLst>
-                  </p:cNvPr>
-                  <p:cNvSpPr txBox="1">
-                    <a:spLocks noRot="1" noChangeAspect="1" noMove="1" noResize="1" noEditPoints="1" noAdjustHandles="1" noChangeArrowheads="1" noChangeShapeType="1" noTextEdit="1"/>
-                  </p:cNvSpPr>
-                  <p:nvPr/>
-                </p:nvSpPr>
-                <p:spPr>
-                  <a:xfrm>
-                    <a:off x="1441522" y="40650"/>
-                    <a:ext cx="176928" cy="338554"/>
-                  </a:xfrm>
-                  <a:prstGeom prst="rect">
-                    <a:avLst/>
-                  </a:prstGeom>
-                  <a:blipFill>
-                    <a:blip r:embed="rId14"/>
-                    <a:stretch>
-                      <a:fillRect r="-41379"/>
+                      <a:fillRect l="-3030"/>
                     </a:stretch>
                   </a:blipFill>
                 </p:spPr>
@@ -5459,10 +4061,10 @@
             <mc:Choice Requires="a14">
               <p:sp>
                 <p:nvSpPr>
-                  <p:cNvPr id="56" name="TextBox 12">
+                  <p:cNvPr id="94" name="文字方塊 93">
                     <a:extLst>
                       <a:ext uri="{FF2B5EF4-FFF2-40B4-BE49-F238E27FC236}">
-                        <a16:creationId xmlns:a16="http://schemas.microsoft.com/office/drawing/2014/main" id="{5D9434DF-9D09-4ECB-ABE4-0C76FE93439D}"/>
+                        <a16:creationId xmlns:a16="http://schemas.microsoft.com/office/drawing/2014/main" id="{D13B2A8B-882B-4987-9873-0FED454CC822}"/>
                       </a:ext>
                     </a:extLst>
                   </p:cNvPr>
@@ -5471,8 +4073,8 @@
                 </p:nvSpPr>
                 <p:spPr>
                   <a:xfrm>
-                    <a:off x="2096445" y="136047"/>
-                    <a:ext cx="176928" cy="338554"/>
+                    <a:off x="5990995" y="5476756"/>
+                    <a:ext cx="865663" cy="486795"/>
                   </a:xfrm>
                   <a:prstGeom prst="rect">
                     <a:avLst/>
@@ -5485,7 +4087,7 @@
                   </a:bodyPr>
                   <a:lstStyle/>
                   <a:p>
-                    <a:pPr/>
+                    <a:pPr algn="ctr"/>
                     <a14:m>
                       <m:oMathPara xmlns:m="http://schemas.openxmlformats.org/officeDocument/2006/math">
                         <m:oMathParaPr>
@@ -5493,15 +4095,15 @@
                         </m:oMathParaPr>
                         <m:oMath xmlns:m="http://schemas.openxmlformats.org/officeDocument/2006/math">
                           <m:r>
-                            <a:rPr lang="en-US" sz="1600" i="1">
+                            <a:rPr lang="en-US" altLang="zh-TW" sz="2470" i="1">
                               <a:latin typeface="Cambria Math" panose="02040503050406030204" pitchFamily="18" charset="0"/>
                             </a:rPr>
-                            <m:t>𝑦</m:t>
+                            <m:t>𝜋</m:t>
                           </m:r>
                         </m:oMath>
                       </m:oMathPara>
                     </a14:m>
-                    <a:endParaRPr lang="en-US" sz="1600" dirty="0"/>
+                    <a:endParaRPr lang="zh-TW" altLang="en-US" sz="2470" dirty="0"/>
                   </a:p>
                 </p:txBody>
               </p:sp>
@@ -5509,10 +4111,10 @@
             <mc:Fallback xmlns="">
               <p:sp>
                 <p:nvSpPr>
-                  <p:cNvPr id="127" name="TextBox 12">
+                  <p:cNvPr id="94" name="文字方塊 93">
                     <a:extLst>
                       <a:ext uri="{FF2B5EF4-FFF2-40B4-BE49-F238E27FC236}">
-                        <a16:creationId xmlns:a16="http://schemas.microsoft.com/office/drawing/2014/main" id="{3BFF9703-6F9D-4BE1-800D-35E8D1FA7574}"/>
+                        <a16:creationId xmlns:a16="http://schemas.microsoft.com/office/drawing/2014/main" id="{D13B2A8B-882B-4987-9873-0FED454CC822}"/>
                       </a:ext>
                     </a:extLst>
                   </p:cNvPr>
@@ -5523,16 +4125,16 @@
                 </p:nvSpPr>
                 <p:spPr>
                   <a:xfrm>
-                    <a:off x="2096445" y="136047"/>
-                    <a:ext cx="176928" cy="338554"/>
+                    <a:off x="5990995" y="5476756"/>
+                    <a:ext cx="865663" cy="486795"/>
                   </a:xfrm>
                   <a:prstGeom prst="rect">
                     <a:avLst/>
                   </a:prstGeom>
                   <a:blipFill>
-                    <a:blip r:embed="rId15"/>
+                    <a:blip r:embed="rId5"/>
                     <a:stretch>
-                      <a:fillRect r="-51724" b="-3636"/>
+                      <a:fillRect/>
                     </a:stretch>
                   </a:blipFill>
                 </p:spPr>
@@ -5555,10 +4157,10 @@
             <mc:Choice Requires="a14">
               <p:sp>
                 <p:nvSpPr>
-                  <p:cNvPr id="57" name="TextBox 13">
+                  <p:cNvPr id="95" name="文字方塊 94">
                     <a:extLst>
                       <a:ext uri="{FF2B5EF4-FFF2-40B4-BE49-F238E27FC236}">
-                        <a16:creationId xmlns:a16="http://schemas.microsoft.com/office/drawing/2014/main" id="{FD3E0DB0-BFA5-4C05-8197-56FED2EA48A3}"/>
+                        <a16:creationId xmlns:a16="http://schemas.microsoft.com/office/drawing/2014/main" id="{EF56A411-7952-4419-9680-98A1AFFEF81A}"/>
                       </a:ext>
                     </a:extLst>
                   </p:cNvPr>
@@ -5567,8 +4169,8 @@
                 </p:nvSpPr>
                 <p:spPr>
                   <a:xfrm>
-                    <a:off x="1852321" y="-493695"/>
-                    <a:ext cx="256967" cy="338554"/>
+                    <a:off x="3825999" y="2003456"/>
+                    <a:ext cx="353850" cy="486795"/>
                   </a:xfrm>
                   <a:prstGeom prst="rect">
                     <a:avLst/>
@@ -5581,7 +4183,7 @@
                   </a:bodyPr>
                   <a:lstStyle/>
                   <a:p>
-                    <a:pPr/>
+                    <a:pPr algn="ctr"/>
                     <a14:m>
                       <m:oMathPara xmlns:m="http://schemas.openxmlformats.org/officeDocument/2006/math">
                         <m:oMathParaPr>
@@ -5589,15 +4191,15 @@
                         </m:oMathParaPr>
                         <m:oMath xmlns:m="http://schemas.openxmlformats.org/officeDocument/2006/math">
                           <m:r>
-                            <a:rPr lang="en-US" sz="1600" i="1">
+                            <a:rPr lang="en-US" altLang="zh-TW" sz="2470" i="1">
                               <a:latin typeface="Cambria Math" panose="02040503050406030204" pitchFamily="18" charset="0"/>
                             </a:rPr>
-                            <m:t>𝑧</m:t>
+                            <m:t>1</m:t>
                           </m:r>
                         </m:oMath>
                       </m:oMathPara>
                     </a14:m>
-                    <a:endParaRPr lang="en-US" sz="1600" dirty="0"/>
+                    <a:endParaRPr lang="zh-TW" altLang="en-US" sz="2470" dirty="0"/>
                   </a:p>
                 </p:txBody>
               </p:sp>
@@ -5605,10 +4207,10 @@
             <mc:Fallback xmlns="">
               <p:sp>
                 <p:nvSpPr>
-                  <p:cNvPr id="129" name="TextBox 13">
+                  <p:cNvPr id="95" name="文字方塊 94">
                     <a:extLst>
                       <a:ext uri="{FF2B5EF4-FFF2-40B4-BE49-F238E27FC236}">
-                        <a16:creationId xmlns:a16="http://schemas.microsoft.com/office/drawing/2014/main" id="{006DB87D-4747-446D-A81F-C70C343CD78F}"/>
+                        <a16:creationId xmlns:a16="http://schemas.microsoft.com/office/drawing/2014/main" id="{EF56A411-7952-4419-9680-98A1AFFEF81A}"/>
                       </a:ext>
                     </a:extLst>
                   </p:cNvPr>
@@ -5619,16 +4221,16 @@
                 </p:nvSpPr>
                 <p:spPr>
                   <a:xfrm>
-                    <a:off x="1852321" y="-493695"/>
-                    <a:ext cx="256967" cy="338554"/>
+                    <a:off x="3825999" y="2003456"/>
+                    <a:ext cx="353850" cy="486795"/>
                   </a:xfrm>
                   <a:prstGeom prst="rect">
                     <a:avLst/>
                   </a:prstGeom>
                   <a:blipFill>
-                    <a:blip r:embed="rId16"/>
+                    <a:blip r:embed="rId6"/>
                     <a:stretch>
-                      <a:fillRect/>
+                      <a:fillRect l="-7692"/>
                     </a:stretch>
                   </a:blipFill>
                 </p:spPr>
@@ -5647,280 +4249,14 @@
               </p:sp>
             </mc:Fallback>
           </mc:AlternateContent>
-          <p:sp>
-            <p:nvSpPr>
-              <p:cNvPr id="58" name="DVO">
-                <a:extLst>
-                  <a:ext uri="{FF2B5EF4-FFF2-40B4-BE49-F238E27FC236}">
-                    <a16:creationId xmlns:a16="http://schemas.microsoft.com/office/drawing/2014/main" id="{8014F4CC-016E-429A-A39F-EF381543DB95}"/>
-                  </a:ext>
-                </a:extLst>
-              </p:cNvPr>
-              <p:cNvSpPr/>
-              <p:nvPr/>
-            </p:nvSpPr>
-            <p:spPr>
-              <a:xfrm flipH="1">
-                <a:off x="1629320" y="-528896"/>
-                <a:ext cx="722000" cy="1495797"/>
-              </a:xfrm>
-              <a:prstGeom prst="arc">
-                <a:avLst>
-                  <a:gd name="adj1" fmla="val 5396867"/>
-                  <a:gd name="adj2" fmla="val 16170484"/>
-                </a:avLst>
-              </a:prstGeom>
-              <a:ln w="25400">
-                <a:solidFill>
-                  <a:schemeClr val="bg1">
-                    <a:lumMod val="50000"/>
-                  </a:schemeClr>
-                </a:solidFill>
-              </a:ln>
-            </p:spPr>
-            <p:style>
-              <a:lnRef idx="1">
-                <a:schemeClr val="accent1"/>
-              </a:lnRef>
-              <a:fillRef idx="0">
-                <a:schemeClr val="accent1"/>
-              </a:fillRef>
-              <a:effectRef idx="0">
-                <a:schemeClr val="accent1"/>
-              </a:effectRef>
-              <a:fontRef idx="minor">
-                <a:schemeClr val="tx1"/>
-              </a:fontRef>
-            </p:style>
-            <p:txBody>
-              <a:bodyPr rtlCol="0" anchor="ctr"/>
-              <a:lstStyle/>
-              <a:p>
-                <a:pPr algn="ctr"/>
-                <a:endParaRPr lang="en-US" sz="1600" dirty="0"/>
-              </a:p>
-            </p:txBody>
-          </p:sp>
-          <p:cxnSp>
-            <p:nvCxnSpPr>
-              <p:cNvPr id="60" name="Straight Arrow Connector 7">
-                <a:extLst>
-                  <a:ext uri="{FF2B5EF4-FFF2-40B4-BE49-F238E27FC236}">
-                    <a16:creationId xmlns:a16="http://schemas.microsoft.com/office/drawing/2014/main" id="{0F735830-0119-41EE-8B88-9E1CEF71A068}"/>
-                  </a:ext>
-                </a:extLst>
-              </p:cNvPr>
-              <p:cNvCxnSpPr>
-                <a:cxnSpLocks/>
-              </p:cNvCxnSpPr>
-              <p:nvPr/>
-            </p:nvCxnSpPr>
-            <p:spPr>
-              <a:xfrm flipV="1">
-                <a:off x="1987289" y="-229080"/>
-                <a:ext cx="1697" cy="445890"/>
-              </a:xfrm>
-              <a:prstGeom prst="straightConnector1">
-                <a:avLst/>
-              </a:prstGeom>
-              <a:ln w="12700">
-                <a:solidFill>
-                  <a:schemeClr val="tx1"/>
-                </a:solidFill>
-                <a:tailEnd type="triangle" w="med" len="lg"/>
-              </a:ln>
-            </p:spPr>
-            <p:style>
-              <a:lnRef idx="1">
-                <a:schemeClr val="accent1"/>
-              </a:lnRef>
-              <a:fillRef idx="0">
-                <a:schemeClr val="accent1"/>
-              </a:fillRef>
-              <a:effectRef idx="0">
-                <a:schemeClr val="accent1"/>
-              </a:effectRef>
-              <a:fontRef idx="minor">
-                <a:schemeClr val="tx1"/>
-              </a:fontRef>
-            </p:style>
-          </p:cxnSp>
-          <p:cxnSp>
-            <p:nvCxnSpPr>
-              <p:cNvPr id="61" name="Straight Arrow Connector 19">
-                <a:extLst>
-                  <a:ext uri="{FF2B5EF4-FFF2-40B4-BE49-F238E27FC236}">
-                    <a16:creationId xmlns:a16="http://schemas.microsoft.com/office/drawing/2014/main" id="{39E2CFE6-71B5-48A8-A33D-0F7BAF74F818}"/>
-                  </a:ext>
-                </a:extLst>
-              </p:cNvPr>
-              <p:cNvCxnSpPr>
-                <a:cxnSpLocks/>
-              </p:cNvCxnSpPr>
-              <p:nvPr/>
-            </p:nvCxnSpPr>
-            <p:spPr>
-              <a:xfrm>
-                <a:off x="1990273" y="214626"/>
-                <a:ext cx="195802" cy="156763"/>
-              </a:xfrm>
-              <a:prstGeom prst="straightConnector1">
-                <a:avLst/>
-              </a:prstGeom>
-              <a:ln w="12700">
-                <a:solidFill>
-                  <a:schemeClr val="tx1"/>
-                </a:solidFill>
-                <a:tailEnd type="triangle" w="med" len="lg"/>
-              </a:ln>
-            </p:spPr>
-            <p:style>
-              <a:lnRef idx="1">
-                <a:schemeClr val="accent1"/>
-              </a:lnRef>
-              <a:fillRef idx="0">
-                <a:schemeClr val="accent1"/>
-              </a:fillRef>
-              <a:effectRef idx="0">
-                <a:schemeClr val="accent1"/>
-              </a:effectRef>
-              <a:fontRef idx="minor">
-                <a:schemeClr val="tx1"/>
-              </a:fontRef>
-            </p:style>
-          </p:cxnSp>
-          <p:cxnSp>
-            <p:nvCxnSpPr>
-              <p:cNvPr id="62" name="Straight Arrow Connector 18">
-                <a:extLst>
-                  <a:ext uri="{FF2B5EF4-FFF2-40B4-BE49-F238E27FC236}">
-                    <a16:creationId xmlns:a16="http://schemas.microsoft.com/office/drawing/2014/main" id="{77E2241E-E6BD-4C5C-BF46-A54DF191C714}"/>
-                  </a:ext>
-                </a:extLst>
-              </p:cNvPr>
-              <p:cNvCxnSpPr>
-                <a:cxnSpLocks/>
-              </p:cNvCxnSpPr>
-              <p:nvPr/>
-            </p:nvCxnSpPr>
-            <p:spPr>
-              <a:xfrm rot="16200000" flipH="1" flipV="1">
-                <a:off x="1818951" y="43150"/>
-                <a:ext cx="0" cy="342950"/>
-              </a:xfrm>
-              <a:prstGeom prst="straightConnector1">
-                <a:avLst/>
-              </a:prstGeom>
-              <a:ln w="12700">
-                <a:solidFill>
-                  <a:schemeClr val="tx1"/>
-                </a:solidFill>
-                <a:tailEnd type="triangle" w="med" len="lg"/>
-              </a:ln>
-            </p:spPr>
-            <p:style>
-              <a:lnRef idx="1">
-                <a:schemeClr val="accent1"/>
-              </a:lnRef>
-              <a:fillRef idx="0">
-                <a:schemeClr val="accent1"/>
-              </a:fillRef>
-              <a:effectRef idx="0">
-                <a:schemeClr val="accent1"/>
-              </a:effectRef>
-              <a:fontRef idx="minor">
-                <a:schemeClr val="tx1"/>
-              </a:fontRef>
-            </p:style>
-          </p:cxnSp>
-          <p:sp>
-            <p:nvSpPr>
-              <p:cNvPr id="65" name="Partial Circle 9">
-                <a:extLst>
-                  <a:ext uri="{FF2B5EF4-FFF2-40B4-BE49-F238E27FC236}">
-                    <a16:creationId xmlns:a16="http://schemas.microsoft.com/office/drawing/2014/main" id="{D88A16EF-A4D9-422C-B440-1E9B0B79D7E9}"/>
-                  </a:ext>
-                </a:extLst>
-              </p:cNvPr>
-              <p:cNvSpPr>
-                <a:spLocks noChangeAspect="1"/>
-              </p:cNvSpPr>
-              <p:nvPr/>
-            </p:nvSpPr>
-            <p:spPr>
-              <a:xfrm rot="16200000" flipH="1">
-                <a:off x="1924887" y="120473"/>
-                <a:ext cx="102408" cy="197724"/>
-              </a:xfrm>
-              <a:prstGeom prst="pie">
-                <a:avLst>
-                  <a:gd name="adj1" fmla="val 16258856"/>
-                  <a:gd name="adj2" fmla="val 19252600"/>
-                </a:avLst>
-              </a:prstGeom>
-              <a:gradFill flip="none" rotWithShape="1">
-                <a:gsLst>
-                  <a:gs pos="0">
-                    <a:schemeClr val="tx1"/>
-                  </a:gs>
-                  <a:gs pos="50000">
-                    <a:schemeClr val="tx1">
-                      <a:lumMod val="50000"/>
-                      <a:lumOff val="50000"/>
-                    </a:schemeClr>
-                  </a:gs>
-                  <a:gs pos="100000">
-                    <a:schemeClr val="bg1">
-                      <a:lumMod val="50000"/>
-                    </a:schemeClr>
-                  </a:gs>
-                </a:gsLst>
-                <a:lin ang="2700000" scaled="1"/>
-                <a:tileRect/>
-              </a:gradFill>
-              <a:ln w="19050">
-                <a:solidFill>
-                  <a:schemeClr val="tx1"/>
-                </a:solidFill>
-              </a:ln>
-            </p:spPr>
-            <p:style>
-              <a:lnRef idx="2">
-                <a:schemeClr val="accent1">
-                  <a:shade val="50000"/>
-                </a:schemeClr>
-              </a:lnRef>
-              <a:fillRef idx="1">
-                <a:schemeClr val="accent1"/>
-              </a:fillRef>
-              <a:effectRef idx="0">
-                <a:schemeClr val="accent1"/>
-              </a:effectRef>
-              <a:fontRef idx="minor">
-                <a:schemeClr val="lt1"/>
-              </a:fontRef>
-            </p:style>
-            <p:txBody>
-              <a:bodyPr rtlCol="0" anchor="ctr"/>
-              <a:lstStyle/>
-              <a:p>
-                <a:pPr algn="ctr"/>
-                <a:endParaRPr lang="en-US" sz="1600" dirty="0">
-                  <a:solidFill>
-                    <a:schemeClr val="tx1"/>
-                  </a:solidFill>
-                </a:endParaRPr>
-              </a:p>
-            </p:txBody>
-          </p:sp>
           <mc:AlternateContent xmlns:mc="http://schemas.openxmlformats.org/markup-compatibility/2006" xmlns:a14="http://schemas.microsoft.com/office/drawing/2010/main">
             <mc:Choice Requires="a14">
               <p:sp>
                 <p:nvSpPr>
-                  <p:cNvPr id="66" name="TextBox 10">
+                  <p:cNvPr id="96" name="文字方塊 95">
                     <a:extLst>
                       <a:ext uri="{FF2B5EF4-FFF2-40B4-BE49-F238E27FC236}">
-                        <a16:creationId xmlns:a16="http://schemas.microsoft.com/office/drawing/2014/main" id="{B0755140-1ED3-418E-8E73-E1D2B917C7ED}"/>
+                        <a16:creationId xmlns:a16="http://schemas.microsoft.com/office/drawing/2014/main" id="{E1FC4C25-9C59-4E3E-A43F-FEA53E982F28}"/>
                       </a:ext>
                     </a:extLst>
                   </p:cNvPr>
@@ -5929,8 +4265,8 @@
                 </p:nvSpPr>
                 <p:spPr>
                   <a:xfrm>
-                    <a:off x="1560871" y="155523"/>
-                    <a:ext cx="315234" cy="338554"/>
+                    <a:off x="3878686" y="5075200"/>
+                    <a:ext cx="248476" cy="486795"/>
                   </a:xfrm>
                   <a:prstGeom prst="rect">
                     <a:avLst/>
@@ -5943,7 +4279,7 @@
                   </a:bodyPr>
                   <a:lstStyle/>
                   <a:p>
-                    <a:pPr/>
+                    <a:pPr algn="ctr"/>
                     <a14:m>
                       <m:oMathPara xmlns:m="http://schemas.openxmlformats.org/officeDocument/2006/math">
                         <m:oMathParaPr>
@@ -5951,15 +4287,15 @@
                         </m:oMathParaPr>
                         <m:oMath xmlns:m="http://schemas.openxmlformats.org/officeDocument/2006/math">
                           <m:r>
-                            <a:rPr lang="en-US" sz="1600" i="1">
+                            <a:rPr lang="en-US" altLang="zh-TW" sz="2470" i="1">
                               <a:latin typeface="Cambria Math" panose="02040503050406030204" pitchFamily="18" charset="0"/>
                             </a:rPr>
-                            <m:t>𝛼</m:t>
+                            <m:t>0</m:t>
                           </m:r>
                         </m:oMath>
                       </m:oMathPara>
                     </a14:m>
-                    <a:endParaRPr lang="en-US" sz="1600" dirty="0"/>
+                    <a:endParaRPr lang="zh-TW" altLang="en-US" sz="2470" dirty="0"/>
                   </a:p>
                 </p:txBody>
               </p:sp>
@@ -5967,10 +4303,10 @@
             <mc:Fallback xmlns="">
               <p:sp>
                 <p:nvSpPr>
-                  <p:cNvPr id="143" name="TextBox 10">
+                  <p:cNvPr id="96" name="文字方塊 95">
                     <a:extLst>
                       <a:ext uri="{FF2B5EF4-FFF2-40B4-BE49-F238E27FC236}">
-                        <a16:creationId xmlns:a16="http://schemas.microsoft.com/office/drawing/2014/main" id="{F4BA87A4-FF23-4612-80FF-80921F92BB65}"/>
+                        <a16:creationId xmlns:a16="http://schemas.microsoft.com/office/drawing/2014/main" id="{E1FC4C25-9C59-4E3E-A43F-FEA53E982F28}"/>
                       </a:ext>
                     </a:extLst>
                   </p:cNvPr>
@@ -5981,16 +4317,16 @@
                 </p:nvSpPr>
                 <p:spPr>
                   <a:xfrm>
-                    <a:off x="1560871" y="155523"/>
-                    <a:ext cx="315234" cy="338554"/>
+                    <a:off x="3878686" y="5075200"/>
+                    <a:ext cx="248476" cy="486795"/>
                   </a:xfrm>
                   <a:prstGeom prst="rect">
                     <a:avLst/>
                   </a:prstGeom>
                   <a:blipFill>
-                    <a:blip r:embed="rId17"/>
+                    <a:blip r:embed="rId7"/>
                     <a:stretch>
-                      <a:fillRect/>
+                      <a:fillRect l="-33333" r="-6667"/>
                     </a:stretch>
                   </a:blipFill>
                 </p:spPr>
@@ -6009,138 +4345,14 @@
               </p:sp>
             </mc:Fallback>
           </mc:AlternateContent>
-          <p:cxnSp>
-            <p:nvCxnSpPr>
-              <p:cNvPr id="67" name="Straight Arrow Connector 17">
-                <a:extLst>
-                  <a:ext uri="{FF2B5EF4-FFF2-40B4-BE49-F238E27FC236}">
-                    <a16:creationId xmlns:a16="http://schemas.microsoft.com/office/drawing/2014/main" id="{BF6121CE-90BE-4D19-9571-5F7CB3DD4312}"/>
-                  </a:ext>
-                </a:extLst>
-              </p:cNvPr>
-              <p:cNvCxnSpPr>
-                <a:cxnSpLocks/>
-              </p:cNvCxnSpPr>
-              <p:nvPr/>
-            </p:nvCxnSpPr>
-            <p:spPr>
-              <a:xfrm flipH="1">
-                <a:off x="1768140" y="220545"/>
-                <a:ext cx="221585" cy="286539"/>
-              </a:xfrm>
-              <a:prstGeom prst="straightConnector1">
-                <a:avLst/>
-              </a:prstGeom>
-              <a:ln w="38100">
-                <a:solidFill>
-                  <a:schemeClr val="tx1"/>
-                </a:solidFill>
-                <a:tailEnd type="stealth" w="lg" len="lg"/>
-              </a:ln>
-            </p:spPr>
-            <p:style>
-              <a:lnRef idx="3">
-                <a:schemeClr val="accent6"/>
-              </a:lnRef>
-              <a:fillRef idx="0">
-                <a:schemeClr val="accent6"/>
-              </a:fillRef>
-              <a:effectRef idx="2">
-                <a:schemeClr val="accent6"/>
-              </a:effectRef>
-              <a:fontRef idx="minor">
-                <a:schemeClr val="tx1"/>
-              </a:fontRef>
-            </p:style>
-          </p:cxnSp>
-          <p:sp>
-            <p:nvSpPr>
-              <p:cNvPr id="68" name="Partial Circle 9">
-                <a:extLst>
-                  <a:ext uri="{FF2B5EF4-FFF2-40B4-BE49-F238E27FC236}">
-                    <a16:creationId xmlns:a16="http://schemas.microsoft.com/office/drawing/2014/main" id="{528F2B9E-C51B-4BE0-A58B-43D54E2EE500}"/>
-                  </a:ext>
-                </a:extLst>
-              </p:cNvPr>
-              <p:cNvSpPr>
-                <a:spLocks noChangeAspect="1"/>
-              </p:cNvSpPr>
-              <p:nvPr/>
-            </p:nvSpPr>
-            <p:spPr>
-              <a:xfrm>
-                <a:off x="1912164" y="83252"/>
-                <a:ext cx="149214" cy="301366"/>
-              </a:xfrm>
-              <a:prstGeom prst="pie">
-                <a:avLst>
-                  <a:gd name="adj1" fmla="val 16258856"/>
-                  <a:gd name="adj2" fmla="val 19252600"/>
-                </a:avLst>
-              </a:prstGeom>
-              <a:gradFill flip="none" rotWithShape="1">
-                <a:gsLst>
-                  <a:gs pos="0">
-                    <a:schemeClr val="tx1"/>
-                  </a:gs>
-                  <a:gs pos="50000">
-                    <a:schemeClr val="tx1">
-                      <a:lumMod val="50000"/>
-                      <a:lumOff val="50000"/>
-                    </a:schemeClr>
-                  </a:gs>
-                  <a:gs pos="100000">
-                    <a:schemeClr val="bg1">
-                      <a:lumMod val="50000"/>
-                    </a:schemeClr>
-                  </a:gs>
-                </a:gsLst>
-                <a:lin ang="2700000" scaled="1"/>
-                <a:tileRect/>
-              </a:gradFill>
-              <a:ln w="19050">
-                <a:solidFill>
-                  <a:schemeClr val="tx1"/>
-                </a:solidFill>
-              </a:ln>
-            </p:spPr>
-            <p:style>
-              <a:lnRef idx="2">
-                <a:schemeClr val="accent1">
-                  <a:shade val="50000"/>
-                </a:schemeClr>
-              </a:lnRef>
-              <a:fillRef idx="1">
-                <a:schemeClr val="accent1"/>
-              </a:fillRef>
-              <a:effectRef idx="0">
-                <a:schemeClr val="accent1"/>
-              </a:effectRef>
-              <a:fontRef idx="minor">
-                <a:schemeClr val="lt1"/>
-              </a:fontRef>
-            </p:style>
-            <p:txBody>
-              <a:bodyPr rtlCol="0" anchor="ctr"/>
-              <a:lstStyle/>
-              <a:p>
-                <a:pPr algn="ctr"/>
-                <a:endParaRPr lang="en-US" sz="1600" dirty="0">
-                  <a:solidFill>
-                    <a:schemeClr val="tx1"/>
-                  </a:solidFill>
-                </a:endParaRPr>
-              </a:p>
-            </p:txBody>
-          </p:sp>
           <mc:AlternateContent xmlns:mc="http://schemas.openxmlformats.org/markup-compatibility/2006" xmlns:a14="http://schemas.microsoft.com/office/drawing/2010/main">
             <mc:Choice Requires="a14">
               <p:sp>
                 <p:nvSpPr>
-                  <p:cNvPr id="69" name="TextBox 10">
+                  <p:cNvPr id="97" name="文字方塊 96">
                     <a:extLst>
                       <a:ext uri="{FF2B5EF4-FFF2-40B4-BE49-F238E27FC236}">
-                        <a16:creationId xmlns:a16="http://schemas.microsoft.com/office/drawing/2014/main" id="{E3CB8141-3307-4D03-B1E5-D63D5A364FA6}"/>
+                        <a16:creationId xmlns:a16="http://schemas.microsoft.com/office/drawing/2014/main" id="{FDEF6E31-6CEA-40DE-8268-E67835E3C9DE}"/>
                       </a:ext>
                     </a:extLst>
                   </p:cNvPr>
@@ -6148,9 +4360,9 @@
                   <p:nvPr/>
                 </p:nvSpPr>
                 <p:spPr>
-                  <a:xfrm>
-                    <a:off x="1951942" y="-164895"/>
-                    <a:ext cx="297046" cy="338554"/>
+                  <a:xfrm rot="16200000">
+                    <a:off x="3648200" y="3499414"/>
+                    <a:ext cx="487945" cy="422758"/>
                   </a:xfrm>
                   <a:prstGeom prst="rect">
                     <a:avLst/>
@@ -6163,23 +4375,47 @@
                   </a:bodyPr>
                   <a:lstStyle/>
                   <a:p>
-                    <a:pPr/>
+                    <a:pPr algn="ctr"/>
                     <a14:m>
                       <m:oMathPara xmlns:m="http://schemas.openxmlformats.org/officeDocument/2006/math">
                         <m:oMathParaPr>
-                          <m:jc m:val="centerGroup"/>
+                          <m:jc m:val="center"/>
                         </m:oMathParaPr>
                         <m:oMath xmlns:m="http://schemas.openxmlformats.org/officeDocument/2006/math">
                           <m:r>
-                            <a:rPr lang="en-US" sz="1600" i="1">
+                            <m:rPr>
+                              <m:sty m:val="p"/>
+                            </m:rPr>
+                            <a:rPr lang="en-US" altLang="zh-TW" sz="2470" dirty="0">
                               <a:latin typeface="Cambria Math" panose="02040503050406030204" pitchFamily="18" charset="0"/>
                             </a:rPr>
-                            <m:t>𝛽</m:t>
+                            <m:t>a</m:t>
+                          </m:r>
+                          <m:r>
+                            <a:rPr lang="en-US" altLang="zh-TW" sz="2470" dirty="0">
+                              <a:latin typeface="Cambria Math" panose="02040503050406030204" pitchFamily="18" charset="0"/>
+                            </a:rPr>
+                            <m:t>.</m:t>
+                          </m:r>
+                          <m:r>
+                            <m:rPr>
+                              <m:sty m:val="p"/>
+                            </m:rPr>
+                            <a:rPr lang="en-US" altLang="zh-TW" sz="2470" dirty="0">
+                              <a:latin typeface="Cambria Math" panose="02040503050406030204" pitchFamily="18" charset="0"/>
+                            </a:rPr>
+                            <m:t>u</m:t>
+                          </m:r>
+                          <m:r>
+                            <a:rPr lang="en-US" altLang="zh-TW" sz="2470" dirty="0">
+                              <a:latin typeface="Cambria Math" panose="02040503050406030204" pitchFamily="18" charset="0"/>
+                            </a:rPr>
+                            <m:t>.</m:t>
                           </m:r>
                         </m:oMath>
                       </m:oMathPara>
                     </a14:m>
-                    <a:endParaRPr lang="en-US" sz="1600" dirty="0"/>
+                    <a:endParaRPr lang="zh-TW" altLang="en-US" sz="2470" dirty="0"/>
                   </a:p>
                 </p:txBody>
               </p:sp>
@@ -6187,10 +4423,10 @@
             <mc:Fallback xmlns="">
               <p:sp>
                 <p:nvSpPr>
-                  <p:cNvPr id="146" name="TextBox 10">
+                  <p:cNvPr id="97" name="文字方塊 96">
                     <a:extLst>
                       <a:ext uri="{FF2B5EF4-FFF2-40B4-BE49-F238E27FC236}">
-                        <a16:creationId xmlns:a16="http://schemas.microsoft.com/office/drawing/2014/main" id="{18AA10A0-393A-4B71-8D8A-7D5D0CD59BF5}"/>
+                        <a16:creationId xmlns:a16="http://schemas.microsoft.com/office/drawing/2014/main" id="{FDEF6E31-6CEA-40DE-8268-E67835E3C9DE}"/>
                       </a:ext>
                     </a:extLst>
                   </p:cNvPr>
@@ -6200,17 +4436,17 @@
                   <p:nvPr/>
                 </p:nvSpPr>
                 <p:spPr>
-                  <a:xfrm>
-                    <a:off x="1951942" y="-164895"/>
-                    <a:ext cx="297046" cy="338554"/>
+                  <a:xfrm rot="16200000">
+                    <a:off x="3648200" y="3499414"/>
+                    <a:ext cx="487945" cy="422758"/>
                   </a:xfrm>
                   <a:prstGeom prst="rect">
                     <a:avLst/>
                   </a:prstGeom>
                   <a:blipFill>
-                    <a:blip r:embed="rId18"/>
+                    <a:blip r:embed="rId8"/>
                     <a:stretch>
-                      <a:fillRect r="-4082" b="-8929"/>
+                      <a:fillRect b="-26923"/>
                     </a:stretch>
                   </a:blipFill>
                 </p:spPr>
@@ -6229,56 +4465,99 @@
               </p:sp>
             </mc:Fallback>
           </mc:AlternateContent>
-          <p:cxnSp>
-            <p:nvCxnSpPr>
-              <p:cNvPr id="70" name="Straight Arrow Connector 17">
+        </p:grpSp>
+        <p:pic>
+          <p:nvPicPr>
+            <p:cNvPr id="109" name="圖片 108">
+              <a:extLst>
+                <a:ext uri="{FF2B5EF4-FFF2-40B4-BE49-F238E27FC236}">
+                  <a16:creationId xmlns:a16="http://schemas.microsoft.com/office/drawing/2014/main" id="{599620D1-D750-4CB6-92F0-6E1E6D67F8CB}"/>
+                </a:ext>
+              </a:extLst>
+            </p:cNvPr>
+            <p:cNvPicPr>
+              <a:picLocks noChangeAspect="1"/>
+            </p:cNvPicPr>
+            <p:nvPr/>
+          </p:nvPicPr>
+          <p:blipFill rotWithShape="1">
+            <a:blip r:embed="rId9">
+              <a:clrChange>
+                <a:clrFrom>
+                  <a:srgbClr val="FFFFFF"/>
+                </a:clrFrom>
+                <a:clrTo>
+                  <a:srgbClr val="FFFFFF">
+                    <a:alpha val="0"/>
+                  </a:srgbClr>
+                </a:clrTo>
+              </a:clrChange>
+              <a:extLst>
+                <a:ext uri="{28A0092B-C50C-407E-A947-70E740481C1C}">
+                  <a14:useLocalDpi xmlns:a14="http://schemas.microsoft.com/office/drawing/2010/main" val="0"/>
+                </a:ext>
+              </a:extLst>
+            </a:blip>
+            <a:srcRect l="11196" t="10298" r="8713" b="9225"/>
+            <a:stretch/>
+          </p:blipFill>
+          <p:spPr>
+            <a:xfrm>
+              <a:off x="3695700" y="1092200"/>
+              <a:ext cx="6051940" cy="5067300"/>
+            </a:xfrm>
+            <a:prstGeom prst="rect">
+              <a:avLst/>
+            </a:prstGeom>
+          </p:spPr>
+        </p:pic>
+      </p:grpSp>
+      <p:grpSp>
+        <p:nvGrpSpPr>
+          <p:cNvPr id="100" name="群組 99">
+            <a:extLst>
+              <a:ext uri="{FF2B5EF4-FFF2-40B4-BE49-F238E27FC236}">
+                <a16:creationId xmlns:a16="http://schemas.microsoft.com/office/drawing/2014/main" id="{A891D3DD-CA42-4E3B-862C-1E531521AF18}"/>
+              </a:ext>
+            </a:extLst>
+          </p:cNvPr>
+          <p:cNvGrpSpPr/>
+          <p:nvPr/>
+        </p:nvGrpSpPr>
+        <p:grpSpPr>
+          <a:xfrm>
+            <a:off x="7418653" y="1624707"/>
+            <a:ext cx="2045607" cy="2115996"/>
+            <a:chOff x="3931342" y="2273301"/>
+            <a:chExt cx="2319338" cy="2399146"/>
+          </a:xfrm>
+        </p:grpSpPr>
+        <p:grpSp>
+          <p:nvGrpSpPr>
+            <p:cNvPr id="101" name="群組 100">
+              <a:extLst>
+                <a:ext uri="{FF2B5EF4-FFF2-40B4-BE49-F238E27FC236}">
+                  <a16:creationId xmlns:a16="http://schemas.microsoft.com/office/drawing/2014/main" id="{1D88D25E-8ACE-474D-99D5-98CE042D1311}"/>
+                </a:ext>
+              </a:extLst>
+            </p:cNvPr>
+            <p:cNvGrpSpPr/>
+            <p:nvPr/>
+          </p:nvGrpSpPr>
+          <p:grpSpPr>
+            <a:xfrm>
+              <a:off x="3931342" y="2273301"/>
+              <a:ext cx="2319338" cy="2399146"/>
+              <a:chOff x="8429625" y="2279434"/>
+              <a:chExt cx="2319338" cy="2399146"/>
+            </a:xfrm>
+          </p:grpSpPr>
+          <p:sp>
+            <p:nvSpPr>
+              <p:cNvPr id="103" name="矩形: 圓角 102">
                 <a:extLst>
                   <a:ext uri="{FF2B5EF4-FFF2-40B4-BE49-F238E27FC236}">
-                    <a16:creationId xmlns:a16="http://schemas.microsoft.com/office/drawing/2014/main" id="{5F124962-8FE5-4142-B6B9-BECD5A587C8A}"/>
-                  </a:ext>
-                </a:extLst>
-              </p:cNvPr>
-              <p:cNvCxnSpPr>
-                <a:cxnSpLocks/>
-              </p:cNvCxnSpPr>
-              <p:nvPr/>
-            </p:nvCxnSpPr>
-            <p:spPr>
-              <a:xfrm flipV="1">
-                <a:off x="1981637" y="-225181"/>
-                <a:ext cx="571923" cy="449644"/>
-              </a:xfrm>
-              <a:prstGeom prst="straightConnector1">
-                <a:avLst/>
-              </a:prstGeom>
-              <a:ln w="38100">
-                <a:solidFill>
-                  <a:schemeClr val="tx1"/>
-                </a:solidFill>
-                <a:tailEnd type="stealth" w="lg" len="lg"/>
-              </a:ln>
-            </p:spPr>
-            <p:style>
-              <a:lnRef idx="3">
-                <a:schemeClr val="accent6"/>
-              </a:lnRef>
-              <a:fillRef idx="0">
-                <a:schemeClr val="accent6"/>
-              </a:fillRef>
-              <a:effectRef idx="2">
-                <a:schemeClr val="accent6"/>
-              </a:effectRef>
-              <a:fontRef idx="minor">
-                <a:schemeClr val="tx1"/>
-              </a:fontRef>
-            </p:style>
-          </p:cxnSp>
-          <p:sp>
-            <p:nvSpPr>
-              <p:cNvPr id="71" name="等腰三角形 70">
-                <a:extLst>
-                  <a:ext uri="{FF2B5EF4-FFF2-40B4-BE49-F238E27FC236}">
-                    <a16:creationId xmlns:a16="http://schemas.microsoft.com/office/drawing/2014/main" id="{1BA0EA36-2FEC-48FE-A773-79C92D57F754}"/>
+                    <a16:creationId xmlns:a16="http://schemas.microsoft.com/office/drawing/2014/main" id="{0F8570AA-B79B-4813-8A09-F41912059DEF}"/>
                   </a:ext>
                 </a:extLst>
               </p:cNvPr>
@@ -6286,30 +4565,46 @@
               <p:nvPr/>
             </p:nvSpPr>
             <p:spPr>
-              <a:xfrm rot="5400000">
-                <a:off x="1943813" y="420057"/>
-                <a:ext cx="329835" cy="221179"/>
+              <a:xfrm>
+                <a:off x="8429625" y="2279434"/>
+                <a:ext cx="2319338" cy="2399146"/>
               </a:xfrm>
-              <a:prstGeom prst="triangle">
-                <a:avLst/>
+              <a:prstGeom prst="roundRect">
+                <a:avLst>
+                  <a:gd name="adj" fmla="val 2487"/>
+                </a:avLst>
               </a:prstGeom>
+              <a:gradFill>
+                <a:gsLst>
+                  <a:gs pos="100000">
+                    <a:schemeClr val="bg1">
+                      <a:lumMod val="95000"/>
+                    </a:schemeClr>
+                  </a:gs>
+                  <a:gs pos="0">
+                    <a:schemeClr val="bg1">
+                      <a:lumMod val="85000"/>
+                    </a:schemeClr>
+                  </a:gs>
+                </a:gsLst>
+              </a:gradFill>
             </p:spPr>
             <p:style>
               <a:lnRef idx="0">
-                <a:schemeClr val="accent2"/>
+                <a:schemeClr val="accent3"/>
               </a:lnRef>
               <a:fillRef idx="3">
-                <a:schemeClr val="accent2"/>
+                <a:schemeClr val="accent3"/>
               </a:fillRef>
               <a:effectRef idx="3">
-                <a:schemeClr val="accent2"/>
+                <a:schemeClr val="accent3"/>
               </a:effectRef>
               <a:fontRef idx="minor">
                 <a:schemeClr val="lt1"/>
               </a:fontRef>
             </p:style>
             <p:txBody>
-              <a:bodyPr rot="0" spcFirstLastPara="0" vertOverflow="overflow" horzOverflow="overflow" vert="horz" wrap="square" lIns="71889" tIns="35945" rIns="71889" bIns="35945" numCol="1" spcCol="0" rtlCol="0" fromWordArt="0" anchor="ctr" anchorCtr="0" forceAA="0" compatLnSpc="1">
+              <a:bodyPr rot="0" spcFirstLastPara="0" vertOverflow="overflow" horzOverflow="overflow" vert="horz" wrap="square" lIns="51213" tIns="25606" rIns="51213" bIns="25606" numCol="1" spcCol="0" rtlCol="0" fromWordArt="0" anchor="ctr" anchorCtr="0" forceAA="0" compatLnSpc="1">
                 <a:prstTxWarp prst="textNoShape">
                   <a:avLst/>
                 </a:prstTxWarp>
@@ -6318,11 +4613,1689 @@
               <a:lstStyle/>
               <a:p>
                 <a:pPr algn="ctr"/>
-                <a:endParaRPr lang="zh-TW" altLang="en-US" sz="1415" dirty="0"/>
+                <a:endParaRPr lang="zh-TW" altLang="en-US" sz="1008" dirty="0"/>
               </a:p>
             </p:txBody>
           </p:sp>
+          <p:pic>
+            <p:nvPicPr>
+              <p:cNvPr id="104" name="圖片 103">
+                <a:extLst>
+                  <a:ext uri="{FF2B5EF4-FFF2-40B4-BE49-F238E27FC236}">
+                    <a16:creationId xmlns:a16="http://schemas.microsoft.com/office/drawing/2014/main" id="{816EFE65-7CC6-441D-BAE1-FC184AD58417}"/>
+                  </a:ext>
+                </a:extLst>
+              </p:cNvPr>
+              <p:cNvPicPr>
+                <a:picLocks noChangeAspect="1"/>
+              </p:cNvPicPr>
+              <p:nvPr/>
+            </p:nvPicPr>
+            <p:blipFill rotWithShape="1">
+              <a:blip r:embed="rId10">
+                <a:clrChange>
+                  <a:clrFrom>
+                    <a:srgbClr val="FFFFFF"/>
+                  </a:clrFrom>
+                  <a:clrTo>
+                    <a:srgbClr val="FFFFFF">
+                      <a:alpha val="0"/>
+                    </a:srgbClr>
+                  </a:clrTo>
+                </a:clrChange>
+              </a:blip>
+              <a:srcRect l="24815" r="49907"/>
+              <a:stretch/>
+            </p:blipFill>
+            <p:spPr>
+              <a:xfrm>
+                <a:off x="9507740" y="2996758"/>
+                <a:ext cx="1061469" cy="384394"/>
+              </a:xfrm>
+              <a:prstGeom prst="rect">
+                <a:avLst/>
+              </a:prstGeom>
+            </p:spPr>
+          </p:pic>
+          <p:pic>
+            <p:nvPicPr>
+              <p:cNvPr id="105" name="圖片 104">
+                <a:extLst>
+                  <a:ext uri="{FF2B5EF4-FFF2-40B4-BE49-F238E27FC236}">
+                    <a16:creationId xmlns:a16="http://schemas.microsoft.com/office/drawing/2014/main" id="{ADC94B57-B79E-42F7-B251-D11376F3F57E}"/>
+                  </a:ext>
+                </a:extLst>
+              </p:cNvPr>
+              <p:cNvPicPr>
+                <a:picLocks noChangeAspect="1"/>
+              </p:cNvPicPr>
+              <p:nvPr/>
+            </p:nvPicPr>
+            <p:blipFill rotWithShape="1">
+              <a:blip r:embed="rId10">
+                <a:clrChange>
+                  <a:clrFrom>
+                    <a:srgbClr val="FFFFFF"/>
+                  </a:clrFrom>
+                  <a:clrTo>
+                    <a:srgbClr val="FFFFFF">
+                      <a:alpha val="0"/>
+                    </a:srgbClr>
+                  </a:clrTo>
+                </a:clrChange>
+              </a:blip>
+              <a:srcRect r="74861"/>
+              <a:stretch/>
+            </p:blipFill>
+            <p:spPr>
+              <a:xfrm>
+                <a:off x="9507740" y="2410917"/>
+                <a:ext cx="1055637" cy="384394"/>
+              </a:xfrm>
+              <a:prstGeom prst="rect">
+                <a:avLst/>
+              </a:prstGeom>
+            </p:spPr>
+          </p:pic>
+          <p:pic>
+            <p:nvPicPr>
+              <p:cNvPr id="106" name="圖片 105">
+                <a:extLst>
+                  <a:ext uri="{FF2B5EF4-FFF2-40B4-BE49-F238E27FC236}">
+                    <a16:creationId xmlns:a16="http://schemas.microsoft.com/office/drawing/2014/main" id="{9B0D56D2-4D2E-4AD0-B6D2-F775797A4BB5}"/>
+                  </a:ext>
+                </a:extLst>
+              </p:cNvPr>
+              <p:cNvPicPr>
+                <a:picLocks noChangeAspect="1"/>
+              </p:cNvPicPr>
+              <p:nvPr/>
+            </p:nvPicPr>
+            <p:blipFill rotWithShape="1">
+              <a:blip r:embed="rId10">
+                <a:clrChange>
+                  <a:clrFrom>
+                    <a:srgbClr val="FFFFFF"/>
+                  </a:clrFrom>
+                  <a:clrTo>
+                    <a:srgbClr val="FFFFFF">
+                      <a:alpha val="0"/>
+                    </a:srgbClr>
+                  </a:clrTo>
+                </a:clrChange>
+              </a:blip>
+              <a:srcRect l="49861" r="24676"/>
+              <a:stretch/>
+            </p:blipFill>
+            <p:spPr>
+              <a:xfrm>
+                <a:off x="9507740" y="3579355"/>
+                <a:ext cx="1069247" cy="384394"/>
+              </a:xfrm>
+              <a:prstGeom prst="rect">
+                <a:avLst/>
+              </a:prstGeom>
+            </p:spPr>
+          </p:pic>
+          <p:pic>
+            <p:nvPicPr>
+              <p:cNvPr id="107" name="圖片 106">
+                <a:extLst>
+                  <a:ext uri="{FF2B5EF4-FFF2-40B4-BE49-F238E27FC236}">
+                    <a16:creationId xmlns:a16="http://schemas.microsoft.com/office/drawing/2014/main" id="{A0FC878E-C831-4DB8-8C7A-35ED80FC8FB5}"/>
+                  </a:ext>
+                </a:extLst>
+              </p:cNvPr>
+              <p:cNvPicPr>
+                <a:picLocks noChangeAspect="1"/>
+              </p:cNvPicPr>
+              <p:nvPr/>
+            </p:nvPicPr>
+            <p:blipFill rotWithShape="1">
+              <a:blip r:embed="rId10">
+                <a:clrChange>
+                  <a:clrFrom>
+                    <a:srgbClr val="FFFFFF"/>
+                  </a:clrFrom>
+                  <a:clrTo>
+                    <a:srgbClr val="FFFFFF">
+                      <a:alpha val="0"/>
+                    </a:srgbClr>
+                  </a:clrTo>
+                </a:clrChange>
+              </a:blip>
+              <a:srcRect l="74768"/>
+              <a:stretch/>
+            </p:blipFill>
+            <p:spPr>
+              <a:xfrm>
+                <a:off x="9507740" y="4169509"/>
+                <a:ext cx="1059526" cy="384394"/>
+              </a:xfrm>
+              <a:prstGeom prst="rect">
+                <a:avLst/>
+              </a:prstGeom>
+            </p:spPr>
+          </p:pic>
         </p:grpSp>
+        <p:pic>
+          <p:nvPicPr>
+            <p:cNvPr id="102" name="圖片 101">
+              <a:extLst>
+                <a:ext uri="{FF2B5EF4-FFF2-40B4-BE49-F238E27FC236}">
+                  <a16:creationId xmlns:a16="http://schemas.microsoft.com/office/drawing/2014/main" id="{4F1AA4D3-A4D7-4974-A36D-A1DD6F1523EF}"/>
+                </a:ext>
+              </a:extLst>
+            </p:cNvPr>
+            <p:cNvPicPr>
+              <a:picLocks noChangeAspect="1"/>
+            </p:cNvPicPr>
+            <p:nvPr/>
+          </p:nvPicPr>
+          <p:blipFill rotWithShape="1">
+            <a:blip r:embed="rId11">
+              <a:clrChange>
+                <a:clrFrom>
+                  <a:srgbClr val="FFFFFF"/>
+                </a:clrFrom>
+                <a:clrTo>
+                  <a:srgbClr val="FFFFFF">
+                    <a:alpha val="0"/>
+                  </a:srgbClr>
+                </a:clrTo>
+              </a:clrChange>
+              <a:extLst>
+                <a:ext uri="{28A0092B-C50C-407E-A947-70E740481C1C}">
+                  <a14:useLocalDpi xmlns:a14="http://schemas.microsoft.com/office/drawing/2010/main" val="0"/>
+                </a:ext>
+              </a:extLst>
+            </a:blip>
+            <a:srcRect l="61194" t="34136" r="30343" b="39166"/>
+            <a:stretch/>
+          </p:blipFill>
+          <p:spPr>
+            <a:xfrm>
+              <a:off x="4064762" y="2414839"/>
+              <a:ext cx="811276" cy="2132931"/>
+            </a:xfrm>
+            <a:prstGeom prst="rect">
+              <a:avLst/>
+            </a:prstGeom>
+          </p:spPr>
+        </p:pic>
+      </p:grpSp>
+      <p:grpSp>
+        <p:nvGrpSpPr>
+          <p:cNvPr id="48" name="群組 47">
+            <a:extLst>
+              <a:ext uri="{FF2B5EF4-FFF2-40B4-BE49-F238E27FC236}">
+                <a16:creationId xmlns:a16="http://schemas.microsoft.com/office/drawing/2014/main" id="{C442AC70-635E-4D32-8B70-E0C2CA7499E9}"/>
+              </a:ext>
+            </a:extLst>
+          </p:cNvPr>
+          <p:cNvGrpSpPr/>
+          <p:nvPr/>
+        </p:nvGrpSpPr>
+        <p:grpSpPr>
+          <a:xfrm>
+            <a:off x="535763" y="1462287"/>
+            <a:ext cx="1446191" cy="2284146"/>
+            <a:chOff x="1269221" y="-909815"/>
+            <a:chExt cx="1446191" cy="2284146"/>
+          </a:xfrm>
+        </p:grpSpPr>
+        <mc:AlternateContent xmlns:mc="http://schemas.openxmlformats.org/markup-compatibility/2006" xmlns:a14="http://schemas.microsoft.com/office/drawing/2010/main">
+          <mc:Choice Requires="a14">
+            <p:sp>
+              <p:nvSpPr>
+                <p:cNvPr id="49" name="文字方塊 48">
+                  <a:extLst>
+                    <a:ext uri="{FF2B5EF4-FFF2-40B4-BE49-F238E27FC236}">
+                      <a16:creationId xmlns:a16="http://schemas.microsoft.com/office/drawing/2014/main" id="{FBF53740-3821-4DC0-B0C2-B03AF01F965D}"/>
+                    </a:ext>
+                  </a:extLst>
+                </p:cNvPr>
+                <p:cNvSpPr txBox="1"/>
+                <p:nvPr/>
+              </p:nvSpPr>
+              <p:spPr>
+                <a:xfrm>
+                  <a:off x="1563231" y="1035777"/>
+                  <a:ext cx="812954" cy="338554"/>
+                </a:xfrm>
+                <a:prstGeom prst="rect">
+                  <a:avLst/>
+                </a:prstGeom>
+                <a:noFill/>
+              </p:spPr>
+              <p:txBody>
+                <a:bodyPr wrap="square" rtlCol="0">
+                  <a:spAutoFit/>
+                </a:bodyPr>
+                <a:lstStyle/>
+                <a:p>
+                  <a:pPr/>
+                  <a14:m>
+                    <m:oMathPara xmlns:m="http://schemas.openxmlformats.org/officeDocument/2006/math">
+                      <m:oMathParaPr>
+                        <m:jc m:val="centerGroup"/>
+                      </m:oMathParaPr>
+                      <m:oMath xmlns:m="http://schemas.openxmlformats.org/officeDocument/2006/math">
+                        <m:r>
+                          <a:rPr lang="en-US" altLang="zh-TW" sz="1600" i="1">
+                            <a:latin typeface="Cambria Math" panose="02040503050406030204" pitchFamily="18" charset="0"/>
+                          </a:rPr>
+                          <m:t>|</m:t>
+                        </m:r>
+                        <m:d>
+                          <m:dPr>
+                            <m:begChr m:val=""/>
+                            <m:endChr m:val="⟩"/>
+                            <m:ctrlPr>
+                              <a:rPr lang="en-US" altLang="zh-TW" sz="1600" i="1">
+                                <a:latin typeface="Cambria Math" panose="02040503050406030204" pitchFamily="18" charset="0"/>
+                              </a:rPr>
+                            </m:ctrlPr>
+                          </m:dPr>
+                          <m:e>
+                            <m:r>
+                              <a:rPr lang="en-US" altLang="zh-TW" sz="1600" i="1">
+                                <a:latin typeface="Cambria Math" panose="02040503050406030204" pitchFamily="18" charset="0"/>
+                              </a:rPr>
+                              <m:t>−1, 1</m:t>
+                            </m:r>
+                          </m:e>
+                        </m:d>
+                      </m:oMath>
+                    </m:oMathPara>
+                  </a14:m>
+                  <a:endParaRPr lang="zh-TW" altLang="en-US" sz="1600" dirty="0"/>
+                </a:p>
+              </p:txBody>
+            </p:sp>
+          </mc:Choice>
+          <mc:Fallback xmlns="">
+            <p:sp>
+              <p:nvSpPr>
+                <p:cNvPr id="49" name="文字方塊 48">
+                  <a:extLst>
+                    <a:ext uri="{FF2B5EF4-FFF2-40B4-BE49-F238E27FC236}">
+                      <a16:creationId xmlns:a16="http://schemas.microsoft.com/office/drawing/2014/main" id="{FBF53740-3821-4DC0-B0C2-B03AF01F965D}"/>
+                    </a:ext>
+                  </a:extLst>
+                </p:cNvPr>
+                <p:cNvSpPr txBox="1">
+                  <a:spLocks noRot="1" noChangeAspect="1" noMove="1" noResize="1" noEditPoints="1" noAdjustHandles="1" noChangeArrowheads="1" noChangeShapeType="1" noTextEdit="1"/>
+                </p:cNvSpPr>
+                <p:nvPr/>
+              </p:nvSpPr>
+              <p:spPr>
+                <a:xfrm>
+                  <a:off x="1563231" y="1035777"/>
+                  <a:ext cx="812954" cy="338554"/>
+                </a:xfrm>
+                <a:prstGeom prst="rect">
+                  <a:avLst/>
+                </a:prstGeom>
+                <a:blipFill>
+                  <a:blip r:embed="rId12"/>
+                  <a:stretch>
+                    <a:fillRect t="-108929" r="-47368" b="-167857"/>
+                  </a:stretch>
+                </a:blipFill>
+              </p:spPr>
+              <p:txBody>
+                <a:bodyPr/>
+                <a:lstStyle/>
+                <a:p>
+                  <a:r>
+                    <a:rPr lang="zh-TW" altLang="en-US">
+                      <a:noFill/>
+                    </a:rPr>
+                    <a:t> </a:t>
+                  </a:r>
+                </a:p>
+              </p:txBody>
+            </p:sp>
+          </mc:Fallback>
+        </mc:AlternateContent>
+        <mc:AlternateContent xmlns:mc="http://schemas.openxmlformats.org/markup-compatibility/2006" xmlns:a14="http://schemas.microsoft.com/office/drawing/2010/main">
+          <mc:Choice Requires="a14">
+            <p:sp>
+              <p:nvSpPr>
+                <p:cNvPr id="50" name="文字方塊 49">
+                  <a:extLst>
+                    <a:ext uri="{FF2B5EF4-FFF2-40B4-BE49-F238E27FC236}">
+                      <a16:creationId xmlns:a16="http://schemas.microsoft.com/office/drawing/2014/main" id="{F6703772-D62D-410E-8CBB-3657AD0B1213}"/>
+                    </a:ext>
+                  </a:extLst>
+                </p:cNvPr>
+                <p:cNvSpPr txBox="1"/>
+                <p:nvPr/>
+              </p:nvSpPr>
+              <p:spPr>
+                <a:xfrm>
+                  <a:off x="1580027" y="-909815"/>
+                  <a:ext cx="812954" cy="338554"/>
+                </a:xfrm>
+                <a:prstGeom prst="rect">
+                  <a:avLst/>
+                </a:prstGeom>
+                <a:noFill/>
+              </p:spPr>
+              <p:txBody>
+                <a:bodyPr wrap="square" rtlCol="0">
+                  <a:spAutoFit/>
+                </a:bodyPr>
+                <a:lstStyle/>
+                <a:p>
+                  <a:pPr/>
+                  <a14:m>
+                    <m:oMathPara xmlns:m="http://schemas.openxmlformats.org/officeDocument/2006/math">
+                      <m:oMathParaPr>
+                        <m:jc m:val="centerGroup"/>
+                      </m:oMathParaPr>
+                      <m:oMath xmlns:m="http://schemas.openxmlformats.org/officeDocument/2006/math">
+                        <m:r>
+                          <a:rPr lang="en-US" altLang="zh-TW" sz="1600" i="1">
+                            <a:latin typeface="Cambria Math" panose="02040503050406030204" pitchFamily="18" charset="0"/>
+                          </a:rPr>
+                          <m:t>|</m:t>
+                        </m:r>
+                        <m:d>
+                          <m:dPr>
+                            <m:begChr m:val=""/>
+                            <m:endChr m:val="⟩"/>
+                            <m:ctrlPr>
+                              <a:rPr lang="en-US" altLang="zh-TW" sz="1600" i="1">
+                                <a:latin typeface="Cambria Math" panose="02040503050406030204" pitchFamily="18" charset="0"/>
+                              </a:rPr>
+                            </m:ctrlPr>
+                          </m:dPr>
+                          <m:e>
+                            <m:r>
+                              <a:rPr lang="en-US" altLang="zh-TW" sz="1600" i="1">
+                                <a:latin typeface="Cambria Math" panose="02040503050406030204" pitchFamily="18" charset="0"/>
+                              </a:rPr>
+                              <m:t>1, −1</m:t>
+                            </m:r>
+                          </m:e>
+                        </m:d>
+                      </m:oMath>
+                    </m:oMathPara>
+                  </a14:m>
+                  <a:endParaRPr lang="zh-TW" altLang="en-US" sz="1600" dirty="0"/>
+                </a:p>
+              </p:txBody>
+            </p:sp>
+          </mc:Choice>
+          <mc:Fallback xmlns="">
+            <p:sp>
+              <p:nvSpPr>
+                <p:cNvPr id="110" name="文字方塊 109">
+                  <a:extLst>
+                    <a:ext uri="{FF2B5EF4-FFF2-40B4-BE49-F238E27FC236}">
+                      <a16:creationId xmlns:a16="http://schemas.microsoft.com/office/drawing/2014/main" id="{AA0071A4-0DA4-44B4-A41D-67D31117A474}"/>
+                    </a:ext>
+                  </a:extLst>
+                </p:cNvPr>
+                <p:cNvSpPr txBox="1">
+                  <a:spLocks noRot="1" noChangeAspect="1" noMove="1" noResize="1" noEditPoints="1" noAdjustHandles="1" noChangeArrowheads="1" noChangeShapeType="1" noTextEdit="1"/>
+                </p:cNvSpPr>
+                <p:nvPr/>
+              </p:nvSpPr>
+              <p:spPr>
+                <a:xfrm>
+                  <a:off x="1580027" y="-909815"/>
+                  <a:ext cx="812954" cy="338554"/>
+                </a:xfrm>
+                <a:prstGeom prst="rect">
+                  <a:avLst/>
+                </a:prstGeom>
+                <a:blipFill>
+                  <a:blip r:embed="rId13"/>
+                  <a:stretch>
+                    <a:fillRect t="-108929" r="-47368" b="-167857"/>
+                  </a:stretch>
+                </a:blipFill>
+              </p:spPr>
+              <p:txBody>
+                <a:bodyPr/>
+                <a:lstStyle/>
+                <a:p>
+                  <a:r>
+                    <a:rPr lang="zh-TW" altLang="en-US">
+                      <a:noFill/>
+                    </a:rPr>
+                    <a:t> </a:t>
+                  </a:r>
+                </a:p>
+              </p:txBody>
+            </p:sp>
+          </mc:Fallback>
+        </mc:AlternateContent>
+        <p:sp>
+          <p:nvSpPr>
+            <p:cNvPr id="51" name="Oval 4">
+              <a:extLst>
+                <a:ext uri="{FF2B5EF4-FFF2-40B4-BE49-F238E27FC236}">
+                  <a16:creationId xmlns:a16="http://schemas.microsoft.com/office/drawing/2014/main" id="{AFE19F3B-91E8-4FEC-917C-B2AFC2DD0EC2}"/>
+                </a:ext>
+              </a:extLst>
+            </p:cNvPr>
+            <p:cNvSpPr/>
+            <p:nvPr/>
+          </p:nvSpPr>
+          <p:spPr>
+            <a:xfrm>
+              <a:off x="1271413" y="-529397"/>
+              <a:ext cx="1443999" cy="1495797"/>
+            </a:xfrm>
+            <a:prstGeom prst="ellipse">
+              <a:avLst/>
+            </a:prstGeom>
+            <a:gradFill flip="none" rotWithShape="1">
+              <a:gsLst>
+                <a:gs pos="100000">
+                  <a:schemeClr val="accent3">
+                    <a:lumMod val="60000"/>
+                    <a:lumOff val="40000"/>
+                    <a:alpha val="60000"/>
+                  </a:schemeClr>
+                </a:gs>
+                <a:gs pos="55000">
+                  <a:schemeClr val="accent3">
+                    <a:lumMod val="40000"/>
+                    <a:lumOff val="60000"/>
+                    <a:alpha val="60000"/>
+                  </a:schemeClr>
+                </a:gs>
+                <a:gs pos="0">
+                  <a:schemeClr val="bg1">
+                    <a:alpha val="60000"/>
+                  </a:schemeClr>
+                </a:gs>
+              </a:gsLst>
+              <a:path path="circle">
+                <a:fillToRect l="100000" b="100000"/>
+              </a:path>
+              <a:tileRect t="-100000" r="-100000"/>
+            </a:gradFill>
+            <a:ln w="57150">
+              <a:solidFill>
+                <a:srgbClr val="D5D7DA"/>
+              </a:solidFill>
+            </a:ln>
+          </p:spPr>
+          <p:style>
+            <a:lnRef idx="2">
+              <a:schemeClr val="accent1">
+                <a:shade val="50000"/>
+              </a:schemeClr>
+            </a:lnRef>
+            <a:fillRef idx="1">
+              <a:schemeClr val="accent1"/>
+            </a:fillRef>
+            <a:effectRef idx="0">
+              <a:schemeClr val="accent1"/>
+            </a:effectRef>
+            <a:fontRef idx="minor">
+              <a:schemeClr val="lt1"/>
+            </a:fontRef>
+          </p:style>
+          <p:txBody>
+            <a:bodyPr rtlCol="0" anchor="ctr"/>
+            <a:lstStyle/>
+            <a:p>
+              <a:pPr algn="ctr"/>
+              <a:endParaRPr lang="en-US" sz="1600" dirty="0"/>
+            </a:p>
+          </p:txBody>
+        </p:sp>
+        <p:sp>
+          <p:nvSpPr>
+            <p:cNvPr id="52" name="SHO">
+              <a:extLst>
+                <a:ext uri="{FF2B5EF4-FFF2-40B4-BE49-F238E27FC236}">
+                  <a16:creationId xmlns:a16="http://schemas.microsoft.com/office/drawing/2014/main" id="{271EBE3E-50A2-4546-88A8-7D84E9F7DD27}"/>
+                </a:ext>
+              </a:extLst>
+            </p:cNvPr>
+            <p:cNvSpPr/>
+            <p:nvPr/>
+          </p:nvSpPr>
+          <p:spPr>
+            <a:xfrm rot="16200000">
+              <a:off x="1679874" y="-502998"/>
+              <a:ext cx="622693" cy="1443999"/>
+            </a:xfrm>
+            <a:prstGeom prst="arc">
+              <a:avLst>
+                <a:gd name="adj1" fmla="val 5396867"/>
+                <a:gd name="adj2" fmla="val 5395779"/>
+              </a:avLst>
+            </a:prstGeom>
+            <a:gradFill flip="none" rotWithShape="1">
+              <a:gsLst>
+                <a:gs pos="0">
+                  <a:schemeClr val="bg1">
+                    <a:lumMod val="65000"/>
+                  </a:schemeClr>
+                </a:gs>
+                <a:gs pos="47000">
+                  <a:schemeClr val="bg1">
+                    <a:lumMod val="50000"/>
+                  </a:schemeClr>
+                </a:gs>
+                <a:gs pos="97000">
+                  <a:srgbClr val="5E5E5E"/>
+                </a:gs>
+              </a:gsLst>
+              <a:path path="circle">
+                <a:fillToRect l="50000" t="50000" r="50000" b="50000"/>
+              </a:path>
+              <a:tileRect/>
+            </a:gradFill>
+            <a:ln w="31750">
+              <a:noFill/>
+            </a:ln>
+          </p:spPr>
+          <p:style>
+            <a:lnRef idx="1">
+              <a:schemeClr val="accent1"/>
+            </a:lnRef>
+            <a:fillRef idx="0">
+              <a:schemeClr val="accent1"/>
+            </a:fillRef>
+            <a:effectRef idx="0">
+              <a:schemeClr val="accent1"/>
+            </a:effectRef>
+            <a:fontRef idx="minor">
+              <a:schemeClr val="tx1"/>
+            </a:fontRef>
+          </p:style>
+          <p:txBody>
+            <a:bodyPr rtlCol="0" anchor="ctr"/>
+            <a:lstStyle/>
+            <a:p>
+              <a:pPr algn="ctr"/>
+              <a:endParaRPr lang="en-US" sz="1600" dirty="0"/>
+            </a:p>
+          </p:txBody>
+        </p:sp>
+        <p:sp>
+          <p:nvSpPr>
+            <p:cNvPr id="53" name="SVO">
+              <a:extLst>
+                <a:ext uri="{FF2B5EF4-FFF2-40B4-BE49-F238E27FC236}">
+                  <a16:creationId xmlns:a16="http://schemas.microsoft.com/office/drawing/2014/main" id="{80625FC8-72C7-41B1-9C8D-E9879A086ECC}"/>
+                </a:ext>
+              </a:extLst>
+            </p:cNvPr>
+            <p:cNvSpPr/>
+            <p:nvPr/>
+          </p:nvSpPr>
+          <p:spPr>
+            <a:xfrm>
+              <a:off x="1629320" y="-528896"/>
+              <a:ext cx="722000" cy="1495797"/>
+            </a:xfrm>
+            <a:prstGeom prst="ellipse">
+              <a:avLst/>
+            </a:prstGeom>
+            <a:noFill/>
+            <a:ln w="25400">
+              <a:solidFill>
+                <a:schemeClr val="bg1">
+                  <a:lumMod val="50000"/>
+                </a:schemeClr>
+              </a:solidFill>
+              <a:prstDash val="dash"/>
+            </a:ln>
+          </p:spPr>
+          <p:style>
+            <a:lnRef idx="2">
+              <a:schemeClr val="accent1">
+                <a:shade val="50000"/>
+              </a:schemeClr>
+            </a:lnRef>
+            <a:fillRef idx="1">
+              <a:schemeClr val="accent1"/>
+            </a:fillRef>
+            <a:effectRef idx="0">
+              <a:schemeClr val="accent1"/>
+            </a:effectRef>
+            <a:fontRef idx="minor">
+              <a:schemeClr val="lt1"/>
+            </a:fontRef>
+          </p:style>
+          <p:txBody>
+            <a:bodyPr rtlCol="0" anchor="ctr"/>
+            <a:lstStyle/>
+            <a:p>
+              <a:pPr algn="ctr"/>
+              <a:endParaRPr lang="en-US" sz="1600"/>
+            </a:p>
+          </p:txBody>
+        </p:sp>
+        <p:sp>
+          <p:nvSpPr>
+            <p:cNvPr id="54" name="Oval 6">
+              <a:extLst>
+                <a:ext uri="{FF2B5EF4-FFF2-40B4-BE49-F238E27FC236}">
+                  <a16:creationId xmlns:a16="http://schemas.microsoft.com/office/drawing/2014/main" id="{A72BD00D-72C1-4AC1-9E18-24F79F488786}"/>
+                </a:ext>
+              </a:extLst>
+            </p:cNvPr>
+            <p:cNvSpPr/>
+            <p:nvPr/>
+          </p:nvSpPr>
+          <p:spPr>
+            <a:xfrm rot="16200000">
+              <a:off x="1679874" y="-502998"/>
+              <a:ext cx="622693" cy="1443999"/>
+            </a:xfrm>
+            <a:prstGeom prst="ellipse">
+              <a:avLst/>
+            </a:prstGeom>
+            <a:noFill/>
+            <a:ln w="38100">
+              <a:solidFill>
+                <a:srgbClr val="FF3300">
+                  <a:alpha val="60000"/>
+                </a:srgbClr>
+              </a:solidFill>
+              <a:prstDash val="solid"/>
+            </a:ln>
+          </p:spPr>
+          <p:style>
+            <a:lnRef idx="2">
+              <a:schemeClr val="accent1">
+                <a:shade val="50000"/>
+              </a:schemeClr>
+            </a:lnRef>
+            <a:fillRef idx="1">
+              <a:schemeClr val="accent1"/>
+            </a:fillRef>
+            <a:effectRef idx="0">
+              <a:schemeClr val="accent1"/>
+            </a:effectRef>
+            <a:fontRef idx="minor">
+              <a:schemeClr val="lt1"/>
+            </a:fontRef>
+          </p:style>
+          <p:txBody>
+            <a:bodyPr rtlCol="0" anchor="ctr"/>
+            <a:lstStyle/>
+            <a:p>
+              <a:pPr algn="ctr"/>
+              <a:endParaRPr lang="en-US" sz="1600" dirty="0"/>
+            </a:p>
+          </p:txBody>
+        </p:sp>
+        <mc:AlternateContent xmlns:mc="http://schemas.openxmlformats.org/markup-compatibility/2006" xmlns:a14="http://schemas.microsoft.com/office/drawing/2010/main">
+          <mc:Choice Requires="a14">
+            <p:sp>
+              <p:nvSpPr>
+                <p:cNvPr id="55" name="TextBox 11">
+                  <a:extLst>
+                    <a:ext uri="{FF2B5EF4-FFF2-40B4-BE49-F238E27FC236}">
+                      <a16:creationId xmlns:a16="http://schemas.microsoft.com/office/drawing/2014/main" id="{2C660CDC-D9A8-44E4-B6A2-8D2E6CD6D9F3}"/>
+                    </a:ext>
+                  </a:extLst>
+                </p:cNvPr>
+                <p:cNvSpPr txBox="1"/>
+                <p:nvPr/>
+              </p:nvSpPr>
+              <p:spPr>
+                <a:xfrm>
+                  <a:off x="1441522" y="40650"/>
+                  <a:ext cx="176928" cy="338554"/>
+                </a:xfrm>
+                <a:prstGeom prst="rect">
+                  <a:avLst/>
+                </a:prstGeom>
+                <a:noFill/>
+              </p:spPr>
+              <p:txBody>
+                <a:bodyPr wrap="square" rtlCol="0">
+                  <a:spAutoFit/>
+                </a:bodyPr>
+                <a:lstStyle/>
+                <a:p>
+                  <a:pPr/>
+                  <a14:m>
+                    <m:oMathPara xmlns:m="http://schemas.openxmlformats.org/officeDocument/2006/math">
+                      <m:oMathParaPr>
+                        <m:jc m:val="centerGroup"/>
+                      </m:oMathParaPr>
+                      <m:oMath xmlns:m="http://schemas.openxmlformats.org/officeDocument/2006/math">
+                        <m:r>
+                          <a:rPr lang="en-US" sz="1600" i="1">
+                            <a:latin typeface="Cambria Math" panose="02040503050406030204" pitchFamily="18" charset="0"/>
+                          </a:rPr>
+                          <m:t>𝑥</m:t>
+                        </m:r>
+                      </m:oMath>
+                    </m:oMathPara>
+                  </a14:m>
+                  <a:endParaRPr lang="en-US" sz="1600" dirty="0"/>
+                </a:p>
+              </p:txBody>
+            </p:sp>
+          </mc:Choice>
+          <mc:Fallback xmlns="">
+            <p:sp>
+              <p:nvSpPr>
+                <p:cNvPr id="125" name="TextBox 11">
+                  <a:extLst>
+                    <a:ext uri="{FF2B5EF4-FFF2-40B4-BE49-F238E27FC236}">
+                      <a16:creationId xmlns:a16="http://schemas.microsoft.com/office/drawing/2014/main" id="{115660D2-D291-4CC2-9F64-AC685B91012F}"/>
+                    </a:ext>
+                  </a:extLst>
+                </p:cNvPr>
+                <p:cNvSpPr txBox="1">
+                  <a:spLocks noRot="1" noChangeAspect="1" noMove="1" noResize="1" noEditPoints="1" noAdjustHandles="1" noChangeArrowheads="1" noChangeShapeType="1" noTextEdit="1"/>
+                </p:cNvSpPr>
+                <p:nvPr/>
+              </p:nvSpPr>
+              <p:spPr>
+                <a:xfrm>
+                  <a:off x="1441522" y="40650"/>
+                  <a:ext cx="176928" cy="338554"/>
+                </a:xfrm>
+                <a:prstGeom prst="rect">
+                  <a:avLst/>
+                </a:prstGeom>
+                <a:blipFill>
+                  <a:blip r:embed="rId14"/>
+                  <a:stretch>
+                    <a:fillRect r="-41379"/>
+                  </a:stretch>
+                </a:blipFill>
+              </p:spPr>
+              <p:txBody>
+                <a:bodyPr/>
+                <a:lstStyle/>
+                <a:p>
+                  <a:r>
+                    <a:rPr lang="zh-TW" altLang="en-US">
+                      <a:noFill/>
+                    </a:rPr>
+                    <a:t> </a:t>
+                  </a:r>
+                </a:p>
+              </p:txBody>
+            </p:sp>
+          </mc:Fallback>
+        </mc:AlternateContent>
+        <mc:AlternateContent xmlns:mc="http://schemas.openxmlformats.org/markup-compatibility/2006" xmlns:a14="http://schemas.microsoft.com/office/drawing/2010/main">
+          <mc:Choice Requires="a14">
+            <p:sp>
+              <p:nvSpPr>
+                <p:cNvPr id="56" name="TextBox 12">
+                  <a:extLst>
+                    <a:ext uri="{FF2B5EF4-FFF2-40B4-BE49-F238E27FC236}">
+                      <a16:creationId xmlns:a16="http://schemas.microsoft.com/office/drawing/2014/main" id="{5D9434DF-9D09-4ECB-ABE4-0C76FE93439D}"/>
+                    </a:ext>
+                  </a:extLst>
+                </p:cNvPr>
+                <p:cNvSpPr txBox="1"/>
+                <p:nvPr/>
+              </p:nvSpPr>
+              <p:spPr>
+                <a:xfrm>
+                  <a:off x="2096445" y="136047"/>
+                  <a:ext cx="176928" cy="338554"/>
+                </a:xfrm>
+                <a:prstGeom prst="rect">
+                  <a:avLst/>
+                </a:prstGeom>
+                <a:noFill/>
+              </p:spPr>
+              <p:txBody>
+                <a:bodyPr wrap="square" rtlCol="0">
+                  <a:spAutoFit/>
+                </a:bodyPr>
+                <a:lstStyle/>
+                <a:p>
+                  <a:pPr/>
+                  <a14:m>
+                    <m:oMathPara xmlns:m="http://schemas.openxmlformats.org/officeDocument/2006/math">
+                      <m:oMathParaPr>
+                        <m:jc m:val="centerGroup"/>
+                      </m:oMathParaPr>
+                      <m:oMath xmlns:m="http://schemas.openxmlformats.org/officeDocument/2006/math">
+                        <m:r>
+                          <a:rPr lang="en-US" sz="1600" i="1">
+                            <a:latin typeface="Cambria Math" panose="02040503050406030204" pitchFamily="18" charset="0"/>
+                          </a:rPr>
+                          <m:t>𝑦</m:t>
+                        </m:r>
+                      </m:oMath>
+                    </m:oMathPara>
+                  </a14:m>
+                  <a:endParaRPr lang="en-US" sz="1600" dirty="0"/>
+                </a:p>
+              </p:txBody>
+            </p:sp>
+          </mc:Choice>
+          <mc:Fallback xmlns="">
+            <p:sp>
+              <p:nvSpPr>
+                <p:cNvPr id="127" name="TextBox 12">
+                  <a:extLst>
+                    <a:ext uri="{FF2B5EF4-FFF2-40B4-BE49-F238E27FC236}">
+                      <a16:creationId xmlns:a16="http://schemas.microsoft.com/office/drawing/2014/main" id="{3BFF9703-6F9D-4BE1-800D-35E8D1FA7574}"/>
+                    </a:ext>
+                  </a:extLst>
+                </p:cNvPr>
+                <p:cNvSpPr txBox="1">
+                  <a:spLocks noRot="1" noChangeAspect="1" noMove="1" noResize="1" noEditPoints="1" noAdjustHandles="1" noChangeArrowheads="1" noChangeShapeType="1" noTextEdit="1"/>
+                </p:cNvSpPr>
+                <p:nvPr/>
+              </p:nvSpPr>
+              <p:spPr>
+                <a:xfrm>
+                  <a:off x="2096445" y="136047"/>
+                  <a:ext cx="176928" cy="338554"/>
+                </a:xfrm>
+                <a:prstGeom prst="rect">
+                  <a:avLst/>
+                </a:prstGeom>
+                <a:blipFill>
+                  <a:blip r:embed="rId15"/>
+                  <a:stretch>
+                    <a:fillRect r="-51724" b="-3636"/>
+                  </a:stretch>
+                </a:blipFill>
+              </p:spPr>
+              <p:txBody>
+                <a:bodyPr/>
+                <a:lstStyle/>
+                <a:p>
+                  <a:r>
+                    <a:rPr lang="zh-TW" altLang="en-US">
+                      <a:noFill/>
+                    </a:rPr>
+                    <a:t> </a:t>
+                  </a:r>
+                </a:p>
+              </p:txBody>
+            </p:sp>
+          </mc:Fallback>
+        </mc:AlternateContent>
+        <mc:AlternateContent xmlns:mc="http://schemas.openxmlformats.org/markup-compatibility/2006" xmlns:a14="http://schemas.microsoft.com/office/drawing/2010/main">
+          <mc:Choice Requires="a14">
+            <p:sp>
+              <p:nvSpPr>
+                <p:cNvPr id="57" name="TextBox 13">
+                  <a:extLst>
+                    <a:ext uri="{FF2B5EF4-FFF2-40B4-BE49-F238E27FC236}">
+                      <a16:creationId xmlns:a16="http://schemas.microsoft.com/office/drawing/2014/main" id="{FD3E0DB0-BFA5-4C05-8197-56FED2EA48A3}"/>
+                    </a:ext>
+                  </a:extLst>
+                </p:cNvPr>
+                <p:cNvSpPr txBox="1"/>
+                <p:nvPr/>
+              </p:nvSpPr>
+              <p:spPr>
+                <a:xfrm>
+                  <a:off x="1852321" y="-493695"/>
+                  <a:ext cx="256967" cy="338554"/>
+                </a:xfrm>
+                <a:prstGeom prst="rect">
+                  <a:avLst/>
+                </a:prstGeom>
+                <a:noFill/>
+              </p:spPr>
+              <p:txBody>
+                <a:bodyPr wrap="square" rtlCol="0">
+                  <a:spAutoFit/>
+                </a:bodyPr>
+                <a:lstStyle/>
+                <a:p>
+                  <a:pPr/>
+                  <a14:m>
+                    <m:oMathPara xmlns:m="http://schemas.openxmlformats.org/officeDocument/2006/math">
+                      <m:oMathParaPr>
+                        <m:jc m:val="centerGroup"/>
+                      </m:oMathParaPr>
+                      <m:oMath xmlns:m="http://schemas.openxmlformats.org/officeDocument/2006/math">
+                        <m:r>
+                          <a:rPr lang="en-US" sz="1600" i="1">
+                            <a:latin typeface="Cambria Math" panose="02040503050406030204" pitchFamily="18" charset="0"/>
+                          </a:rPr>
+                          <m:t>𝑧</m:t>
+                        </m:r>
+                      </m:oMath>
+                    </m:oMathPara>
+                  </a14:m>
+                  <a:endParaRPr lang="en-US" sz="1600" dirty="0"/>
+                </a:p>
+              </p:txBody>
+            </p:sp>
+          </mc:Choice>
+          <mc:Fallback xmlns="">
+            <p:sp>
+              <p:nvSpPr>
+                <p:cNvPr id="129" name="TextBox 13">
+                  <a:extLst>
+                    <a:ext uri="{FF2B5EF4-FFF2-40B4-BE49-F238E27FC236}">
+                      <a16:creationId xmlns:a16="http://schemas.microsoft.com/office/drawing/2014/main" id="{006DB87D-4747-446D-A81F-C70C343CD78F}"/>
+                    </a:ext>
+                  </a:extLst>
+                </p:cNvPr>
+                <p:cNvSpPr txBox="1">
+                  <a:spLocks noRot="1" noChangeAspect="1" noMove="1" noResize="1" noEditPoints="1" noAdjustHandles="1" noChangeArrowheads="1" noChangeShapeType="1" noTextEdit="1"/>
+                </p:cNvSpPr>
+                <p:nvPr/>
+              </p:nvSpPr>
+              <p:spPr>
+                <a:xfrm>
+                  <a:off x="1852321" y="-493695"/>
+                  <a:ext cx="256967" cy="338554"/>
+                </a:xfrm>
+                <a:prstGeom prst="rect">
+                  <a:avLst/>
+                </a:prstGeom>
+                <a:blipFill>
+                  <a:blip r:embed="rId16"/>
+                  <a:stretch>
+                    <a:fillRect/>
+                  </a:stretch>
+                </a:blipFill>
+              </p:spPr>
+              <p:txBody>
+                <a:bodyPr/>
+                <a:lstStyle/>
+                <a:p>
+                  <a:r>
+                    <a:rPr lang="zh-TW" altLang="en-US">
+                      <a:noFill/>
+                    </a:rPr>
+                    <a:t> </a:t>
+                  </a:r>
+                </a:p>
+              </p:txBody>
+            </p:sp>
+          </mc:Fallback>
+        </mc:AlternateContent>
+        <p:sp>
+          <p:nvSpPr>
+            <p:cNvPr id="58" name="DVO">
+              <a:extLst>
+                <a:ext uri="{FF2B5EF4-FFF2-40B4-BE49-F238E27FC236}">
+                  <a16:creationId xmlns:a16="http://schemas.microsoft.com/office/drawing/2014/main" id="{8014F4CC-016E-429A-A39F-EF381543DB95}"/>
+                </a:ext>
+              </a:extLst>
+            </p:cNvPr>
+            <p:cNvSpPr/>
+            <p:nvPr/>
+          </p:nvSpPr>
+          <p:spPr>
+            <a:xfrm flipH="1">
+              <a:off x="1629320" y="-528896"/>
+              <a:ext cx="722000" cy="1495797"/>
+            </a:xfrm>
+            <a:prstGeom prst="arc">
+              <a:avLst>
+                <a:gd name="adj1" fmla="val 5396867"/>
+                <a:gd name="adj2" fmla="val 16170484"/>
+              </a:avLst>
+            </a:prstGeom>
+            <a:ln w="25400">
+              <a:solidFill>
+                <a:schemeClr val="bg1">
+                  <a:lumMod val="50000"/>
+                </a:schemeClr>
+              </a:solidFill>
+            </a:ln>
+          </p:spPr>
+          <p:style>
+            <a:lnRef idx="1">
+              <a:schemeClr val="accent1"/>
+            </a:lnRef>
+            <a:fillRef idx="0">
+              <a:schemeClr val="accent1"/>
+            </a:fillRef>
+            <a:effectRef idx="0">
+              <a:schemeClr val="accent1"/>
+            </a:effectRef>
+            <a:fontRef idx="minor">
+              <a:schemeClr val="tx1"/>
+            </a:fontRef>
+          </p:style>
+          <p:txBody>
+            <a:bodyPr rtlCol="0" anchor="ctr"/>
+            <a:lstStyle/>
+            <a:p>
+              <a:pPr algn="ctr"/>
+              <a:endParaRPr lang="en-US" sz="1600" dirty="0"/>
+            </a:p>
+          </p:txBody>
+        </p:sp>
+        <p:cxnSp>
+          <p:nvCxnSpPr>
+            <p:cNvPr id="60" name="Straight Arrow Connector 7">
+              <a:extLst>
+                <a:ext uri="{FF2B5EF4-FFF2-40B4-BE49-F238E27FC236}">
+                  <a16:creationId xmlns:a16="http://schemas.microsoft.com/office/drawing/2014/main" id="{0F735830-0119-41EE-8B88-9E1CEF71A068}"/>
+                </a:ext>
+              </a:extLst>
+            </p:cNvPr>
+            <p:cNvCxnSpPr>
+              <a:cxnSpLocks/>
+            </p:cNvCxnSpPr>
+            <p:nvPr/>
+          </p:nvCxnSpPr>
+          <p:spPr>
+            <a:xfrm flipV="1">
+              <a:off x="1987289" y="-229080"/>
+              <a:ext cx="1697" cy="445890"/>
+            </a:xfrm>
+            <a:prstGeom prst="straightConnector1">
+              <a:avLst/>
+            </a:prstGeom>
+            <a:ln w="12700">
+              <a:solidFill>
+                <a:schemeClr val="tx1"/>
+              </a:solidFill>
+              <a:tailEnd type="triangle" w="med" len="lg"/>
+            </a:ln>
+          </p:spPr>
+          <p:style>
+            <a:lnRef idx="1">
+              <a:schemeClr val="accent1"/>
+            </a:lnRef>
+            <a:fillRef idx="0">
+              <a:schemeClr val="accent1"/>
+            </a:fillRef>
+            <a:effectRef idx="0">
+              <a:schemeClr val="accent1"/>
+            </a:effectRef>
+            <a:fontRef idx="minor">
+              <a:schemeClr val="tx1"/>
+            </a:fontRef>
+          </p:style>
+        </p:cxnSp>
+        <p:cxnSp>
+          <p:nvCxnSpPr>
+            <p:cNvPr id="61" name="Straight Arrow Connector 19">
+              <a:extLst>
+                <a:ext uri="{FF2B5EF4-FFF2-40B4-BE49-F238E27FC236}">
+                  <a16:creationId xmlns:a16="http://schemas.microsoft.com/office/drawing/2014/main" id="{39E2CFE6-71B5-48A8-A33D-0F7BAF74F818}"/>
+                </a:ext>
+              </a:extLst>
+            </p:cNvPr>
+            <p:cNvCxnSpPr>
+              <a:cxnSpLocks/>
+            </p:cNvCxnSpPr>
+            <p:nvPr/>
+          </p:nvCxnSpPr>
+          <p:spPr>
+            <a:xfrm>
+              <a:off x="1990273" y="214626"/>
+              <a:ext cx="195802" cy="156763"/>
+            </a:xfrm>
+            <a:prstGeom prst="straightConnector1">
+              <a:avLst/>
+            </a:prstGeom>
+            <a:ln w="12700">
+              <a:solidFill>
+                <a:schemeClr val="tx1"/>
+              </a:solidFill>
+              <a:tailEnd type="triangle" w="med" len="lg"/>
+            </a:ln>
+          </p:spPr>
+          <p:style>
+            <a:lnRef idx="1">
+              <a:schemeClr val="accent1"/>
+            </a:lnRef>
+            <a:fillRef idx="0">
+              <a:schemeClr val="accent1"/>
+            </a:fillRef>
+            <a:effectRef idx="0">
+              <a:schemeClr val="accent1"/>
+            </a:effectRef>
+            <a:fontRef idx="minor">
+              <a:schemeClr val="tx1"/>
+            </a:fontRef>
+          </p:style>
+        </p:cxnSp>
+        <p:cxnSp>
+          <p:nvCxnSpPr>
+            <p:cNvPr id="62" name="Straight Arrow Connector 18">
+              <a:extLst>
+                <a:ext uri="{FF2B5EF4-FFF2-40B4-BE49-F238E27FC236}">
+                  <a16:creationId xmlns:a16="http://schemas.microsoft.com/office/drawing/2014/main" id="{77E2241E-E6BD-4C5C-BF46-A54DF191C714}"/>
+                </a:ext>
+              </a:extLst>
+            </p:cNvPr>
+            <p:cNvCxnSpPr>
+              <a:cxnSpLocks/>
+            </p:cNvCxnSpPr>
+            <p:nvPr/>
+          </p:nvCxnSpPr>
+          <p:spPr>
+            <a:xfrm rot="16200000" flipH="1" flipV="1">
+              <a:off x="1818951" y="43150"/>
+              <a:ext cx="0" cy="342950"/>
+            </a:xfrm>
+            <a:prstGeom prst="straightConnector1">
+              <a:avLst/>
+            </a:prstGeom>
+            <a:ln w="12700">
+              <a:solidFill>
+                <a:schemeClr val="tx1"/>
+              </a:solidFill>
+              <a:tailEnd type="triangle" w="med" len="lg"/>
+            </a:ln>
+          </p:spPr>
+          <p:style>
+            <a:lnRef idx="1">
+              <a:schemeClr val="accent1"/>
+            </a:lnRef>
+            <a:fillRef idx="0">
+              <a:schemeClr val="accent1"/>
+            </a:fillRef>
+            <a:effectRef idx="0">
+              <a:schemeClr val="accent1"/>
+            </a:effectRef>
+            <a:fontRef idx="minor">
+              <a:schemeClr val="tx1"/>
+            </a:fontRef>
+          </p:style>
+        </p:cxnSp>
+        <p:sp>
+          <p:nvSpPr>
+            <p:cNvPr id="65" name="Partial Circle 9">
+              <a:extLst>
+                <a:ext uri="{FF2B5EF4-FFF2-40B4-BE49-F238E27FC236}">
+                  <a16:creationId xmlns:a16="http://schemas.microsoft.com/office/drawing/2014/main" id="{D88A16EF-A4D9-422C-B440-1E9B0B79D7E9}"/>
+                </a:ext>
+              </a:extLst>
+            </p:cNvPr>
+            <p:cNvSpPr>
+              <a:spLocks noChangeAspect="1"/>
+            </p:cNvSpPr>
+            <p:nvPr/>
+          </p:nvSpPr>
+          <p:spPr>
+            <a:xfrm rot="16200000" flipH="1">
+              <a:off x="1924887" y="120473"/>
+              <a:ext cx="102408" cy="197724"/>
+            </a:xfrm>
+            <a:prstGeom prst="pie">
+              <a:avLst>
+                <a:gd name="adj1" fmla="val 16258856"/>
+                <a:gd name="adj2" fmla="val 19252600"/>
+              </a:avLst>
+            </a:prstGeom>
+            <a:gradFill flip="none" rotWithShape="1">
+              <a:gsLst>
+                <a:gs pos="0">
+                  <a:schemeClr val="tx1"/>
+                </a:gs>
+                <a:gs pos="50000">
+                  <a:schemeClr val="tx1">
+                    <a:lumMod val="50000"/>
+                    <a:lumOff val="50000"/>
+                  </a:schemeClr>
+                </a:gs>
+                <a:gs pos="100000">
+                  <a:schemeClr val="bg1">
+                    <a:lumMod val="50000"/>
+                  </a:schemeClr>
+                </a:gs>
+              </a:gsLst>
+              <a:lin ang="2700000" scaled="1"/>
+              <a:tileRect/>
+            </a:gradFill>
+            <a:ln w="19050">
+              <a:solidFill>
+                <a:schemeClr val="tx1"/>
+              </a:solidFill>
+            </a:ln>
+          </p:spPr>
+          <p:style>
+            <a:lnRef idx="2">
+              <a:schemeClr val="accent1">
+                <a:shade val="50000"/>
+              </a:schemeClr>
+            </a:lnRef>
+            <a:fillRef idx="1">
+              <a:schemeClr val="accent1"/>
+            </a:fillRef>
+            <a:effectRef idx="0">
+              <a:schemeClr val="accent1"/>
+            </a:effectRef>
+            <a:fontRef idx="minor">
+              <a:schemeClr val="lt1"/>
+            </a:fontRef>
+          </p:style>
+          <p:txBody>
+            <a:bodyPr rtlCol="0" anchor="ctr"/>
+            <a:lstStyle/>
+            <a:p>
+              <a:pPr algn="ctr"/>
+              <a:endParaRPr lang="en-US" sz="1600" dirty="0">
+                <a:solidFill>
+                  <a:schemeClr val="tx1"/>
+                </a:solidFill>
+              </a:endParaRPr>
+            </a:p>
+          </p:txBody>
+        </p:sp>
+        <mc:AlternateContent xmlns:mc="http://schemas.openxmlformats.org/markup-compatibility/2006" xmlns:a14="http://schemas.microsoft.com/office/drawing/2010/main">
+          <mc:Choice Requires="a14">
+            <p:sp>
+              <p:nvSpPr>
+                <p:cNvPr id="66" name="TextBox 10">
+                  <a:extLst>
+                    <a:ext uri="{FF2B5EF4-FFF2-40B4-BE49-F238E27FC236}">
+                      <a16:creationId xmlns:a16="http://schemas.microsoft.com/office/drawing/2014/main" id="{B0755140-1ED3-418E-8E73-E1D2B917C7ED}"/>
+                    </a:ext>
+                  </a:extLst>
+                </p:cNvPr>
+                <p:cNvSpPr txBox="1"/>
+                <p:nvPr/>
+              </p:nvSpPr>
+              <p:spPr>
+                <a:xfrm>
+                  <a:off x="1560871" y="155523"/>
+                  <a:ext cx="315234" cy="338554"/>
+                </a:xfrm>
+                <a:prstGeom prst="rect">
+                  <a:avLst/>
+                </a:prstGeom>
+                <a:noFill/>
+              </p:spPr>
+              <p:txBody>
+                <a:bodyPr wrap="square" rtlCol="0">
+                  <a:spAutoFit/>
+                </a:bodyPr>
+                <a:lstStyle/>
+                <a:p>
+                  <a:pPr/>
+                  <a14:m>
+                    <m:oMathPara xmlns:m="http://schemas.openxmlformats.org/officeDocument/2006/math">
+                      <m:oMathParaPr>
+                        <m:jc m:val="centerGroup"/>
+                      </m:oMathParaPr>
+                      <m:oMath xmlns:m="http://schemas.openxmlformats.org/officeDocument/2006/math">
+                        <m:r>
+                          <a:rPr lang="en-US" sz="1600" i="1">
+                            <a:latin typeface="Cambria Math" panose="02040503050406030204" pitchFamily="18" charset="0"/>
+                          </a:rPr>
+                          <m:t>𝛼</m:t>
+                        </m:r>
+                      </m:oMath>
+                    </m:oMathPara>
+                  </a14:m>
+                  <a:endParaRPr lang="en-US" sz="1600" dirty="0"/>
+                </a:p>
+              </p:txBody>
+            </p:sp>
+          </mc:Choice>
+          <mc:Fallback xmlns="">
+            <p:sp>
+              <p:nvSpPr>
+                <p:cNvPr id="143" name="TextBox 10">
+                  <a:extLst>
+                    <a:ext uri="{FF2B5EF4-FFF2-40B4-BE49-F238E27FC236}">
+                      <a16:creationId xmlns:a16="http://schemas.microsoft.com/office/drawing/2014/main" id="{F4BA87A4-FF23-4612-80FF-80921F92BB65}"/>
+                    </a:ext>
+                  </a:extLst>
+                </p:cNvPr>
+                <p:cNvSpPr txBox="1">
+                  <a:spLocks noRot="1" noChangeAspect="1" noMove="1" noResize="1" noEditPoints="1" noAdjustHandles="1" noChangeArrowheads="1" noChangeShapeType="1" noTextEdit="1"/>
+                </p:cNvSpPr>
+                <p:nvPr/>
+              </p:nvSpPr>
+              <p:spPr>
+                <a:xfrm>
+                  <a:off x="1560871" y="155523"/>
+                  <a:ext cx="315234" cy="338554"/>
+                </a:xfrm>
+                <a:prstGeom prst="rect">
+                  <a:avLst/>
+                </a:prstGeom>
+                <a:blipFill>
+                  <a:blip r:embed="rId17"/>
+                  <a:stretch>
+                    <a:fillRect/>
+                  </a:stretch>
+                </a:blipFill>
+              </p:spPr>
+              <p:txBody>
+                <a:bodyPr/>
+                <a:lstStyle/>
+                <a:p>
+                  <a:r>
+                    <a:rPr lang="zh-TW" altLang="en-US">
+                      <a:noFill/>
+                    </a:rPr>
+                    <a:t> </a:t>
+                  </a:r>
+                </a:p>
+              </p:txBody>
+            </p:sp>
+          </mc:Fallback>
+        </mc:AlternateContent>
+        <p:cxnSp>
+          <p:nvCxnSpPr>
+            <p:cNvPr id="67" name="Straight Arrow Connector 17">
+              <a:extLst>
+                <a:ext uri="{FF2B5EF4-FFF2-40B4-BE49-F238E27FC236}">
+                  <a16:creationId xmlns:a16="http://schemas.microsoft.com/office/drawing/2014/main" id="{BF6121CE-90BE-4D19-9571-5F7CB3DD4312}"/>
+                </a:ext>
+              </a:extLst>
+            </p:cNvPr>
+            <p:cNvCxnSpPr>
+              <a:cxnSpLocks/>
+            </p:cNvCxnSpPr>
+            <p:nvPr/>
+          </p:nvCxnSpPr>
+          <p:spPr>
+            <a:xfrm flipH="1">
+              <a:off x="1768140" y="220545"/>
+              <a:ext cx="221585" cy="286539"/>
+            </a:xfrm>
+            <a:prstGeom prst="straightConnector1">
+              <a:avLst/>
+            </a:prstGeom>
+            <a:ln w="38100">
+              <a:solidFill>
+                <a:schemeClr val="tx1"/>
+              </a:solidFill>
+              <a:tailEnd type="stealth" w="lg" len="lg"/>
+            </a:ln>
+          </p:spPr>
+          <p:style>
+            <a:lnRef idx="3">
+              <a:schemeClr val="accent6"/>
+            </a:lnRef>
+            <a:fillRef idx="0">
+              <a:schemeClr val="accent6"/>
+            </a:fillRef>
+            <a:effectRef idx="2">
+              <a:schemeClr val="accent6"/>
+            </a:effectRef>
+            <a:fontRef idx="minor">
+              <a:schemeClr val="tx1"/>
+            </a:fontRef>
+          </p:style>
+        </p:cxnSp>
+        <p:sp>
+          <p:nvSpPr>
+            <p:cNvPr id="68" name="Partial Circle 9">
+              <a:extLst>
+                <a:ext uri="{FF2B5EF4-FFF2-40B4-BE49-F238E27FC236}">
+                  <a16:creationId xmlns:a16="http://schemas.microsoft.com/office/drawing/2014/main" id="{528F2B9E-C51B-4BE0-A58B-43D54E2EE500}"/>
+                </a:ext>
+              </a:extLst>
+            </p:cNvPr>
+            <p:cNvSpPr>
+              <a:spLocks noChangeAspect="1"/>
+            </p:cNvSpPr>
+            <p:nvPr/>
+          </p:nvSpPr>
+          <p:spPr>
+            <a:xfrm>
+              <a:off x="1912164" y="83252"/>
+              <a:ext cx="149214" cy="301366"/>
+            </a:xfrm>
+            <a:prstGeom prst="pie">
+              <a:avLst>
+                <a:gd name="adj1" fmla="val 16258856"/>
+                <a:gd name="adj2" fmla="val 19252600"/>
+              </a:avLst>
+            </a:prstGeom>
+            <a:gradFill flip="none" rotWithShape="1">
+              <a:gsLst>
+                <a:gs pos="0">
+                  <a:schemeClr val="tx1"/>
+                </a:gs>
+                <a:gs pos="50000">
+                  <a:schemeClr val="tx1">
+                    <a:lumMod val="50000"/>
+                    <a:lumOff val="50000"/>
+                  </a:schemeClr>
+                </a:gs>
+                <a:gs pos="100000">
+                  <a:schemeClr val="bg1">
+                    <a:lumMod val="50000"/>
+                  </a:schemeClr>
+                </a:gs>
+              </a:gsLst>
+              <a:lin ang="2700000" scaled="1"/>
+              <a:tileRect/>
+            </a:gradFill>
+            <a:ln w="19050">
+              <a:solidFill>
+                <a:schemeClr val="tx1"/>
+              </a:solidFill>
+            </a:ln>
+          </p:spPr>
+          <p:style>
+            <a:lnRef idx="2">
+              <a:schemeClr val="accent1">
+                <a:shade val="50000"/>
+              </a:schemeClr>
+            </a:lnRef>
+            <a:fillRef idx="1">
+              <a:schemeClr val="accent1"/>
+            </a:fillRef>
+            <a:effectRef idx="0">
+              <a:schemeClr val="accent1"/>
+            </a:effectRef>
+            <a:fontRef idx="minor">
+              <a:schemeClr val="lt1"/>
+            </a:fontRef>
+          </p:style>
+          <p:txBody>
+            <a:bodyPr rtlCol="0" anchor="ctr"/>
+            <a:lstStyle/>
+            <a:p>
+              <a:pPr algn="ctr"/>
+              <a:endParaRPr lang="en-US" sz="1600" dirty="0">
+                <a:solidFill>
+                  <a:schemeClr val="tx1"/>
+                </a:solidFill>
+              </a:endParaRPr>
+            </a:p>
+          </p:txBody>
+        </p:sp>
+        <mc:AlternateContent xmlns:mc="http://schemas.openxmlformats.org/markup-compatibility/2006" xmlns:a14="http://schemas.microsoft.com/office/drawing/2010/main">
+          <mc:Choice Requires="a14">
+            <p:sp>
+              <p:nvSpPr>
+                <p:cNvPr id="69" name="TextBox 10">
+                  <a:extLst>
+                    <a:ext uri="{FF2B5EF4-FFF2-40B4-BE49-F238E27FC236}">
+                      <a16:creationId xmlns:a16="http://schemas.microsoft.com/office/drawing/2014/main" id="{E3CB8141-3307-4D03-B1E5-D63D5A364FA6}"/>
+                    </a:ext>
+                  </a:extLst>
+                </p:cNvPr>
+                <p:cNvSpPr txBox="1"/>
+                <p:nvPr/>
+              </p:nvSpPr>
+              <p:spPr>
+                <a:xfrm>
+                  <a:off x="1951942" y="-164895"/>
+                  <a:ext cx="297046" cy="338554"/>
+                </a:xfrm>
+                <a:prstGeom prst="rect">
+                  <a:avLst/>
+                </a:prstGeom>
+                <a:noFill/>
+              </p:spPr>
+              <p:txBody>
+                <a:bodyPr wrap="square" rtlCol="0">
+                  <a:spAutoFit/>
+                </a:bodyPr>
+                <a:lstStyle/>
+                <a:p>
+                  <a:pPr/>
+                  <a14:m>
+                    <m:oMathPara xmlns:m="http://schemas.openxmlformats.org/officeDocument/2006/math">
+                      <m:oMathParaPr>
+                        <m:jc m:val="centerGroup"/>
+                      </m:oMathParaPr>
+                      <m:oMath xmlns:m="http://schemas.openxmlformats.org/officeDocument/2006/math">
+                        <m:r>
+                          <a:rPr lang="en-US" sz="1600" i="1">
+                            <a:latin typeface="Cambria Math" panose="02040503050406030204" pitchFamily="18" charset="0"/>
+                          </a:rPr>
+                          <m:t>𝛽</m:t>
+                        </m:r>
+                      </m:oMath>
+                    </m:oMathPara>
+                  </a14:m>
+                  <a:endParaRPr lang="en-US" sz="1600" dirty="0"/>
+                </a:p>
+              </p:txBody>
+            </p:sp>
+          </mc:Choice>
+          <mc:Fallback xmlns="">
+            <p:sp>
+              <p:nvSpPr>
+                <p:cNvPr id="146" name="TextBox 10">
+                  <a:extLst>
+                    <a:ext uri="{FF2B5EF4-FFF2-40B4-BE49-F238E27FC236}">
+                      <a16:creationId xmlns:a16="http://schemas.microsoft.com/office/drawing/2014/main" id="{18AA10A0-393A-4B71-8D8A-7D5D0CD59BF5}"/>
+                    </a:ext>
+                  </a:extLst>
+                </p:cNvPr>
+                <p:cNvSpPr txBox="1">
+                  <a:spLocks noRot="1" noChangeAspect="1" noMove="1" noResize="1" noEditPoints="1" noAdjustHandles="1" noChangeArrowheads="1" noChangeShapeType="1" noTextEdit="1"/>
+                </p:cNvSpPr>
+                <p:nvPr/>
+              </p:nvSpPr>
+              <p:spPr>
+                <a:xfrm>
+                  <a:off x="1951942" y="-164895"/>
+                  <a:ext cx="297046" cy="338554"/>
+                </a:xfrm>
+                <a:prstGeom prst="rect">
+                  <a:avLst/>
+                </a:prstGeom>
+                <a:blipFill>
+                  <a:blip r:embed="rId18"/>
+                  <a:stretch>
+                    <a:fillRect r="-4082" b="-8929"/>
+                  </a:stretch>
+                </a:blipFill>
+              </p:spPr>
+              <p:txBody>
+                <a:bodyPr/>
+                <a:lstStyle/>
+                <a:p>
+                  <a:r>
+                    <a:rPr lang="zh-TW" altLang="en-US">
+                      <a:noFill/>
+                    </a:rPr>
+                    <a:t> </a:t>
+                  </a:r>
+                </a:p>
+              </p:txBody>
+            </p:sp>
+          </mc:Fallback>
+        </mc:AlternateContent>
+        <p:cxnSp>
+          <p:nvCxnSpPr>
+            <p:cNvPr id="70" name="Straight Arrow Connector 17">
+              <a:extLst>
+                <a:ext uri="{FF2B5EF4-FFF2-40B4-BE49-F238E27FC236}">
+                  <a16:creationId xmlns:a16="http://schemas.microsoft.com/office/drawing/2014/main" id="{5F124962-8FE5-4142-B6B9-BECD5A587C8A}"/>
+                </a:ext>
+              </a:extLst>
+            </p:cNvPr>
+            <p:cNvCxnSpPr>
+              <a:cxnSpLocks/>
+            </p:cNvCxnSpPr>
+            <p:nvPr/>
+          </p:nvCxnSpPr>
+          <p:spPr>
+            <a:xfrm flipV="1">
+              <a:off x="1981637" y="-225181"/>
+              <a:ext cx="571923" cy="449644"/>
+            </a:xfrm>
+            <a:prstGeom prst="straightConnector1">
+              <a:avLst/>
+            </a:prstGeom>
+            <a:ln w="38100">
+              <a:solidFill>
+                <a:schemeClr val="tx1"/>
+              </a:solidFill>
+              <a:tailEnd type="stealth" w="lg" len="lg"/>
+            </a:ln>
+          </p:spPr>
+          <p:style>
+            <a:lnRef idx="3">
+              <a:schemeClr val="accent6"/>
+            </a:lnRef>
+            <a:fillRef idx="0">
+              <a:schemeClr val="accent6"/>
+            </a:fillRef>
+            <a:effectRef idx="2">
+              <a:schemeClr val="accent6"/>
+            </a:effectRef>
+            <a:fontRef idx="minor">
+              <a:schemeClr val="tx1"/>
+            </a:fontRef>
+          </p:style>
+        </p:cxnSp>
+        <p:sp>
+          <p:nvSpPr>
+            <p:cNvPr id="71" name="等腰三角形 70">
+              <a:extLst>
+                <a:ext uri="{FF2B5EF4-FFF2-40B4-BE49-F238E27FC236}">
+                  <a16:creationId xmlns:a16="http://schemas.microsoft.com/office/drawing/2014/main" id="{1BA0EA36-2FEC-48FE-A773-79C92D57F754}"/>
+                </a:ext>
+              </a:extLst>
+            </p:cNvPr>
+            <p:cNvSpPr/>
+            <p:nvPr/>
+          </p:nvSpPr>
+          <p:spPr>
+            <a:xfrm rot="5400000">
+              <a:off x="1943813" y="420057"/>
+              <a:ext cx="329835" cy="221179"/>
+            </a:xfrm>
+            <a:prstGeom prst="triangle">
+              <a:avLst/>
+            </a:prstGeom>
+          </p:spPr>
+          <p:style>
+            <a:lnRef idx="0">
+              <a:schemeClr val="accent2"/>
+            </a:lnRef>
+            <a:fillRef idx="3">
+              <a:schemeClr val="accent2"/>
+            </a:fillRef>
+            <a:effectRef idx="3">
+              <a:schemeClr val="accent2"/>
+            </a:effectRef>
+            <a:fontRef idx="minor">
+              <a:schemeClr val="lt1"/>
+            </a:fontRef>
+          </p:style>
+          <p:txBody>
+            <a:bodyPr rot="0" spcFirstLastPara="0" vertOverflow="overflow" horzOverflow="overflow" vert="horz" wrap="square" lIns="71889" tIns="35945" rIns="71889" bIns="35945" numCol="1" spcCol="0" rtlCol="0" fromWordArt="0" anchor="ctr" anchorCtr="0" forceAA="0" compatLnSpc="1">
+              <a:prstTxWarp prst="textNoShape">
+                <a:avLst/>
+              </a:prstTxWarp>
+              <a:noAutofit/>
+            </a:bodyPr>
+            <a:lstStyle/>
+            <a:p>
+              <a:pPr algn="ctr"/>
+              <a:endParaRPr lang="zh-TW" altLang="en-US" sz="1415" dirty="0"/>
+            </a:p>
+          </p:txBody>
+        </p:sp>
       </p:grpSp>
     </p:spTree>
     <p:extLst>
